--- a/images/bias-brain.pptx
+++ b/images/bias-brain.pptx
@@ -2,15 +2,16 @@
 <file path=ppt/presentation.xml><?xml version="1.0" encoding="utf-8"?>
 <p:presentation xmlns:a="http://schemas.openxmlformats.org/drawingml/2006/main" xmlns:r="http://schemas.openxmlformats.org/officeDocument/2006/relationships" xmlns:p="http://schemas.openxmlformats.org/presentationml/2006/main" saveSubsetFonts="1">
   <p:sldMasterIdLst>
-    <p:sldMasterId id="2147483660" r:id="rId1"/>
+    <p:sldMasterId id="2147483672" r:id="rId1"/>
   </p:sldMasterIdLst>
   <p:sldIdLst>
     <p:sldId id="257" r:id="rId2"/>
-    <p:sldId id="260" r:id="rId3"/>
-    <p:sldId id="258" r:id="rId4"/>
-    <p:sldId id="259" r:id="rId5"/>
+    <p:sldId id="261" r:id="rId3"/>
+    <p:sldId id="260" r:id="rId4"/>
+    <p:sldId id="258" r:id="rId5"/>
+    <p:sldId id="259" r:id="rId6"/>
   </p:sldIdLst>
-  <p:sldSz cx="13716000" cy="2286000"/>
+  <p:sldSz cx="9144000" cy="2286000"/>
   <p:notesSz cx="6858000" cy="9144000"/>
   <p:defaultTextStyle>
     <a:defPPr>
@@ -107,6 +108,11 @@
       </a:defRPr>
     </a:lvl9pPr>
   </p:defaultTextStyle>
+  <p:extLst>
+    <p:ext uri="{EFAFB233-063F-42B5-8137-9DF3F51BA10A}">
+      <p15:sldGuideLst xmlns:p15="http://schemas.microsoft.com/office/powerpoint/2012/main"/>
+    </p:ext>
+  </p:extLst>
 </p:presentation>
 </file>
 
@@ -139,8 +145,8 @@
         </p:nvSpPr>
         <p:spPr>
           <a:xfrm>
-            <a:off x="1714500" y="374121"/>
-            <a:ext cx="10287000" cy="795867"/>
+            <a:off x="1143000" y="374121"/>
+            <a:ext cx="6858000" cy="795867"/>
           </a:xfrm>
         </p:spPr>
         <p:txBody>
@@ -171,8 +177,8 @@
         </p:nvSpPr>
         <p:spPr>
           <a:xfrm>
-            <a:off x="1714500" y="1200679"/>
-            <a:ext cx="10287000" cy="551921"/>
+            <a:off x="1143000" y="1200679"/>
+            <a:ext cx="6858000" cy="551921"/>
           </a:xfrm>
         </p:spPr>
         <p:txBody>
@@ -292,7 +298,7 @@
     </p:spTree>
     <p:extLst>
       <p:ext uri="{BB962C8B-B14F-4D97-AF65-F5344CB8AC3E}">
-        <p14:creationId xmlns:p14="http://schemas.microsoft.com/office/powerpoint/2010/main" val="3206871284"/>
+        <p14:creationId xmlns:p14="http://schemas.microsoft.com/office/powerpoint/2010/main" val="3701436288"/>
       </p:ext>
     </p:extLst>
   </p:cSld>
@@ -462,7 +468,7 @@
     </p:spTree>
     <p:extLst>
       <p:ext uri="{BB962C8B-B14F-4D97-AF65-F5344CB8AC3E}">
-        <p14:creationId xmlns:p14="http://schemas.microsoft.com/office/powerpoint/2010/main" val="3345092137"/>
+        <p14:creationId xmlns:p14="http://schemas.microsoft.com/office/powerpoint/2010/main" val="3719846033"/>
       </p:ext>
     </p:extLst>
   </p:cSld>
@@ -501,8 +507,8 @@
         </p:nvSpPr>
         <p:spPr>
           <a:xfrm>
-            <a:off x="9815512" y="121709"/>
-            <a:ext cx="2957513" cy="1937279"/>
+            <a:off x="6543675" y="121709"/>
+            <a:ext cx="1971675" cy="1937279"/>
           </a:xfrm>
         </p:spPr>
         <p:txBody>
@@ -529,8 +535,8 @@
         </p:nvSpPr>
         <p:spPr>
           <a:xfrm>
-            <a:off x="942975" y="121709"/>
-            <a:ext cx="8701088" cy="1937279"/>
+            <a:off x="628650" y="121709"/>
+            <a:ext cx="5800725" cy="1937279"/>
           </a:xfrm>
         </p:spPr>
         <p:txBody>
@@ -642,7 +648,7 @@
     </p:spTree>
     <p:extLst>
       <p:ext uri="{BB962C8B-B14F-4D97-AF65-F5344CB8AC3E}">
-        <p14:creationId xmlns:p14="http://schemas.microsoft.com/office/powerpoint/2010/main" val="3486826863"/>
+        <p14:creationId xmlns:p14="http://schemas.microsoft.com/office/powerpoint/2010/main" val="359637736"/>
       </p:ext>
     </p:extLst>
   </p:cSld>
@@ -812,7 +818,7 @@
     </p:spTree>
     <p:extLst>
       <p:ext uri="{BB962C8B-B14F-4D97-AF65-F5344CB8AC3E}">
-        <p14:creationId xmlns:p14="http://schemas.microsoft.com/office/powerpoint/2010/main" val="1187644156"/>
+        <p14:creationId xmlns:p14="http://schemas.microsoft.com/office/powerpoint/2010/main" val="3820732286"/>
       </p:ext>
     </p:extLst>
   </p:cSld>
@@ -851,8 +857,8 @@
         </p:nvSpPr>
         <p:spPr>
           <a:xfrm>
-            <a:off x="935831" y="569913"/>
-            <a:ext cx="11830050" cy="950912"/>
+            <a:off x="623888" y="569913"/>
+            <a:ext cx="7886700" cy="950912"/>
           </a:xfrm>
         </p:spPr>
         <p:txBody>
@@ -883,8 +889,8 @@
         </p:nvSpPr>
         <p:spPr>
           <a:xfrm>
-            <a:off x="935831" y="1529821"/>
-            <a:ext cx="11830050" cy="500062"/>
+            <a:off x="623888" y="1529821"/>
+            <a:ext cx="7886700" cy="500062"/>
           </a:xfrm>
         </p:spPr>
         <p:txBody>
@@ -1058,7 +1064,7 @@
     </p:spTree>
     <p:extLst>
       <p:ext uri="{BB962C8B-B14F-4D97-AF65-F5344CB8AC3E}">
-        <p14:creationId xmlns:p14="http://schemas.microsoft.com/office/powerpoint/2010/main" val="1155739437"/>
+        <p14:creationId xmlns:p14="http://schemas.microsoft.com/office/powerpoint/2010/main" val="250400545"/>
       </p:ext>
     </p:extLst>
   </p:cSld>
@@ -1120,8 +1126,8 @@
         </p:nvSpPr>
         <p:spPr>
           <a:xfrm>
-            <a:off x="942975" y="608542"/>
-            <a:ext cx="5829300" cy="1450446"/>
+            <a:off x="628650" y="608542"/>
+            <a:ext cx="3886200" cy="1450446"/>
           </a:xfrm>
         </p:spPr>
         <p:txBody>
@@ -1177,8 +1183,8 @@
         </p:nvSpPr>
         <p:spPr>
           <a:xfrm>
-            <a:off x="6943725" y="608542"/>
-            <a:ext cx="5829300" cy="1450446"/>
+            <a:off x="4629150" y="608542"/>
+            <a:ext cx="3886200" cy="1450446"/>
           </a:xfrm>
         </p:spPr>
         <p:txBody>
@@ -1290,7 +1296,7 @@
     </p:spTree>
     <p:extLst>
       <p:ext uri="{BB962C8B-B14F-4D97-AF65-F5344CB8AC3E}">
-        <p14:creationId xmlns:p14="http://schemas.microsoft.com/office/powerpoint/2010/main" val="4231213891"/>
+        <p14:creationId xmlns:p14="http://schemas.microsoft.com/office/powerpoint/2010/main" val="1309312942"/>
       </p:ext>
     </p:extLst>
   </p:cSld>
@@ -1329,8 +1335,8 @@
         </p:nvSpPr>
         <p:spPr>
           <a:xfrm>
-            <a:off x="944762" y="121709"/>
-            <a:ext cx="11830050" cy="441854"/>
+            <a:off x="629841" y="121709"/>
+            <a:ext cx="7886700" cy="441854"/>
           </a:xfrm>
         </p:spPr>
         <p:txBody>
@@ -1357,8 +1363,8 @@
         </p:nvSpPr>
         <p:spPr>
           <a:xfrm>
-            <a:off x="944762" y="560388"/>
-            <a:ext cx="5802510" cy="274637"/>
+            <a:off x="629842" y="560388"/>
+            <a:ext cx="3868340" cy="274637"/>
           </a:xfrm>
         </p:spPr>
         <p:txBody>
@@ -1422,8 +1428,8 @@
         </p:nvSpPr>
         <p:spPr>
           <a:xfrm>
-            <a:off x="944762" y="835025"/>
-            <a:ext cx="5802510" cy="1228196"/>
+            <a:off x="629842" y="835025"/>
+            <a:ext cx="3868340" cy="1228196"/>
           </a:xfrm>
         </p:spPr>
         <p:txBody>
@@ -1479,8 +1485,8 @@
         </p:nvSpPr>
         <p:spPr>
           <a:xfrm>
-            <a:off x="6943725" y="560388"/>
-            <a:ext cx="5831087" cy="274637"/>
+            <a:off x="4629150" y="560388"/>
+            <a:ext cx="3887391" cy="274637"/>
           </a:xfrm>
         </p:spPr>
         <p:txBody>
@@ -1544,8 +1550,8 @@
         </p:nvSpPr>
         <p:spPr>
           <a:xfrm>
-            <a:off x="6943725" y="835025"/>
-            <a:ext cx="5831087" cy="1228196"/>
+            <a:off x="4629150" y="835025"/>
+            <a:ext cx="3887391" cy="1228196"/>
           </a:xfrm>
         </p:spPr>
         <p:txBody>
@@ -1657,7 +1663,7 @@
     </p:spTree>
     <p:extLst>
       <p:ext uri="{BB962C8B-B14F-4D97-AF65-F5344CB8AC3E}">
-        <p14:creationId xmlns:p14="http://schemas.microsoft.com/office/powerpoint/2010/main" val="947387006"/>
+        <p14:creationId xmlns:p14="http://schemas.microsoft.com/office/powerpoint/2010/main" val="1288962891"/>
       </p:ext>
     </p:extLst>
   </p:cSld>
@@ -1775,7 +1781,7 @@
     </p:spTree>
     <p:extLst>
       <p:ext uri="{BB962C8B-B14F-4D97-AF65-F5344CB8AC3E}">
-        <p14:creationId xmlns:p14="http://schemas.microsoft.com/office/powerpoint/2010/main" val="3954828145"/>
+        <p14:creationId xmlns:p14="http://schemas.microsoft.com/office/powerpoint/2010/main" val="1358196256"/>
       </p:ext>
     </p:extLst>
   </p:cSld>
@@ -1870,7 +1876,7 @@
     </p:spTree>
     <p:extLst>
       <p:ext uri="{BB962C8B-B14F-4D97-AF65-F5344CB8AC3E}">
-        <p14:creationId xmlns:p14="http://schemas.microsoft.com/office/powerpoint/2010/main" val="3153552150"/>
+        <p14:creationId xmlns:p14="http://schemas.microsoft.com/office/powerpoint/2010/main" val="2117292209"/>
       </p:ext>
     </p:extLst>
   </p:cSld>
@@ -1909,8 +1915,8 @@
         </p:nvSpPr>
         <p:spPr>
           <a:xfrm>
-            <a:off x="944762" y="152400"/>
-            <a:ext cx="4423767" cy="533400"/>
+            <a:off x="629841" y="152400"/>
+            <a:ext cx="2949178" cy="533400"/>
           </a:xfrm>
         </p:spPr>
         <p:txBody>
@@ -1941,8 +1947,8 @@
         </p:nvSpPr>
         <p:spPr>
           <a:xfrm>
-            <a:off x="5831087" y="329142"/>
-            <a:ext cx="6943725" cy="1624542"/>
+            <a:off x="3887391" y="329142"/>
+            <a:ext cx="4629150" cy="1624542"/>
           </a:xfrm>
         </p:spPr>
         <p:txBody>
@@ -2026,8 +2032,8 @@
         </p:nvSpPr>
         <p:spPr>
           <a:xfrm>
-            <a:off x="944762" y="685800"/>
-            <a:ext cx="4423767" cy="1270529"/>
+            <a:off x="629841" y="685800"/>
+            <a:ext cx="2949178" cy="1270529"/>
           </a:xfrm>
         </p:spPr>
         <p:txBody>
@@ -2147,7 +2153,7 @@
     </p:spTree>
     <p:extLst>
       <p:ext uri="{BB962C8B-B14F-4D97-AF65-F5344CB8AC3E}">
-        <p14:creationId xmlns:p14="http://schemas.microsoft.com/office/powerpoint/2010/main" val="2469050170"/>
+        <p14:creationId xmlns:p14="http://schemas.microsoft.com/office/powerpoint/2010/main" val="1657374454"/>
       </p:ext>
     </p:extLst>
   </p:cSld>
@@ -2186,8 +2192,8 @@
         </p:nvSpPr>
         <p:spPr>
           <a:xfrm>
-            <a:off x="944762" y="152400"/>
-            <a:ext cx="4423767" cy="533400"/>
+            <a:off x="629841" y="152400"/>
+            <a:ext cx="2949178" cy="533400"/>
           </a:xfrm>
         </p:spPr>
         <p:txBody>
@@ -2218,8 +2224,8 @@
         </p:nvSpPr>
         <p:spPr>
           <a:xfrm>
-            <a:off x="5831087" y="329142"/>
-            <a:ext cx="6943725" cy="1624542"/>
+            <a:off x="3887391" y="329142"/>
+            <a:ext cx="4629150" cy="1624542"/>
           </a:xfrm>
         </p:spPr>
         <p:txBody>
@@ -2283,8 +2289,8 @@
         </p:nvSpPr>
         <p:spPr>
           <a:xfrm>
-            <a:off x="944762" y="685800"/>
-            <a:ext cx="4423767" cy="1270529"/>
+            <a:off x="629841" y="685800"/>
+            <a:ext cx="2949178" cy="1270529"/>
           </a:xfrm>
         </p:spPr>
         <p:txBody>
@@ -2404,7 +2410,7 @@
     </p:spTree>
     <p:extLst>
       <p:ext uri="{BB962C8B-B14F-4D97-AF65-F5344CB8AC3E}">
-        <p14:creationId xmlns:p14="http://schemas.microsoft.com/office/powerpoint/2010/main" val="2707845894"/>
+        <p14:creationId xmlns:p14="http://schemas.microsoft.com/office/powerpoint/2010/main" val="808958569"/>
       </p:ext>
     </p:extLst>
   </p:cSld>
@@ -2448,8 +2454,8 @@
         </p:nvSpPr>
         <p:spPr>
           <a:xfrm>
-            <a:off x="942975" y="121709"/>
-            <a:ext cx="11830050" cy="441854"/>
+            <a:off x="628650" y="121709"/>
+            <a:ext cx="7886700" cy="441854"/>
           </a:xfrm>
           <a:prstGeom prst="rect">
             <a:avLst/>
@@ -2481,8 +2487,8 @@
         </p:nvSpPr>
         <p:spPr>
           <a:xfrm>
-            <a:off x="942975" y="608542"/>
-            <a:ext cx="11830050" cy="1450446"/>
+            <a:off x="628650" y="608542"/>
+            <a:ext cx="7886700" cy="1450446"/>
           </a:xfrm>
           <a:prstGeom prst="rect">
             <a:avLst/>
@@ -2543,8 +2549,8 @@
         </p:nvSpPr>
         <p:spPr>
           <a:xfrm>
-            <a:off x="942975" y="2118784"/>
-            <a:ext cx="3086100" cy="121708"/>
+            <a:off x="628650" y="2118784"/>
+            <a:ext cx="2057400" cy="121708"/>
           </a:xfrm>
           <a:prstGeom prst="rect">
             <a:avLst/>
@@ -2584,8 +2590,8 @@
         </p:nvSpPr>
         <p:spPr>
           <a:xfrm>
-            <a:off x="4543425" y="2118784"/>
-            <a:ext cx="4629150" cy="121708"/>
+            <a:off x="3028950" y="2118784"/>
+            <a:ext cx="3086100" cy="121708"/>
           </a:xfrm>
           <a:prstGeom prst="rect">
             <a:avLst/>
@@ -2621,8 +2627,8 @@
         </p:nvSpPr>
         <p:spPr>
           <a:xfrm>
-            <a:off x="9686925" y="2118784"/>
-            <a:ext cx="3086100" cy="121708"/>
+            <a:off x="6457950" y="2118784"/>
+            <a:ext cx="2057400" cy="121708"/>
           </a:xfrm>
           <a:prstGeom prst="rect">
             <a:avLst/>
@@ -2653,23 +2659,23 @@
     </p:spTree>
     <p:extLst>
       <p:ext uri="{BB962C8B-B14F-4D97-AF65-F5344CB8AC3E}">
-        <p14:creationId xmlns:p14="http://schemas.microsoft.com/office/powerpoint/2010/main" val="3908765372"/>
+        <p14:creationId xmlns:p14="http://schemas.microsoft.com/office/powerpoint/2010/main" val="1293175288"/>
       </p:ext>
     </p:extLst>
   </p:cSld>
   <p:clrMap bg1="lt1" tx1="dk1" bg2="lt2" tx2="dk2" accent1="accent1" accent2="accent2" accent3="accent3" accent4="accent4" accent5="accent5" accent6="accent6" hlink="hlink" folHlink="folHlink"/>
   <p:sldLayoutIdLst>
-    <p:sldLayoutId id="2147483661" r:id="rId1"/>
-    <p:sldLayoutId id="2147483662" r:id="rId2"/>
-    <p:sldLayoutId id="2147483663" r:id="rId3"/>
-    <p:sldLayoutId id="2147483664" r:id="rId4"/>
-    <p:sldLayoutId id="2147483665" r:id="rId5"/>
-    <p:sldLayoutId id="2147483666" r:id="rId6"/>
-    <p:sldLayoutId id="2147483667" r:id="rId7"/>
-    <p:sldLayoutId id="2147483668" r:id="rId8"/>
-    <p:sldLayoutId id="2147483669" r:id="rId9"/>
-    <p:sldLayoutId id="2147483670" r:id="rId10"/>
-    <p:sldLayoutId id="2147483671" r:id="rId11"/>
+    <p:sldLayoutId id="2147483673" r:id="rId1"/>
+    <p:sldLayoutId id="2147483674" r:id="rId2"/>
+    <p:sldLayoutId id="2147483675" r:id="rId3"/>
+    <p:sldLayoutId id="2147483676" r:id="rId4"/>
+    <p:sldLayoutId id="2147483677" r:id="rId5"/>
+    <p:sldLayoutId id="2147483678" r:id="rId6"/>
+    <p:sldLayoutId id="2147483679" r:id="rId7"/>
+    <p:sldLayoutId id="2147483680" r:id="rId8"/>
+    <p:sldLayoutId id="2147483681" r:id="rId9"/>
+    <p:sldLayoutId id="2147483682" r:id="rId10"/>
+    <p:sldLayoutId id="2147483683" r:id="rId11"/>
   </p:sldLayoutIdLst>
   <p:txStyles>
     <p:titleStyle>
@@ -2999,7 +3005,7 @@
         </p:blipFill>
         <p:spPr>
           <a:xfrm>
-            <a:off x="817978" y="0"/>
+            <a:off x="-1468022" y="0"/>
             <a:ext cx="2286000" cy="2286000"/>
           </a:xfrm>
           <a:prstGeom prst="rect">
@@ -3035,7 +3041,7 @@
         </p:blipFill>
         <p:spPr>
           <a:xfrm>
-            <a:off x="4066784" y="0"/>
+            <a:off x="1780784" y="0"/>
             <a:ext cx="2286000" cy="2286000"/>
           </a:xfrm>
           <a:prstGeom prst="rect">
@@ -3071,7 +3077,7 @@
         </p:blipFill>
         <p:spPr>
           <a:xfrm>
-            <a:off x="7363216" y="0"/>
+            <a:off x="5077216" y="0"/>
             <a:ext cx="2286000" cy="2286000"/>
           </a:xfrm>
           <a:prstGeom prst="rect">
@@ -3107,7 +3113,7 @@
         </p:blipFill>
         <p:spPr>
           <a:xfrm>
-            <a:off x="10612022" y="0"/>
+            <a:off x="8326022" y="0"/>
             <a:ext cx="2286000" cy="2286000"/>
           </a:xfrm>
           <a:prstGeom prst="rect">
@@ -3129,7 +3135,7 @@
         </p:nvSpPr>
         <p:spPr>
           <a:xfrm>
-            <a:off x="1523024" y="640080"/>
+            <a:off x="-762976" y="640080"/>
             <a:ext cx="1005840" cy="1005840"/>
           </a:xfrm>
           <a:prstGeom prst="flowChartConnector">
@@ -3181,7 +3187,7 @@
         </p:nvSpPr>
         <p:spPr>
           <a:xfrm>
-            <a:off x="1660184" y="777240"/>
+            <a:off x="-625816" y="777240"/>
             <a:ext cx="731520" cy="731520"/>
           </a:xfrm>
           <a:prstGeom prst="flowChartConnector">
@@ -3233,7 +3239,7 @@
         </p:nvSpPr>
         <p:spPr>
           <a:xfrm>
-            <a:off x="1797344" y="914400"/>
+            <a:off x="-488656" y="914400"/>
             <a:ext cx="457200" cy="457200"/>
           </a:xfrm>
           <a:prstGeom prst="flowChartConnector">
@@ -3285,7 +3291,7 @@
         </p:nvSpPr>
         <p:spPr>
           <a:xfrm>
-            <a:off x="1934504" y="1051560"/>
+            <a:off x="-351496" y="1051560"/>
             <a:ext cx="182880" cy="182880"/>
           </a:xfrm>
           <a:prstGeom prst="flowChartConnector">
@@ -3337,7 +3343,7 @@
         </p:nvSpPr>
         <p:spPr>
           <a:xfrm>
-            <a:off x="4769144" y="640080"/>
+            <a:off x="2483144" y="640080"/>
             <a:ext cx="1005840" cy="1005840"/>
           </a:xfrm>
           <a:prstGeom prst="flowChartConnector">
@@ -3389,7 +3395,7 @@
         </p:nvSpPr>
         <p:spPr>
           <a:xfrm>
-            <a:off x="4906304" y="777240"/>
+            <a:off x="2620304" y="777240"/>
             <a:ext cx="731520" cy="731520"/>
           </a:xfrm>
           <a:prstGeom prst="flowChartConnector">
@@ -3441,7 +3447,7 @@
         </p:nvSpPr>
         <p:spPr>
           <a:xfrm>
-            <a:off x="5043464" y="914400"/>
+            <a:off x="2757464" y="914400"/>
             <a:ext cx="457200" cy="457200"/>
           </a:xfrm>
           <a:prstGeom prst="flowChartConnector">
@@ -3493,7 +3499,7 @@
         </p:nvSpPr>
         <p:spPr>
           <a:xfrm>
-            <a:off x="5180624" y="1051560"/>
+            <a:off x="2894624" y="1051560"/>
             <a:ext cx="182880" cy="182880"/>
           </a:xfrm>
           <a:prstGeom prst="flowChartConnector">
@@ -3545,7 +3551,7 @@
         </p:nvSpPr>
         <p:spPr>
           <a:xfrm>
-            <a:off x="8071144" y="640080"/>
+            <a:off x="5785144" y="640080"/>
             <a:ext cx="1005840" cy="1005840"/>
           </a:xfrm>
           <a:prstGeom prst="flowChartConnector">
@@ -3597,7 +3603,7 @@
         </p:nvSpPr>
         <p:spPr>
           <a:xfrm>
-            <a:off x="8208304" y="777240"/>
+            <a:off x="5922304" y="777240"/>
             <a:ext cx="731520" cy="731520"/>
           </a:xfrm>
           <a:prstGeom prst="flowChartConnector">
@@ -3649,7 +3655,7 @@
         </p:nvSpPr>
         <p:spPr>
           <a:xfrm>
-            <a:off x="8345464" y="914400"/>
+            <a:off x="6059464" y="914400"/>
             <a:ext cx="457200" cy="457200"/>
           </a:xfrm>
           <a:prstGeom prst="flowChartConnector">
@@ -3701,7 +3707,7 @@
         </p:nvSpPr>
         <p:spPr>
           <a:xfrm>
-            <a:off x="8482624" y="1051560"/>
+            <a:off x="6196624" y="1051560"/>
             <a:ext cx="182880" cy="182880"/>
           </a:xfrm>
           <a:prstGeom prst="flowChartConnector">
@@ -3753,7 +3759,7 @@
         </p:nvSpPr>
         <p:spPr>
           <a:xfrm>
-            <a:off x="11326227" y="640080"/>
+            <a:off x="9040227" y="640080"/>
             <a:ext cx="1005840" cy="1005840"/>
           </a:xfrm>
           <a:prstGeom prst="flowChartConnector">
@@ -3805,7 +3811,7 @@
         </p:nvSpPr>
         <p:spPr>
           <a:xfrm>
-            <a:off x="11463387" y="777240"/>
+            <a:off x="9177387" y="777240"/>
             <a:ext cx="731520" cy="731520"/>
           </a:xfrm>
           <a:prstGeom prst="flowChartConnector">
@@ -3857,7 +3863,7 @@
         </p:nvSpPr>
         <p:spPr>
           <a:xfrm>
-            <a:off x="11600547" y="914400"/>
+            <a:off x="9314547" y="914400"/>
             <a:ext cx="457200" cy="457200"/>
           </a:xfrm>
           <a:prstGeom prst="flowChartConnector">
@@ -3909,7 +3915,7 @@
         </p:nvSpPr>
         <p:spPr>
           <a:xfrm>
-            <a:off x="11737707" y="1051560"/>
+            <a:off x="9451707" y="1051560"/>
             <a:ext cx="182880" cy="182880"/>
           </a:xfrm>
           <a:prstGeom prst="flowChartConnector">
@@ -3961,7 +3967,7 @@
         </p:nvSpPr>
         <p:spPr>
           <a:xfrm>
-            <a:off x="1923074" y="1097280"/>
+            <a:off x="-362926" y="1097280"/>
             <a:ext cx="91440" cy="91440"/>
           </a:xfrm>
           <a:prstGeom prst="mathMultiply">
@@ -4013,7 +4019,7 @@
         </p:nvSpPr>
         <p:spPr>
           <a:xfrm>
-            <a:off x="2009434" y="1046480"/>
+            <a:off x="-276566" y="1046480"/>
             <a:ext cx="91440" cy="91440"/>
           </a:xfrm>
           <a:prstGeom prst="mathMultiply">
@@ -4065,7 +4071,7 @@
         </p:nvSpPr>
         <p:spPr>
           <a:xfrm>
-            <a:off x="2025944" y="1143000"/>
+            <a:off x="-260056" y="1143000"/>
             <a:ext cx="91440" cy="91440"/>
           </a:xfrm>
           <a:prstGeom prst="mathMultiply">
@@ -4117,7 +4123,7 @@
         </p:nvSpPr>
         <p:spPr>
           <a:xfrm>
-            <a:off x="5033304" y="1097280"/>
+            <a:off x="2747304" y="1097280"/>
             <a:ext cx="91440" cy="91440"/>
           </a:xfrm>
           <a:prstGeom prst="mathMultiply">
@@ -4169,7 +4175,7 @@
         </p:nvSpPr>
         <p:spPr>
           <a:xfrm>
-            <a:off x="5272064" y="894080"/>
+            <a:off x="2986064" y="894080"/>
             <a:ext cx="91440" cy="91440"/>
           </a:xfrm>
           <a:prstGeom prst="mathMultiply">
@@ -4221,7 +4227,7 @@
         </p:nvSpPr>
         <p:spPr>
           <a:xfrm>
-            <a:off x="5364774" y="1270000"/>
+            <a:off x="3078774" y="1270000"/>
             <a:ext cx="91440" cy="91440"/>
           </a:xfrm>
           <a:prstGeom prst="mathMultiply">
@@ -4273,7 +4279,7 @@
         </p:nvSpPr>
         <p:spPr>
           <a:xfrm>
-            <a:off x="11318901" y="1252220"/>
+            <a:off x="9032901" y="1252220"/>
             <a:ext cx="91440" cy="91440"/>
           </a:xfrm>
           <a:prstGeom prst="mathMultiply">
@@ -4325,7 +4331,7 @@
         </p:nvSpPr>
         <p:spPr>
           <a:xfrm>
-            <a:off x="11557661" y="1049020"/>
+            <a:off x="9271661" y="1049020"/>
             <a:ext cx="91440" cy="91440"/>
           </a:xfrm>
           <a:prstGeom prst="mathMultiply">
@@ -4377,7 +4383,7 @@
         </p:nvSpPr>
         <p:spPr>
           <a:xfrm>
-            <a:off x="11650371" y="1424940"/>
+            <a:off x="9364371" y="1424940"/>
             <a:ext cx="91440" cy="91440"/>
           </a:xfrm>
           <a:prstGeom prst="mathMultiply">
@@ -4429,7 +4435,7 @@
         </p:nvSpPr>
         <p:spPr>
           <a:xfrm>
-            <a:off x="8200978" y="1290320"/>
+            <a:off x="5914978" y="1290320"/>
             <a:ext cx="91440" cy="91440"/>
           </a:xfrm>
           <a:prstGeom prst="mathMultiply">
@@ -4481,7 +4487,7 @@
         </p:nvSpPr>
         <p:spPr>
           <a:xfrm>
-            <a:off x="8287338" y="1239520"/>
+            <a:off x="6001338" y="1239520"/>
             <a:ext cx="91440" cy="91440"/>
           </a:xfrm>
           <a:prstGeom prst="mathMultiply">
@@ -4533,7 +4539,7 @@
         </p:nvSpPr>
         <p:spPr>
           <a:xfrm>
-            <a:off x="8303848" y="1336040"/>
+            <a:off x="6017848" y="1336040"/>
             <a:ext cx="91440" cy="91440"/>
           </a:xfrm>
           <a:prstGeom prst="mathMultiply">
@@ -4585,6 +4591,1642 @@
 </file>
 
 <file path=ppt/slides/slide2.xml><?xml version="1.0" encoding="utf-8"?>
+<p:sld xmlns:a="http://schemas.openxmlformats.org/drawingml/2006/main" xmlns:r="http://schemas.openxmlformats.org/officeDocument/2006/relationships" xmlns:p="http://schemas.openxmlformats.org/presentationml/2006/main">
+  <p:cSld>
+    <p:spTree>
+      <p:nvGrpSpPr>
+        <p:cNvPr id="1" name="">
+          <a:extLst>
+            <a:ext uri="{FF2B5EF4-FFF2-40B4-BE49-F238E27FC236}">
+              <a16:creationId xmlns:a16="http://schemas.microsoft.com/office/drawing/2014/main" id="{1433BE31-2B51-6272-2227-9E142DD74758}"/>
+            </a:ext>
+          </a:extLst>
+        </p:cNvPr>
+        <p:cNvGrpSpPr/>
+        <p:nvPr/>
+      </p:nvGrpSpPr>
+      <p:grpSpPr>
+        <a:xfrm>
+          <a:off x="0" y="0"/>
+          <a:ext cx="0" cy="0"/>
+          <a:chOff x="0" y="0"/>
+          <a:chExt cx="0" cy="0"/>
+        </a:xfrm>
+      </p:grpSpPr>
+      <p:pic>
+        <p:nvPicPr>
+          <p:cNvPr id="3" name="Graphic 2" descr="Brain with solid fill">
+            <a:extLst>
+              <a:ext uri="{FF2B5EF4-FFF2-40B4-BE49-F238E27FC236}">
+                <a16:creationId xmlns:a16="http://schemas.microsoft.com/office/drawing/2014/main" id="{FE6BDE0F-C665-C574-6B09-889239508A05}"/>
+              </a:ext>
+            </a:extLst>
+          </p:cNvPr>
+          <p:cNvPicPr>
+            <a:picLocks noChangeAspect="1"/>
+          </p:cNvPicPr>
+          <p:nvPr/>
+        </p:nvPicPr>
+        <p:blipFill>
+          <a:blip r:embed="rId2">
+            <a:extLst>
+              <a:ext uri="{96DAC541-7B7A-43D3-8B79-37D633B846F1}">
+                <asvg:svgBlip xmlns:asvg="http://schemas.microsoft.com/office/drawing/2016/SVG/main" r:embed="rId3"/>
+              </a:ext>
+            </a:extLst>
+          </a:blip>
+          <a:stretch>
+            <a:fillRect/>
+          </a:stretch>
+        </p:blipFill>
+        <p:spPr>
+          <a:xfrm>
+            <a:off x="0" y="0"/>
+            <a:ext cx="2286000" cy="2286000"/>
+          </a:xfrm>
+          <a:prstGeom prst="rect">
+            <a:avLst/>
+          </a:prstGeom>
+        </p:spPr>
+      </p:pic>
+      <p:pic>
+        <p:nvPicPr>
+          <p:cNvPr id="4" name="Graphic 3" descr="Brain with solid fill">
+            <a:extLst>
+              <a:ext uri="{FF2B5EF4-FFF2-40B4-BE49-F238E27FC236}">
+                <a16:creationId xmlns:a16="http://schemas.microsoft.com/office/drawing/2014/main" id="{5F3AE0B2-E735-D69E-7665-07BF1966E4BD}"/>
+              </a:ext>
+            </a:extLst>
+          </p:cNvPr>
+          <p:cNvPicPr>
+            <a:picLocks noChangeAspect="1"/>
+          </p:cNvPicPr>
+          <p:nvPr/>
+        </p:nvPicPr>
+        <p:blipFill>
+          <a:blip r:embed="rId2">
+            <a:extLst>
+              <a:ext uri="{96DAC541-7B7A-43D3-8B79-37D633B846F1}">
+                <asvg:svgBlip xmlns:asvg="http://schemas.microsoft.com/office/drawing/2016/SVG/main" r:embed="rId3"/>
+              </a:ext>
+            </a:extLst>
+          </a:blip>
+          <a:stretch>
+            <a:fillRect/>
+          </a:stretch>
+        </p:blipFill>
+        <p:spPr>
+          <a:xfrm>
+            <a:off x="2286000" y="0"/>
+            <a:ext cx="2286000" cy="2286000"/>
+          </a:xfrm>
+          <a:prstGeom prst="rect">
+            <a:avLst/>
+          </a:prstGeom>
+        </p:spPr>
+      </p:pic>
+      <p:pic>
+        <p:nvPicPr>
+          <p:cNvPr id="5" name="Graphic 4" descr="Brain with solid fill">
+            <a:extLst>
+              <a:ext uri="{FF2B5EF4-FFF2-40B4-BE49-F238E27FC236}">
+                <a16:creationId xmlns:a16="http://schemas.microsoft.com/office/drawing/2014/main" id="{0C521C75-FC4A-FCEF-2EFF-CFAA97CEAD51}"/>
+              </a:ext>
+            </a:extLst>
+          </p:cNvPr>
+          <p:cNvPicPr>
+            <a:picLocks noChangeAspect="1"/>
+          </p:cNvPicPr>
+          <p:nvPr/>
+        </p:nvPicPr>
+        <p:blipFill>
+          <a:blip r:embed="rId2">
+            <a:extLst>
+              <a:ext uri="{96DAC541-7B7A-43D3-8B79-37D633B846F1}">
+                <asvg:svgBlip xmlns:asvg="http://schemas.microsoft.com/office/drawing/2016/SVG/main" r:embed="rId3"/>
+              </a:ext>
+            </a:extLst>
+          </a:blip>
+          <a:stretch>
+            <a:fillRect/>
+          </a:stretch>
+        </p:blipFill>
+        <p:spPr>
+          <a:xfrm>
+            <a:off x="4572000" y="0"/>
+            <a:ext cx="2286000" cy="2286000"/>
+          </a:xfrm>
+          <a:prstGeom prst="rect">
+            <a:avLst/>
+          </a:prstGeom>
+        </p:spPr>
+      </p:pic>
+      <p:pic>
+        <p:nvPicPr>
+          <p:cNvPr id="6" name="Graphic 5" descr="Brain with solid fill">
+            <a:extLst>
+              <a:ext uri="{FF2B5EF4-FFF2-40B4-BE49-F238E27FC236}">
+                <a16:creationId xmlns:a16="http://schemas.microsoft.com/office/drawing/2014/main" id="{949A5856-6DC3-E726-EC64-05DA798A718B}"/>
+              </a:ext>
+            </a:extLst>
+          </p:cNvPr>
+          <p:cNvPicPr>
+            <a:picLocks noChangeAspect="1"/>
+          </p:cNvPicPr>
+          <p:nvPr/>
+        </p:nvPicPr>
+        <p:blipFill>
+          <a:blip r:embed="rId2">
+            <a:extLst>
+              <a:ext uri="{96DAC541-7B7A-43D3-8B79-37D633B846F1}">
+                <asvg:svgBlip xmlns:asvg="http://schemas.microsoft.com/office/drawing/2016/SVG/main" r:embed="rId3"/>
+              </a:ext>
+            </a:extLst>
+          </a:blip>
+          <a:stretch>
+            <a:fillRect/>
+          </a:stretch>
+        </p:blipFill>
+        <p:spPr>
+          <a:xfrm>
+            <a:off x="6858000" y="0"/>
+            <a:ext cx="2286000" cy="2286000"/>
+          </a:xfrm>
+          <a:prstGeom prst="rect">
+            <a:avLst/>
+          </a:prstGeom>
+        </p:spPr>
+      </p:pic>
+      <p:sp>
+        <p:nvSpPr>
+          <p:cNvPr id="2" name="Flowchart: Connector 1">
+            <a:extLst>
+              <a:ext uri="{FF2B5EF4-FFF2-40B4-BE49-F238E27FC236}">
+                <a16:creationId xmlns:a16="http://schemas.microsoft.com/office/drawing/2014/main" id="{214E3771-E0EF-1702-78B1-45E355768185}"/>
+              </a:ext>
+            </a:extLst>
+          </p:cNvPr>
+          <p:cNvSpPr/>
+          <p:nvPr/>
+        </p:nvSpPr>
+        <p:spPr>
+          <a:xfrm>
+            <a:off x="740314" y="640080"/>
+            <a:ext cx="1005840" cy="1005840"/>
+          </a:xfrm>
+          <a:prstGeom prst="flowChartConnector">
+            <a:avLst/>
+          </a:prstGeom>
+          <a:noFill/>
+          <a:ln w="76200">
+            <a:solidFill>
+              <a:srgbClr val="C00000"/>
+            </a:solidFill>
+          </a:ln>
+        </p:spPr>
+        <p:style>
+          <a:lnRef idx="2">
+            <a:schemeClr val="accent1">
+              <a:shade val="15000"/>
+            </a:schemeClr>
+          </a:lnRef>
+          <a:fillRef idx="1">
+            <a:schemeClr val="accent1"/>
+          </a:fillRef>
+          <a:effectRef idx="0">
+            <a:schemeClr val="accent1"/>
+          </a:effectRef>
+          <a:fontRef idx="minor">
+            <a:schemeClr val="lt1"/>
+          </a:fontRef>
+        </p:style>
+        <p:txBody>
+          <a:bodyPr rtlCol="0" anchor="ctr"/>
+          <a:lstStyle/>
+          <a:p>
+            <a:pPr algn="ctr"/>
+            <a:endParaRPr lang="en-US"/>
+          </a:p>
+        </p:txBody>
+      </p:sp>
+      <p:sp>
+        <p:nvSpPr>
+          <p:cNvPr id="7" name="Flowchart: Connector 6">
+            <a:extLst>
+              <a:ext uri="{FF2B5EF4-FFF2-40B4-BE49-F238E27FC236}">
+                <a16:creationId xmlns:a16="http://schemas.microsoft.com/office/drawing/2014/main" id="{F394243C-B49A-E0D6-0C6F-1A3D288A591F}"/>
+              </a:ext>
+            </a:extLst>
+          </p:cNvPr>
+          <p:cNvSpPr/>
+          <p:nvPr/>
+        </p:nvSpPr>
+        <p:spPr>
+          <a:xfrm>
+            <a:off x="877474" y="777240"/>
+            <a:ext cx="731520" cy="731520"/>
+          </a:xfrm>
+          <a:prstGeom prst="flowChartConnector">
+            <a:avLst/>
+          </a:prstGeom>
+          <a:noFill/>
+          <a:ln w="76200">
+            <a:solidFill>
+              <a:srgbClr val="C00000"/>
+            </a:solidFill>
+          </a:ln>
+        </p:spPr>
+        <p:style>
+          <a:lnRef idx="2">
+            <a:schemeClr val="accent1">
+              <a:shade val="15000"/>
+            </a:schemeClr>
+          </a:lnRef>
+          <a:fillRef idx="1">
+            <a:schemeClr val="accent1"/>
+          </a:fillRef>
+          <a:effectRef idx="0">
+            <a:schemeClr val="accent1"/>
+          </a:effectRef>
+          <a:fontRef idx="minor">
+            <a:schemeClr val="lt1"/>
+          </a:fontRef>
+        </p:style>
+        <p:txBody>
+          <a:bodyPr rtlCol="0" anchor="ctr"/>
+          <a:lstStyle/>
+          <a:p>
+            <a:pPr algn="ctr"/>
+            <a:endParaRPr lang="en-US"/>
+          </a:p>
+        </p:txBody>
+      </p:sp>
+      <p:sp>
+        <p:nvSpPr>
+          <p:cNvPr id="8" name="Flowchart: Connector 7">
+            <a:extLst>
+              <a:ext uri="{FF2B5EF4-FFF2-40B4-BE49-F238E27FC236}">
+                <a16:creationId xmlns:a16="http://schemas.microsoft.com/office/drawing/2014/main" id="{81D9B8E4-B68B-B4D1-0CC8-44C06695F0A3}"/>
+              </a:ext>
+            </a:extLst>
+          </p:cNvPr>
+          <p:cNvSpPr/>
+          <p:nvPr/>
+        </p:nvSpPr>
+        <p:spPr>
+          <a:xfrm>
+            <a:off x="1014634" y="914400"/>
+            <a:ext cx="457200" cy="457200"/>
+          </a:xfrm>
+          <a:prstGeom prst="flowChartConnector">
+            <a:avLst/>
+          </a:prstGeom>
+          <a:noFill/>
+          <a:ln w="76200">
+            <a:solidFill>
+              <a:srgbClr val="C00000"/>
+            </a:solidFill>
+          </a:ln>
+        </p:spPr>
+        <p:style>
+          <a:lnRef idx="2">
+            <a:schemeClr val="accent1">
+              <a:shade val="15000"/>
+            </a:schemeClr>
+          </a:lnRef>
+          <a:fillRef idx="1">
+            <a:schemeClr val="accent1"/>
+          </a:fillRef>
+          <a:effectRef idx="0">
+            <a:schemeClr val="accent1"/>
+          </a:effectRef>
+          <a:fontRef idx="minor">
+            <a:schemeClr val="lt1"/>
+          </a:fontRef>
+        </p:style>
+        <p:txBody>
+          <a:bodyPr rtlCol="0" anchor="ctr"/>
+          <a:lstStyle/>
+          <a:p>
+            <a:pPr algn="ctr"/>
+            <a:endParaRPr lang="en-US"/>
+          </a:p>
+        </p:txBody>
+      </p:sp>
+      <p:sp>
+        <p:nvSpPr>
+          <p:cNvPr id="9" name="Flowchart: Connector 8">
+            <a:extLst>
+              <a:ext uri="{FF2B5EF4-FFF2-40B4-BE49-F238E27FC236}">
+                <a16:creationId xmlns:a16="http://schemas.microsoft.com/office/drawing/2014/main" id="{1E219C02-71CA-F9B0-D471-29372ABAFFBC}"/>
+              </a:ext>
+            </a:extLst>
+          </p:cNvPr>
+          <p:cNvSpPr/>
+          <p:nvPr/>
+        </p:nvSpPr>
+        <p:spPr>
+          <a:xfrm>
+            <a:off x="1151794" y="1051560"/>
+            <a:ext cx="182880" cy="182880"/>
+          </a:xfrm>
+          <a:prstGeom prst="flowChartConnector">
+            <a:avLst/>
+          </a:prstGeom>
+          <a:noFill/>
+          <a:ln w="76200">
+            <a:solidFill>
+              <a:srgbClr val="C00000"/>
+            </a:solidFill>
+          </a:ln>
+        </p:spPr>
+        <p:style>
+          <a:lnRef idx="2">
+            <a:schemeClr val="accent1">
+              <a:shade val="15000"/>
+            </a:schemeClr>
+          </a:lnRef>
+          <a:fillRef idx="1">
+            <a:schemeClr val="accent1"/>
+          </a:fillRef>
+          <a:effectRef idx="0">
+            <a:schemeClr val="accent1"/>
+          </a:effectRef>
+          <a:fontRef idx="minor">
+            <a:schemeClr val="lt1"/>
+          </a:fontRef>
+        </p:style>
+        <p:txBody>
+          <a:bodyPr rtlCol="0" anchor="ctr"/>
+          <a:lstStyle/>
+          <a:p>
+            <a:pPr algn="ctr"/>
+            <a:endParaRPr lang="en-US"/>
+          </a:p>
+        </p:txBody>
+      </p:sp>
+      <p:sp>
+        <p:nvSpPr>
+          <p:cNvPr id="14" name="Flowchart: Connector 13">
+            <a:extLst>
+              <a:ext uri="{FF2B5EF4-FFF2-40B4-BE49-F238E27FC236}">
+                <a16:creationId xmlns:a16="http://schemas.microsoft.com/office/drawing/2014/main" id="{EB371EDF-5627-5109-29DF-2C9EE6786BBA}"/>
+              </a:ext>
+            </a:extLst>
+          </p:cNvPr>
+          <p:cNvSpPr/>
+          <p:nvPr/>
+        </p:nvSpPr>
+        <p:spPr>
+          <a:xfrm>
+            <a:off x="3026314" y="640080"/>
+            <a:ext cx="1005840" cy="1005840"/>
+          </a:xfrm>
+          <a:prstGeom prst="flowChartConnector">
+            <a:avLst/>
+          </a:prstGeom>
+          <a:noFill/>
+          <a:ln w="76200">
+            <a:solidFill>
+              <a:srgbClr val="C00000"/>
+            </a:solidFill>
+          </a:ln>
+        </p:spPr>
+        <p:style>
+          <a:lnRef idx="2">
+            <a:schemeClr val="accent1">
+              <a:shade val="15000"/>
+            </a:schemeClr>
+          </a:lnRef>
+          <a:fillRef idx="1">
+            <a:schemeClr val="accent1"/>
+          </a:fillRef>
+          <a:effectRef idx="0">
+            <a:schemeClr val="accent1"/>
+          </a:effectRef>
+          <a:fontRef idx="minor">
+            <a:schemeClr val="lt1"/>
+          </a:fontRef>
+        </p:style>
+        <p:txBody>
+          <a:bodyPr rtlCol="0" anchor="ctr"/>
+          <a:lstStyle/>
+          <a:p>
+            <a:pPr algn="ctr"/>
+            <a:endParaRPr lang="en-US"/>
+          </a:p>
+        </p:txBody>
+      </p:sp>
+      <p:sp>
+        <p:nvSpPr>
+          <p:cNvPr id="15" name="Flowchart: Connector 14">
+            <a:extLst>
+              <a:ext uri="{FF2B5EF4-FFF2-40B4-BE49-F238E27FC236}">
+                <a16:creationId xmlns:a16="http://schemas.microsoft.com/office/drawing/2014/main" id="{8138BA02-F3AE-5825-87AC-1B68DA86A031}"/>
+              </a:ext>
+            </a:extLst>
+          </p:cNvPr>
+          <p:cNvSpPr/>
+          <p:nvPr/>
+        </p:nvSpPr>
+        <p:spPr>
+          <a:xfrm>
+            <a:off x="3163474" y="777240"/>
+            <a:ext cx="731520" cy="731520"/>
+          </a:xfrm>
+          <a:prstGeom prst="flowChartConnector">
+            <a:avLst/>
+          </a:prstGeom>
+          <a:noFill/>
+          <a:ln w="76200">
+            <a:solidFill>
+              <a:srgbClr val="C00000"/>
+            </a:solidFill>
+          </a:ln>
+        </p:spPr>
+        <p:style>
+          <a:lnRef idx="2">
+            <a:schemeClr val="accent1">
+              <a:shade val="15000"/>
+            </a:schemeClr>
+          </a:lnRef>
+          <a:fillRef idx="1">
+            <a:schemeClr val="accent1"/>
+          </a:fillRef>
+          <a:effectRef idx="0">
+            <a:schemeClr val="accent1"/>
+          </a:effectRef>
+          <a:fontRef idx="minor">
+            <a:schemeClr val="lt1"/>
+          </a:fontRef>
+        </p:style>
+        <p:txBody>
+          <a:bodyPr rtlCol="0" anchor="ctr"/>
+          <a:lstStyle/>
+          <a:p>
+            <a:pPr algn="ctr"/>
+            <a:endParaRPr lang="en-US"/>
+          </a:p>
+        </p:txBody>
+      </p:sp>
+      <p:sp>
+        <p:nvSpPr>
+          <p:cNvPr id="16" name="Flowchart: Connector 15">
+            <a:extLst>
+              <a:ext uri="{FF2B5EF4-FFF2-40B4-BE49-F238E27FC236}">
+                <a16:creationId xmlns:a16="http://schemas.microsoft.com/office/drawing/2014/main" id="{9D827F47-32ED-97C8-31CD-89E958FCA5A4}"/>
+              </a:ext>
+            </a:extLst>
+          </p:cNvPr>
+          <p:cNvSpPr/>
+          <p:nvPr/>
+        </p:nvSpPr>
+        <p:spPr>
+          <a:xfrm>
+            <a:off x="3300634" y="914400"/>
+            <a:ext cx="457200" cy="457200"/>
+          </a:xfrm>
+          <a:prstGeom prst="flowChartConnector">
+            <a:avLst/>
+          </a:prstGeom>
+          <a:noFill/>
+          <a:ln w="76200">
+            <a:solidFill>
+              <a:srgbClr val="C00000"/>
+            </a:solidFill>
+          </a:ln>
+        </p:spPr>
+        <p:style>
+          <a:lnRef idx="2">
+            <a:schemeClr val="accent1">
+              <a:shade val="15000"/>
+            </a:schemeClr>
+          </a:lnRef>
+          <a:fillRef idx="1">
+            <a:schemeClr val="accent1"/>
+          </a:fillRef>
+          <a:effectRef idx="0">
+            <a:schemeClr val="accent1"/>
+          </a:effectRef>
+          <a:fontRef idx="minor">
+            <a:schemeClr val="lt1"/>
+          </a:fontRef>
+        </p:style>
+        <p:txBody>
+          <a:bodyPr rtlCol="0" anchor="ctr"/>
+          <a:lstStyle/>
+          <a:p>
+            <a:pPr algn="ctr"/>
+            <a:endParaRPr lang="en-US"/>
+          </a:p>
+        </p:txBody>
+      </p:sp>
+      <p:sp>
+        <p:nvSpPr>
+          <p:cNvPr id="17" name="Flowchart: Connector 16">
+            <a:extLst>
+              <a:ext uri="{FF2B5EF4-FFF2-40B4-BE49-F238E27FC236}">
+                <a16:creationId xmlns:a16="http://schemas.microsoft.com/office/drawing/2014/main" id="{4107351C-04BD-477F-23BE-36C18CD8E116}"/>
+              </a:ext>
+            </a:extLst>
+          </p:cNvPr>
+          <p:cNvSpPr/>
+          <p:nvPr/>
+        </p:nvSpPr>
+        <p:spPr>
+          <a:xfrm>
+            <a:off x="3437794" y="1051560"/>
+            <a:ext cx="182880" cy="182880"/>
+          </a:xfrm>
+          <a:prstGeom prst="flowChartConnector">
+            <a:avLst/>
+          </a:prstGeom>
+          <a:noFill/>
+          <a:ln w="76200">
+            <a:solidFill>
+              <a:srgbClr val="C00000"/>
+            </a:solidFill>
+          </a:ln>
+        </p:spPr>
+        <p:style>
+          <a:lnRef idx="2">
+            <a:schemeClr val="accent1">
+              <a:shade val="15000"/>
+            </a:schemeClr>
+          </a:lnRef>
+          <a:fillRef idx="1">
+            <a:schemeClr val="accent1"/>
+          </a:fillRef>
+          <a:effectRef idx="0">
+            <a:schemeClr val="accent1"/>
+          </a:effectRef>
+          <a:fontRef idx="minor">
+            <a:schemeClr val="lt1"/>
+          </a:fontRef>
+        </p:style>
+        <p:txBody>
+          <a:bodyPr rtlCol="0" anchor="ctr"/>
+          <a:lstStyle/>
+          <a:p>
+            <a:pPr algn="ctr"/>
+            <a:endParaRPr lang="en-US"/>
+          </a:p>
+        </p:txBody>
+      </p:sp>
+      <p:sp>
+        <p:nvSpPr>
+          <p:cNvPr id="18" name="Flowchart: Connector 17">
+            <a:extLst>
+              <a:ext uri="{FF2B5EF4-FFF2-40B4-BE49-F238E27FC236}">
+                <a16:creationId xmlns:a16="http://schemas.microsoft.com/office/drawing/2014/main" id="{5D5D4632-F4F3-4CFA-BE2C-F30B1B74997D}"/>
+              </a:ext>
+            </a:extLst>
+          </p:cNvPr>
+          <p:cNvSpPr/>
+          <p:nvPr/>
+        </p:nvSpPr>
+        <p:spPr>
+          <a:xfrm>
+            <a:off x="5312314" y="640080"/>
+            <a:ext cx="1005840" cy="1005840"/>
+          </a:xfrm>
+          <a:prstGeom prst="flowChartConnector">
+            <a:avLst/>
+          </a:prstGeom>
+          <a:noFill/>
+          <a:ln w="76200">
+            <a:solidFill>
+              <a:srgbClr val="C00000"/>
+            </a:solidFill>
+          </a:ln>
+        </p:spPr>
+        <p:style>
+          <a:lnRef idx="2">
+            <a:schemeClr val="accent1">
+              <a:shade val="15000"/>
+            </a:schemeClr>
+          </a:lnRef>
+          <a:fillRef idx="1">
+            <a:schemeClr val="accent1"/>
+          </a:fillRef>
+          <a:effectRef idx="0">
+            <a:schemeClr val="accent1"/>
+          </a:effectRef>
+          <a:fontRef idx="minor">
+            <a:schemeClr val="lt1"/>
+          </a:fontRef>
+        </p:style>
+        <p:txBody>
+          <a:bodyPr rtlCol="0" anchor="ctr"/>
+          <a:lstStyle/>
+          <a:p>
+            <a:pPr algn="ctr"/>
+            <a:endParaRPr lang="en-US"/>
+          </a:p>
+        </p:txBody>
+      </p:sp>
+      <p:sp>
+        <p:nvSpPr>
+          <p:cNvPr id="19" name="Flowchart: Connector 18">
+            <a:extLst>
+              <a:ext uri="{FF2B5EF4-FFF2-40B4-BE49-F238E27FC236}">
+                <a16:creationId xmlns:a16="http://schemas.microsoft.com/office/drawing/2014/main" id="{77B77236-CF61-DE03-7429-2E11C196A598}"/>
+              </a:ext>
+            </a:extLst>
+          </p:cNvPr>
+          <p:cNvSpPr/>
+          <p:nvPr/>
+        </p:nvSpPr>
+        <p:spPr>
+          <a:xfrm>
+            <a:off x="5449474" y="777240"/>
+            <a:ext cx="731520" cy="731520"/>
+          </a:xfrm>
+          <a:prstGeom prst="flowChartConnector">
+            <a:avLst/>
+          </a:prstGeom>
+          <a:noFill/>
+          <a:ln w="76200">
+            <a:solidFill>
+              <a:srgbClr val="C00000"/>
+            </a:solidFill>
+          </a:ln>
+        </p:spPr>
+        <p:style>
+          <a:lnRef idx="2">
+            <a:schemeClr val="accent1">
+              <a:shade val="15000"/>
+            </a:schemeClr>
+          </a:lnRef>
+          <a:fillRef idx="1">
+            <a:schemeClr val="accent1"/>
+          </a:fillRef>
+          <a:effectRef idx="0">
+            <a:schemeClr val="accent1"/>
+          </a:effectRef>
+          <a:fontRef idx="minor">
+            <a:schemeClr val="lt1"/>
+          </a:fontRef>
+        </p:style>
+        <p:txBody>
+          <a:bodyPr rtlCol="0" anchor="ctr"/>
+          <a:lstStyle/>
+          <a:p>
+            <a:pPr algn="ctr"/>
+            <a:endParaRPr lang="en-US"/>
+          </a:p>
+        </p:txBody>
+      </p:sp>
+      <p:sp>
+        <p:nvSpPr>
+          <p:cNvPr id="20" name="Flowchart: Connector 19">
+            <a:extLst>
+              <a:ext uri="{FF2B5EF4-FFF2-40B4-BE49-F238E27FC236}">
+                <a16:creationId xmlns:a16="http://schemas.microsoft.com/office/drawing/2014/main" id="{8C2DB0A9-5571-4232-102F-D4E9F9E062CD}"/>
+              </a:ext>
+            </a:extLst>
+          </p:cNvPr>
+          <p:cNvSpPr/>
+          <p:nvPr/>
+        </p:nvSpPr>
+        <p:spPr>
+          <a:xfrm>
+            <a:off x="5586634" y="914400"/>
+            <a:ext cx="457200" cy="457200"/>
+          </a:xfrm>
+          <a:prstGeom prst="flowChartConnector">
+            <a:avLst/>
+          </a:prstGeom>
+          <a:noFill/>
+          <a:ln w="76200">
+            <a:solidFill>
+              <a:srgbClr val="C00000"/>
+            </a:solidFill>
+          </a:ln>
+        </p:spPr>
+        <p:style>
+          <a:lnRef idx="2">
+            <a:schemeClr val="accent1">
+              <a:shade val="15000"/>
+            </a:schemeClr>
+          </a:lnRef>
+          <a:fillRef idx="1">
+            <a:schemeClr val="accent1"/>
+          </a:fillRef>
+          <a:effectRef idx="0">
+            <a:schemeClr val="accent1"/>
+          </a:effectRef>
+          <a:fontRef idx="minor">
+            <a:schemeClr val="lt1"/>
+          </a:fontRef>
+        </p:style>
+        <p:txBody>
+          <a:bodyPr rtlCol="0" anchor="ctr"/>
+          <a:lstStyle/>
+          <a:p>
+            <a:pPr algn="ctr"/>
+            <a:endParaRPr lang="en-US"/>
+          </a:p>
+        </p:txBody>
+      </p:sp>
+      <p:sp>
+        <p:nvSpPr>
+          <p:cNvPr id="21" name="Flowchart: Connector 20">
+            <a:extLst>
+              <a:ext uri="{FF2B5EF4-FFF2-40B4-BE49-F238E27FC236}">
+                <a16:creationId xmlns:a16="http://schemas.microsoft.com/office/drawing/2014/main" id="{3E71695C-45C7-7F95-C88D-79C61EC8AC82}"/>
+              </a:ext>
+            </a:extLst>
+          </p:cNvPr>
+          <p:cNvSpPr/>
+          <p:nvPr/>
+        </p:nvSpPr>
+        <p:spPr>
+          <a:xfrm>
+            <a:off x="5723794" y="1051560"/>
+            <a:ext cx="182880" cy="182880"/>
+          </a:xfrm>
+          <a:prstGeom prst="flowChartConnector">
+            <a:avLst/>
+          </a:prstGeom>
+          <a:noFill/>
+          <a:ln w="76200">
+            <a:solidFill>
+              <a:srgbClr val="C00000"/>
+            </a:solidFill>
+          </a:ln>
+        </p:spPr>
+        <p:style>
+          <a:lnRef idx="2">
+            <a:schemeClr val="accent1">
+              <a:shade val="15000"/>
+            </a:schemeClr>
+          </a:lnRef>
+          <a:fillRef idx="1">
+            <a:schemeClr val="accent1"/>
+          </a:fillRef>
+          <a:effectRef idx="0">
+            <a:schemeClr val="accent1"/>
+          </a:effectRef>
+          <a:fontRef idx="minor">
+            <a:schemeClr val="lt1"/>
+          </a:fontRef>
+        </p:style>
+        <p:txBody>
+          <a:bodyPr rtlCol="0" anchor="ctr"/>
+          <a:lstStyle/>
+          <a:p>
+            <a:pPr algn="ctr"/>
+            <a:endParaRPr lang="en-US"/>
+          </a:p>
+        </p:txBody>
+      </p:sp>
+      <p:sp>
+        <p:nvSpPr>
+          <p:cNvPr id="22" name="Flowchart: Connector 21">
+            <a:extLst>
+              <a:ext uri="{FF2B5EF4-FFF2-40B4-BE49-F238E27FC236}">
+                <a16:creationId xmlns:a16="http://schemas.microsoft.com/office/drawing/2014/main" id="{5A6FE1C9-A26A-4FC1-CB0E-A6A53D24FAC9}"/>
+              </a:ext>
+            </a:extLst>
+          </p:cNvPr>
+          <p:cNvSpPr/>
+          <p:nvPr/>
+        </p:nvSpPr>
+        <p:spPr>
+          <a:xfrm>
+            <a:off x="7598314" y="640080"/>
+            <a:ext cx="1005840" cy="1005840"/>
+          </a:xfrm>
+          <a:prstGeom prst="flowChartConnector">
+            <a:avLst/>
+          </a:prstGeom>
+          <a:noFill/>
+          <a:ln w="76200">
+            <a:solidFill>
+              <a:srgbClr val="C00000"/>
+            </a:solidFill>
+          </a:ln>
+        </p:spPr>
+        <p:style>
+          <a:lnRef idx="2">
+            <a:schemeClr val="accent1">
+              <a:shade val="15000"/>
+            </a:schemeClr>
+          </a:lnRef>
+          <a:fillRef idx="1">
+            <a:schemeClr val="accent1"/>
+          </a:fillRef>
+          <a:effectRef idx="0">
+            <a:schemeClr val="accent1"/>
+          </a:effectRef>
+          <a:fontRef idx="minor">
+            <a:schemeClr val="lt1"/>
+          </a:fontRef>
+        </p:style>
+        <p:txBody>
+          <a:bodyPr rtlCol="0" anchor="ctr"/>
+          <a:lstStyle/>
+          <a:p>
+            <a:pPr algn="ctr"/>
+            <a:endParaRPr lang="en-US"/>
+          </a:p>
+        </p:txBody>
+      </p:sp>
+      <p:sp>
+        <p:nvSpPr>
+          <p:cNvPr id="23" name="Flowchart: Connector 22">
+            <a:extLst>
+              <a:ext uri="{FF2B5EF4-FFF2-40B4-BE49-F238E27FC236}">
+                <a16:creationId xmlns:a16="http://schemas.microsoft.com/office/drawing/2014/main" id="{615AE5A8-C0D4-342D-BEA6-C9E477ABF937}"/>
+              </a:ext>
+            </a:extLst>
+          </p:cNvPr>
+          <p:cNvSpPr/>
+          <p:nvPr/>
+        </p:nvSpPr>
+        <p:spPr>
+          <a:xfrm>
+            <a:off x="7735474" y="777240"/>
+            <a:ext cx="731520" cy="731520"/>
+          </a:xfrm>
+          <a:prstGeom prst="flowChartConnector">
+            <a:avLst/>
+          </a:prstGeom>
+          <a:noFill/>
+          <a:ln w="76200">
+            <a:solidFill>
+              <a:srgbClr val="C00000"/>
+            </a:solidFill>
+          </a:ln>
+        </p:spPr>
+        <p:style>
+          <a:lnRef idx="2">
+            <a:schemeClr val="accent1">
+              <a:shade val="15000"/>
+            </a:schemeClr>
+          </a:lnRef>
+          <a:fillRef idx="1">
+            <a:schemeClr val="accent1"/>
+          </a:fillRef>
+          <a:effectRef idx="0">
+            <a:schemeClr val="accent1"/>
+          </a:effectRef>
+          <a:fontRef idx="minor">
+            <a:schemeClr val="lt1"/>
+          </a:fontRef>
+        </p:style>
+        <p:txBody>
+          <a:bodyPr rtlCol="0" anchor="ctr"/>
+          <a:lstStyle/>
+          <a:p>
+            <a:pPr algn="ctr"/>
+            <a:endParaRPr lang="en-US"/>
+          </a:p>
+        </p:txBody>
+      </p:sp>
+      <p:sp>
+        <p:nvSpPr>
+          <p:cNvPr id="24" name="Flowchart: Connector 23">
+            <a:extLst>
+              <a:ext uri="{FF2B5EF4-FFF2-40B4-BE49-F238E27FC236}">
+                <a16:creationId xmlns:a16="http://schemas.microsoft.com/office/drawing/2014/main" id="{8C001727-28B3-D0DE-EC86-1CE231FF8952}"/>
+              </a:ext>
+            </a:extLst>
+          </p:cNvPr>
+          <p:cNvSpPr/>
+          <p:nvPr/>
+        </p:nvSpPr>
+        <p:spPr>
+          <a:xfrm>
+            <a:off x="7872634" y="914400"/>
+            <a:ext cx="457200" cy="457200"/>
+          </a:xfrm>
+          <a:prstGeom prst="flowChartConnector">
+            <a:avLst/>
+          </a:prstGeom>
+          <a:noFill/>
+          <a:ln w="76200">
+            <a:solidFill>
+              <a:srgbClr val="C00000"/>
+            </a:solidFill>
+          </a:ln>
+        </p:spPr>
+        <p:style>
+          <a:lnRef idx="2">
+            <a:schemeClr val="accent1">
+              <a:shade val="15000"/>
+            </a:schemeClr>
+          </a:lnRef>
+          <a:fillRef idx="1">
+            <a:schemeClr val="accent1"/>
+          </a:fillRef>
+          <a:effectRef idx="0">
+            <a:schemeClr val="accent1"/>
+          </a:effectRef>
+          <a:fontRef idx="minor">
+            <a:schemeClr val="lt1"/>
+          </a:fontRef>
+        </p:style>
+        <p:txBody>
+          <a:bodyPr rtlCol="0" anchor="ctr"/>
+          <a:lstStyle/>
+          <a:p>
+            <a:pPr algn="ctr"/>
+            <a:endParaRPr lang="en-US"/>
+          </a:p>
+        </p:txBody>
+      </p:sp>
+      <p:sp>
+        <p:nvSpPr>
+          <p:cNvPr id="25" name="Flowchart: Connector 24">
+            <a:extLst>
+              <a:ext uri="{FF2B5EF4-FFF2-40B4-BE49-F238E27FC236}">
+                <a16:creationId xmlns:a16="http://schemas.microsoft.com/office/drawing/2014/main" id="{8DF22DA1-2919-C60C-C27F-001AABCBA457}"/>
+              </a:ext>
+            </a:extLst>
+          </p:cNvPr>
+          <p:cNvSpPr/>
+          <p:nvPr/>
+        </p:nvSpPr>
+        <p:spPr>
+          <a:xfrm>
+            <a:off x="8009794" y="1051560"/>
+            <a:ext cx="182880" cy="182880"/>
+          </a:xfrm>
+          <a:prstGeom prst="flowChartConnector">
+            <a:avLst/>
+          </a:prstGeom>
+          <a:noFill/>
+          <a:ln w="76200">
+            <a:solidFill>
+              <a:srgbClr val="C00000"/>
+            </a:solidFill>
+          </a:ln>
+        </p:spPr>
+        <p:style>
+          <a:lnRef idx="2">
+            <a:schemeClr val="accent1">
+              <a:shade val="15000"/>
+            </a:schemeClr>
+          </a:lnRef>
+          <a:fillRef idx="1">
+            <a:schemeClr val="accent1"/>
+          </a:fillRef>
+          <a:effectRef idx="0">
+            <a:schemeClr val="accent1"/>
+          </a:effectRef>
+          <a:fontRef idx="minor">
+            <a:schemeClr val="lt1"/>
+          </a:fontRef>
+        </p:style>
+        <p:txBody>
+          <a:bodyPr rtlCol="0" anchor="ctr"/>
+          <a:lstStyle/>
+          <a:p>
+            <a:pPr algn="ctr"/>
+            <a:endParaRPr lang="en-US"/>
+          </a:p>
+        </p:txBody>
+      </p:sp>
+      <p:sp>
+        <p:nvSpPr>
+          <p:cNvPr id="32" name="Multiplication Sign 31">
+            <a:extLst>
+              <a:ext uri="{FF2B5EF4-FFF2-40B4-BE49-F238E27FC236}">
+                <a16:creationId xmlns:a16="http://schemas.microsoft.com/office/drawing/2014/main" id="{346CB416-D4E1-27AD-6C0F-D7A1A58C0F66}"/>
+              </a:ext>
+            </a:extLst>
+          </p:cNvPr>
+          <p:cNvSpPr/>
+          <p:nvPr/>
+        </p:nvSpPr>
+        <p:spPr>
+          <a:xfrm>
+            <a:off x="1060354" y="1051560"/>
+            <a:ext cx="182880" cy="182880"/>
+          </a:xfrm>
+          <a:prstGeom prst="mathMultiply">
+            <a:avLst/>
+          </a:prstGeom>
+          <a:solidFill>
+            <a:schemeClr val="tx1"/>
+          </a:solidFill>
+          <a:ln>
+            <a:noFill/>
+          </a:ln>
+        </p:spPr>
+        <p:style>
+          <a:lnRef idx="2">
+            <a:schemeClr val="accent1">
+              <a:shade val="15000"/>
+            </a:schemeClr>
+          </a:lnRef>
+          <a:fillRef idx="1">
+            <a:schemeClr val="accent1"/>
+          </a:fillRef>
+          <a:effectRef idx="0">
+            <a:schemeClr val="accent1"/>
+          </a:effectRef>
+          <a:fontRef idx="minor">
+            <a:schemeClr val="lt1"/>
+          </a:fontRef>
+        </p:style>
+        <p:txBody>
+          <a:bodyPr rtlCol="0" anchor="ctr"/>
+          <a:lstStyle/>
+          <a:p>
+            <a:pPr algn="ctr"/>
+            <a:endParaRPr lang="en-US"/>
+          </a:p>
+        </p:txBody>
+      </p:sp>
+      <p:sp>
+        <p:nvSpPr>
+          <p:cNvPr id="33" name="Multiplication Sign 32">
+            <a:extLst>
+              <a:ext uri="{FF2B5EF4-FFF2-40B4-BE49-F238E27FC236}">
+                <a16:creationId xmlns:a16="http://schemas.microsoft.com/office/drawing/2014/main" id="{570ABCA8-E0C6-57BC-A595-414E5F921FB1}"/>
+              </a:ext>
+            </a:extLst>
+          </p:cNvPr>
+          <p:cNvSpPr/>
+          <p:nvPr/>
+        </p:nvSpPr>
+        <p:spPr>
+          <a:xfrm>
+            <a:off x="1183290" y="964184"/>
+            <a:ext cx="182880" cy="182880"/>
+          </a:xfrm>
+          <a:prstGeom prst="mathMultiply">
+            <a:avLst/>
+          </a:prstGeom>
+          <a:solidFill>
+            <a:schemeClr val="tx1"/>
+          </a:solidFill>
+          <a:ln>
+            <a:noFill/>
+          </a:ln>
+        </p:spPr>
+        <p:style>
+          <a:lnRef idx="2">
+            <a:schemeClr val="accent1">
+              <a:shade val="15000"/>
+            </a:schemeClr>
+          </a:lnRef>
+          <a:fillRef idx="1">
+            <a:schemeClr val="accent1"/>
+          </a:fillRef>
+          <a:effectRef idx="0">
+            <a:schemeClr val="accent1"/>
+          </a:effectRef>
+          <a:fontRef idx="minor">
+            <a:schemeClr val="lt1"/>
+          </a:fontRef>
+        </p:style>
+        <p:txBody>
+          <a:bodyPr rtlCol="0" anchor="ctr"/>
+          <a:lstStyle/>
+          <a:p>
+            <a:pPr algn="ctr"/>
+            <a:endParaRPr lang="en-US"/>
+          </a:p>
+        </p:txBody>
+      </p:sp>
+      <p:sp>
+        <p:nvSpPr>
+          <p:cNvPr id="34" name="Multiplication Sign 33">
+            <a:extLst>
+              <a:ext uri="{FF2B5EF4-FFF2-40B4-BE49-F238E27FC236}">
+                <a16:creationId xmlns:a16="http://schemas.microsoft.com/office/drawing/2014/main" id="{146F3FC9-0A56-5849-3694-F2547C58B21E}"/>
+              </a:ext>
+            </a:extLst>
+          </p:cNvPr>
+          <p:cNvSpPr/>
+          <p:nvPr/>
+        </p:nvSpPr>
+        <p:spPr>
+          <a:xfrm>
+            <a:off x="1230280" y="1109472"/>
+            <a:ext cx="182880" cy="182880"/>
+          </a:xfrm>
+          <a:prstGeom prst="mathMultiply">
+            <a:avLst/>
+          </a:prstGeom>
+          <a:solidFill>
+            <a:schemeClr val="tx1"/>
+          </a:solidFill>
+          <a:ln>
+            <a:noFill/>
+          </a:ln>
+        </p:spPr>
+        <p:style>
+          <a:lnRef idx="2">
+            <a:schemeClr val="accent1">
+              <a:shade val="15000"/>
+            </a:schemeClr>
+          </a:lnRef>
+          <a:fillRef idx="1">
+            <a:schemeClr val="accent1"/>
+          </a:fillRef>
+          <a:effectRef idx="0">
+            <a:schemeClr val="accent1"/>
+          </a:effectRef>
+          <a:fontRef idx="minor">
+            <a:schemeClr val="lt1"/>
+          </a:fontRef>
+        </p:style>
+        <p:txBody>
+          <a:bodyPr rtlCol="0" anchor="ctr"/>
+          <a:lstStyle/>
+          <a:p>
+            <a:pPr algn="ctr"/>
+            <a:endParaRPr lang="en-US"/>
+          </a:p>
+        </p:txBody>
+      </p:sp>
+      <p:sp>
+        <p:nvSpPr>
+          <p:cNvPr id="38" name="Multiplication Sign 37">
+            <a:extLst>
+              <a:ext uri="{FF2B5EF4-FFF2-40B4-BE49-F238E27FC236}">
+                <a16:creationId xmlns:a16="http://schemas.microsoft.com/office/drawing/2014/main" id="{098C83BF-1997-F9B1-8C30-40AE8A021BDB}"/>
+              </a:ext>
+            </a:extLst>
+          </p:cNvPr>
+          <p:cNvSpPr/>
+          <p:nvPr/>
+        </p:nvSpPr>
+        <p:spPr>
+          <a:xfrm>
+            <a:off x="3055651" y="1292352"/>
+            <a:ext cx="182880" cy="182880"/>
+          </a:xfrm>
+          <a:prstGeom prst="mathMultiply">
+            <a:avLst/>
+          </a:prstGeom>
+          <a:solidFill>
+            <a:schemeClr val="tx1"/>
+          </a:solidFill>
+          <a:ln>
+            <a:noFill/>
+          </a:ln>
+        </p:spPr>
+        <p:style>
+          <a:lnRef idx="2">
+            <a:schemeClr val="accent1">
+              <a:shade val="15000"/>
+            </a:schemeClr>
+          </a:lnRef>
+          <a:fillRef idx="1">
+            <a:schemeClr val="accent1"/>
+          </a:fillRef>
+          <a:effectRef idx="0">
+            <a:schemeClr val="accent1"/>
+          </a:effectRef>
+          <a:fontRef idx="minor">
+            <a:schemeClr val="lt1"/>
+          </a:fontRef>
+        </p:style>
+        <p:txBody>
+          <a:bodyPr rtlCol="0" anchor="ctr"/>
+          <a:lstStyle/>
+          <a:p>
+            <a:pPr algn="ctr"/>
+            <a:endParaRPr lang="en-US"/>
+          </a:p>
+        </p:txBody>
+      </p:sp>
+      <p:sp>
+        <p:nvSpPr>
+          <p:cNvPr id="39" name="Multiplication Sign 38">
+            <a:extLst>
+              <a:ext uri="{FF2B5EF4-FFF2-40B4-BE49-F238E27FC236}">
+                <a16:creationId xmlns:a16="http://schemas.microsoft.com/office/drawing/2014/main" id="{4BB1FA84-60D9-4C83-070B-A379A6CD6DC9}"/>
+              </a:ext>
+            </a:extLst>
+          </p:cNvPr>
+          <p:cNvSpPr/>
+          <p:nvPr/>
+        </p:nvSpPr>
+        <p:spPr>
+          <a:xfrm>
+            <a:off x="3178587" y="1204976"/>
+            <a:ext cx="182880" cy="182880"/>
+          </a:xfrm>
+          <a:prstGeom prst="mathMultiply">
+            <a:avLst/>
+          </a:prstGeom>
+          <a:solidFill>
+            <a:schemeClr val="tx1"/>
+          </a:solidFill>
+          <a:ln>
+            <a:noFill/>
+          </a:ln>
+        </p:spPr>
+        <p:style>
+          <a:lnRef idx="2">
+            <a:schemeClr val="accent1">
+              <a:shade val="15000"/>
+            </a:schemeClr>
+          </a:lnRef>
+          <a:fillRef idx="1">
+            <a:schemeClr val="accent1"/>
+          </a:fillRef>
+          <a:effectRef idx="0">
+            <a:schemeClr val="accent1"/>
+          </a:effectRef>
+          <a:fontRef idx="minor">
+            <a:schemeClr val="lt1"/>
+          </a:fontRef>
+        </p:style>
+        <p:txBody>
+          <a:bodyPr rtlCol="0" anchor="ctr"/>
+          <a:lstStyle/>
+          <a:p>
+            <a:pPr algn="ctr"/>
+            <a:endParaRPr lang="en-US"/>
+          </a:p>
+        </p:txBody>
+      </p:sp>
+      <p:sp>
+        <p:nvSpPr>
+          <p:cNvPr id="40" name="Multiplication Sign 39">
+            <a:extLst>
+              <a:ext uri="{FF2B5EF4-FFF2-40B4-BE49-F238E27FC236}">
+                <a16:creationId xmlns:a16="http://schemas.microsoft.com/office/drawing/2014/main" id="{B9989E8C-C6B0-5682-D753-47D722E3E18A}"/>
+              </a:ext>
+            </a:extLst>
+          </p:cNvPr>
+          <p:cNvSpPr/>
+          <p:nvPr/>
+        </p:nvSpPr>
+        <p:spPr>
+          <a:xfrm>
+            <a:off x="3225577" y="1350264"/>
+            <a:ext cx="182880" cy="182880"/>
+          </a:xfrm>
+          <a:prstGeom prst="mathMultiply">
+            <a:avLst/>
+          </a:prstGeom>
+          <a:solidFill>
+            <a:schemeClr val="tx1"/>
+          </a:solidFill>
+          <a:ln>
+            <a:noFill/>
+          </a:ln>
+        </p:spPr>
+        <p:style>
+          <a:lnRef idx="2">
+            <a:schemeClr val="accent1">
+              <a:shade val="15000"/>
+            </a:schemeClr>
+          </a:lnRef>
+          <a:fillRef idx="1">
+            <a:schemeClr val="accent1"/>
+          </a:fillRef>
+          <a:effectRef idx="0">
+            <a:schemeClr val="accent1"/>
+          </a:effectRef>
+          <a:fontRef idx="minor">
+            <a:schemeClr val="lt1"/>
+          </a:fontRef>
+        </p:style>
+        <p:txBody>
+          <a:bodyPr rtlCol="0" anchor="ctr"/>
+          <a:lstStyle/>
+          <a:p>
+            <a:pPr algn="ctr"/>
+            <a:endParaRPr lang="en-US"/>
+          </a:p>
+        </p:txBody>
+      </p:sp>
+      <p:sp>
+        <p:nvSpPr>
+          <p:cNvPr id="41" name="Multiplication Sign 40">
+            <a:extLst>
+              <a:ext uri="{FF2B5EF4-FFF2-40B4-BE49-F238E27FC236}">
+                <a16:creationId xmlns:a16="http://schemas.microsoft.com/office/drawing/2014/main" id="{257305F8-EED5-D520-5A53-ACEF9837CB45}"/>
+              </a:ext>
+            </a:extLst>
+          </p:cNvPr>
+          <p:cNvSpPr/>
+          <p:nvPr/>
+        </p:nvSpPr>
+        <p:spPr>
+          <a:xfrm>
+            <a:off x="5470683" y="1045464"/>
+            <a:ext cx="182880" cy="182880"/>
+          </a:xfrm>
+          <a:prstGeom prst="mathMultiply">
+            <a:avLst/>
+          </a:prstGeom>
+          <a:solidFill>
+            <a:schemeClr val="tx1"/>
+          </a:solidFill>
+          <a:ln>
+            <a:noFill/>
+          </a:ln>
+        </p:spPr>
+        <p:style>
+          <a:lnRef idx="2">
+            <a:schemeClr val="accent1">
+              <a:shade val="15000"/>
+            </a:schemeClr>
+          </a:lnRef>
+          <a:fillRef idx="1">
+            <a:schemeClr val="accent1"/>
+          </a:fillRef>
+          <a:effectRef idx="0">
+            <a:schemeClr val="accent1"/>
+          </a:effectRef>
+          <a:fontRef idx="minor">
+            <a:schemeClr val="lt1"/>
+          </a:fontRef>
+        </p:style>
+        <p:txBody>
+          <a:bodyPr rtlCol="0" anchor="ctr"/>
+          <a:lstStyle/>
+          <a:p>
+            <a:pPr algn="ctr"/>
+            <a:endParaRPr lang="en-US"/>
+          </a:p>
+        </p:txBody>
+      </p:sp>
+      <p:sp>
+        <p:nvSpPr>
+          <p:cNvPr id="42" name="Multiplication Sign 41">
+            <a:extLst>
+              <a:ext uri="{FF2B5EF4-FFF2-40B4-BE49-F238E27FC236}">
+                <a16:creationId xmlns:a16="http://schemas.microsoft.com/office/drawing/2014/main" id="{D02C3953-6367-B0A7-5CEC-B8B0E9214DDD}"/>
+              </a:ext>
+            </a:extLst>
+          </p:cNvPr>
+          <p:cNvSpPr/>
+          <p:nvPr/>
+        </p:nvSpPr>
+        <p:spPr>
+          <a:xfrm>
+            <a:off x="5770403" y="811784"/>
+            <a:ext cx="182880" cy="182880"/>
+          </a:xfrm>
+          <a:prstGeom prst="mathMultiply">
+            <a:avLst/>
+          </a:prstGeom>
+          <a:solidFill>
+            <a:schemeClr val="tx1"/>
+          </a:solidFill>
+          <a:ln>
+            <a:noFill/>
+          </a:ln>
+        </p:spPr>
+        <p:style>
+          <a:lnRef idx="2">
+            <a:schemeClr val="accent1">
+              <a:shade val="15000"/>
+            </a:schemeClr>
+          </a:lnRef>
+          <a:fillRef idx="1">
+            <a:schemeClr val="accent1"/>
+          </a:fillRef>
+          <a:effectRef idx="0">
+            <a:schemeClr val="accent1"/>
+          </a:effectRef>
+          <a:fontRef idx="minor">
+            <a:schemeClr val="lt1"/>
+          </a:fontRef>
+        </p:style>
+        <p:txBody>
+          <a:bodyPr rtlCol="0" anchor="ctr"/>
+          <a:lstStyle/>
+          <a:p>
+            <a:pPr algn="ctr"/>
+            <a:endParaRPr lang="en-US"/>
+          </a:p>
+        </p:txBody>
+      </p:sp>
+      <p:sp>
+        <p:nvSpPr>
+          <p:cNvPr id="43" name="Multiplication Sign 42">
+            <a:extLst>
+              <a:ext uri="{FF2B5EF4-FFF2-40B4-BE49-F238E27FC236}">
+                <a16:creationId xmlns:a16="http://schemas.microsoft.com/office/drawing/2014/main" id="{58104411-D5F2-C2F7-F92E-995124AFA34B}"/>
+              </a:ext>
+            </a:extLst>
+          </p:cNvPr>
+          <p:cNvSpPr/>
+          <p:nvPr/>
+        </p:nvSpPr>
+        <p:spPr>
+          <a:xfrm>
+            <a:off x="5909595" y="1228344"/>
+            <a:ext cx="182880" cy="182880"/>
+          </a:xfrm>
+          <a:prstGeom prst="mathMultiply">
+            <a:avLst/>
+          </a:prstGeom>
+          <a:solidFill>
+            <a:schemeClr val="tx1"/>
+          </a:solidFill>
+          <a:ln>
+            <a:noFill/>
+          </a:ln>
+        </p:spPr>
+        <p:style>
+          <a:lnRef idx="2">
+            <a:schemeClr val="accent1">
+              <a:shade val="15000"/>
+            </a:schemeClr>
+          </a:lnRef>
+          <a:fillRef idx="1">
+            <a:schemeClr val="accent1"/>
+          </a:fillRef>
+          <a:effectRef idx="0">
+            <a:schemeClr val="accent1"/>
+          </a:effectRef>
+          <a:fontRef idx="minor">
+            <a:schemeClr val="lt1"/>
+          </a:fontRef>
+        </p:style>
+        <p:txBody>
+          <a:bodyPr rtlCol="0" anchor="ctr"/>
+          <a:lstStyle/>
+          <a:p>
+            <a:pPr algn="ctr"/>
+            <a:endParaRPr lang="en-US"/>
+          </a:p>
+        </p:txBody>
+      </p:sp>
+      <p:sp>
+        <p:nvSpPr>
+          <p:cNvPr id="44" name="Multiplication Sign 43">
+            <a:extLst>
+              <a:ext uri="{FF2B5EF4-FFF2-40B4-BE49-F238E27FC236}">
+                <a16:creationId xmlns:a16="http://schemas.microsoft.com/office/drawing/2014/main" id="{4F3996F3-238C-9E12-CA19-CAFF44FC44E8}"/>
+              </a:ext>
+            </a:extLst>
+          </p:cNvPr>
+          <p:cNvSpPr/>
+          <p:nvPr/>
+        </p:nvSpPr>
+        <p:spPr>
+          <a:xfrm>
+            <a:off x="7600885" y="1258824"/>
+            <a:ext cx="182880" cy="182880"/>
+          </a:xfrm>
+          <a:prstGeom prst="mathMultiply">
+            <a:avLst/>
+          </a:prstGeom>
+          <a:solidFill>
+            <a:schemeClr val="tx1"/>
+          </a:solidFill>
+          <a:ln>
+            <a:noFill/>
+          </a:ln>
+        </p:spPr>
+        <p:style>
+          <a:lnRef idx="2">
+            <a:schemeClr val="accent1">
+              <a:shade val="15000"/>
+            </a:schemeClr>
+          </a:lnRef>
+          <a:fillRef idx="1">
+            <a:schemeClr val="accent1"/>
+          </a:fillRef>
+          <a:effectRef idx="0">
+            <a:schemeClr val="accent1"/>
+          </a:effectRef>
+          <a:fontRef idx="minor">
+            <a:schemeClr val="lt1"/>
+          </a:fontRef>
+        </p:style>
+        <p:txBody>
+          <a:bodyPr rtlCol="0" anchor="ctr"/>
+          <a:lstStyle/>
+          <a:p>
+            <a:pPr algn="ctr"/>
+            <a:endParaRPr lang="en-US"/>
+          </a:p>
+        </p:txBody>
+      </p:sp>
+      <p:sp>
+        <p:nvSpPr>
+          <p:cNvPr id="45" name="Multiplication Sign 44">
+            <a:extLst>
+              <a:ext uri="{FF2B5EF4-FFF2-40B4-BE49-F238E27FC236}">
+                <a16:creationId xmlns:a16="http://schemas.microsoft.com/office/drawing/2014/main" id="{5450922A-73D0-63AB-D57B-B4BB13B2DD7B}"/>
+              </a:ext>
+            </a:extLst>
+          </p:cNvPr>
+          <p:cNvSpPr/>
+          <p:nvPr/>
+        </p:nvSpPr>
+        <p:spPr>
+          <a:xfrm>
+            <a:off x="7900605" y="1025144"/>
+            <a:ext cx="182880" cy="182880"/>
+          </a:xfrm>
+          <a:prstGeom prst="mathMultiply">
+            <a:avLst/>
+          </a:prstGeom>
+          <a:solidFill>
+            <a:schemeClr val="tx1"/>
+          </a:solidFill>
+          <a:ln>
+            <a:noFill/>
+          </a:ln>
+        </p:spPr>
+        <p:style>
+          <a:lnRef idx="2">
+            <a:schemeClr val="accent1">
+              <a:shade val="15000"/>
+            </a:schemeClr>
+          </a:lnRef>
+          <a:fillRef idx="1">
+            <a:schemeClr val="accent1"/>
+          </a:fillRef>
+          <a:effectRef idx="0">
+            <a:schemeClr val="accent1"/>
+          </a:effectRef>
+          <a:fontRef idx="minor">
+            <a:schemeClr val="lt1"/>
+          </a:fontRef>
+        </p:style>
+        <p:txBody>
+          <a:bodyPr rtlCol="0" anchor="ctr"/>
+          <a:lstStyle/>
+          <a:p>
+            <a:pPr algn="ctr"/>
+            <a:endParaRPr lang="en-US"/>
+          </a:p>
+        </p:txBody>
+      </p:sp>
+      <p:sp>
+        <p:nvSpPr>
+          <p:cNvPr id="46" name="Multiplication Sign 45">
+            <a:extLst>
+              <a:ext uri="{FF2B5EF4-FFF2-40B4-BE49-F238E27FC236}">
+                <a16:creationId xmlns:a16="http://schemas.microsoft.com/office/drawing/2014/main" id="{F9BBDB0F-2349-C488-229C-C7EE5F89E5EA}"/>
+              </a:ext>
+            </a:extLst>
+          </p:cNvPr>
+          <p:cNvSpPr/>
+          <p:nvPr/>
+        </p:nvSpPr>
+        <p:spPr>
+          <a:xfrm>
+            <a:off x="8039797" y="1441704"/>
+            <a:ext cx="182880" cy="182880"/>
+          </a:xfrm>
+          <a:prstGeom prst="mathMultiply">
+            <a:avLst/>
+          </a:prstGeom>
+          <a:solidFill>
+            <a:schemeClr val="tx1"/>
+          </a:solidFill>
+          <a:ln>
+            <a:noFill/>
+          </a:ln>
+        </p:spPr>
+        <p:style>
+          <a:lnRef idx="2">
+            <a:schemeClr val="accent1">
+              <a:shade val="15000"/>
+            </a:schemeClr>
+          </a:lnRef>
+          <a:fillRef idx="1">
+            <a:schemeClr val="accent1"/>
+          </a:fillRef>
+          <a:effectRef idx="0">
+            <a:schemeClr val="accent1"/>
+          </a:effectRef>
+          <a:fontRef idx="minor">
+            <a:schemeClr val="lt1"/>
+          </a:fontRef>
+        </p:style>
+        <p:txBody>
+          <a:bodyPr rtlCol="0" anchor="ctr"/>
+          <a:lstStyle/>
+          <a:p>
+            <a:pPr algn="ctr"/>
+            <a:endParaRPr lang="en-US"/>
+          </a:p>
+        </p:txBody>
+      </p:sp>
+    </p:spTree>
+    <p:extLst>
+      <p:ext uri="{BB962C8B-B14F-4D97-AF65-F5344CB8AC3E}">
+        <p14:creationId xmlns:p14="http://schemas.microsoft.com/office/powerpoint/2010/main" val="1532485738"/>
+      </p:ext>
+    </p:extLst>
+  </p:cSld>
+  <p:clrMapOvr>
+    <a:masterClrMapping/>
+  </p:clrMapOvr>
+</p:sld>
+</file>
+
+<file path=ppt/slides/slide3.xml><?xml version="1.0" encoding="utf-8"?>
 <p:sld xmlns:a="http://schemas.openxmlformats.org/drawingml/2006/main" xmlns:r="http://schemas.openxmlformats.org/officeDocument/2006/relationships" xmlns:p="http://schemas.openxmlformats.org/presentationml/2006/main">
   <p:cSld>
     <p:spTree>
@@ -4635,7 +6277,7 @@
         </p:blipFill>
         <p:spPr>
           <a:xfrm>
-            <a:off x="817978" y="0"/>
+            <a:off x="0" y="0"/>
             <a:ext cx="2286000" cy="2286000"/>
           </a:xfrm>
           <a:prstGeom prst="rect">
@@ -4671,7 +6313,7 @@
         </p:blipFill>
         <p:spPr>
           <a:xfrm>
-            <a:off x="4066784" y="0"/>
+            <a:off x="2286000" y="0"/>
             <a:ext cx="2286000" cy="2286000"/>
           </a:xfrm>
           <a:prstGeom prst="rect">
@@ -4707,7 +6349,7 @@
         </p:blipFill>
         <p:spPr>
           <a:xfrm>
-            <a:off x="7363216" y="0"/>
+            <a:off x="4572000" y="0"/>
             <a:ext cx="2286000" cy="2286000"/>
           </a:xfrm>
           <a:prstGeom prst="rect">
@@ -4743,7 +6385,7 @@
         </p:blipFill>
         <p:spPr>
           <a:xfrm>
-            <a:off x="10612022" y="0"/>
+            <a:off x="6858000" y="0"/>
             <a:ext cx="2286000" cy="2286000"/>
           </a:xfrm>
           <a:prstGeom prst="rect">
@@ -4755,244 +6397,6 @@
     <p:extLst>
       <p:ext uri="{BB962C8B-B14F-4D97-AF65-F5344CB8AC3E}">
         <p14:creationId xmlns:p14="http://schemas.microsoft.com/office/powerpoint/2010/main" val="1604193028"/>
-      </p:ext>
-    </p:extLst>
-  </p:cSld>
-  <p:clrMapOvr>
-    <a:masterClrMapping/>
-  </p:clrMapOvr>
-</p:sld>
-</file>
-
-<file path=ppt/slides/slide3.xml><?xml version="1.0" encoding="utf-8"?>
-<p:sld xmlns:a="http://schemas.openxmlformats.org/drawingml/2006/main" xmlns:r="http://schemas.openxmlformats.org/officeDocument/2006/relationships" xmlns:p="http://schemas.openxmlformats.org/presentationml/2006/main">
-  <p:cSld>
-    <p:spTree>
-      <p:nvGrpSpPr>
-        <p:cNvPr id="1" name=""/>
-        <p:cNvGrpSpPr/>
-        <p:nvPr/>
-      </p:nvGrpSpPr>
-      <p:grpSpPr>
-        <a:xfrm>
-          <a:off x="0" y="0"/>
-          <a:ext cx="0" cy="0"/>
-          <a:chOff x="0" y="0"/>
-          <a:chExt cx="0" cy="0"/>
-        </a:xfrm>
-      </p:grpSpPr>
-      <p:sp>
-        <p:nvSpPr>
-          <p:cNvPr id="7" name="Flowchart: Connector 6">
-            <a:extLst>
-              <a:ext uri="{FF2B5EF4-FFF2-40B4-BE49-F238E27FC236}">
-                <a16:creationId xmlns:a16="http://schemas.microsoft.com/office/drawing/2014/main" id="{3D754C27-EE6E-B76D-58C5-1DF8E5CF2BCE}"/>
-              </a:ext>
-            </a:extLst>
-          </p:cNvPr>
-          <p:cNvSpPr/>
-          <p:nvPr/>
-        </p:nvSpPr>
-        <p:spPr>
-          <a:xfrm>
-            <a:off x="2686344" y="640080"/>
-            <a:ext cx="1005840" cy="1005840"/>
-          </a:xfrm>
-          <a:prstGeom prst="flowChartConnector">
-            <a:avLst/>
-          </a:prstGeom>
-          <a:noFill/>
-          <a:ln w="76200">
-            <a:solidFill>
-              <a:srgbClr val="C00000"/>
-            </a:solidFill>
-          </a:ln>
-        </p:spPr>
-        <p:style>
-          <a:lnRef idx="2">
-            <a:schemeClr val="accent1">
-              <a:shade val="15000"/>
-            </a:schemeClr>
-          </a:lnRef>
-          <a:fillRef idx="1">
-            <a:schemeClr val="accent1"/>
-          </a:fillRef>
-          <a:effectRef idx="0">
-            <a:schemeClr val="accent1"/>
-          </a:effectRef>
-          <a:fontRef idx="minor">
-            <a:schemeClr val="lt1"/>
-          </a:fontRef>
-        </p:style>
-        <p:txBody>
-          <a:bodyPr rtlCol="0" anchor="ctr"/>
-          <a:lstStyle/>
-          <a:p>
-            <a:pPr algn="ctr"/>
-            <a:endParaRPr lang="en-US"/>
-          </a:p>
-        </p:txBody>
-      </p:sp>
-      <p:sp>
-        <p:nvSpPr>
-          <p:cNvPr id="8" name="Flowchart: Connector 7">
-            <a:extLst>
-              <a:ext uri="{FF2B5EF4-FFF2-40B4-BE49-F238E27FC236}">
-                <a16:creationId xmlns:a16="http://schemas.microsoft.com/office/drawing/2014/main" id="{95E71FB6-86C3-5D8B-0832-26E3EA849125}"/>
-              </a:ext>
-            </a:extLst>
-          </p:cNvPr>
-          <p:cNvSpPr/>
-          <p:nvPr/>
-        </p:nvSpPr>
-        <p:spPr>
-          <a:xfrm>
-            <a:off x="2823504" y="777240"/>
-            <a:ext cx="731520" cy="731520"/>
-          </a:xfrm>
-          <a:prstGeom prst="flowChartConnector">
-            <a:avLst/>
-          </a:prstGeom>
-          <a:noFill/>
-          <a:ln w="76200">
-            <a:solidFill>
-              <a:srgbClr val="C00000"/>
-            </a:solidFill>
-          </a:ln>
-        </p:spPr>
-        <p:style>
-          <a:lnRef idx="2">
-            <a:schemeClr val="accent1">
-              <a:shade val="15000"/>
-            </a:schemeClr>
-          </a:lnRef>
-          <a:fillRef idx="1">
-            <a:schemeClr val="accent1"/>
-          </a:fillRef>
-          <a:effectRef idx="0">
-            <a:schemeClr val="accent1"/>
-          </a:effectRef>
-          <a:fontRef idx="minor">
-            <a:schemeClr val="lt1"/>
-          </a:fontRef>
-        </p:style>
-        <p:txBody>
-          <a:bodyPr rtlCol="0" anchor="ctr"/>
-          <a:lstStyle/>
-          <a:p>
-            <a:pPr algn="ctr"/>
-            <a:endParaRPr lang="en-US"/>
-          </a:p>
-        </p:txBody>
-      </p:sp>
-      <p:sp>
-        <p:nvSpPr>
-          <p:cNvPr id="9" name="Flowchart: Connector 8">
-            <a:extLst>
-              <a:ext uri="{FF2B5EF4-FFF2-40B4-BE49-F238E27FC236}">
-                <a16:creationId xmlns:a16="http://schemas.microsoft.com/office/drawing/2014/main" id="{4F0930C7-3C3E-D294-3222-61D1329496A5}"/>
-              </a:ext>
-            </a:extLst>
-          </p:cNvPr>
-          <p:cNvSpPr/>
-          <p:nvPr/>
-        </p:nvSpPr>
-        <p:spPr>
-          <a:xfrm>
-            <a:off x="2960664" y="914400"/>
-            <a:ext cx="457200" cy="457200"/>
-          </a:xfrm>
-          <a:prstGeom prst="flowChartConnector">
-            <a:avLst/>
-          </a:prstGeom>
-          <a:noFill/>
-          <a:ln w="76200">
-            <a:solidFill>
-              <a:srgbClr val="C00000"/>
-            </a:solidFill>
-          </a:ln>
-        </p:spPr>
-        <p:style>
-          <a:lnRef idx="2">
-            <a:schemeClr val="accent1">
-              <a:shade val="15000"/>
-            </a:schemeClr>
-          </a:lnRef>
-          <a:fillRef idx="1">
-            <a:schemeClr val="accent1"/>
-          </a:fillRef>
-          <a:effectRef idx="0">
-            <a:schemeClr val="accent1"/>
-          </a:effectRef>
-          <a:fontRef idx="minor">
-            <a:schemeClr val="lt1"/>
-          </a:fontRef>
-        </p:style>
-        <p:txBody>
-          <a:bodyPr rtlCol="0" anchor="ctr"/>
-          <a:lstStyle/>
-          <a:p>
-            <a:pPr algn="ctr"/>
-            <a:endParaRPr lang="en-US"/>
-          </a:p>
-        </p:txBody>
-      </p:sp>
-      <p:sp>
-        <p:nvSpPr>
-          <p:cNvPr id="10" name="Flowchart: Connector 9">
-            <a:extLst>
-              <a:ext uri="{FF2B5EF4-FFF2-40B4-BE49-F238E27FC236}">
-                <a16:creationId xmlns:a16="http://schemas.microsoft.com/office/drawing/2014/main" id="{CF458069-0224-95D9-00BE-B534EA3C1C9B}"/>
-              </a:ext>
-            </a:extLst>
-          </p:cNvPr>
-          <p:cNvSpPr/>
-          <p:nvPr/>
-        </p:nvSpPr>
-        <p:spPr>
-          <a:xfrm>
-            <a:off x="3097824" y="1051560"/>
-            <a:ext cx="182880" cy="182880"/>
-          </a:xfrm>
-          <a:prstGeom prst="flowChartConnector">
-            <a:avLst/>
-          </a:prstGeom>
-          <a:noFill/>
-          <a:ln w="76200">
-            <a:solidFill>
-              <a:srgbClr val="C00000"/>
-            </a:solidFill>
-          </a:ln>
-        </p:spPr>
-        <p:style>
-          <a:lnRef idx="2">
-            <a:schemeClr val="accent1">
-              <a:shade val="15000"/>
-            </a:schemeClr>
-          </a:lnRef>
-          <a:fillRef idx="1">
-            <a:schemeClr val="accent1"/>
-          </a:fillRef>
-          <a:effectRef idx="0">
-            <a:schemeClr val="accent1"/>
-          </a:effectRef>
-          <a:fontRef idx="minor">
-            <a:schemeClr val="lt1"/>
-          </a:fontRef>
-        </p:style>
-        <p:txBody>
-          <a:bodyPr rtlCol="0" anchor="ctr"/>
-          <a:lstStyle/>
-          <a:p>
-            <a:pPr algn="ctr"/>
-            <a:endParaRPr lang="en-US"/>
-          </a:p>
-        </p:txBody>
-      </p:sp>
-    </p:spTree>
-    <p:extLst>
-      <p:ext uri="{BB962C8B-B14F-4D97-AF65-F5344CB8AC3E}">
-        <p14:creationId xmlns:p14="http://schemas.microsoft.com/office/powerpoint/2010/main" val="2580505433"/>
       </p:ext>
     </p:extLst>
   </p:cSld>
@@ -5021,10 +6425,10 @@
       </p:grpSpPr>
       <p:sp>
         <p:nvSpPr>
-          <p:cNvPr id="2" name="Multiplication Sign 1">
-            <a:extLst>
-              <a:ext uri="{FF2B5EF4-FFF2-40B4-BE49-F238E27FC236}">
-                <a16:creationId xmlns:a16="http://schemas.microsoft.com/office/drawing/2014/main" id="{9D96AF8B-28DD-1F9A-26E1-C4E8E5C34AA3}"/>
+          <p:cNvPr id="7" name="Flowchart: Connector 6">
+            <a:extLst>
+              <a:ext uri="{FF2B5EF4-FFF2-40B4-BE49-F238E27FC236}">
+                <a16:creationId xmlns:a16="http://schemas.microsoft.com/office/drawing/2014/main" id="{3D754C27-EE6E-B76D-58C5-1DF8E5CF2BCE}"/>
               </a:ext>
             </a:extLst>
           </p:cNvPr>
@@ -5033,17 +6437,17 @@
         </p:nvSpPr>
         <p:spPr>
           <a:xfrm>
-            <a:off x="1322070" y="1097280"/>
-            <a:ext cx="91440" cy="91440"/>
-          </a:xfrm>
-          <a:prstGeom prst="mathMultiply">
-            <a:avLst/>
-          </a:prstGeom>
-          <a:solidFill>
-            <a:schemeClr val="tx1"/>
-          </a:solidFill>
-          <a:ln>
-            <a:noFill/>
+            <a:off x="400344" y="640080"/>
+            <a:ext cx="1005840" cy="1005840"/>
+          </a:xfrm>
+          <a:prstGeom prst="flowChartConnector">
+            <a:avLst/>
+          </a:prstGeom>
+          <a:noFill/>
+          <a:ln w="76200">
+            <a:solidFill>
+              <a:srgbClr val="C00000"/>
+            </a:solidFill>
           </a:ln>
         </p:spPr>
         <p:style>
@@ -5073,10 +6477,10 @@
       </p:sp>
       <p:sp>
         <p:nvSpPr>
-          <p:cNvPr id="3" name="Multiplication Sign 2">
-            <a:extLst>
-              <a:ext uri="{FF2B5EF4-FFF2-40B4-BE49-F238E27FC236}">
-                <a16:creationId xmlns:a16="http://schemas.microsoft.com/office/drawing/2014/main" id="{9A359F7C-42C3-BE77-C423-61ABEE7B80F1}"/>
+          <p:cNvPr id="8" name="Flowchart: Connector 7">
+            <a:extLst>
+              <a:ext uri="{FF2B5EF4-FFF2-40B4-BE49-F238E27FC236}">
+                <a16:creationId xmlns:a16="http://schemas.microsoft.com/office/drawing/2014/main" id="{95E71FB6-86C3-5D8B-0832-26E3EA849125}"/>
               </a:ext>
             </a:extLst>
           </p:cNvPr>
@@ -5085,17 +6489,17 @@
         </p:nvSpPr>
         <p:spPr>
           <a:xfrm>
-            <a:off x="1408430" y="1046480"/>
-            <a:ext cx="91440" cy="91440"/>
-          </a:xfrm>
-          <a:prstGeom prst="mathMultiply">
-            <a:avLst/>
-          </a:prstGeom>
-          <a:solidFill>
-            <a:schemeClr val="tx1"/>
-          </a:solidFill>
-          <a:ln>
-            <a:noFill/>
+            <a:off x="537504" y="777240"/>
+            <a:ext cx="731520" cy="731520"/>
+          </a:xfrm>
+          <a:prstGeom prst="flowChartConnector">
+            <a:avLst/>
+          </a:prstGeom>
+          <a:noFill/>
+          <a:ln w="76200">
+            <a:solidFill>
+              <a:srgbClr val="C00000"/>
+            </a:solidFill>
           </a:ln>
         </p:spPr>
         <p:style>
@@ -5125,10 +6529,10 @@
       </p:sp>
       <p:sp>
         <p:nvSpPr>
-          <p:cNvPr id="4" name="Multiplication Sign 3">
-            <a:extLst>
-              <a:ext uri="{FF2B5EF4-FFF2-40B4-BE49-F238E27FC236}">
-                <a16:creationId xmlns:a16="http://schemas.microsoft.com/office/drawing/2014/main" id="{D29C0198-CB97-2625-8427-FB7190F6EBC9}"/>
+          <p:cNvPr id="9" name="Flowchart: Connector 8">
+            <a:extLst>
+              <a:ext uri="{FF2B5EF4-FFF2-40B4-BE49-F238E27FC236}">
+                <a16:creationId xmlns:a16="http://schemas.microsoft.com/office/drawing/2014/main" id="{4F0930C7-3C3E-D294-3222-61D1329496A5}"/>
               </a:ext>
             </a:extLst>
           </p:cNvPr>
@@ -5137,17 +6541,17 @@
         </p:nvSpPr>
         <p:spPr>
           <a:xfrm>
-            <a:off x="1424940" y="1143000"/>
-            <a:ext cx="91440" cy="91440"/>
-          </a:xfrm>
-          <a:prstGeom prst="mathMultiply">
-            <a:avLst/>
-          </a:prstGeom>
-          <a:solidFill>
-            <a:schemeClr val="tx1"/>
-          </a:solidFill>
-          <a:ln>
-            <a:noFill/>
+            <a:off x="674664" y="914400"/>
+            <a:ext cx="457200" cy="457200"/>
+          </a:xfrm>
+          <a:prstGeom prst="flowChartConnector">
+            <a:avLst/>
+          </a:prstGeom>
+          <a:noFill/>
+          <a:ln w="76200">
+            <a:solidFill>
+              <a:srgbClr val="C00000"/>
+            </a:solidFill>
           </a:ln>
         </p:spPr>
         <p:style>
@@ -5177,10 +6581,10 @@
       </p:sp>
       <p:sp>
         <p:nvSpPr>
-          <p:cNvPr id="7" name="Multiplication Sign 6">
-            <a:extLst>
-              <a:ext uri="{FF2B5EF4-FFF2-40B4-BE49-F238E27FC236}">
-                <a16:creationId xmlns:a16="http://schemas.microsoft.com/office/drawing/2014/main" id="{1221E184-C1A2-55E4-79FF-C8E9FA1D4EC8}"/>
+          <p:cNvPr id="10" name="Flowchart: Connector 9">
+            <a:extLst>
+              <a:ext uri="{FF2B5EF4-FFF2-40B4-BE49-F238E27FC236}">
+                <a16:creationId xmlns:a16="http://schemas.microsoft.com/office/drawing/2014/main" id="{CF458069-0224-95D9-00BE-B534EA3C1C9B}"/>
               </a:ext>
             </a:extLst>
           </p:cNvPr>
@@ -5189,17 +6593,17 @@
         </p:nvSpPr>
         <p:spPr>
           <a:xfrm>
-            <a:off x="2962910" y="1097280"/>
-            <a:ext cx="91440" cy="91440"/>
-          </a:xfrm>
-          <a:prstGeom prst="mathMultiply">
-            <a:avLst/>
-          </a:prstGeom>
-          <a:solidFill>
-            <a:schemeClr val="tx1"/>
-          </a:solidFill>
-          <a:ln>
-            <a:noFill/>
+            <a:off x="811824" y="1051560"/>
+            <a:ext cx="182880" cy="182880"/>
+          </a:xfrm>
+          <a:prstGeom prst="flowChartConnector">
+            <a:avLst/>
+          </a:prstGeom>
+          <a:noFill/>
+          <a:ln w="76200">
+            <a:solidFill>
+              <a:srgbClr val="C00000"/>
+            </a:solidFill>
           </a:ln>
         </p:spPr>
         <p:style>
@@ -5227,12 +6631,42 @@
           </a:p>
         </p:txBody>
       </p:sp>
-      <p:sp>
-        <p:nvSpPr>
-          <p:cNvPr id="8" name="Multiplication Sign 7">
-            <a:extLst>
-              <a:ext uri="{FF2B5EF4-FFF2-40B4-BE49-F238E27FC236}">
-                <a16:creationId xmlns:a16="http://schemas.microsoft.com/office/drawing/2014/main" id="{9A91ED6E-C6FA-523A-9A0B-C8D5760A7853}"/>
+    </p:spTree>
+    <p:extLst>
+      <p:ext uri="{BB962C8B-B14F-4D97-AF65-F5344CB8AC3E}">
+        <p14:creationId xmlns:p14="http://schemas.microsoft.com/office/powerpoint/2010/main" val="2580505433"/>
+      </p:ext>
+    </p:extLst>
+  </p:cSld>
+  <p:clrMapOvr>
+    <a:masterClrMapping/>
+  </p:clrMapOvr>
+</p:sld>
+</file>
+
+<file path=ppt/slides/slide5.xml><?xml version="1.0" encoding="utf-8"?>
+<p:sld xmlns:a="http://schemas.openxmlformats.org/drawingml/2006/main" xmlns:r="http://schemas.openxmlformats.org/officeDocument/2006/relationships" xmlns:p="http://schemas.openxmlformats.org/presentationml/2006/main">
+  <p:cSld>
+    <p:spTree>
+      <p:nvGrpSpPr>
+        <p:cNvPr id="1" name=""/>
+        <p:cNvGrpSpPr/>
+        <p:nvPr/>
+      </p:nvGrpSpPr>
+      <p:grpSpPr>
+        <a:xfrm>
+          <a:off x="0" y="0"/>
+          <a:ext cx="0" cy="0"/>
+          <a:chOff x="0" y="0"/>
+          <a:chExt cx="0" cy="0"/>
+        </a:xfrm>
+      </p:grpSpPr>
+      <p:sp>
+        <p:nvSpPr>
+          <p:cNvPr id="2" name="Multiplication Sign 1">
+            <a:extLst>
+              <a:ext uri="{FF2B5EF4-FFF2-40B4-BE49-F238E27FC236}">
+                <a16:creationId xmlns:a16="http://schemas.microsoft.com/office/drawing/2014/main" id="{9D96AF8B-28DD-1F9A-26E1-C4E8E5C34AA3}"/>
               </a:ext>
             </a:extLst>
           </p:cNvPr>
@@ -5241,8 +6675,8 @@
         </p:nvSpPr>
         <p:spPr>
           <a:xfrm>
-            <a:off x="3201670" y="894080"/>
-            <a:ext cx="91440" cy="91440"/>
+            <a:off x="423672" y="1115568"/>
+            <a:ext cx="182880" cy="182880"/>
           </a:xfrm>
           <a:prstGeom prst="mathMultiply">
             <a:avLst/>
@@ -5281,6 +6715,214 @@
       </p:sp>
       <p:sp>
         <p:nvSpPr>
+          <p:cNvPr id="3" name="Multiplication Sign 2">
+            <a:extLst>
+              <a:ext uri="{FF2B5EF4-FFF2-40B4-BE49-F238E27FC236}">
+                <a16:creationId xmlns:a16="http://schemas.microsoft.com/office/drawing/2014/main" id="{9A359F7C-42C3-BE77-C423-61ABEE7B80F1}"/>
+              </a:ext>
+            </a:extLst>
+          </p:cNvPr>
+          <p:cNvSpPr/>
+          <p:nvPr/>
+        </p:nvSpPr>
+        <p:spPr>
+          <a:xfrm>
+            <a:off x="546608" y="1028192"/>
+            <a:ext cx="182880" cy="182880"/>
+          </a:xfrm>
+          <a:prstGeom prst="mathMultiply">
+            <a:avLst/>
+          </a:prstGeom>
+          <a:solidFill>
+            <a:schemeClr val="tx1"/>
+          </a:solidFill>
+          <a:ln>
+            <a:noFill/>
+          </a:ln>
+        </p:spPr>
+        <p:style>
+          <a:lnRef idx="2">
+            <a:schemeClr val="accent1">
+              <a:shade val="15000"/>
+            </a:schemeClr>
+          </a:lnRef>
+          <a:fillRef idx="1">
+            <a:schemeClr val="accent1"/>
+          </a:fillRef>
+          <a:effectRef idx="0">
+            <a:schemeClr val="accent1"/>
+          </a:effectRef>
+          <a:fontRef idx="minor">
+            <a:schemeClr val="lt1"/>
+          </a:fontRef>
+        </p:style>
+        <p:txBody>
+          <a:bodyPr rtlCol="0" anchor="ctr"/>
+          <a:lstStyle/>
+          <a:p>
+            <a:pPr algn="ctr"/>
+            <a:endParaRPr lang="en-US"/>
+          </a:p>
+        </p:txBody>
+      </p:sp>
+      <p:sp>
+        <p:nvSpPr>
+          <p:cNvPr id="4" name="Multiplication Sign 3">
+            <a:extLst>
+              <a:ext uri="{FF2B5EF4-FFF2-40B4-BE49-F238E27FC236}">
+                <a16:creationId xmlns:a16="http://schemas.microsoft.com/office/drawing/2014/main" id="{D29C0198-CB97-2625-8427-FB7190F6EBC9}"/>
+              </a:ext>
+            </a:extLst>
+          </p:cNvPr>
+          <p:cNvSpPr/>
+          <p:nvPr/>
+        </p:nvSpPr>
+        <p:spPr>
+          <a:xfrm>
+            <a:off x="593598" y="1173480"/>
+            <a:ext cx="182880" cy="182880"/>
+          </a:xfrm>
+          <a:prstGeom prst="mathMultiply">
+            <a:avLst/>
+          </a:prstGeom>
+          <a:solidFill>
+            <a:schemeClr val="tx1"/>
+          </a:solidFill>
+          <a:ln>
+            <a:noFill/>
+          </a:ln>
+        </p:spPr>
+        <p:style>
+          <a:lnRef idx="2">
+            <a:schemeClr val="accent1">
+              <a:shade val="15000"/>
+            </a:schemeClr>
+          </a:lnRef>
+          <a:fillRef idx="1">
+            <a:schemeClr val="accent1"/>
+          </a:fillRef>
+          <a:effectRef idx="0">
+            <a:schemeClr val="accent1"/>
+          </a:effectRef>
+          <a:fontRef idx="minor">
+            <a:schemeClr val="lt1"/>
+          </a:fontRef>
+        </p:style>
+        <p:txBody>
+          <a:bodyPr rtlCol="0" anchor="ctr"/>
+          <a:lstStyle/>
+          <a:p>
+            <a:pPr algn="ctr"/>
+            <a:endParaRPr lang="en-US"/>
+          </a:p>
+        </p:txBody>
+      </p:sp>
+      <p:sp>
+        <p:nvSpPr>
+          <p:cNvPr id="7" name="Multiplication Sign 6">
+            <a:extLst>
+              <a:ext uri="{FF2B5EF4-FFF2-40B4-BE49-F238E27FC236}">
+                <a16:creationId xmlns:a16="http://schemas.microsoft.com/office/drawing/2014/main" id="{1221E184-C1A2-55E4-79FF-C8E9FA1D4EC8}"/>
+              </a:ext>
+            </a:extLst>
+          </p:cNvPr>
+          <p:cNvSpPr/>
+          <p:nvPr/>
+        </p:nvSpPr>
+        <p:spPr>
+          <a:xfrm>
+            <a:off x="2052320" y="1097280"/>
+            <a:ext cx="182880" cy="182880"/>
+          </a:xfrm>
+          <a:prstGeom prst="mathMultiply">
+            <a:avLst/>
+          </a:prstGeom>
+          <a:solidFill>
+            <a:schemeClr val="tx1"/>
+          </a:solidFill>
+          <a:ln>
+            <a:noFill/>
+          </a:ln>
+        </p:spPr>
+        <p:style>
+          <a:lnRef idx="2">
+            <a:schemeClr val="accent1">
+              <a:shade val="15000"/>
+            </a:schemeClr>
+          </a:lnRef>
+          <a:fillRef idx="1">
+            <a:schemeClr val="accent1"/>
+          </a:fillRef>
+          <a:effectRef idx="0">
+            <a:schemeClr val="accent1"/>
+          </a:effectRef>
+          <a:fontRef idx="minor">
+            <a:schemeClr val="lt1"/>
+          </a:fontRef>
+        </p:style>
+        <p:txBody>
+          <a:bodyPr rtlCol="0" anchor="ctr"/>
+          <a:lstStyle/>
+          <a:p>
+            <a:pPr algn="ctr"/>
+            <a:endParaRPr lang="en-US"/>
+          </a:p>
+        </p:txBody>
+      </p:sp>
+      <p:sp>
+        <p:nvSpPr>
+          <p:cNvPr id="8" name="Multiplication Sign 7">
+            <a:extLst>
+              <a:ext uri="{FF2B5EF4-FFF2-40B4-BE49-F238E27FC236}">
+                <a16:creationId xmlns:a16="http://schemas.microsoft.com/office/drawing/2014/main" id="{9A91ED6E-C6FA-523A-9A0B-C8D5760A7853}"/>
+              </a:ext>
+            </a:extLst>
+          </p:cNvPr>
+          <p:cNvSpPr/>
+          <p:nvPr/>
+        </p:nvSpPr>
+        <p:spPr>
+          <a:xfrm>
+            <a:off x="2352040" y="863600"/>
+            <a:ext cx="182880" cy="182880"/>
+          </a:xfrm>
+          <a:prstGeom prst="mathMultiply">
+            <a:avLst/>
+          </a:prstGeom>
+          <a:solidFill>
+            <a:schemeClr val="tx1"/>
+          </a:solidFill>
+          <a:ln>
+            <a:noFill/>
+          </a:ln>
+        </p:spPr>
+        <p:style>
+          <a:lnRef idx="2">
+            <a:schemeClr val="accent1">
+              <a:shade val="15000"/>
+            </a:schemeClr>
+          </a:lnRef>
+          <a:fillRef idx="1">
+            <a:schemeClr val="accent1"/>
+          </a:fillRef>
+          <a:effectRef idx="0">
+            <a:schemeClr val="accent1"/>
+          </a:effectRef>
+          <a:fontRef idx="minor">
+            <a:schemeClr val="lt1"/>
+          </a:fontRef>
+        </p:style>
+        <p:txBody>
+          <a:bodyPr rtlCol="0" anchor="ctr"/>
+          <a:lstStyle/>
+          <a:p>
+            <a:pPr algn="ctr"/>
+            <a:endParaRPr lang="en-US"/>
+          </a:p>
+        </p:txBody>
+      </p:sp>
+      <p:sp>
+        <p:nvSpPr>
           <p:cNvPr id="9" name="Multiplication Sign 8">
             <a:extLst>
               <a:ext uri="{FF2B5EF4-FFF2-40B4-BE49-F238E27FC236}">
@@ -5293,8 +6935,8 @@
         </p:nvSpPr>
         <p:spPr>
           <a:xfrm>
-            <a:off x="3294380" y="1270000"/>
-            <a:ext cx="91440" cy="91440"/>
+            <a:off x="2491232" y="1280160"/>
+            <a:ext cx="182880" cy="182880"/>
           </a:xfrm>
           <a:prstGeom prst="mathMultiply">
             <a:avLst/>

--- a/images/bias-brain.pptx
+++ b/images/bias-brain.pptx
@@ -2,16 +2,15 @@
 <file path=ppt/presentation.xml><?xml version="1.0" encoding="utf-8"?>
 <p:presentation xmlns:a="http://schemas.openxmlformats.org/drawingml/2006/main" xmlns:r="http://schemas.openxmlformats.org/officeDocument/2006/relationships" xmlns:p="http://schemas.openxmlformats.org/presentationml/2006/main" saveSubsetFonts="1">
   <p:sldMasterIdLst>
-    <p:sldMasterId id="2147483672" r:id="rId1"/>
+    <p:sldMasterId id="2147483684" r:id="rId1"/>
   </p:sldMasterIdLst>
   <p:sldIdLst>
-    <p:sldId id="257" r:id="rId2"/>
-    <p:sldId id="261" r:id="rId3"/>
-    <p:sldId id="260" r:id="rId4"/>
-    <p:sldId id="258" r:id="rId5"/>
-    <p:sldId id="259" r:id="rId6"/>
+    <p:sldId id="261" r:id="rId2"/>
+    <p:sldId id="260" r:id="rId3"/>
+    <p:sldId id="258" r:id="rId4"/>
+    <p:sldId id="259" r:id="rId5"/>
   </p:sldIdLst>
-  <p:sldSz cx="9144000" cy="2286000"/>
+  <p:sldSz cx="9601200" cy="3200400"/>
   <p:notesSz cx="6858000" cy="9144000"/>
   <p:defaultTextStyle>
     <a:defPPr>
@@ -145,15 +144,15 @@
         </p:nvSpPr>
         <p:spPr>
           <a:xfrm>
-            <a:off x="1143000" y="374121"/>
-            <a:ext cx="6858000" cy="795867"/>
+            <a:off x="1200150" y="523770"/>
+            <a:ext cx="7200900" cy="1114213"/>
           </a:xfrm>
         </p:spPr>
         <p:txBody>
           <a:bodyPr anchor="b"/>
           <a:lstStyle>
             <a:lvl1pPr algn="ctr">
-              <a:defRPr sz="2000"/>
+              <a:defRPr sz="2800"/>
             </a:lvl1pPr>
           </a:lstStyle>
           <a:p>
@@ -177,8 +176,8 @@
         </p:nvSpPr>
         <p:spPr>
           <a:xfrm>
-            <a:off x="1143000" y="1200679"/>
-            <a:ext cx="6858000" cy="551921"/>
+            <a:off x="1200150" y="1680951"/>
+            <a:ext cx="7200900" cy="772689"/>
           </a:xfrm>
         </p:spPr>
         <p:txBody>
@@ -186,39 +185,39 @@
           <a:lstStyle>
             <a:lvl1pPr marL="0" indent="0" algn="ctr">
               <a:buNone/>
-              <a:defRPr sz="800"/>
+              <a:defRPr sz="1120"/>
             </a:lvl1pPr>
-            <a:lvl2pPr marL="152385" indent="0" algn="ctr">
-              <a:buNone/>
-              <a:defRPr sz="667"/>
+            <a:lvl2pPr marL="213375" indent="0" algn="ctr">
+              <a:buNone/>
+              <a:defRPr sz="933"/>
             </a:lvl2pPr>
-            <a:lvl3pPr marL="304770" indent="0" algn="ctr">
-              <a:buNone/>
-              <a:defRPr sz="600"/>
+            <a:lvl3pPr marL="426750" indent="0" algn="ctr">
+              <a:buNone/>
+              <a:defRPr sz="840"/>
             </a:lvl3pPr>
-            <a:lvl4pPr marL="457154" indent="0" algn="ctr">
-              <a:buNone/>
-              <a:defRPr sz="533"/>
+            <a:lvl4pPr marL="640126" indent="0" algn="ctr">
+              <a:buNone/>
+              <a:defRPr sz="747"/>
             </a:lvl4pPr>
-            <a:lvl5pPr marL="609539" indent="0" algn="ctr">
-              <a:buNone/>
-              <a:defRPr sz="533"/>
+            <a:lvl5pPr marL="853501" indent="0" algn="ctr">
+              <a:buNone/>
+              <a:defRPr sz="747"/>
             </a:lvl5pPr>
-            <a:lvl6pPr marL="761924" indent="0" algn="ctr">
-              <a:buNone/>
-              <a:defRPr sz="533"/>
+            <a:lvl6pPr marL="1066876" indent="0" algn="ctr">
+              <a:buNone/>
+              <a:defRPr sz="747"/>
             </a:lvl6pPr>
-            <a:lvl7pPr marL="914309" indent="0" algn="ctr">
-              <a:buNone/>
-              <a:defRPr sz="533"/>
+            <a:lvl7pPr marL="1280251" indent="0" algn="ctr">
+              <a:buNone/>
+              <a:defRPr sz="747"/>
             </a:lvl7pPr>
-            <a:lvl8pPr marL="1066693" indent="0" algn="ctr">
-              <a:buNone/>
-              <a:defRPr sz="533"/>
+            <a:lvl8pPr marL="1493627" indent="0" algn="ctr">
+              <a:buNone/>
+              <a:defRPr sz="747"/>
             </a:lvl8pPr>
-            <a:lvl9pPr marL="1219078" indent="0" algn="ctr">
-              <a:buNone/>
-              <a:defRPr sz="533"/>
+            <a:lvl9pPr marL="1707002" indent="0" algn="ctr">
+              <a:buNone/>
+              <a:defRPr sz="747"/>
             </a:lvl9pPr>
           </a:lstStyle>
           <a:p>
@@ -298,7 +297,7 @@
     </p:spTree>
     <p:extLst>
       <p:ext uri="{BB962C8B-B14F-4D97-AF65-F5344CB8AC3E}">
-        <p14:creationId xmlns:p14="http://schemas.microsoft.com/office/powerpoint/2010/main" val="3701436288"/>
+        <p14:creationId xmlns:p14="http://schemas.microsoft.com/office/powerpoint/2010/main" val="2938614429"/>
       </p:ext>
     </p:extLst>
   </p:cSld>
@@ -468,7 +467,7 @@
     </p:spTree>
     <p:extLst>
       <p:ext uri="{BB962C8B-B14F-4D97-AF65-F5344CB8AC3E}">
-        <p14:creationId xmlns:p14="http://schemas.microsoft.com/office/powerpoint/2010/main" val="3719846033"/>
+        <p14:creationId xmlns:p14="http://schemas.microsoft.com/office/powerpoint/2010/main" val="3298997016"/>
       </p:ext>
     </p:extLst>
   </p:cSld>
@@ -507,8 +506,8 @@
         </p:nvSpPr>
         <p:spPr>
           <a:xfrm>
-            <a:off x="6543675" y="121709"/>
-            <a:ext cx="1971675" cy="1937279"/>
+            <a:off x="6870859" y="170392"/>
+            <a:ext cx="2070259" cy="2712191"/>
           </a:xfrm>
         </p:spPr>
         <p:txBody>
@@ -535,8 +534,8 @@
         </p:nvSpPr>
         <p:spPr>
           <a:xfrm>
-            <a:off x="628650" y="121709"/>
-            <a:ext cx="5800725" cy="1937279"/>
+            <a:off x="660083" y="170392"/>
+            <a:ext cx="6090761" cy="2712191"/>
           </a:xfrm>
         </p:spPr>
         <p:txBody>
@@ -648,7 +647,7 @@
     </p:spTree>
     <p:extLst>
       <p:ext uri="{BB962C8B-B14F-4D97-AF65-F5344CB8AC3E}">
-        <p14:creationId xmlns:p14="http://schemas.microsoft.com/office/powerpoint/2010/main" val="359637736"/>
+        <p14:creationId xmlns:p14="http://schemas.microsoft.com/office/powerpoint/2010/main" val="1648769896"/>
       </p:ext>
     </p:extLst>
   </p:cSld>
@@ -818,7 +817,7 @@
     </p:spTree>
     <p:extLst>
       <p:ext uri="{BB962C8B-B14F-4D97-AF65-F5344CB8AC3E}">
-        <p14:creationId xmlns:p14="http://schemas.microsoft.com/office/powerpoint/2010/main" val="3820732286"/>
+        <p14:creationId xmlns:p14="http://schemas.microsoft.com/office/powerpoint/2010/main" val="3148622299"/>
       </p:ext>
     </p:extLst>
   </p:cSld>
@@ -857,15 +856,15 @@
         </p:nvSpPr>
         <p:spPr>
           <a:xfrm>
-            <a:off x="623888" y="569913"/>
-            <a:ext cx="7886700" cy="950912"/>
+            <a:off x="655082" y="797878"/>
+            <a:ext cx="8281035" cy="1331277"/>
           </a:xfrm>
         </p:spPr>
         <p:txBody>
           <a:bodyPr anchor="b"/>
           <a:lstStyle>
             <a:lvl1pPr>
-              <a:defRPr sz="2000"/>
+              <a:defRPr sz="2800"/>
             </a:lvl1pPr>
           </a:lstStyle>
           <a:p>
@@ -889,8 +888,8 @@
         </p:nvSpPr>
         <p:spPr>
           <a:xfrm>
-            <a:off x="623888" y="1529821"/>
-            <a:ext cx="7886700" cy="500062"/>
+            <a:off x="655082" y="2141750"/>
+            <a:ext cx="8281035" cy="700087"/>
           </a:xfrm>
         </p:spPr>
         <p:txBody>
@@ -898,7 +897,7 @@
           <a:lstStyle>
             <a:lvl1pPr marL="0" indent="0">
               <a:buNone/>
-              <a:defRPr sz="800">
+              <a:defRPr sz="1120">
                 <a:solidFill>
                   <a:schemeClr val="tx1">
                     <a:tint val="82000"/>
@@ -906,9 +905,9 @@
                 </a:solidFill>
               </a:defRPr>
             </a:lvl1pPr>
-            <a:lvl2pPr marL="152385" indent="0">
-              <a:buNone/>
-              <a:defRPr sz="667">
+            <a:lvl2pPr marL="213375" indent="0">
+              <a:buNone/>
+              <a:defRPr sz="933">
                 <a:solidFill>
                   <a:schemeClr val="tx1">
                     <a:tint val="82000"/>
@@ -916,9 +915,9 @@
                 </a:solidFill>
               </a:defRPr>
             </a:lvl2pPr>
-            <a:lvl3pPr marL="304770" indent="0">
-              <a:buNone/>
-              <a:defRPr sz="600">
+            <a:lvl3pPr marL="426750" indent="0">
+              <a:buNone/>
+              <a:defRPr sz="840">
                 <a:solidFill>
                   <a:schemeClr val="tx1">
                     <a:tint val="82000"/>
@@ -926,9 +925,9 @@
                 </a:solidFill>
               </a:defRPr>
             </a:lvl3pPr>
-            <a:lvl4pPr marL="457154" indent="0">
-              <a:buNone/>
-              <a:defRPr sz="533">
+            <a:lvl4pPr marL="640126" indent="0">
+              <a:buNone/>
+              <a:defRPr sz="747">
                 <a:solidFill>
                   <a:schemeClr val="tx1">
                     <a:tint val="82000"/>
@@ -936,9 +935,9 @@
                 </a:solidFill>
               </a:defRPr>
             </a:lvl4pPr>
-            <a:lvl5pPr marL="609539" indent="0">
-              <a:buNone/>
-              <a:defRPr sz="533">
+            <a:lvl5pPr marL="853501" indent="0">
+              <a:buNone/>
+              <a:defRPr sz="747">
                 <a:solidFill>
                   <a:schemeClr val="tx1">
                     <a:tint val="82000"/>
@@ -946,9 +945,9 @@
                 </a:solidFill>
               </a:defRPr>
             </a:lvl5pPr>
-            <a:lvl6pPr marL="761924" indent="0">
-              <a:buNone/>
-              <a:defRPr sz="533">
+            <a:lvl6pPr marL="1066876" indent="0">
+              <a:buNone/>
+              <a:defRPr sz="747">
                 <a:solidFill>
                   <a:schemeClr val="tx1">
                     <a:tint val="82000"/>
@@ -956,9 +955,9 @@
                 </a:solidFill>
               </a:defRPr>
             </a:lvl6pPr>
-            <a:lvl7pPr marL="914309" indent="0">
-              <a:buNone/>
-              <a:defRPr sz="533">
+            <a:lvl7pPr marL="1280251" indent="0">
+              <a:buNone/>
+              <a:defRPr sz="747">
                 <a:solidFill>
                   <a:schemeClr val="tx1">
                     <a:tint val="82000"/>
@@ -966,9 +965,9 @@
                 </a:solidFill>
               </a:defRPr>
             </a:lvl7pPr>
-            <a:lvl8pPr marL="1066693" indent="0">
-              <a:buNone/>
-              <a:defRPr sz="533">
+            <a:lvl8pPr marL="1493627" indent="0">
+              <a:buNone/>
+              <a:defRPr sz="747">
                 <a:solidFill>
                   <a:schemeClr val="tx1">
                     <a:tint val="82000"/>
@@ -976,9 +975,9 @@
                 </a:solidFill>
               </a:defRPr>
             </a:lvl8pPr>
-            <a:lvl9pPr marL="1219078" indent="0">
-              <a:buNone/>
-              <a:defRPr sz="533">
+            <a:lvl9pPr marL="1707002" indent="0">
+              <a:buNone/>
+              <a:defRPr sz="747">
                 <a:solidFill>
                   <a:schemeClr val="tx1">
                     <a:tint val="82000"/>
@@ -1064,7 +1063,7 @@
     </p:spTree>
     <p:extLst>
       <p:ext uri="{BB962C8B-B14F-4D97-AF65-F5344CB8AC3E}">
-        <p14:creationId xmlns:p14="http://schemas.microsoft.com/office/powerpoint/2010/main" val="250400545"/>
+        <p14:creationId xmlns:p14="http://schemas.microsoft.com/office/powerpoint/2010/main" val="3332104886"/>
       </p:ext>
     </p:extLst>
   </p:cSld>
@@ -1126,8 +1125,8 @@
         </p:nvSpPr>
         <p:spPr>
           <a:xfrm>
-            <a:off x="628650" y="608542"/>
-            <a:ext cx="3886200" cy="1450446"/>
+            <a:off x="660083" y="851959"/>
+            <a:ext cx="4080510" cy="2030624"/>
           </a:xfrm>
         </p:spPr>
         <p:txBody>
@@ -1183,8 +1182,8 @@
         </p:nvSpPr>
         <p:spPr>
           <a:xfrm>
-            <a:off x="4629150" y="608542"/>
-            <a:ext cx="3886200" cy="1450446"/>
+            <a:off x="4860608" y="851959"/>
+            <a:ext cx="4080510" cy="2030624"/>
           </a:xfrm>
         </p:spPr>
         <p:txBody>
@@ -1296,7 +1295,7 @@
     </p:spTree>
     <p:extLst>
       <p:ext uri="{BB962C8B-B14F-4D97-AF65-F5344CB8AC3E}">
-        <p14:creationId xmlns:p14="http://schemas.microsoft.com/office/powerpoint/2010/main" val="1309312942"/>
+        <p14:creationId xmlns:p14="http://schemas.microsoft.com/office/powerpoint/2010/main" val="2511836825"/>
       </p:ext>
     </p:extLst>
   </p:cSld>
@@ -1335,8 +1334,8 @@
         </p:nvSpPr>
         <p:spPr>
           <a:xfrm>
-            <a:off x="629841" y="121709"/>
-            <a:ext cx="7886700" cy="441854"/>
+            <a:off x="661333" y="170392"/>
+            <a:ext cx="8281035" cy="618596"/>
           </a:xfrm>
         </p:spPr>
         <p:txBody>
@@ -1363,8 +1362,8 @@
         </p:nvSpPr>
         <p:spPr>
           <a:xfrm>
-            <a:off x="629842" y="560388"/>
-            <a:ext cx="3868340" cy="274637"/>
+            <a:off x="661334" y="784543"/>
+            <a:ext cx="4061757" cy="384492"/>
           </a:xfrm>
         </p:spPr>
         <p:txBody>
@@ -1372,39 +1371,39 @@
           <a:lstStyle>
             <a:lvl1pPr marL="0" indent="0">
               <a:buNone/>
-              <a:defRPr sz="800" b="1"/>
+              <a:defRPr sz="1120" b="1"/>
             </a:lvl1pPr>
-            <a:lvl2pPr marL="152385" indent="0">
-              <a:buNone/>
-              <a:defRPr sz="667" b="1"/>
+            <a:lvl2pPr marL="213375" indent="0">
+              <a:buNone/>
+              <a:defRPr sz="933" b="1"/>
             </a:lvl2pPr>
-            <a:lvl3pPr marL="304770" indent="0">
-              <a:buNone/>
-              <a:defRPr sz="600" b="1"/>
+            <a:lvl3pPr marL="426750" indent="0">
+              <a:buNone/>
+              <a:defRPr sz="840" b="1"/>
             </a:lvl3pPr>
-            <a:lvl4pPr marL="457154" indent="0">
-              <a:buNone/>
-              <a:defRPr sz="533" b="1"/>
+            <a:lvl4pPr marL="640126" indent="0">
+              <a:buNone/>
+              <a:defRPr sz="747" b="1"/>
             </a:lvl4pPr>
-            <a:lvl5pPr marL="609539" indent="0">
-              <a:buNone/>
-              <a:defRPr sz="533" b="1"/>
+            <a:lvl5pPr marL="853501" indent="0">
+              <a:buNone/>
+              <a:defRPr sz="747" b="1"/>
             </a:lvl5pPr>
-            <a:lvl6pPr marL="761924" indent="0">
-              <a:buNone/>
-              <a:defRPr sz="533" b="1"/>
+            <a:lvl6pPr marL="1066876" indent="0">
+              <a:buNone/>
+              <a:defRPr sz="747" b="1"/>
             </a:lvl6pPr>
-            <a:lvl7pPr marL="914309" indent="0">
-              <a:buNone/>
-              <a:defRPr sz="533" b="1"/>
+            <a:lvl7pPr marL="1280251" indent="0">
+              <a:buNone/>
+              <a:defRPr sz="747" b="1"/>
             </a:lvl7pPr>
-            <a:lvl8pPr marL="1066693" indent="0">
-              <a:buNone/>
-              <a:defRPr sz="533" b="1"/>
+            <a:lvl8pPr marL="1493627" indent="0">
+              <a:buNone/>
+              <a:defRPr sz="747" b="1"/>
             </a:lvl8pPr>
-            <a:lvl9pPr marL="1219078" indent="0">
-              <a:buNone/>
-              <a:defRPr sz="533" b="1"/>
+            <a:lvl9pPr marL="1707002" indent="0">
+              <a:buNone/>
+              <a:defRPr sz="747" b="1"/>
             </a:lvl9pPr>
           </a:lstStyle>
           <a:p>
@@ -1428,8 +1427,8 @@
         </p:nvSpPr>
         <p:spPr>
           <a:xfrm>
-            <a:off x="629842" y="835025"/>
-            <a:ext cx="3868340" cy="1228196"/>
+            <a:off x="661334" y="1169035"/>
+            <a:ext cx="4061757" cy="1719474"/>
           </a:xfrm>
         </p:spPr>
         <p:txBody>
@@ -1485,8 +1484,8 @@
         </p:nvSpPr>
         <p:spPr>
           <a:xfrm>
-            <a:off x="4629150" y="560388"/>
-            <a:ext cx="3887391" cy="274637"/>
+            <a:off x="4860607" y="784543"/>
+            <a:ext cx="4081761" cy="384492"/>
           </a:xfrm>
         </p:spPr>
         <p:txBody>
@@ -1494,39 +1493,39 @@
           <a:lstStyle>
             <a:lvl1pPr marL="0" indent="0">
               <a:buNone/>
-              <a:defRPr sz="800" b="1"/>
+              <a:defRPr sz="1120" b="1"/>
             </a:lvl1pPr>
-            <a:lvl2pPr marL="152385" indent="0">
-              <a:buNone/>
-              <a:defRPr sz="667" b="1"/>
+            <a:lvl2pPr marL="213375" indent="0">
+              <a:buNone/>
+              <a:defRPr sz="933" b="1"/>
             </a:lvl2pPr>
-            <a:lvl3pPr marL="304770" indent="0">
-              <a:buNone/>
-              <a:defRPr sz="600" b="1"/>
+            <a:lvl3pPr marL="426750" indent="0">
+              <a:buNone/>
+              <a:defRPr sz="840" b="1"/>
             </a:lvl3pPr>
-            <a:lvl4pPr marL="457154" indent="0">
-              <a:buNone/>
-              <a:defRPr sz="533" b="1"/>
+            <a:lvl4pPr marL="640126" indent="0">
+              <a:buNone/>
+              <a:defRPr sz="747" b="1"/>
             </a:lvl4pPr>
-            <a:lvl5pPr marL="609539" indent="0">
-              <a:buNone/>
-              <a:defRPr sz="533" b="1"/>
+            <a:lvl5pPr marL="853501" indent="0">
+              <a:buNone/>
+              <a:defRPr sz="747" b="1"/>
             </a:lvl5pPr>
-            <a:lvl6pPr marL="761924" indent="0">
-              <a:buNone/>
-              <a:defRPr sz="533" b="1"/>
+            <a:lvl6pPr marL="1066876" indent="0">
+              <a:buNone/>
+              <a:defRPr sz="747" b="1"/>
             </a:lvl6pPr>
-            <a:lvl7pPr marL="914309" indent="0">
-              <a:buNone/>
-              <a:defRPr sz="533" b="1"/>
+            <a:lvl7pPr marL="1280251" indent="0">
+              <a:buNone/>
+              <a:defRPr sz="747" b="1"/>
             </a:lvl7pPr>
-            <a:lvl8pPr marL="1066693" indent="0">
-              <a:buNone/>
-              <a:defRPr sz="533" b="1"/>
+            <a:lvl8pPr marL="1493627" indent="0">
+              <a:buNone/>
+              <a:defRPr sz="747" b="1"/>
             </a:lvl8pPr>
-            <a:lvl9pPr marL="1219078" indent="0">
-              <a:buNone/>
-              <a:defRPr sz="533" b="1"/>
+            <a:lvl9pPr marL="1707002" indent="0">
+              <a:buNone/>
+              <a:defRPr sz="747" b="1"/>
             </a:lvl9pPr>
           </a:lstStyle>
           <a:p>
@@ -1550,8 +1549,8 @@
         </p:nvSpPr>
         <p:spPr>
           <a:xfrm>
-            <a:off x="4629150" y="835025"/>
-            <a:ext cx="3887391" cy="1228196"/>
+            <a:off x="4860607" y="1169035"/>
+            <a:ext cx="4081761" cy="1719474"/>
           </a:xfrm>
         </p:spPr>
         <p:txBody>
@@ -1663,7 +1662,7 @@
     </p:spTree>
     <p:extLst>
       <p:ext uri="{BB962C8B-B14F-4D97-AF65-F5344CB8AC3E}">
-        <p14:creationId xmlns:p14="http://schemas.microsoft.com/office/powerpoint/2010/main" val="1288962891"/>
+        <p14:creationId xmlns:p14="http://schemas.microsoft.com/office/powerpoint/2010/main" val="1802984315"/>
       </p:ext>
     </p:extLst>
   </p:cSld>
@@ -1781,7 +1780,7 @@
     </p:spTree>
     <p:extLst>
       <p:ext uri="{BB962C8B-B14F-4D97-AF65-F5344CB8AC3E}">
-        <p14:creationId xmlns:p14="http://schemas.microsoft.com/office/powerpoint/2010/main" val="1358196256"/>
+        <p14:creationId xmlns:p14="http://schemas.microsoft.com/office/powerpoint/2010/main" val="3244191607"/>
       </p:ext>
     </p:extLst>
   </p:cSld>
@@ -1876,7 +1875,7 @@
     </p:spTree>
     <p:extLst>
       <p:ext uri="{BB962C8B-B14F-4D97-AF65-F5344CB8AC3E}">
-        <p14:creationId xmlns:p14="http://schemas.microsoft.com/office/powerpoint/2010/main" val="2117292209"/>
+        <p14:creationId xmlns:p14="http://schemas.microsoft.com/office/powerpoint/2010/main" val="2657724188"/>
       </p:ext>
     </p:extLst>
   </p:cSld>
@@ -1915,15 +1914,15 @@
         </p:nvSpPr>
         <p:spPr>
           <a:xfrm>
-            <a:off x="629841" y="152400"/>
-            <a:ext cx="2949178" cy="533400"/>
+            <a:off x="661333" y="213360"/>
+            <a:ext cx="3096637" cy="746760"/>
           </a:xfrm>
         </p:spPr>
         <p:txBody>
           <a:bodyPr anchor="b"/>
           <a:lstStyle>
             <a:lvl1pPr>
-              <a:defRPr sz="1067"/>
+              <a:defRPr sz="1493"/>
             </a:lvl1pPr>
           </a:lstStyle>
           <a:p>
@@ -1947,39 +1946,39 @@
         </p:nvSpPr>
         <p:spPr>
           <a:xfrm>
-            <a:off x="3887391" y="329142"/>
-            <a:ext cx="4629150" cy="1624542"/>
+            <a:off x="4081760" y="460799"/>
+            <a:ext cx="4860608" cy="2274358"/>
           </a:xfrm>
         </p:spPr>
         <p:txBody>
           <a:bodyPr/>
           <a:lstStyle>
             <a:lvl1pPr>
-              <a:defRPr sz="1067"/>
+              <a:defRPr sz="1493"/>
             </a:lvl1pPr>
             <a:lvl2pPr>
-              <a:defRPr sz="933"/>
+              <a:defRPr sz="1307"/>
             </a:lvl2pPr>
             <a:lvl3pPr>
-              <a:defRPr sz="800"/>
+              <a:defRPr sz="1120"/>
             </a:lvl3pPr>
             <a:lvl4pPr>
-              <a:defRPr sz="667"/>
+              <a:defRPr sz="933"/>
             </a:lvl4pPr>
             <a:lvl5pPr>
-              <a:defRPr sz="667"/>
+              <a:defRPr sz="933"/>
             </a:lvl5pPr>
             <a:lvl6pPr>
-              <a:defRPr sz="667"/>
+              <a:defRPr sz="933"/>
             </a:lvl6pPr>
             <a:lvl7pPr>
-              <a:defRPr sz="667"/>
+              <a:defRPr sz="933"/>
             </a:lvl7pPr>
             <a:lvl8pPr>
-              <a:defRPr sz="667"/>
+              <a:defRPr sz="933"/>
             </a:lvl8pPr>
             <a:lvl9pPr>
-              <a:defRPr sz="667"/>
+              <a:defRPr sz="933"/>
             </a:lvl9pPr>
           </a:lstStyle>
           <a:p>
@@ -2032,8 +2031,8 @@
         </p:nvSpPr>
         <p:spPr>
           <a:xfrm>
-            <a:off x="629841" y="685800"/>
-            <a:ext cx="2949178" cy="1270529"/>
+            <a:off x="661333" y="960120"/>
+            <a:ext cx="3096637" cy="1778741"/>
           </a:xfrm>
         </p:spPr>
         <p:txBody>
@@ -2041,39 +2040,39 @@
           <a:lstStyle>
             <a:lvl1pPr marL="0" indent="0">
               <a:buNone/>
-              <a:defRPr sz="533"/>
+              <a:defRPr sz="747"/>
             </a:lvl1pPr>
-            <a:lvl2pPr marL="152385" indent="0">
+            <a:lvl2pPr marL="213375" indent="0">
+              <a:buNone/>
+              <a:defRPr sz="653"/>
+            </a:lvl2pPr>
+            <a:lvl3pPr marL="426750" indent="0">
+              <a:buNone/>
+              <a:defRPr sz="560"/>
+            </a:lvl3pPr>
+            <a:lvl4pPr marL="640126" indent="0">
               <a:buNone/>
               <a:defRPr sz="467"/>
-            </a:lvl2pPr>
-            <a:lvl3pPr marL="304770" indent="0">
-              <a:buNone/>
-              <a:defRPr sz="400"/>
-            </a:lvl3pPr>
-            <a:lvl4pPr marL="457154" indent="0">
-              <a:buNone/>
-              <a:defRPr sz="333"/>
             </a:lvl4pPr>
-            <a:lvl5pPr marL="609539" indent="0">
-              <a:buNone/>
-              <a:defRPr sz="333"/>
+            <a:lvl5pPr marL="853501" indent="0">
+              <a:buNone/>
+              <a:defRPr sz="467"/>
             </a:lvl5pPr>
-            <a:lvl6pPr marL="761924" indent="0">
-              <a:buNone/>
-              <a:defRPr sz="333"/>
+            <a:lvl6pPr marL="1066876" indent="0">
+              <a:buNone/>
+              <a:defRPr sz="467"/>
             </a:lvl6pPr>
-            <a:lvl7pPr marL="914309" indent="0">
-              <a:buNone/>
-              <a:defRPr sz="333"/>
+            <a:lvl7pPr marL="1280251" indent="0">
+              <a:buNone/>
+              <a:defRPr sz="467"/>
             </a:lvl7pPr>
-            <a:lvl8pPr marL="1066693" indent="0">
-              <a:buNone/>
-              <a:defRPr sz="333"/>
+            <a:lvl8pPr marL="1493627" indent="0">
+              <a:buNone/>
+              <a:defRPr sz="467"/>
             </a:lvl8pPr>
-            <a:lvl9pPr marL="1219078" indent="0">
-              <a:buNone/>
-              <a:defRPr sz="333"/>
+            <a:lvl9pPr marL="1707002" indent="0">
+              <a:buNone/>
+              <a:defRPr sz="467"/>
             </a:lvl9pPr>
           </a:lstStyle>
           <a:p>
@@ -2153,7 +2152,7 @@
     </p:spTree>
     <p:extLst>
       <p:ext uri="{BB962C8B-B14F-4D97-AF65-F5344CB8AC3E}">
-        <p14:creationId xmlns:p14="http://schemas.microsoft.com/office/powerpoint/2010/main" val="1657374454"/>
+        <p14:creationId xmlns:p14="http://schemas.microsoft.com/office/powerpoint/2010/main" val="1016146877"/>
       </p:ext>
     </p:extLst>
   </p:cSld>
@@ -2192,15 +2191,15 @@
         </p:nvSpPr>
         <p:spPr>
           <a:xfrm>
-            <a:off x="629841" y="152400"/>
-            <a:ext cx="2949178" cy="533400"/>
+            <a:off x="661333" y="213360"/>
+            <a:ext cx="3096637" cy="746760"/>
           </a:xfrm>
         </p:spPr>
         <p:txBody>
           <a:bodyPr anchor="b"/>
           <a:lstStyle>
             <a:lvl1pPr>
-              <a:defRPr sz="1067"/>
+              <a:defRPr sz="1493"/>
             </a:lvl1pPr>
           </a:lstStyle>
           <a:p>
@@ -2224,8 +2223,8 @@
         </p:nvSpPr>
         <p:spPr>
           <a:xfrm>
-            <a:off x="3887391" y="329142"/>
-            <a:ext cx="4629150" cy="1624542"/>
+            <a:off x="4081760" y="460799"/>
+            <a:ext cx="4860608" cy="2274358"/>
           </a:xfrm>
         </p:spPr>
         <p:txBody>
@@ -2233,39 +2232,39 @@
           <a:lstStyle>
             <a:lvl1pPr marL="0" indent="0">
               <a:buNone/>
-              <a:defRPr sz="1067"/>
+              <a:defRPr sz="1493"/>
             </a:lvl1pPr>
-            <a:lvl2pPr marL="152385" indent="0">
+            <a:lvl2pPr marL="213375" indent="0">
+              <a:buNone/>
+              <a:defRPr sz="1307"/>
+            </a:lvl2pPr>
+            <a:lvl3pPr marL="426750" indent="0">
+              <a:buNone/>
+              <a:defRPr sz="1120"/>
+            </a:lvl3pPr>
+            <a:lvl4pPr marL="640126" indent="0">
               <a:buNone/>
               <a:defRPr sz="933"/>
-            </a:lvl2pPr>
-            <a:lvl3pPr marL="304770" indent="0">
-              <a:buNone/>
-              <a:defRPr sz="800"/>
-            </a:lvl3pPr>
-            <a:lvl4pPr marL="457154" indent="0">
-              <a:buNone/>
-              <a:defRPr sz="667"/>
             </a:lvl4pPr>
-            <a:lvl5pPr marL="609539" indent="0">
-              <a:buNone/>
-              <a:defRPr sz="667"/>
+            <a:lvl5pPr marL="853501" indent="0">
+              <a:buNone/>
+              <a:defRPr sz="933"/>
             </a:lvl5pPr>
-            <a:lvl6pPr marL="761924" indent="0">
-              <a:buNone/>
-              <a:defRPr sz="667"/>
+            <a:lvl6pPr marL="1066876" indent="0">
+              <a:buNone/>
+              <a:defRPr sz="933"/>
             </a:lvl6pPr>
-            <a:lvl7pPr marL="914309" indent="0">
-              <a:buNone/>
-              <a:defRPr sz="667"/>
+            <a:lvl7pPr marL="1280251" indent="0">
+              <a:buNone/>
+              <a:defRPr sz="933"/>
             </a:lvl7pPr>
-            <a:lvl8pPr marL="1066693" indent="0">
-              <a:buNone/>
-              <a:defRPr sz="667"/>
+            <a:lvl8pPr marL="1493627" indent="0">
+              <a:buNone/>
+              <a:defRPr sz="933"/>
             </a:lvl8pPr>
-            <a:lvl9pPr marL="1219078" indent="0">
-              <a:buNone/>
-              <a:defRPr sz="667"/>
+            <a:lvl9pPr marL="1707002" indent="0">
+              <a:buNone/>
+              <a:defRPr sz="933"/>
             </a:lvl9pPr>
           </a:lstStyle>
           <a:p>
@@ -2289,8 +2288,8 @@
         </p:nvSpPr>
         <p:spPr>
           <a:xfrm>
-            <a:off x="629841" y="685800"/>
-            <a:ext cx="2949178" cy="1270529"/>
+            <a:off x="661333" y="960120"/>
+            <a:ext cx="3096637" cy="1778741"/>
           </a:xfrm>
         </p:spPr>
         <p:txBody>
@@ -2298,39 +2297,39 @@
           <a:lstStyle>
             <a:lvl1pPr marL="0" indent="0">
               <a:buNone/>
-              <a:defRPr sz="533"/>
+              <a:defRPr sz="747"/>
             </a:lvl1pPr>
-            <a:lvl2pPr marL="152385" indent="0">
+            <a:lvl2pPr marL="213375" indent="0">
+              <a:buNone/>
+              <a:defRPr sz="653"/>
+            </a:lvl2pPr>
+            <a:lvl3pPr marL="426750" indent="0">
+              <a:buNone/>
+              <a:defRPr sz="560"/>
+            </a:lvl3pPr>
+            <a:lvl4pPr marL="640126" indent="0">
               <a:buNone/>
               <a:defRPr sz="467"/>
-            </a:lvl2pPr>
-            <a:lvl3pPr marL="304770" indent="0">
-              <a:buNone/>
-              <a:defRPr sz="400"/>
-            </a:lvl3pPr>
-            <a:lvl4pPr marL="457154" indent="0">
-              <a:buNone/>
-              <a:defRPr sz="333"/>
             </a:lvl4pPr>
-            <a:lvl5pPr marL="609539" indent="0">
-              <a:buNone/>
-              <a:defRPr sz="333"/>
+            <a:lvl5pPr marL="853501" indent="0">
+              <a:buNone/>
+              <a:defRPr sz="467"/>
             </a:lvl5pPr>
-            <a:lvl6pPr marL="761924" indent="0">
-              <a:buNone/>
-              <a:defRPr sz="333"/>
+            <a:lvl6pPr marL="1066876" indent="0">
+              <a:buNone/>
+              <a:defRPr sz="467"/>
             </a:lvl6pPr>
-            <a:lvl7pPr marL="914309" indent="0">
-              <a:buNone/>
-              <a:defRPr sz="333"/>
+            <a:lvl7pPr marL="1280251" indent="0">
+              <a:buNone/>
+              <a:defRPr sz="467"/>
             </a:lvl7pPr>
-            <a:lvl8pPr marL="1066693" indent="0">
-              <a:buNone/>
-              <a:defRPr sz="333"/>
+            <a:lvl8pPr marL="1493627" indent="0">
+              <a:buNone/>
+              <a:defRPr sz="467"/>
             </a:lvl8pPr>
-            <a:lvl9pPr marL="1219078" indent="0">
-              <a:buNone/>
-              <a:defRPr sz="333"/>
+            <a:lvl9pPr marL="1707002" indent="0">
+              <a:buNone/>
+              <a:defRPr sz="467"/>
             </a:lvl9pPr>
           </a:lstStyle>
           <a:p>
@@ -2410,7 +2409,7 @@
     </p:spTree>
     <p:extLst>
       <p:ext uri="{BB962C8B-B14F-4D97-AF65-F5344CB8AC3E}">
-        <p14:creationId xmlns:p14="http://schemas.microsoft.com/office/powerpoint/2010/main" val="808958569"/>
+        <p14:creationId xmlns:p14="http://schemas.microsoft.com/office/powerpoint/2010/main" val="1070012783"/>
       </p:ext>
     </p:extLst>
   </p:cSld>
@@ -2454,8 +2453,8 @@
         </p:nvSpPr>
         <p:spPr>
           <a:xfrm>
-            <a:off x="628650" y="121709"/>
-            <a:ext cx="7886700" cy="441854"/>
+            <a:off x="660083" y="170392"/>
+            <a:ext cx="8281035" cy="618596"/>
           </a:xfrm>
           <a:prstGeom prst="rect">
             <a:avLst/>
@@ -2487,8 +2486,8 @@
         </p:nvSpPr>
         <p:spPr>
           <a:xfrm>
-            <a:off x="628650" y="608542"/>
-            <a:ext cx="7886700" cy="1450446"/>
+            <a:off x="660083" y="851959"/>
+            <a:ext cx="8281035" cy="2030624"/>
           </a:xfrm>
           <a:prstGeom prst="rect">
             <a:avLst/>
@@ -2549,8 +2548,8 @@
         </p:nvSpPr>
         <p:spPr>
           <a:xfrm>
-            <a:off x="628650" y="2118784"/>
-            <a:ext cx="2057400" cy="121708"/>
+            <a:off x="660083" y="2966297"/>
+            <a:ext cx="2160270" cy="170392"/>
           </a:xfrm>
           <a:prstGeom prst="rect">
             <a:avLst/>
@@ -2560,7 +2559,7 @@
           <a:bodyPr vert="horz" lIns="91440" tIns="45720" rIns="91440" bIns="45720" rtlCol="0" anchor="ctr"/>
           <a:lstStyle>
             <a:lvl1pPr algn="l">
-              <a:defRPr sz="400">
+              <a:defRPr sz="560">
                 <a:solidFill>
                   <a:schemeClr val="tx1">
                     <a:tint val="82000"/>
@@ -2590,8 +2589,8 @@
         </p:nvSpPr>
         <p:spPr>
           <a:xfrm>
-            <a:off x="3028950" y="2118784"/>
-            <a:ext cx="3086100" cy="121708"/>
+            <a:off x="3180398" y="2966297"/>
+            <a:ext cx="3240405" cy="170392"/>
           </a:xfrm>
           <a:prstGeom prst="rect">
             <a:avLst/>
@@ -2601,7 +2600,7 @@
           <a:bodyPr vert="horz" lIns="91440" tIns="45720" rIns="91440" bIns="45720" rtlCol="0" anchor="ctr"/>
           <a:lstStyle>
             <a:lvl1pPr algn="ctr">
-              <a:defRPr sz="400">
+              <a:defRPr sz="560">
                 <a:solidFill>
                   <a:schemeClr val="tx1">
                     <a:tint val="82000"/>
@@ -2627,8 +2626,8 @@
         </p:nvSpPr>
         <p:spPr>
           <a:xfrm>
-            <a:off x="6457950" y="2118784"/>
-            <a:ext cx="2057400" cy="121708"/>
+            <a:off x="6780848" y="2966297"/>
+            <a:ext cx="2160270" cy="170392"/>
           </a:xfrm>
           <a:prstGeom prst="rect">
             <a:avLst/>
@@ -2638,7 +2637,7 @@
           <a:bodyPr vert="horz" lIns="91440" tIns="45720" rIns="91440" bIns="45720" rtlCol="0" anchor="ctr"/>
           <a:lstStyle>
             <a:lvl1pPr algn="r">
-              <a:defRPr sz="400">
+              <a:defRPr sz="560">
                 <a:solidFill>
                   <a:schemeClr val="tx1">
                     <a:tint val="82000"/>
@@ -2659,27 +2658,27 @@
     </p:spTree>
     <p:extLst>
       <p:ext uri="{BB962C8B-B14F-4D97-AF65-F5344CB8AC3E}">
-        <p14:creationId xmlns:p14="http://schemas.microsoft.com/office/powerpoint/2010/main" val="1293175288"/>
+        <p14:creationId xmlns:p14="http://schemas.microsoft.com/office/powerpoint/2010/main" val="3520775868"/>
       </p:ext>
     </p:extLst>
   </p:cSld>
   <p:clrMap bg1="lt1" tx1="dk1" bg2="lt2" tx2="dk2" accent1="accent1" accent2="accent2" accent3="accent3" accent4="accent4" accent5="accent5" accent6="accent6" hlink="hlink" folHlink="folHlink"/>
   <p:sldLayoutIdLst>
-    <p:sldLayoutId id="2147483673" r:id="rId1"/>
-    <p:sldLayoutId id="2147483674" r:id="rId2"/>
-    <p:sldLayoutId id="2147483675" r:id="rId3"/>
-    <p:sldLayoutId id="2147483676" r:id="rId4"/>
-    <p:sldLayoutId id="2147483677" r:id="rId5"/>
-    <p:sldLayoutId id="2147483678" r:id="rId6"/>
-    <p:sldLayoutId id="2147483679" r:id="rId7"/>
-    <p:sldLayoutId id="2147483680" r:id="rId8"/>
-    <p:sldLayoutId id="2147483681" r:id="rId9"/>
-    <p:sldLayoutId id="2147483682" r:id="rId10"/>
-    <p:sldLayoutId id="2147483683" r:id="rId11"/>
+    <p:sldLayoutId id="2147483685" r:id="rId1"/>
+    <p:sldLayoutId id="2147483686" r:id="rId2"/>
+    <p:sldLayoutId id="2147483687" r:id="rId3"/>
+    <p:sldLayoutId id="2147483688" r:id="rId4"/>
+    <p:sldLayoutId id="2147483689" r:id="rId5"/>
+    <p:sldLayoutId id="2147483690" r:id="rId6"/>
+    <p:sldLayoutId id="2147483691" r:id="rId7"/>
+    <p:sldLayoutId id="2147483692" r:id="rId8"/>
+    <p:sldLayoutId id="2147483693" r:id="rId9"/>
+    <p:sldLayoutId id="2147483694" r:id="rId10"/>
+    <p:sldLayoutId id="2147483695" r:id="rId11"/>
   </p:sldLayoutIdLst>
   <p:txStyles>
     <p:titleStyle>
-      <a:lvl1pPr algn="l" defTabSz="304770" rtl="0" eaLnBrk="1" latinLnBrk="0" hangingPunct="1">
+      <a:lvl1pPr algn="l" defTabSz="426750" rtl="0" eaLnBrk="1" latinLnBrk="0" hangingPunct="1">
         <a:lnSpc>
           <a:spcPct val="90000"/>
         </a:lnSpc>
@@ -2687,7 +2686,7 @@
           <a:spcPct val="0"/>
         </a:spcBef>
         <a:buNone/>
-        <a:defRPr sz="1467" kern="1200">
+        <a:defRPr sz="2053" kern="1200">
           <a:solidFill>
             <a:schemeClr val="tx1"/>
           </a:solidFill>
@@ -2698,12 +2697,48 @@
       </a:lvl1pPr>
     </p:titleStyle>
     <p:bodyStyle>
-      <a:lvl1pPr marL="76192" indent="-76192" algn="l" defTabSz="304770" rtl="0" eaLnBrk="1" latinLnBrk="0" hangingPunct="1">
+      <a:lvl1pPr marL="106688" indent="-106688" algn="l" defTabSz="426750" rtl="0" eaLnBrk="1" latinLnBrk="0" hangingPunct="1">
         <a:lnSpc>
           <a:spcPct val="90000"/>
         </a:lnSpc>
         <a:spcBef>
-          <a:spcPts val="333"/>
+          <a:spcPts val="467"/>
+        </a:spcBef>
+        <a:buFont typeface="Arial" panose="020B0604020202020204" pitchFamily="34" charset="0"/>
+        <a:buChar char="•"/>
+        <a:defRPr sz="1307" kern="1200">
+          <a:solidFill>
+            <a:schemeClr val="tx1"/>
+          </a:solidFill>
+          <a:latin typeface="+mn-lt"/>
+          <a:ea typeface="+mn-ea"/>
+          <a:cs typeface="+mn-cs"/>
+        </a:defRPr>
+      </a:lvl1pPr>
+      <a:lvl2pPr marL="320063" indent="-106688" algn="l" defTabSz="426750" rtl="0" eaLnBrk="1" latinLnBrk="0" hangingPunct="1">
+        <a:lnSpc>
+          <a:spcPct val="90000"/>
+        </a:lnSpc>
+        <a:spcBef>
+          <a:spcPts val="233"/>
+        </a:spcBef>
+        <a:buFont typeface="Arial" panose="020B0604020202020204" pitchFamily="34" charset="0"/>
+        <a:buChar char="•"/>
+        <a:defRPr sz="1120" kern="1200">
+          <a:solidFill>
+            <a:schemeClr val="tx1"/>
+          </a:solidFill>
+          <a:latin typeface="+mn-lt"/>
+          <a:ea typeface="+mn-ea"/>
+          <a:cs typeface="+mn-cs"/>
+        </a:defRPr>
+      </a:lvl2pPr>
+      <a:lvl3pPr marL="533438" indent="-106688" algn="l" defTabSz="426750" rtl="0" eaLnBrk="1" latinLnBrk="0" hangingPunct="1">
+        <a:lnSpc>
+          <a:spcPct val="90000"/>
+        </a:lnSpc>
+        <a:spcBef>
+          <a:spcPts val="233"/>
         </a:spcBef>
         <a:buFont typeface="Arial" panose="020B0604020202020204" pitchFamily="34" charset="0"/>
         <a:buChar char="•"/>
@@ -2715,53 +2750,17 @@
           <a:ea typeface="+mn-ea"/>
           <a:cs typeface="+mn-cs"/>
         </a:defRPr>
-      </a:lvl1pPr>
-      <a:lvl2pPr marL="228577" indent="-76192" algn="l" defTabSz="304770" rtl="0" eaLnBrk="1" latinLnBrk="0" hangingPunct="1">
+      </a:lvl3pPr>
+      <a:lvl4pPr marL="746813" indent="-106688" algn="l" defTabSz="426750" rtl="0" eaLnBrk="1" latinLnBrk="0" hangingPunct="1">
         <a:lnSpc>
           <a:spcPct val="90000"/>
         </a:lnSpc>
         <a:spcBef>
-          <a:spcPts val="167"/>
+          <a:spcPts val="233"/>
         </a:spcBef>
         <a:buFont typeface="Arial" panose="020B0604020202020204" pitchFamily="34" charset="0"/>
         <a:buChar char="•"/>
-        <a:defRPr sz="800" kern="1200">
-          <a:solidFill>
-            <a:schemeClr val="tx1"/>
-          </a:solidFill>
-          <a:latin typeface="+mn-lt"/>
-          <a:ea typeface="+mn-ea"/>
-          <a:cs typeface="+mn-cs"/>
-        </a:defRPr>
-      </a:lvl2pPr>
-      <a:lvl3pPr marL="380962" indent="-76192" algn="l" defTabSz="304770" rtl="0" eaLnBrk="1" latinLnBrk="0" hangingPunct="1">
-        <a:lnSpc>
-          <a:spcPct val="90000"/>
-        </a:lnSpc>
-        <a:spcBef>
-          <a:spcPts val="167"/>
-        </a:spcBef>
-        <a:buFont typeface="Arial" panose="020B0604020202020204" pitchFamily="34" charset="0"/>
-        <a:buChar char="•"/>
-        <a:defRPr sz="667" kern="1200">
-          <a:solidFill>
-            <a:schemeClr val="tx1"/>
-          </a:solidFill>
-          <a:latin typeface="+mn-lt"/>
-          <a:ea typeface="+mn-ea"/>
-          <a:cs typeface="+mn-cs"/>
-        </a:defRPr>
-      </a:lvl3pPr>
-      <a:lvl4pPr marL="533347" indent="-76192" algn="l" defTabSz="304770" rtl="0" eaLnBrk="1" latinLnBrk="0" hangingPunct="1">
-        <a:lnSpc>
-          <a:spcPct val="90000"/>
-        </a:lnSpc>
-        <a:spcBef>
-          <a:spcPts val="167"/>
-        </a:spcBef>
-        <a:buFont typeface="Arial" panose="020B0604020202020204" pitchFamily="34" charset="0"/>
-        <a:buChar char="•"/>
-        <a:defRPr sz="600" kern="1200">
+        <a:defRPr sz="840" kern="1200">
           <a:solidFill>
             <a:schemeClr val="tx1"/>
           </a:solidFill>
@@ -2770,16 +2769,16 @@
           <a:cs typeface="+mn-cs"/>
         </a:defRPr>
       </a:lvl4pPr>
-      <a:lvl5pPr marL="685731" indent="-76192" algn="l" defTabSz="304770" rtl="0" eaLnBrk="1" latinLnBrk="0" hangingPunct="1">
+      <a:lvl5pPr marL="960189" indent="-106688" algn="l" defTabSz="426750" rtl="0" eaLnBrk="1" latinLnBrk="0" hangingPunct="1">
         <a:lnSpc>
           <a:spcPct val="90000"/>
         </a:lnSpc>
         <a:spcBef>
-          <a:spcPts val="167"/>
+          <a:spcPts val="233"/>
         </a:spcBef>
         <a:buFont typeface="Arial" panose="020B0604020202020204" pitchFamily="34" charset="0"/>
         <a:buChar char="•"/>
-        <a:defRPr sz="600" kern="1200">
+        <a:defRPr sz="840" kern="1200">
           <a:solidFill>
             <a:schemeClr val="tx1"/>
           </a:solidFill>
@@ -2788,16 +2787,16 @@
           <a:cs typeface="+mn-cs"/>
         </a:defRPr>
       </a:lvl5pPr>
-      <a:lvl6pPr marL="838116" indent="-76192" algn="l" defTabSz="304770" rtl="0" eaLnBrk="1" latinLnBrk="0" hangingPunct="1">
+      <a:lvl6pPr marL="1173564" indent="-106688" algn="l" defTabSz="426750" rtl="0" eaLnBrk="1" latinLnBrk="0" hangingPunct="1">
         <a:lnSpc>
           <a:spcPct val="90000"/>
         </a:lnSpc>
         <a:spcBef>
-          <a:spcPts val="167"/>
+          <a:spcPts val="233"/>
         </a:spcBef>
         <a:buFont typeface="Arial" panose="020B0604020202020204" pitchFamily="34" charset="0"/>
         <a:buChar char="•"/>
-        <a:defRPr sz="600" kern="1200">
+        <a:defRPr sz="840" kern="1200">
           <a:solidFill>
             <a:schemeClr val="tx1"/>
           </a:solidFill>
@@ -2806,16 +2805,16 @@
           <a:cs typeface="+mn-cs"/>
         </a:defRPr>
       </a:lvl6pPr>
-      <a:lvl7pPr marL="990501" indent="-76192" algn="l" defTabSz="304770" rtl="0" eaLnBrk="1" latinLnBrk="0" hangingPunct="1">
+      <a:lvl7pPr marL="1386939" indent="-106688" algn="l" defTabSz="426750" rtl="0" eaLnBrk="1" latinLnBrk="0" hangingPunct="1">
         <a:lnSpc>
           <a:spcPct val="90000"/>
         </a:lnSpc>
         <a:spcBef>
-          <a:spcPts val="167"/>
+          <a:spcPts val="233"/>
         </a:spcBef>
         <a:buFont typeface="Arial" panose="020B0604020202020204" pitchFamily="34" charset="0"/>
         <a:buChar char="•"/>
-        <a:defRPr sz="600" kern="1200">
+        <a:defRPr sz="840" kern="1200">
           <a:solidFill>
             <a:schemeClr val="tx1"/>
           </a:solidFill>
@@ -2824,16 +2823,16 @@
           <a:cs typeface="+mn-cs"/>
         </a:defRPr>
       </a:lvl7pPr>
-      <a:lvl8pPr marL="1142886" indent="-76192" algn="l" defTabSz="304770" rtl="0" eaLnBrk="1" latinLnBrk="0" hangingPunct="1">
+      <a:lvl8pPr marL="1600314" indent="-106688" algn="l" defTabSz="426750" rtl="0" eaLnBrk="1" latinLnBrk="0" hangingPunct="1">
         <a:lnSpc>
           <a:spcPct val="90000"/>
         </a:lnSpc>
         <a:spcBef>
-          <a:spcPts val="167"/>
+          <a:spcPts val="233"/>
         </a:spcBef>
         <a:buFont typeface="Arial" panose="020B0604020202020204" pitchFamily="34" charset="0"/>
         <a:buChar char="•"/>
-        <a:defRPr sz="600" kern="1200">
+        <a:defRPr sz="840" kern="1200">
           <a:solidFill>
             <a:schemeClr val="tx1"/>
           </a:solidFill>
@@ -2842,16 +2841,16 @@
           <a:cs typeface="+mn-cs"/>
         </a:defRPr>
       </a:lvl8pPr>
-      <a:lvl9pPr marL="1295270" indent="-76192" algn="l" defTabSz="304770" rtl="0" eaLnBrk="1" latinLnBrk="0" hangingPunct="1">
+      <a:lvl9pPr marL="1813690" indent="-106688" algn="l" defTabSz="426750" rtl="0" eaLnBrk="1" latinLnBrk="0" hangingPunct="1">
         <a:lnSpc>
           <a:spcPct val="90000"/>
         </a:lnSpc>
         <a:spcBef>
-          <a:spcPts val="167"/>
+          <a:spcPts val="233"/>
         </a:spcBef>
         <a:buFont typeface="Arial" panose="020B0604020202020204" pitchFamily="34" charset="0"/>
         <a:buChar char="•"/>
-        <a:defRPr sz="600" kern="1200">
+        <a:defRPr sz="840" kern="1200">
           <a:solidFill>
             <a:schemeClr val="tx1"/>
           </a:solidFill>
@@ -2865,8 +2864,8 @@
       <a:defPPr>
         <a:defRPr lang="en-US"/>
       </a:defPPr>
-      <a:lvl1pPr marL="0" algn="l" defTabSz="304770" rtl="0" eaLnBrk="1" latinLnBrk="0" hangingPunct="1">
-        <a:defRPr sz="600" kern="1200">
+      <a:lvl1pPr marL="0" algn="l" defTabSz="426750" rtl="0" eaLnBrk="1" latinLnBrk="0" hangingPunct="1">
+        <a:defRPr sz="840" kern="1200">
           <a:solidFill>
             <a:schemeClr val="tx1"/>
           </a:solidFill>
@@ -2875,8 +2874,8 @@
           <a:cs typeface="+mn-cs"/>
         </a:defRPr>
       </a:lvl1pPr>
-      <a:lvl2pPr marL="152385" algn="l" defTabSz="304770" rtl="0" eaLnBrk="1" latinLnBrk="0" hangingPunct="1">
-        <a:defRPr sz="600" kern="1200">
+      <a:lvl2pPr marL="213375" algn="l" defTabSz="426750" rtl="0" eaLnBrk="1" latinLnBrk="0" hangingPunct="1">
+        <a:defRPr sz="840" kern="1200">
           <a:solidFill>
             <a:schemeClr val="tx1"/>
           </a:solidFill>
@@ -2885,8 +2884,8 @@
           <a:cs typeface="+mn-cs"/>
         </a:defRPr>
       </a:lvl2pPr>
-      <a:lvl3pPr marL="304770" algn="l" defTabSz="304770" rtl="0" eaLnBrk="1" latinLnBrk="0" hangingPunct="1">
-        <a:defRPr sz="600" kern="1200">
+      <a:lvl3pPr marL="426750" algn="l" defTabSz="426750" rtl="0" eaLnBrk="1" latinLnBrk="0" hangingPunct="1">
+        <a:defRPr sz="840" kern="1200">
           <a:solidFill>
             <a:schemeClr val="tx1"/>
           </a:solidFill>
@@ -2895,8 +2894,8 @@
           <a:cs typeface="+mn-cs"/>
         </a:defRPr>
       </a:lvl3pPr>
-      <a:lvl4pPr marL="457154" algn="l" defTabSz="304770" rtl="0" eaLnBrk="1" latinLnBrk="0" hangingPunct="1">
-        <a:defRPr sz="600" kern="1200">
+      <a:lvl4pPr marL="640126" algn="l" defTabSz="426750" rtl="0" eaLnBrk="1" latinLnBrk="0" hangingPunct="1">
+        <a:defRPr sz="840" kern="1200">
           <a:solidFill>
             <a:schemeClr val="tx1"/>
           </a:solidFill>
@@ -2905,8 +2904,8 @@
           <a:cs typeface="+mn-cs"/>
         </a:defRPr>
       </a:lvl4pPr>
-      <a:lvl5pPr marL="609539" algn="l" defTabSz="304770" rtl="0" eaLnBrk="1" latinLnBrk="0" hangingPunct="1">
-        <a:defRPr sz="600" kern="1200">
+      <a:lvl5pPr marL="853501" algn="l" defTabSz="426750" rtl="0" eaLnBrk="1" latinLnBrk="0" hangingPunct="1">
+        <a:defRPr sz="840" kern="1200">
           <a:solidFill>
             <a:schemeClr val="tx1"/>
           </a:solidFill>
@@ -2915,8 +2914,8 @@
           <a:cs typeface="+mn-cs"/>
         </a:defRPr>
       </a:lvl5pPr>
-      <a:lvl6pPr marL="761924" algn="l" defTabSz="304770" rtl="0" eaLnBrk="1" latinLnBrk="0" hangingPunct="1">
-        <a:defRPr sz="600" kern="1200">
+      <a:lvl6pPr marL="1066876" algn="l" defTabSz="426750" rtl="0" eaLnBrk="1" latinLnBrk="0" hangingPunct="1">
+        <a:defRPr sz="840" kern="1200">
           <a:solidFill>
             <a:schemeClr val="tx1"/>
           </a:solidFill>
@@ -2925,8 +2924,8 @@
           <a:cs typeface="+mn-cs"/>
         </a:defRPr>
       </a:lvl6pPr>
-      <a:lvl7pPr marL="914309" algn="l" defTabSz="304770" rtl="0" eaLnBrk="1" latinLnBrk="0" hangingPunct="1">
-        <a:defRPr sz="600" kern="1200">
+      <a:lvl7pPr marL="1280251" algn="l" defTabSz="426750" rtl="0" eaLnBrk="1" latinLnBrk="0" hangingPunct="1">
+        <a:defRPr sz="840" kern="1200">
           <a:solidFill>
             <a:schemeClr val="tx1"/>
           </a:solidFill>
@@ -2935,8 +2934,8 @@
           <a:cs typeface="+mn-cs"/>
         </a:defRPr>
       </a:lvl7pPr>
-      <a:lvl8pPr marL="1066693" algn="l" defTabSz="304770" rtl="0" eaLnBrk="1" latinLnBrk="0" hangingPunct="1">
-        <a:defRPr sz="600" kern="1200">
+      <a:lvl8pPr marL="1493627" algn="l" defTabSz="426750" rtl="0" eaLnBrk="1" latinLnBrk="0" hangingPunct="1">
+        <a:defRPr sz="840" kern="1200">
           <a:solidFill>
             <a:schemeClr val="tx1"/>
           </a:solidFill>
@@ -2945,8 +2944,8 @@
           <a:cs typeface="+mn-cs"/>
         </a:defRPr>
       </a:lvl8pPr>
-      <a:lvl9pPr marL="1219078" algn="l" defTabSz="304770" rtl="0" eaLnBrk="1" latinLnBrk="0" hangingPunct="1">
-        <a:defRPr sz="600" kern="1200">
+      <a:lvl9pPr marL="1707002" algn="l" defTabSz="426750" rtl="0" eaLnBrk="1" latinLnBrk="0" hangingPunct="1">
+        <a:defRPr sz="840" kern="1200">
           <a:solidFill>
             <a:schemeClr val="tx1"/>
           </a:solidFill>
@@ -2961,1636 +2960,6 @@
 </file>
 
 <file path=ppt/slides/slide1.xml><?xml version="1.0" encoding="utf-8"?>
-<p:sld xmlns:a="http://schemas.openxmlformats.org/drawingml/2006/main" xmlns:r="http://schemas.openxmlformats.org/officeDocument/2006/relationships" xmlns:p="http://schemas.openxmlformats.org/presentationml/2006/main">
-  <p:cSld>
-    <p:spTree>
-      <p:nvGrpSpPr>
-        <p:cNvPr id="1" name=""/>
-        <p:cNvGrpSpPr/>
-        <p:nvPr/>
-      </p:nvGrpSpPr>
-      <p:grpSpPr>
-        <a:xfrm>
-          <a:off x="0" y="0"/>
-          <a:ext cx="0" cy="0"/>
-          <a:chOff x="0" y="0"/>
-          <a:chExt cx="0" cy="0"/>
-        </a:xfrm>
-      </p:grpSpPr>
-      <p:pic>
-        <p:nvPicPr>
-          <p:cNvPr id="3" name="Graphic 2" descr="Brain with solid fill">
-            <a:extLst>
-              <a:ext uri="{FF2B5EF4-FFF2-40B4-BE49-F238E27FC236}">
-                <a16:creationId xmlns:a16="http://schemas.microsoft.com/office/drawing/2014/main" id="{813285C2-36D4-73C7-CFCB-2228081418D2}"/>
-              </a:ext>
-            </a:extLst>
-          </p:cNvPr>
-          <p:cNvPicPr>
-            <a:picLocks noChangeAspect="1"/>
-          </p:cNvPicPr>
-          <p:nvPr/>
-        </p:nvPicPr>
-        <p:blipFill>
-          <a:blip r:embed="rId2">
-            <a:extLst>
-              <a:ext uri="{96DAC541-7B7A-43D3-8B79-37D633B846F1}">
-                <asvg:svgBlip xmlns:asvg="http://schemas.microsoft.com/office/drawing/2016/SVG/main" r:embed="rId3"/>
-              </a:ext>
-            </a:extLst>
-          </a:blip>
-          <a:stretch>
-            <a:fillRect/>
-          </a:stretch>
-        </p:blipFill>
-        <p:spPr>
-          <a:xfrm>
-            <a:off x="-1468022" y="0"/>
-            <a:ext cx="2286000" cy="2286000"/>
-          </a:xfrm>
-          <a:prstGeom prst="rect">
-            <a:avLst/>
-          </a:prstGeom>
-        </p:spPr>
-      </p:pic>
-      <p:pic>
-        <p:nvPicPr>
-          <p:cNvPr id="4" name="Graphic 3" descr="Brain with solid fill">
-            <a:extLst>
-              <a:ext uri="{FF2B5EF4-FFF2-40B4-BE49-F238E27FC236}">
-                <a16:creationId xmlns:a16="http://schemas.microsoft.com/office/drawing/2014/main" id="{550A103D-1F46-3845-112F-5720B35A05EE}"/>
-              </a:ext>
-            </a:extLst>
-          </p:cNvPr>
-          <p:cNvPicPr>
-            <a:picLocks noChangeAspect="1"/>
-          </p:cNvPicPr>
-          <p:nvPr/>
-        </p:nvPicPr>
-        <p:blipFill>
-          <a:blip r:embed="rId2">
-            <a:extLst>
-              <a:ext uri="{96DAC541-7B7A-43D3-8B79-37D633B846F1}">
-                <asvg:svgBlip xmlns:asvg="http://schemas.microsoft.com/office/drawing/2016/SVG/main" r:embed="rId3"/>
-              </a:ext>
-            </a:extLst>
-          </a:blip>
-          <a:stretch>
-            <a:fillRect/>
-          </a:stretch>
-        </p:blipFill>
-        <p:spPr>
-          <a:xfrm>
-            <a:off x="1780784" y="0"/>
-            <a:ext cx="2286000" cy="2286000"/>
-          </a:xfrm>
-          <a:prstGeom prst="rect">
-            <a:avLst/>
-          </a:prstGeom>
-        </p:spPr>
-      </p:pic>
-      <p:pic>
-        <p:nvPicPr>
-          <p:cNvPr id="5" name="Graphic 4" descr="Brain with solid fill">
-            <a:extLst>
-              <a:ext uri="{FF2B5EF4-FFF2-40B4-BE49-F238E27FC236}">
-                <a16:creationId xmlns:a16="http://schemas.microsoft.com/office/drawing/2014/main" id="{F875E4C9-25C3-7D12-D70A-1B3FF8F5265C}"/>
-              </a:ext>
-            </a:extLst>
-          </p:cNvPr>
-          <p:cNvPicPr>
-            <a:picLocks noChangeAspect="1"/>
-          </p:cNvPicPr>
-          <p:nvPr/>
-        </p:nvPicPr>
-        <p:blipFill>
-          <a:blip r:embed="rId2">
-            <a:extLst>
-              <a:ext uri="{96DAC541-7B7A-43D3-8B79-37D633B846F1}">
-                <asvg:svgBlip xmlns:asvg="http://schemas.microsoft.com/office/drawing/2016/SVG/main" r:embed="rId3"/>
-              </a:ext>
-            </a:extLst>
-          </a:blip>
-          <a:stretch>
-            <a:fillRect/>
-          </a:stretch>
-        </p:blipFill>
-        <p:spPr>
-          <a:xfrm>
-            <a:off x="5077216" y="0"/>
-            <a:ext cx="2286000" cy="2286000"/>
-          </a:xfrm>
-          <a:prstGeom prst="rect">
-            <a:avLst/>
-          </a:prstGeom>
-        </p:spPr>
-      </p:pic>
-      <p:pic>
-        <p:nvPicPr>
-          <p:cNvPr id="6" name="Graphic 5" descr="Brain with solid fill">
-            <a:extLst>
-              <a:ext uri="{FF2B5EF4-FFF2-40B4-BE49-F238E27FC236}">
-                <a16:creationId xmlns:a16="http://schemas.microsoft.com/office/drawing/2014/main" id="{5135C67E-B164-E71B-A13F-108C7B472DE4}"/>
-              </a:ext>
-            </a:extLst>
-          </p:cNvPr>
-          <p:cNvPicPr>
-            <a:picLocks noChangeAspect="1"/>
-          </p:cNvPicPr>
-          <p:nvPr/>
-        </p:nvPicPr>
-        <p:blipFill>
-          <a:blip r:embed="rId2">
-            <a:extLst>
-              <a:ext uri="{96DAC541-7B7A-43D3-8B79-37D633B846F1}">
-                <asvg:svgBlip xmlns:asvg="http://schemas.microsoft.com/office/drawing/2016/SVG/main" r:embed="rId3"/>
-              </a:ext>
-            </a:extLst>
-          </a:blip>
-          <a:stretch>
-            <a:fillRect/>
-          </a:stretch>
-        </p:blipFill>
-        <p:spPr>
-          <a:xfrm>
-            <a:off x="8326022" y="0"/>
-            <a:ext cx="2286000" cy="2286000"/>
-          </a:xfrm>
-          <a:prstGeom prst="rect">
-            <a:avLst/>
-          </a:prstGeom>
-        </p:spPr>
-      </p:pic>
-      <p:sp>
-        <p:nvSpPr>
-          <p:cNvPr id="17" name="Flowchart: Connector 16">
-            <a:extLst>
-              <a:ext uri="{FF2B5EF4-FFF2-40B4-BE49-F238E27FC236}">
-                <a16:creationId xmlns:a16="http://schemas.microsoft.com/office/drawing/2014/main" id="{E0C2AF85-E563-C224-EA74-EE8D1B92A53D}"/>
-              </a:ext>
-            </a:extLst>
-          </p:cNvPr>
-          <p:cNvSpPr/>
-          <p:nvPr/>
-        </p:nvSpPr>
-        <p:spPr>
-          <a:xfrm>
-            <a:off x="-762976" y="640080"/>
-            <a:ext cx="1005840" cy="1005840"/>
-          </a:xfrm>
-          <a:prstGeom prst="flowChartConnector">
-            <a:avLst/>
-          </a:prstGeom>
-          <a:noFill/>
-          <a:ln w="76200">
-            <a:solidFill>
-              <a:srgbClr val="C00000"/>
-            </a:solidFill>
-          </a:ln>
-        </p:spPr>
-        <p:style>
-          <a:lnRef idx="2">
-            <a:schemeClr val="accent1">
-              <a:shade val="15000"/>
-            </a:schemeClr>
-          </a:lnRef>
-          <a:fillRef idx="1">
-            <a:schemeClr val="accent1"/>
-          </a:fillRef>
-          <a:effectRef idx="0">
-            <a:schemeClr val="accent1"/>
-          </a:effectRef>
-          <a:fontRef idx="minor">
-            <a:schemeClr val="lt1"/>
-          </a:fontRef>
-        </p:style>
-        <p:txBody>
-          <a:bodyPr rtlCol="0" anchor="ctr"/>
-          <a:lstStyle/>
-          <a:p>
-            <a:pPr algn="ctr"/>
-            <a:endParaRPr lang="en-US"/>
-          </a:p>
-        </p:txBody>
-      </p:sp>
-      <p:sp>
-        <p:nvSpPr>
-          <p:cNvPr id="18" name="Flowchart: Connector 17">
-            <a:extLst>
-              <a:ext uri="{FF2B5EF4-FFF2-40B4-BE49-F238E27FC236}">
-                <a16:creationId xmlns:a16="http://schemas.microsoft.com/office/drawing/2014/main" id="{B1652A51-ABC1-3D99-FDEF-FAE924D8D12B}"/>
-              </a:ext>
-            </a:extLst>
-          </p:cNvPr>
-          <p:cNvSpPr/>
-          <p:nvPr/>
-        </p:nvSpPr>
-        <p:spPr>
-          <a:xfrm>
-            <a:off x="-625816" y="777240"/>
-            <a:ext cx="731520" cy="731520"/>
-          </a:xfrm>
-          <a:prstGeom prst="flowChartConnector">
-            <a:avLst/>
-          </a:prstGeom>
-          <a:noFill/>
-          <a:ln w="76200">
-            <a:solidFill>
-              <a:srgbClr val="C00000"/>
-            </a:solidFill>
-          </a:ln>
-        </p:spPr>
-        <p:style>
-          <a:lnRef idx="2">
-            <a:schemeClr val="accent1">
-              <a:shade val="15000"/>
-            </a:schemeClr>
-          </a:lnRef>
-          <a:fillRef idx="1">
-            <a:schemeClr val="accent1"/>
-          </a:fillRef>
-          <a:effectRef idx="0">
-            <a:schemeClr val="accent1"/>
-          </a:effectRef>
-          <a:fontRef idx="minor">
-            <a:schemeClr val="lt1"/>
-          </a:fontRef>
-        </p:style>
-        <p:txBody>
-          <a:bodyPr rtlCol="0" anchor="ctr"/>
-          <a:lstStyle/>
-          <a:p>
-            <a:pPr algn="ctr"/>
-            <a:endParaRPr lang="en-US"/>
-          </a:p>
-        </p:txBody>
-      </p:sp>
-      <p:sp>
-        <p:nvSpPr>
-          <p:cNvPr id="19" name="Flowchart: Connector 18">
-            <a:extLst>
-              <a:ext uri="{FF2B5EF4-FFF2-40B4-BE49-F238E27FC236}">
-                <a16:creationId xmlns:a16="http://schemas.microsoft.com/office/drawing/2014/main" id="{B9156E2F-3CDF-F7FA-8F5C-494E73C228CF}"/>
-              </a:ext>
-            </a:extLst>
-          </p:cNvPr>
-          <p:cNvSpPr/>
-          <p:nvPr/>
-        </p:nvSpPr>
-        <p:spPr>
-          <a:xfrm>
-            <a:off x="-488656" y="914400"/>
-            <a:ext cx="457200" cy="457200"/>
-          </a:xfrm>
-          <a:prstGeom prst="flowChartConnector">
-            <a:avLst/>
-          </a:prstGeom>
-          <a:noFill/>
-          <a:ln w="76200">
-            <a:solidFill>
-              <a:srgbClr val="C00000"/>
-            </a:solidFill>
-          </a:ln>
-        </p:spPr>
-        <p:style>
-          <a:lnRef idx="2">
-            <a:schemeClr val="accent1">
-              <a:shade val="15000"/>
-            </a:schemeClr>
-          </a:lnRef>
-          <a:fillRef idx="1">
-            <a:schemeClr val="accent1"/>
-          </a:fillRef>
-          <a:effectRef idx="0">
-            <a:schemeClr val="accent1"/>
-          </a:effectRef>
-          <a:fontRef idx="minor">
-            <a:schemeClr val="lt1"/>
-          </a:fontRef>
-        </p:style>
-        <p:txBody>
-          <a:bodyPr rtlCol="0" anchor="ctr"/>
-          <a:lstStyle/>
-          <a:p>
-            <a:pPr algn="ctr"/>
-            <a:endParaRPr lang="en-US"/>
-          </a:p>
-        </p:txBody>
-      </p:sp>
-      <p:sp>
-        <p:nvSpPr>
-          <p:cNvPr id="20" name="Flowchart: Connector 19">
-            <a:extLst>
-              <a:ext uri="{FF2B5EF4-FFF2-40B4-BE49-F238E27FC236}">
-                <a16:creationId xmlns:a16="http://schemas.microsoft.com/office/drawing/2014/main" id="{59765092-8B35-764B-7834-89D090D1D67E}"/>
-              </a:ext>
-            </a:extLst>
-          </p:cNvPr>
-          <p:cNvSpPr/>
-          <p:nvPr/>
-        </p:nvSpPr>
-        <p:spPr>
-          <a:xfrm>
-            <a:off x="-351496" y="1051560"/>
-            <a:ext cx="182880" cy="182880"/>
-          </a:xfrm>
-          <a:prstGeom prst="flowChartConnector">
-            <a:avLst/>
-          </a:prstGeom>
-          <a:noFill/>
-          <a:ln w="76200">
-            <a:solidFill>
-              <a:srgbClr val="C00000"/>
-            </a:solidFill>
-          </a:ln>
-        </p:spPr>
-        <p:style>
-          <a:lnRef idx="2">
-            <a:schemeClr val="accent1">
-              <a:shade val="15000"/>
-            </a:schemeClr>
-          </a:lnRef>
-          <a:fillRef idx="1">
-            <a:schemeClr val="accent1"/>
-          </a:fillRef>
-          <a:effectRef idx="0">
-            <a:schemeClr val="accent1"/>
-          </a:effectRef>
-          <a:fontRef idx="minor">
-            <a:schemeClr val="lt1"/>
-          </a:fontRef>
-        </p:style>
-        <p:txBody>
-          <a:bodyPr rtlCol="0" anchor="ctr"/>
-          <a:lstStyle/>
-          <a:p>
-            <a:pPr algn="ctr"/>
-            <a:endParaRPr lang="en-US"/>
-          </a:p>
-        </p:txBody>
-      </p:sp>
-      <p:sp>
-        <p:nvSpPr>
-          <p:cNvPr id="21" name="Flowchart: Connector 20">
-            <a:extLst>
-              <a:ext uri="{FF2B5EF4-FFF2-40B4-BE49-F238E27FC236}">
-                <a16:creationId xmlns:a16="http://schemas.microsoft.com/office/drawing/2014/main" id="{E824B8C7-9CB3-F694-8F3F-A7173405002F}"/>
-              </a:ext>
-            </a:extLst>
-          </p:cNvPr>
-          <p:cNvSpPr/>
-          <p:nvPr/>
-        </p:nvSpPr>
-        <p:spPr>
-          <a:xfrm>
-            <a:off x="2483144" y="640080"/>
-            <a:ext cx="1005840" cy="1005840"/>
-          </a:xfrm>
-          <a:prstGeom prst="flowChartConnector">
-            <a:avLst/>
-          </a:prstGeom>
-          <a:noFill/>
-          <a:ln w="76200">
-            <a:solidFill>
-              <a:srgbClr val="C00000"/>
-            </a:solidFill>
-          </a:ln>
-        </p:spPr>
-        <p:style>
-          <a:lnRef idx="2">
-            <a:schemeClr val="accent1">
-              <a:shade val="15000"/>
-            </a:schemeClr>
-          </a:lnRef>
-          <a:fillRef idx="1">
-            <a:schemeClr val="accent1"/>
-          </a:fillRef>
-          <a:effectRef idx="0">
-            <a:schemeClr val="accent1"/>
-          </a:effectRef>
-          <a:fontRef idx="minor">
-            <a:schemeClr val="lt1"/>
-          </a:fontRef>
-        </p:style>
-        <p:txBody>
-          <a:bodyPr rtlCol="0" anchor="ctr"/>
-          <a:lstStyle/>
-          <a:p>
-            <a:pPr algn="ctr"/>
-            <a:endParaRPr lang="en-US"/>
-          </a:p>
-        </p:txBody>
-      </p:sp>
-      <p:sp>
-        <p:nvSpPr>
-          <p:cNvPr id="22" name="Flowchart: Connector 21">
-            <a:extLst>
-              <a:ext uri="{FF2B5EF4-FFF2-40B4-BE49-F238E27FC236}">
-                <a16:creationId xmlns:a16="http://schemas.microsoft.com/office/drawing/2014/main" id="{99504568-EC96-E574-222A-F202BF85DFCF}"/>
-              </a:ext>
-            </a:extLst>
-          </p:cNvPr>
-          <p:cNvSpPr/>
-          <p:nvPr/>
-        </p:nvSpPr>
-        <p:spPr>
-          <a:xfrm>
-            <a:off x="2620304" y="777240"/>
-            <a:ext cx="731520" cy="731520"/>
-          </a:xfrm>
-          <a:prstGeom prst="flowChartConnector">
-            <a:avLst/>
-          </a:prstGeom>
-          <a:noFill/>
-          <a:ln w="76200">
-            <a:solidFill>
-              <a:srgbClr val="C00000"/>
-            </a:solidFill>
-          </a:ln>
-        </p:spPr>
-        <p:style>
-          <a:lnRef idx="2">
-            <a:schemeClr val="accent1">
-              <a:shade val="15000"/>
-            </a:schemeClr>
-          </a:lnRef>
-          <a:fillRef idx="1">
-            <a:schemeClr val="accent1"/>
-          </a:fillRef>
-          <a:effectRef idx="0">
-            <a:schemeClr val="accent1"/>
-          </a:effectRef>
-          <a:fontRef idx="minor">
-            <a:schemeClr val="lt1"/>
-          </a:fontRef>
-        </p:style>
-        <p:txBody>
-          <a:bodyPr rtlCol="0" anchor="ctr"/>
-          <a:lstStyle/>
-          <a:p>
-            <a:pPr algn="ctr"/>
-            <a:endParaRPr lang="en-US"/>
-          </a:p>
-        </p:txBody>
-      </p:sp>
-      <p:sp>
-        <p:nvSpPr>
-          <p:cNvPr id="23" name="Flowchart: Connector 22">
-            <a:extLst>
-              <a:ext uri="{FF2B5EF4-FFF2-40B4-BE49-F238E27FC236}">
-                <a16:creationId xmlns:a16="http://schemas.microsoft.com/office/drawing/2014/main" id="{A3A825FD-DE8D-A026-C086-97C3EB490050}"/>
-              </a:ext>
-            </a:extLst>
-          </p:cNvPr>
-          <p:cNvSpPr/>
-          <p:nvPr/>
-        </p:nvSpPr>
-        <p:spPr>
-          <a:xfrm>
-            <a:off x="2757464" y="914400"/>
-            <a:ext cx="457200" cy="457200"/>
-          </a:xfrm>
-          <a:prstGeom prst="flowChartConnector">
-            <a:avLst/>
-          </a:prstGeom>
-          <a:noFill/>
-          <a:ln w="76200">
-            <a:solidFill>
-              <a:srgbClr val="C00000"/>
-            </a:solidFill>
-          </a:ln>
-        </p:spPr>
-        <p:style>
-          <a:lnRef idx="2">
-            <a:schemeClr val="accent1">
-              <a:shade val="15000"/>
-            </a:schemeClr>
-          </a:lnRef>
-          <a:fillRef idx="1">
-            <a:schemeClr val="accent1"/>
-          </a:fillRef>
-          <a:effectRef idx="0">
-            <a:schemeClr val="accent1"/>
-          </a:effectRef>
-          <a:fontRef idx="minor">
-            <a:schemeClr val="lt1"/>
-          </a:fontRef>
-        </p:style>
-        <p:txBody>
-          <a:bodyPr rtlCol="0" anchor="ctr"/>
-          <a:lstStyle/>
-          <a:p>
-            <a:pPr algn="ctr"/>
-            <a:endParaRPr lang="en-US"/>
-          </a:p>
-        </p:txBody>
-      </p:sp>
-      <p:sp>
-        <p:nvSpPr>
-          <p:cNvPr id="24" name="Flowchart: Connector 23">
-            <a:extLst>
-              <a:ext uri="{FF2B5EF4-FFF2-40B4-BE49-F238E27FC236}">
-                <a16:creationId xmlns:a16="http://schemas.microsoft.com/office/drawing/2014/main" id="{999038F0-BDF4-AA97-C493-844CC90669BD}"/>
-              </a:ext>
-            </a:extLst>
-          </p:cNvPr>
-          <p:cNvSpPr/>
-          <p:nvPr/>
-        </p:nvSpPr>
-        <p:spPr>
-          <a:xfrm>
-            <a:off x="2894624" y="1051560"/>
-            <a:ext cx="182880" cy="182880"/>
-          </a:xfrm>
-          <a:prstGeom prst="flowChartConnector">
-            <a:avLst/>
-          </a:prstGeom>
-          <a:noFill/>
-          <a:ln w="76200">
-            <a:solidFill>
-              <a:srgbClr val="C00000"/>
-            </a:solidFill>
-          </a:ln>
-        </p:spPr>
-        <p:style>
-          <a:lnRef idx="2">
-            <a:schemeClr val="accent1">
-              <a:shade val="15000"/>
-            </a:schemeClr>
-          </a:lnRef>
-          <a:fillRef idx="1">
-            <a:schemeClr val="accent1"/>
-          </a:fillRef>
-          <a:effectRef idx="0">
-            <a:schemeClr val="accent1"/>
-          </a:effectRef>
-          <a:fontRef idx="minor">
-            <a:schemeClr val="lt1"/>
-          </a:fontRef>
-        </p:style>
-        <p:txBody>
-          <a:bodyPr rtlCol="0" anchor="ctr"/>
-          <a:lstStyle/>
-          <a:p>
-            <a:pPr algn="ctr"/>
-            <a:endParaRPr lang="en-US"/>
-          </a:p>
-        </p:txBody>
-      </p:sp>
-      <p:sp>
-        <p:nvSpPr>
-          <p:cNvPr id="25" name="Flowchart: Connector 24">
-            <a:extLst>
-              <a:ext uri="{FF2B5EF4-FFF2-40B4-BE49-F238E27FC236}">
-                <a16:creationId xmlns:a16="http://schemas.microsoft.com/office/drawing/2014/main" id="{01C409A0-8384-96E6-9BD7-D99488D75713}"/>
-              </a:ext>
-            </a:extLst>
-          </p:cNvPr>
-          <p:cNvSpPr/>
-          <p:nvPr/>
-        </p:nvSpPr>
-        <p:spPr>
-          <a:xfrm>
-            <a:off x="5785144" y="640080"/>
-            <a:ext cx="1005840" cy="1005840"/>
-          </a:xfrm>
-          <a:prstGeom prst="flowChartConnector">
-            <a:avLst/>
-          </a:prstGeom>
-          <a:noFill/>
-          <a:ln w="76200">
-            <a:solidFill>
-              <a:srgbClr val="C00000"/>
-            </a:solidFill>
-          </a:ln>
-        </p:spPr>
-        <p:style>
-          <a:lnRef idx="2">
-            <a:schemeClr val="accent1">
-              <a:shade val="15000"/>
-            </a:schemeClr>
-          </a:lnRef>
-          <a:fillRef idx="1">
-            <a:schemeClr val="accent1"/>
-          </a:fillRef>
-          <a:effectRef idx="0">
-            <a:schemeClr val="accent1"/>
-          </a:effectRef>
-          <a:fontRef idx="minor">
-            <a:schemeClr val="lt1"/>
-          </a:fontRef>
-        </p:style>
-        <p:txBody>
-          <a:bodyPr rtlCol="0" anchor="ctr"/>
-          <a:lstStyle/>
-          <a:p>
-            <a:pPr algn="ctr"/>
-            <a:endParaRPr lang="en-US"/>
-          </a:p>
-        </p:txBody>
-      </p:sp>
-      <p:sp>
-        <p:nvSpPr>
-          <p:cNvPr id="26" name="Flowchart: Connector 25">
-            <a:extLst>
-              <a:ext uri="{FF2B5EF4-FFF2-40B4-BE49-F238E27FC236}">
-                <a16:creationId xmlns:a16="http://schemas.microsoft.com/office/drawing/2014/main" id="{7A8E75F7-7413-9197-DAC5-EFCDC4F68253}"/>
-              </a:ext>
-            </a:extLst>
-          </p:cNvPr>
-          <p:cNvSpPr/>
-          <p:nvPr/>
-        </p:nvSpPr>
-        <p:spPr>
-          <a:xfrm>
-            <a:off x="5922304" y="777240"/>
-            <a:ext cx="731520" cy="731520"/>
-          </a:xfrm>
-          <a:prstGeom prst="flowChartConnector">
-            <a:avLst/>
-          </a:prstGeom>
-          <a:noFill/>
-          <a:ln w="76200">
-            <a:solidFill>
-              <a:srgbClr val="C00000"/>
-            </a:solidFill>
-          </a:ln>
-        </p:spPr>
-        <p:style>
-          <a:lnRef idx="2">
-            <a:schemeClr val="accent1">
-              <a:shade val="15000"/>
-            </a:schemeClr>
-          </a:lnRef>
-          <a:fillRef idx="1">
-            <a:schemeClr val="accent1"/>
-          </a:fillRef>
-          <a:effectRef idx="0">
-            <a:schemeClr val="accent1"/>
-          </a:effectRef>
-          <a:fontRef idx="minor">
-            <a:schemeClr val="lt1"/>
-          </a:fontRef>
-        </p:style>
-        <p:txBody>
-          <a:bodyPr rtlCol="0" anchor="ctr"/>
-          <a:lstStyle/>
-          <a:p>
-            <a:pPr algn="ctr"/>
-            <a:endParaRPr lang="en-US"/>
-          </a:p>
-        </p:txBody>
-      </p:sp>
-      <p:sp>
-        <p:nvSpPr>
-          <p:cNvPr id="27" name="Flowchart: Connector 26">
-            <a:extLst>
-              <a:ext uri="{FF2B5EF4-FFF2-40B4-BE49-F238E27FC236}">
-                <a16:creationId xmlns:a16="http://schemas.microsoft.com/office/drawing/2014/main" id="{6FFE8951-B64B-DF1E-9BC4-67CBB2907AB4}"/>
-              </a:ext>
-            </a:extLst>
-          </p:cNvPr>
-          <p:cNvSpPr/>
-          <p:nvPr/>
-        </p:nvSpPr>
-        <p:spPr>
-          <a:xfrm>
-            <a:off x="6059464" y="914400"/>
-            <a:ext cx="457200" cy="457200"/>
-          </a:xfrm>
-          <a:prstGeom prst="flowChartConnector">
-            <a:avLst/>
-          </a:prstGeom>
-          <a:noFill/>
-          <a:ln w="76200">
-            <a:solidFill>
-              <a:srgbClr val="C00000"/>
-            </a:solidFill>
-          </a:ln>
-        </p:spPr>
-        <p:style>
-          <a:lnRef idx="2">
-            <a:schemeClr val="accent1">
-              <a:shade val="15000"/>
-            </a:schemeClr>
-          </a:lnRef>
-          <a:fillRef idx="1">
-            <a:schemeClr val="accent1"/>
-          </a:fillRef>
-          <a:effectRef idx="0">
-            <a:schemeClr val="accent1"/>
-          </a:effectRef>
-          <a:fontRef idx="minor">
-            <a:schemeClr val="lt1"/>
-          </a:fontRef>
-        </p:style>
-        <p:txBody>
-          <a:bodyPr rtlCol="0" anchor="ctr"/>
-          <a:lstStyle/>
-          <a:p>
-            <a:pPr algn="ctr"/>
-            <a:endParaRPr lang="en-US"/>
-          </a:p>
-        </p:txBody>
-      </p:sp>
-      <p:sp>
-        <p:nvSpPr>
-          <p:cNvPr id="28" name="Flowchart: Connector 27">
-            <a:extLst>
-              <a:ext uri="{FF2B5EF4-FFF2-40B4-BE49-F238E27FC236}">
-                <a16:creationId xmlns:a16="http://schemas.microsoft.com/office/drawing/2014/main" id="{F41F1353-97F8-4E1C-4E27-2C10DF48AA20}"/>
-              </a:ext>
-            </a:extLst>
-          </p:cNvPr>
-          <p:cNvSpPr/>
-          <p:nvPr/>
-        </p:nvSpPr>
-        <p:spPr>
-          <a:xfrm>
-            <a:off x="6196624" y="1051560"/>
-            <a:ext cx="182880" cy="182880"/>
-          </a:xfrm>
-          <a:prstGeom prst="flowChartConnector">
-            <a:avLst/>
-          </a:prstGeom>
-          <a:noFill/>
-          <a:ln w="76200">
-            <a:solidFill>
-              <a:srgbClr val="C00000"/>
-            </a:solidFill>
-          </a:ln>
-        </p:spPr>
-        <p:style>
-          <a:lnRef idx="2">
-            <a:schemeClr val="accent1">
-              <a:shade val="15000"/>
-            </a:schemeClr>
-          </a:lnRef>
-          <a:fillRef idx="1">
-            <a:schemeClr val="accent1"/>
-          </a:fillRef>
-          <a:effectRef idx="0">
-            <a:schemeClr val="accent1"/>
-          </a:effectRef>
-          <a:fontRef idx="minor">
-            <a:schemeClr val="lt1"/>
-          </a:fontRef>
-        </p:style>
-        <p:txBody>
-          <a:bodyPr rtlCol="0" anchor="ctr"/>
-          <a:lstStyle/>
-          <a:p>
-            <a:pPr algn="ctr"/>
-            <a:endParaRPr lang="en-US"/>
-          </a:p>
-        </p:txBody>
-      </p:sp>
-      <p:sp>
-        <p:nvSpPr>
-          <p:cNvPr id="29" name="Flowchart: Connector 28">
-            <a:extLst>
-              <a:ext uri="{FF2B5EF4-FFF2-40B4-BE49-F238E27FC236}">
-                <a16:creationId xmlns:a16="http://schemas.microsoft.com/office/drawing/2014/main" id="{8A22E39B-325D-DA3C-730B-9716294F300B}"/>
-              </a:ext>
-            </a:extLst>
-          </p:cNvPr>
-          <p:cNvSpPr/>
-          <p:nvPr/>
-        </p:nvSpPr>
-        <p:spPr>
-          <a:xfrm>
-            <a:off x="9040227" y="640080"/>
-            <a:ext cx="1005840" cy="1005840"/>
-          </a:xfrm>
-          <a:prstGeom prst="flowChartConnector">
-            <a:avLst/>
-          </a:prstGeom>
-          <a:noFill/>
-          <a:ln w="76200">
-            <a:solidFill>
-              <a:srgbClr val="C00000"/>
-            </a:solidFill>
-          </a:ln>
-        </p:spPr>
-        <p:style>
-          <a:lnRef idx="2">
-            <a:schemeClr val="accent1">
-              <a:shade val="15000"/>
-            </a:schemeClr>
-          </a:lnRef>
-          <a:fillRef idx="1">
-            <a:schemeClr val="accent1"/>
-          </a:fillRef>
-          <a:effectRef idx="0">
-            <a:schemeClr val="accent1"/>
-          </a:effectRef>
-          <a:fontRef idx="minor">
-            <a:schemeClr val="lt1"/>
-          </a:fontRef>
-        </p:style>
-        <p:txBody>
-          <a:bodyPr rtlCol="0" anchor="ctr"/>
-          <a:lstStyle/>
-          <a:p>
-            <a:pPr algn="ctr"/>
-            <a:endParaRPr lang="en-US"/>
-          </a:p>
-        </p:txBody>
-      </p:sp>
-      <p:sp>
-        <p:nvSpPr>
-          <p:cNvPr id="30" name="Flowchart: Connector 29">
-            <a:extLst>
-              <a:ext uri="{FF2B5EF4-FFF2-40B4-BE49-F238E27FC236}">
-                <a16:creationId xmlns:a16="http://schemas.microsoft.com/office/drawing/2014/main" id="{CB971316-1BF2-077D-14A3-0E49B9D91CDC}"/>
-              </a:ext>
-            </a:extLst>
-          </p:cNvPr>
-          <p:cNvSpPr/>
-          <p:nvPr/>
-        </p:nvSpPr>
-        <p:spPr>
-          <a:xfrm>
-            <a:off x="9177387" y="777240"/>
-            <a:ext cx="731520" cy="731520"/>
-          </a:xfrm>
-          <a:prstGeom prst="flowChartConnector">
-            <a:avLst/>
-          </a:prstGeom>
-          <a:noFill/>
-          <a:ln w="76200">
-            <a:solidFill>
-              <a:srgbClr val="C00000"/>
-            </a:solidFill>
-          </a:ln>
-        </p:spPr>
-        <p:style>
-          <a:lnRef idx="2">
-            <a:schemeClr val="accent1">
-              <a:shade val="15000"/>
-            </a:schemeClr>
-          </a:lnRef>
-          <a:fillRef idx="1">
-            <a:schemeClr val="accent1"/>
-          </a:fillRef>
-          <a:effectRef idx="0">
-            <a:schemeClr val="accent1"/>
-          </a:effectRef>
-          <a:fontRef idx="minor">
-            <a:schemeClr val="lt1"/>
-          </a:fontRef>
-        </p:style>
-        <p:txBody>
-          <a:bodyPr rtlCol="0" anchor="ctr"/>
-          <a:lstStyle/>
-          <a:p>
-            <a:pPr algn="ctr"/>
-            <a:endParaRPr lang="en-US"/>
-          </a:p>
-        </p:txBody>
-      </p:sp>
-      <p:sp>
-        <p:nvSpPr>
-          <p:cNvPr id="31" name="Flowchart: Connector 30">
-            <a:extLst>
-              <a:ext uri="{FF2B5EF4-FFF2-40B4-BE49-F238E27FC236}">
-                <a16:creationId xmlns:a16="http://schemas.microsoft.com/office/drawing/2014/main" id="{77F3A0EB-E5E3-F8BE-A50C-8AB835A62E65}"/>
-              </a:ext>
-            </a:extLst>
-          </p:cNvPr>
-          <p:cNvSpPr/>
-          <p:nvPr/>
-        </p:nvSpPr>
-        <p:spPr>
-          <a:xfrm>
-            <a:off x="9314547" y="914400"/>
-            <a:ext cx="457200" cy="457200"/>
-          </a:xfrm>
-          <a:prstGeom prst="flowChartConnector">
-            <a:avLst/>
-          </a:prstGeom>
-          <a:noFill/>
-          <a:ln w="76200">
-            <a:solidFill>
-              <a:srgbClr val="C00000"/>
-            </a:solidFill>
-          </a:ln>
-        </p:spPr>
-        <p:style>
-          <a:lnRef idx="2">
-            <a:schemeClr val="accent1">
-              <a:shade val="15000"/>
-            </a:schemeClr>
-          </a:lnRef>
-          <a:fillRef idx="1">
-            <a:schemeClr val="accent1"/>
-          </a:fillRef>
-          <a:effectRef idx="0">
-            <a:schemeClr val="accent1"/>
-          </a:effectRef>
-          <a:fontRef idx="minor">
-            <a:schemeClr val="lt1"/>
-          </a:fontRef>
-        </p:style>
-        <p:txBody>
-          <a:bodyPr rtlCol="0" anchor="ctr"/>
-          <a:lstStyle/>
-          <a:p>
-            <a:pPr algn="ctr"/>
-            <a:endParaRPr lang="en-US"/>
-          </a:p>
-        </p:txBody>
-      </p:sp>
-      <p:sp>
-        <p:nvSpPr>
-          <p:cNvPr id="32" name="Flowchart: Connector 31">
-            <a:extLst>
-              <a:ext uri="{FF2B5EF4-FFF2-40B4-BE49-F238E27FC236}">
-                <a16:creationId xmlns:a16="http://schemas.microsoft.com/office/drawing/2014/main" id="{AB070A1B-FD56-BCF9-0F69-20F03724FECA}"/>
-              </a:ext>
-            </a:extLst>
-          </p:cNvPr>
-          <p:cNvSpPr/>
-          <p:nvPr/>
-        </p:nvSpPr>
-        <p:spPr>
-          <a:xfrm>
-            <a:off x="9451707" y="1051560"/>
-            <a:ext cx="182880" cy="182880"/>
-          </a:xfrm>
-          <a:prstGeom prst="flowChartConnector">
-            <a:avLst/>
-          </a:prstGeom>
-          <a:noFill/>
-          <a:ln w="76200">
-            <a:solidFill>
-              <a:srgbClr val="C00000"/>
-            </a:solidFill>
-          </a:ln>
-        </p:spPr>
-        <p:style>
-          <a:lnRef idx="2">
-            <a:schemeClr val="accent1">
-              <a:shade val="15000"/>
-            </a:schemeClr>
-          </a:lnRef>
-          <a:fillRef idx="1">
-            <a:schemeClr val="accent1"/>
-          </a:fillRef>
-          <a:effectRef idx="0">
-            <a:schemeClr val="accent1"/>
-          </a:effectRef>
-          <a:fontRef idx="minor">
-            <a:schemeClr val="lt1"/>
-          </a:fontRef>
-        </p:style>
-        <p:txBody>
-          <a:bodyPr rtlCol="0" anchor="ctr"/>
-          <a:lstStyle/>
-          <a:p>
-            <a:pPr algn="ctr"/>
-            <a:endParaRPr lang="en-US"/>
-          </a:p>
-        </p:txBody>
-      </p:sp>
-      <p:sp>
-        <p:nvSpPr>
-          <p:cNvPr id="33" name="Multiplication Sign 32">
-            <a:extLst>
-              <a:ext uri="{FF2B5EF4-FFF2-40B4-BE49-F238E27FC236}">
-                <a16:creationId xmlns:a16="http://schemas.microsoft.com/office/drawing/2014/main" id="{352279F5-2DAB-06F3-B569-F5610B0A9773}"/>
-              </a:ext>
-            </a:extLst>
-          </p:cNvPr>
-          <p:cNvSpPr/>
-          <p:nvPr/>
-        </p:nvSpPr>
-        <p:spPr>
-          <a:xfrm>
-            <a:off x="-362926" y="1097280"/>
-            <a:ext cx="91440" cy="91440"/>
-          </a:xfrm>
-          <a:prstGeom prst="mathMultiply">
-            <a:avLst/>
-          </a:prstGeom>
-          <a:solidFill>
-            <a:schemeClr val="tx1"/>
-          </a:solidFill>
-          <a:ln>
-            <a:noFill/>
-          </a:ln>
-        </p:spPr>
-        <p:style>
-          <a:lnRef idx="2">
-            <a:schemeClr val="accent1">
-              <a:shade val="15000"/>
-            </a:schemeClr>
-          </a:lnRef>
-          <a:fillRef idx="1">
-            <a:schemeClr val="accent1"/>
-          </a:fillRef>
-          <a:effectRef idx="0">
-            <a:schemeClr val="accent1"/>
-          </a:effectRef>
-          <a:fontRef idx="minor">
-            <a:schemeClr val="lt1"/>
-          </a:fontRef>
-        </p:style>
-        <p:txBody>
-          <a:bodyPr rtlCol="0" anchor="ctr"/>
-          <a:lstStyle/>
-          <a:p>
-            <a:pPr algn="ctr"/>
-            <a:endParaRPr lang="en-US"/>
-          </a:p>
-        </p:txBody>
-      </p:sp>
-      <p:sp>
-        <p:nvSpPr>
-          <p:cNvPr id="34" name="Multiplication Sign 33">
-            <a:extLst>
-              <a:ext uri="{FF2B5EF4-FFF2-40B4-BE49-F238E27FC236}">
-                <a16:creationId xmlns:a16="http://schemas.microsoft.com/office/drawing/2014/main" id="{737B2C3F-9B34-0858-2BA9-3A42ABC40C43}"/>
-              </a:ext>
-            </a:extLst>
-          </p:cNvPr>
-          <p:cNvSpPr/>
-          <p:nvPr/>
-        </p:nvSpPr>
-        <p:spPr>
-          <a:xfrm>
-            <a:off x="-276566" y="1046480"/>
-            <a:ext cx="91440" cy="91440"/>
-          </a:xfrm>
-          <a:prstGeom prst="mathMultiply">
-            <a:avLst/>
-          </a:prstGeom>
-          <a:solidFill>
-            <a:schemeClr val="tx1"/>
-          </a:solidFill>
-          <a:ln>
-            <a:noFill/>
-          </a:ln>
-        </p:spPr>
-        <p:style>
-          <a:lnRef idx="2">
-            <a:schemeClr val="accent1">
-              <a:shade val="15000"/>
-            </a:schemeClr>
-          </a:lnRef>
-          <a:fillRef idx="1">
-            <a:schemeClr val="accent1"/>
-          </a:fillRef>
-          <a:effectRef idx="0">
-            <a:schemeClr val="accent1"/>
-          </a:effectRef>
-          <a:fontRef idx="minor">
-            <a:schemeClr val="lt1"/>
-          </a:fontRef>
-        </p:style>
-        <p:txBody>
-          <a:bodyPr rtlCol="0" anchor="ctr"/>
-          <a:lstStyle/>
-          <a:p>
-            <a:pPr algn="ctr"/>
-            <a:endParaRPr lang="en-US"/>
-          </a:p>
-        </p:txBody>
-      </p:sp>
-      <p:sp>
-        <p:nvSpPr>
-          <p:cNvPr id="35" name="Multiplication Sign 34">
-            <a:extLst>
-              <a:ext uri="{FF2B5EF4-FFF2-40B4-BE49-F238E27FC236}">
-                <a16:creationId xmlns:a16="http://schemas.microsoft.com/office/drawing/2014/main" id="{75CD8FB3-1E19-22EF-171D-CC2007A56D5F}"/>
-              </a:ext>
-            </a:extLst>
-          </p:cNvPr>
-          <p:cNvSpPr/>
-          <p:nvPr/>
-        </p:nvSpPr>
-        <p:spPr>
-          <a:xfrm>
-            <a:off x="-260056" y="1143000"/>
-            <a:ext cx="91440" cy="91440"/>
-          </a:xfrm>
-          <a:prstGeom prst="mathMultiply">
-            <a:avLst/>
-          </a:prstGeom>
-          <a:solidFill>
-            <a:schemeClr val="tx1"/>
-          </a:solidFill>
-          <a:ln>
-            <a:noFill/>
-          </a:ln>
-        </p:spPr>
-        <p:style>
-          <a:lnRef idx="2">
-            <a:schemeClr val="accent1">
-              <a:shade val="15000"/>
-            </a:schemeClr>
-          </a:lnRef>
-          <a:fillRef idx="1">
-            <a:schemeClr val="accent1"/>
-          </a:fillRef>
-          <a:effectRef idx="0">
-            <a:schemeClr val="accent1"/>
-          </a:effectRef>
-          <a:fontRef idx="minor">
-            <a:schemeClr val="lt1"/>
-          </a:fontRef>
-        </p:style>
-        <p:txBody>
-          <a:bodyPr rtlCol="0" anchor="ctr"/>
-          <a:lstStyle/>
-          <a:p>
-            <a:pPr algn="ctr"/>
-            <a:endParaRPr lang="en-US"/>
-          </a:p>
-        </p:txBody>
-      </p:sp>
-      <p:sp>
-        <p:nvSpPr>
-          <p:cNvPr id="36" name="Multiplication Sign 35">
-            <a:extLst>
-              <a:ext uri="{FF2B5EF4-FFF2-40B4-BE49-F238E27FC236}">
-                <a16:creationId xmlns:a16="http://schemas.microsoft.com/office/drawing/2014/main" id="{11F975D0-9452-3BB7-7CCC-CCCF795F5C14}"/>
-              </a:ext>
-            </a:extLst>
-          </p:cNvPr>
-          <p:cNvSpPr/>
-          <p:nvPr/>
-        </p:nvSpPr>
-        <p:spPr>
-          <a:xfrm>
-            <a:off x="2747304" y="1097280"/>
-            <a:ext cx="91440" cy="91440"/>
-          </a:xfrm>
-          <a:prstGeom prst="mathMultiply">
-            <a:avLst/>
-          </a:prstGeom>
-          <a:solidFill>
-            <a:schemeClr val="tx1"/>
-          </a:solidFill>
-          <a:ln>
-            <a:noFill/>
-          </a:ln>
-        </p:spPr>
-        <p:style>
-          <a:lnRef idx="2">
-            <a:schemeClr val="accent1">
-              <a:shade val="15000"/>
-            </a:schemeClr>
-          </a:lnRef>
-          <a:fillRef idx="1">
-            <a:schemeClr val="accent1"/>
-          </a:fillRef>
-          <a:effectRef idx="0">
-            <a:schemeClr val="accent1"/>
-          </a:effectRef>
-          <a:fontRef idx="minor">
-            <a:schemeClr val="lt1"/>
-          </a:fontRef>
-        </p:style>
-        <p:txBody>
-          <a:bodyPr rtlCol="0" anchor="ctr"/>
-          <a:lstStyle/>
-          <a:p>
-            <a:pPr algn="ctr"/>
-            <a:endParaRPr lang="en-US"/>
-          </a:p>
-        </p:txBody>
-      </p:sp>
-      <p:sp>
-        <p:nvSpPr>
-          <p:cNvPr id="37" name="Multiplication Sign 36">
-            <a:extLst>
-              <a:ext uri="{FF2B5EF4-FFF2-40B4-BE49-F238E27FC236}">
-                <a16:creationId xmlns:a16="http://schemas.microsoft.com/office/drawing/2014/main" id="{1F489CF5-B9CF-CD06-9B3A-094A017D4A98}"/>
-              </a:ext>
-            </a:extLst>
-          </p:cNvPr>
-          <p:cNvSpPr/>
-          <p:nvPr/>
-        </p:nvSpPr>
-        <p:spPr>
-          <a:xfrm>
-            <a:off x="2986064" y="894080"/>
-            <a:ext cx="91440" cy="91440"/>
-          </a:xfrm>
-          <a:prstGeom prst="mathMultiply">
-            <a:avLst/>
-          </a:prstGeom>
-          <a:solidFill>
-            <a:schemeClr val="tx1"/>
-          </a:solidFill>
-          <a:ln>
-            <a:noFill/>
-          </a:ln>
-        </p:spPr>
-        <p:style>
-          <a:lnRef idx="2">
-            <a:schemeClr val="accent1">
-              <a:shade val="15000"/>
-            </a:schemeClr>
-          </a:lnRef>
-          <a:fillRef idx="1">
-            <a:schemeClr val="accent1"/>
-          </a:fillRef>
-          <a:effectRef idx="0">
-            <a:schemeClr val="accent1"/>
-          </a:effectRef>
-          <a:fontRef idx="minor">
-            <a:schemeClr val="lt1"/>
-          </a:fontRef>
-        </p:style>
-        <p:txBody>
-          <a:bodyPr rtlCol="0" anchor="ctr"/>
-          <a:lstStyle/>
-          <a:p>
-            <a:pPr algn="ctr"/>
-            <a:endParaRPr lang="en-US"/>
-          </a:p>
-        </p:txBody>
-      </p:sp>
-      <p:sp>
-        <p:nvSpPr>
-          <p:cNvPr id="38" name="Multiplication Sign 37">
-            <a:extLst>
-              <a:ext uri="{FF2B5EF4-FFF2-40B4-BE49-F238E27FC236}">
-                <a16:creationId xmlns:a16="http://schemas.microsoft.com/office/drawing/2014/main" id="{AFAD919D-7A66-0E46-9926-51BA5F0D9FEC}"/>
-              </a:ext>
-            </a:extLst>
-          </p:cNvPr>
-          <p:cNvSpPr/>
-          <p:nvPr/>
-        </p:nvSpPr>
-        <p:spPr>
-          <a:xfrm>
-            <a:off x="3078774" y="1270000"/>
-            <a:ext cx="91440" cy="91440"/>
-          </a:xfrm>
-          <a:prstGeom prst="mathMultiply">
-            <a:avLst/>
-          </a:prstGeom>
-          <a:solidFill>
-            <a:schemeClr val="tx1"/>
-          </a:solidFill>
-          <a:ln>
-            <a:noFill/>
-          </a:ln>
-        </p:spPr>
-        <p:style>
-          <a:lnRef idx="2">
-            <a:schemeClr val="accent1">
-              <a:shade val="15000"/>
-            </a:schemeClr>
-          </a:lnRef>
-          <a:fillRef idx="1">
-            <a:schemeClr val="accent1"/>
-          </a:fillRef>
-          <a:effectRef idx="0">
-            <a:schemeClr val="accent1"/>
-          </a:effectRef>
-          <a:fontRef idx="minor">
-            <a:schemeClr val="lt1"/>
-          </a:fontRef>
-        </p:style>
-        <p:txBody>
-          <a:bodyPr rtlCol="0" anchor="ctr"/>
-          <a:lstStyle/>
-          <a:p>
-            <a:pPr algn="ctr"/>
-            <a:endParaRPr lang="en-US"/>
-          </a:p>
-        </p:txBody>
-      </p:sp>
-      <p:sp>
-        <p:nvSpPr>
-          <p:cNvPr id="39" name="Multiplication Sign 38">
-            <a:extLst>
-              <a:ext uri="{FF2B5EF4-FFF2-40B4-BE49-F238E27FC236}">
-                <a16:creationId xmlns:a16="http://schemas.microsoft.com/office/drawing/2014/main" id="{CEE1822B-8DB9-9781-76AD-F48BC302DE76}"/>
-              </a:ext>
-            </a:extLst>
-          </p:cNvPr>
-          <p:cNvSpPr/>
-          <p:nvPr/>
-        </p:nvSpPr>
-        <p:spPr>
-          <a:xfrm>
-            <a:off x="9032901" y="1252220"/>
-            <a:ext cx="91440" cy="91440"/>
-          </a:xfrm>
-          <a:prstGeom prst="mathMultiply">
-            <a:avLst/>
-          </a:prstGeom>
-          <a:solidFill>
-            <a:schemeClr val="tx1"/>
-          </a:solidFill>
-          <a:ln>
-            <a:noFill/>
-          </a:ln>
-        </p:spPr>
-        <p:style>
-          <a:lnRef idx="2">
-            <a:schemeClr val="accent1">
-              <a:shade val="15000"/>
-            </a:schemeClr>
-          </a:lnRef>
-          <a:fillRef idx="1">
-            <a:schemeClr val="accent1"/>
-          </a:fillRef>
-          <a:effectRef idx="0">
-            <a:schemeClr val="accent1"/>
-          </a:effectRef>
-          <a:fontRef idx="minor">
-            <a:schemeClr val="lt1"/>
-          </a:fontRef>
-        </p:style>
-        <p:txBody>
-          <a:bodyPr rtlCol="0" anchor="ctr"/>
-          <a:lstStyle/>
-          <a:p>
-            <a:pPr algn="ctr"/>
-            <a:endParaRPr lang="en-US"/>
-          </a:p>
-        </p:txBody>
-      </p:sp>
-      <p:sp>
-        <p:nvSpPr>
-          <p:cNvPr id="40" name="Multiplication Sign 39">
-            <a:extLst>
-              <a:ext uri="{FF2B5EF4-FFF2-40B4-BE49-F238E27FC236}">
-                <a16:creationId xmlns:a16="http://schemas.microsoft.com/office/drawing/2014/main" id="{82AADA0D-A116-08DC-3F10-FBABF964B99C}"/>
-              </a:ext>
-            </a:extLst>
-          </p:cNvPr>
-          <p:cNvSpPr/>
-          <p:nvPr/>
-        </p:nvSpPr>
-        <p:spPr>
-          <a:xfrm>
-            <a:off x="9271661" y="1049020"/>
-            <a:ext cx="91440" cy="91440"/>
-          </a:xfrm>
-          <a:prstGeom prst="mathMultiply">
-            <a:avLst/>
-          </a:prstGeom>
-          <a:solidFill>
-            <a:schemeClr val="tx1"/>
-          </a:solidFill>
-          <a:ln>
-            <a:noFill/>
-          </a:ln>
-        </p:spPr>
-        <p:style>
-          <a:lnRef idx="2">
-            <a:schemeClr val="accent1">
-              <a:shade val="15000"/>
-            </a:schemeClr>
-          </a:lnRef>
-          <a:fillRef idx="1">
-            <a:schemeClr val="accent1"/>
-          </a:fillRef>
-          <a:effectRef idx="0">
-            <a:schemeClr val="accent1"/>
-          </a:effectRef>
-          <a:fontRef idx="minor">
-            <a:schemeClr val="lt1"/>
-          </a:fontRef>
-        </p:style>
-        <p:txBody>
-          <a:bodyPr rtlCol="0" anchor="ctr"/>
-          <a:lstStyle/>
-          <a:p>
-            <a:pPr algn="ctr"/>
-            <a:endParaRPr lang="en-US"/>
-          </a:p>
-        </p:txBody>
-      </p:sp>
-      <p:sp>
-        <p:nvSpPr>
-          <p:cNvPr id="41" name="Multiplication Sign 40">
-            <a:extLst>
-              <a:ext uri="{FF2B5EF4-FFF2-40B4-BE49-F238E27FC236}">
-                <a16:creationId xmlns:a16="http://schemas.microsoft.com/office/drawing/2014/main" id="{2F89EAAB-A7E0-CBA7-7DFE-DD99B159B5F5}"/>
-              </a:ext>
-            </a:extLst>
-          </p:cNvPr>
-          <p:cNvSpPr/>
-          <p:nvPr/>
-        </p:nvSpPr>
-        <p:spPr>
-          <a:xfrm>
-            <a:off x="9364371" y="1424940"/>
-            <a:ext cx="91440" cy="91440"/>
-          </a:xfrm>
-          <a:prstGeom prst="mathMultiply">
-            <a:avLst/>
-          </a:prstGeom>
-          <a:solidFill>
-            <a:schemeClr val="tx1"/>
-          </a:solidFill>
-          <a:ln>
-            <a:noFill/>
-          </a:ln>
-        </p:spPr>
-        <p:style>
-          <a:lnRef idx="2">
-            <a:schemeClr val="accent1">
-              <a:shade val="15000"/>
-            </a:schemeClr>
-          </a:lnRef>
-          <a:fillRef idx="1">
-            <a:schemeClr val="accent1"/>
-          </a:fillRef>
-          <a:effectRef idx="0">
-            <a:schemeClr val="accent1"/>
-          </a:effectRef>
-          <a:fontRef idx="minor">
-            <a:schemeClr val="lt1"/>
-          </a:fontRef>
-        </p:style>
-        <p:txBody>
-          <a:bodyPr rtlCol="0" anchor="ctr"/>
-          <a:lstStyle/>
-          <a:p>
-            <a:pPr algn="ctr"/>
-            <a:endParaRPr lang="en-US"/>
-          </a:p>
-        </p:txBody>
-      </p:sp>
-      <p:sp>
-        <p:nvSpPr>
-          <p:cNvPr id="42" name="Multiplication Sign 41">
-            <a:extLst>
-              <a:ext uri="{FF2B5EF4-FFF2-40B4-BE49-F238E27FC236}">
-                <a16:creationId xmlns:a16="http://schemas.microsoft.com/office/drawing/2014/main" id="{47AE80E3-811E-7B76-8159-A8E45A6BBED6}"/>
-              </a:ext>
-            </a:extLst>
-          </p:cNvPr>
-          <p:cNvSpPr/>
-          <p:nvPr/>
-        </p:nvSpPr>
-        <p:spPr>
-          <a:xfrm>
-            <a:off x="5914978" y="1290320"/>
-            <a:ext cx="91440" cy="91440"/>
-          </a:xfrm>
-          <a:prstGeom prst="mathMultiply">
-            <a:avLst/>
-          </a:prstGeom>
-          <a:solidFill>
-            <a:schemeClr val="tx1"/>
-          </a:solidFill>
-          <a:ln>
-            <a:noFill/>
-          </a:ln>
-        </p:spPr>
-        <p:style>
-          <a:lnRef idx="2">
-            <a:schemeClr val="accent1">
-              <a:shade val="15000"/>
-            </a:schemeClr>
-          </a:lnRef>
-          <a:fillRef idx="1">
-            <a:schemeClr val="accent1"/>
-          </a:fillRef>
-          <a:effectRef idx="0">
-            <a:schemeClr val="accent1"/>
-          </a:effectRef>
-          <a:fontRef idx="minor">
-            <a:schemeClr val="lt1"/>
-          </a:fontRef>
-        </p:style>
-        <p:txBody>
-          <a:bodyPr rtlCol="0" anchor="ctr"/>
-          <a:lstStyle/>
-          <a:p>
-            <a:pPr algn="ctr"/>
-            <a:endParaRPr lang="en-US"/>
-          </a:p>
-        </p:txBody>
-      </p:sp>
-      <p:sp>
-        <p:nvSpPr>
-          <p:cNvPr id="43" name="Multiplication Sign 42">
-            <a:extLst>
-              <a:ext uri="{FF2B5EF4-FFF2-40B4-BE49-F238E27FC236}">
-                <a16:creationId xmlns:a16="http://schemas.microsoft.com/office/drawing/2014/main" id="{D97AA53B-0A59-1A4B-5C73-D2B18B065EB7}"/>
-              </a:ext>
-            </a:extLst>
-          </p:cNvPr>
-          <p:cNvSpPr/>
-          <p:nvPr/>
-        </p:nvSpPr>
-        <p:spPr>
-          <a:xfrm>
-            <a:off x="6001338" y="1239520"/>
-            <a:ext cx="91440" cy="91440"/>
-          </a:xfrm>
-          <a:prstGeom prst="mathMultiply">
-            <a:avLst/>
-          </a:prstGeom>
-          <a:solidFill>
-            <a:schemeClr val="tx1"/>
-          </a:solidFill>
-          <a:ln>
-            <a:noFill/>
-          </a:ln>
-        </p:spPr>
-        <p:style>
-          <a:lnRef idx="2">
-            <a:schemeClr val="accent1">
-              <a:shade val="15000"/>
-            </a:schemeClr>
-          </a:lnRef>
-          <a:fillRef idx="1">
-            <a:schemeClr val="accent1"/>
-          </a:fillRef>
-          <a:effectRef idx="0">
-            <a:schemeClr val="accent1"/>
-          </a:effectRef>
-          <a:fontRef idx="minor">
-            <a:schemeClr val="lt1"/>
-          </a:fontRef>
-        </p:style>
-        <p:txBody>
-          <a:bodyPr rtlCol="0" anchor="ctr"/>
-          <a:lstStyle/>
-          <a:p>
-            <a:pPr algn="ctr"/>
-            <a:endParaRPr lang="en-US"/>
-          </a:p>
-        </p:txBody>
-      </p:sp>
-      <p:sp>
-        <p:nvSpPr>
-          <p:cNvPr id="44" name="Multiplication Sign 43">
-            <a:extLst>
-              <a:ext uri="{FF2B5EF4-FFF2-40B4-BE49-F238E27FC236}">
-                <a16:creationId xmlns:a16="http://schemas.microsoft.com/office/drawing/2014/main" id="{C3A96F20-044D-A125-1A7F-2A7D1003558D}"/>
-              </a:ext>
-            </a:extLst>
-          </p:cNvPr>
-          <p:cNvSpPr/>
-          <p:nvPr/>
-        </p:nvSpPr>
-        <p:spPr>
-          <a:xfrm>
-            <a:off x="6017848" y="1336040"/>
-            <a:ext cx="91440" cy="91440"/>
-          </a:xfrm>
-          <a:prstGeom prst="mathMultiply">
-            <a:avLst/>
-          </a:prstGeom>
-          <a:solidFill>
-            <a:schemeClr val="tx1"/>
-          </a:solidFill>
-          <a:ln>
-            <a:noFill/>
-          </a:ln>
-        </p:spPr>
-        <p:style>
-          <a:lnRef idx="2">
-            <a:schemeClr val="accent1">
-              <a:shade val="15000"/>
-            </a:schemeClr>
-          </a:lnRef>
-          <a:fillRef idx="1">
-            <a:schemeClr val="accent1"/>
-          </a:fillRef>
-          <a:effectRef idx="0">
-            <a:schemeClr val="accent1"/>
-          </a:effectRef>
-          <a:fontRef idx="minor">
-            <a:schemeClr val="lt1"/>
-          </a:fontRef>
-        </p:style>
-        <p:txBody>
-          <a:bodyPr rtlCol="0" anchor="ctr"/>
-          <a:lstStyle/>
-          <a:p>
-            <a:pPr algn="ctr"/>
-            <a:endParaRPr lang="en-US"/>
-          </a:p>
-        </p:txBody>
-      </p:sp>
-    </p:spTree>
-    <p:extLst>
-      <p:ext uri="{BB962C8B-B14F-4D97-AF65-F5344CB8AC3E}">
-        <p14:creationId xmlns:p14="http://schemas.microsoft.com/office/powerpoint/2010/main" val="2498309860"/>
-      </p:ext>
-    </p:extLst>
-  </p:cSld>
-  <p:clrMapOvr>
-    <a:masterClrMapping/>
-  </p:clrMapOvr>
-</p:sld>
-</file>
-
-<file path=ppt/slides/slide2.xml><?xml version="1.0" encoding="utf-8"?>
 <p:sld xmlns:a="http://schemas.openxmlformats.org/drawingml/2006/main" xmlns:r="http://schemas.openxmlformats.org/officeDocument/2006/relationships" xmlns:p="http://schemas.openxmlformats.org/presentationml/2006/main">
   <p:cSld>
     <p:spTree>
@@ -4641,8 +3010,8 @@
         </p:blipFill>
         <p:spPr>
           <a:xfrm>
-            <a:off x="0" y="0"/>
-            <a:ext cx="2286000" cy="2286000"/>
+            <a:off x="0" y="400050"/>
+            <a:ext cx="2400300" cy="2400300"/>
           </a:xfrm>
           <a:prstGeom prst="rect">
             <a:avLst/>
@@ -4677,8 +3046,8 @@
         </p:blipFill>
         <p:spPr>
           <a:xfrm>
-            <a:off x="2286000" y="0"/>
-            <a:ext cx="2286000" cy="2286000"/>
+            <a:off x="2400300" y="400050"/>
+            <a:ext cx="2400300" cy="2400300"/>
           </a:xfrm>
           <a:prstGeom prst="rect">
             <a:avLst/>
@@ -4713,8 +3082,8 @@
         </p:blipFill>
         <p:spPr>
           <a:xfrm>
-            <a:off x="4572000" y="0"/>
-            <a:ext cx="2286000" cy="2286000"/>
+            <a:off x="4800600" y="400050"/>
+            <a:ext cx="2400300" cy="2400300"/>
           </a:xfrm>
           <a:prstGeom prst="rect">
             <a:avLst/>
@@ -4749,8 +3118,8 @@
         </p:blipFill>
         <p:spPr>
           <a:xfrm>
-            <a:off x="6858000" y="0"/>
-            <a:ext cx="2286000" cy="2286000"/>
+            <a:off x="7200900" y="400050"/>
+            <a:ext cx="2400300" cy="2400300"/>
           </a:xfrm>
           <a:prstGeom prst="rect">
             <a:avLst/>
@@ -4771,8 +3140,8 @@
         </p:nvSpPr>
         <p:spPr>
           <a:xfrm>
-            <a:off x="740314" y="640080"/>
-            <a:ext cx="1005840" cy="1005840"/>
+            <a:off x="777330" y="1072134"/>
+            <a:ext cx="1056132" cy="1056132"/>
           </a:xfrm>
           <a:prstGeom prst="flowChartConnector">
             <a:avLst/>
@@ -4805,7 +3174,7 @@
           <a:lstStyle/>
           <a:p>
             <a:pPr algn="ctr"/>
-            <a:endParaRPr lang="en-US"/>
+            <a:endParaRPr lang="en-US" sz="2117"/>
           </a:p>
         </p:txBody>
       </p:sp>
@@ -4823,8 +3192,8 @@
         </p:nvSpPr>
         <p:spPr>
           <a:xfrm>
-            <a:off x="877474" y="777240"/>
-            <a:ext cx="731520" cy="731520"/>
+            <a:off x="921348" y="1216152"/>
+            <a:ext cx="768096" cy="768096"/>
           </a:xfrm>
           <a:prstGeom prst="flowChartConnector">
             <a:avLst/>
@@ -4857,7 +3226,7 @@
           <a:lstStyle/>
           <a:p>
             <a:pPr algn="ctr"/>
-            <a:endParaRPr lang="en-US"/>
+            <a:endParaRPr lang="en-US" sz="2117"/>
           </a:p>
         </p:txBody>
       </p:sp>
@@ -4875,8 +3244,8 @@
         </p:nvSpPr>
         <p:spPr>
           <a:xfrm>
-            <a:off x="1014634" y="914400"/>
-            <a:ext cx="457200" cy="457200"/>
+            <a:off x="1065366" y="1360170"/>
+            <a:ext cx="480060" cy="480060"/>
           </a:xfrm>
           <a:prstGeom prst="flowChartConnector">
             <a:avLst/>
@@ -4909,7 +3278,7 @@
           <a:lstStyle/>
           <a:p>
             <a:pPr algn="ctr"/>
-            <a:endParaRPr lang="en-US"/>
+            <a:endParaRPr lang="en-US" sz="2117"/>
           </a:p>
         </p:txBody>
       </p:sp>
@@ -4927,8 +3296,8 @@
         </p:nvSpPr>
         <p:spPr>
           <a:xfrm>
-            <a:off x="1151794" y="1051560"/>
-            <a:ext cx="182880" cy="182880"/>
+            <a:off x="1209384" y="1504188"/>
+            <a:ext cx="192024" cy="192024"/>
           </a:xfrm>
           <a:prstGeom prst="flowChartConnector">
             <a:avLst/>
@@ -4961,7 +3330,7 @@
           <a:lstStyle/>
           <a:p>
             <a:pPr algn="ctr"/>
-            <a:endParaRPr lang="en-US"/>
+            <a:endParaRPr lang="en-US" sz="2117"/>
           </a:p>
         </p:txBody>
       </p:sp>
@@ -4979,8 +3348,8 @@
         </p:nvSpPr>
         <p:spPr>
           <a:xfrm>
-            <a:off x="3026314" y="640080"/>
-            <a:ext cx="1005840" cy="1005840"/>
+            <a:off x="3177630" y="1072134"/>
+            <a:ext cx="1056132" cy="1056132"/>
           </a:xfrm>
           <a:prstGeom prst="flowChartConnector">
             <a:avLst/>
@@ -5013,7 +3382,7 @@
           <a:lstStyle/>
           <a:p>
             <a:pPr algn="ctr"/>
-            <a:endParaRPr lang="en-US"/>
+            <a:endParaRPr lang="en-US" sz="2117"/>
           </a:p>
         </p:txBody>
       </p:sp>
@@ -5031,8 +3400,8 @@
         </p:nvSpPr>
         <p:spPr>
           <a:xfrm>
-            <a:off x="3163474" y="777240"/>
-            <a:ext cx="731520" cy="731520"/>
+            <a:off x="3321648" y="1216152"/>
+            <a:ext cx="768096" cy="768096"/>
           </a:xfrm>
           <a:prstGeom prst="flowChartConnector">
             <a:avLst/>
@@ -5065,7 +3434,7 @@
           <a:lstStyle/>
           <a:p>
             <a:pPr algn="ctr"/>
-            <a:endParaRPr lang="en-US"/>
+            <a:endParaRPr lang="en-US" sz="2117"/>
           </a:p>
         </p:txBody>
       </p:sp>
@@ -5083,8 +3452,8 @@
         </p:nvSpPr>
         <p:spPr>
           <a:xfrm>
-            <a:off x="3300634" y="914400"/>
-            <a:ext cx="457200" cy="457200"/>
+            <a:off x="3465666" y="1360170"/>
+            <a:ext cx="480060" cy="480060"/>
           </a:xfrm>
           <a:prstGeom prst="flowChartConnector">
             <a:avLst/>
@@ -5117,7 +3486,7 @@
           <a:lstStyle/>
           <a:p>
             <a:pPr algn="ctr"/>
-            <a:endParaRPr lang="en-US"/>
+            <a:endParaRPr lang="en-US" sz="2117"/>
           </a:p>
         </p:txBody>
       </p:sp>
@@ -5135,8 +3504,8 @@
         </p:nvSpPr>
         <p:spPr>
           <a:xfrm>
-            <a:off x="3437794" y="1051560"/>
-            <a:ext cx="182880" cy="182880"/>
+            <a:off x="3609684" y="1504188"/>
+            <a:ext cx="192024" cy="192024"/>
           </a:xfrm>
           <a:prstGeom prst="flowChartConnector">
             <a:avLst/>
@@ -5169,7 +3538,7 @@
           <a:lstStyle/>
           <a:p>
             <a:pPr algn="ctr"/>
-            <a:endParaRPr lang="en-US"/>
+            <a:endParaRPr lang="en-US" sz="2117"/>
           </a:p>
         </p:txBody>
       </p:sp>
@@ -5187,8 +3556,8 @@
         </p:nvSpPr>
         <p:spPr>
           <a:xfrm>
-            <a:off x="5312314" y="640080"/>
-            <a:ext cx="1005840" cy="1005840"/>
+            <a:off x="5577930" y="1072134"/>
+            <a:ext cx="1056132" cy="1056132"/>
           </a:xfrm>
           <a:prstGeom prst="flowChartConnector">
             <a:avLst/>
@@ -5221,7 +3590,7 @@
           <a:lstStyle/>
           <a:p>
             <a:pPr algn="ctr"/>
-            <a:endParaRPr lang="en-US"/>
+            <a:endParaRPr lang="en-US" sz="2117"/>
           </a:p>
         </p:txBody>
       </p:sp>
@@ -5239,8 +3608,8 @@
         </p:nvSpPr>
         <p:spPr>
           <a:xfrm>
-            <a:off x="5449474" y="777240"/>
-            <a:ext cx="731520" cy="731520"/>
+            <a:off x="5721948" y="1216152"/>
+            <a:ext cx="768096" cy="768096"/>
           </a:xfrm>
           <a:prstGeom prst="flowChartConnector">
             <a:avLst/>
@@ -5273,7 +3642,7 @@
           <a:lstStyle/>
           <a:p>
             <a:pPr algn="ctr"/>
-            <a:endParaRPr lang="en-US"/>
+            <a:endParaRPr lang="en-US" sz="2117"/>
           </a:p>
         </p:txBody>
       </p:sp>
@@ -5291,8 +3660,8 @@
         </p:nvSpPr>
         <p:spPr>
           <a:xfrm>
-            <a:off x="5586634" y="914400"/>
-            <a:ext cx="457200" cy="457200"/>
+            <a:off x="5865966" y="1360170"/>
+            <a:ext cx="480060" cy="480060"/>
           </a:xfrm>
           <a:prstGeom prst="flowChartConnector">
             <a:avLst/>
@@ -5325,7 +3694,7 @@
           <a:lstStyle/>
           <a:p>
             <a:pPr algn="ctr"/>
-            <a:endParaRPr lang="en-US"/>
+            <a:endParaRPr lang="en-US" sz="2117"/>
           </a:p>
         </p:txBody>
       </p:sp>
@@ -5343,8 +3712,8 @@
         </p:nvSpPr>
         <p:spPr>
           <a:xfrm>
-            <a:off x="5723794" y="1051560"/>
-            <a:ext cx="182880" cy="182880"/>
+            <a:off x="6009984" y="1504188"/>
+            <a:ext cx="192024" cy="192024"/>
           </a:xfrm>
           <a:prstGeom prst="flowChartConnector">
             <a:avLst/>
@@ -5377,7 +3746,7 @@
           <a:lstStyle/>
           <a:p>
             <a:pPr algn="ctr"/>
-            <a:endParaRPr lang="en-US"/>
+            <a:endParaRPr lang="en-US" sz="2117"/>
           </a:p>
         </p:txBody>
       </p:sp>
@@ -5395,8 +3764,8 @@
         </p:nvSpPr>
         <p:spPr>
           <a:xfrm>
-            <a:off x="7598314" y="640080"/>
-            <a:ext cx="1005840" cy="1005840"/>
+            <a:off x="7978230" y="1072134"/>
+            <a:ext cx="1056132" cy="1056132"/>
           </a:xfrm>
           <a:prstGeom prst="flowChartConnector">
             <a:avLst/>
@@ -5429,7 +3798,7 @@
           <a:lstStyle/>
           <a:p>
             <a:pPr algn="ctr"/>
-            <a:endParaRPr lang="en-US"/>
+            <a:endParaRPr lang="en-US" sz="2117"/>
           </a:p>
         </p:txBody>
       </p:sp>
@@ -5447,8 +3816,8 @@
         </p:nvSpPr>
         <p:spPr>
           <a:xfrm>
-            <a:off x="7735474" y="777240"/>
-            <a:ext cx="731520" cy="731520"/>
+            <a:off x="8122248" y="1216152"/>
+            <a:ext cx="768096" cy="768096"/>
           </a:xfrm>
           <a:prstGeom prst="flowChartConnector">
             <a:avLst/>
@@ -5481,7 +3850,7 @@
           <a:lstStyle/>
           <a:p>
             <a:pPr algn="ctr"/>
-            <a:endParaRPr lang="en-US"/>
+            <a:endParaRPr lang="en-US" sz="2117"/>
           </a:p>
         </p:txBody>
       </p:sp>
@@ -5499,8 +3868,8 @@
         </p:nvSpPr>
         <p:spPr>
           <a:xfrm>
-            <a:off x="7872634" y="914400"/>
-            <a:ext cx="457200" cy="457200"/>
+            <a:off x="8266266" y="1360170"/>
+            <a:ext cx="480060" cy="480060"/>
           </a:xfrm>
           <a:prstGeom prst="flowChartConnector">
             <a:avLst/>
@@ -5533,7 +3902,7 @@
           <a:lstStyle/>
           <a:p>
             <a:pPr algn="ctr"/>
-            <a:endParaRPr lang="en-US"/>
+            <a:endParaRPr lang="en-US" sz="2117"/>
           </a:p>
         </p:txBody>
       </p:sp>
@@ -5551,8 +3920,8 @@
         </p:nvSpPr>
         <p:spPr>
           <a:xfrm>
-            <a:off x="8009794" y="1051560"/>
-            <a:ext cx="182880" cy="182880"/>
+            <a:off x="8410284" y="1504188"/>
+            <a:ext cx="192024" cy="192024"/>
           </a:xfrm>
           <a:prstGeom prst="flowChartConnector">
             <a:avLst/>
@@ -5585,7 +3954,7 @@
           <a:lstStyle/>
           <a:p>
             <a:pPr algn="ctr"/>
-            <a:endParaRPr lang="en-US"/>
+            <a:endParaRPr lang="en-US" sz="2117"/>
           </a:p>
         </p:txBody>
       </p:sp>
@@ -5603,8 +3972,8 @@
         </p:nvSpPr>
         <p:spPr>
           <a:xfrm>
-            <a:off x="1060354" y="1051560"/>
-            <a:ext cx="182880" cy="182880"/>
+            <a:off x="1113372" y="1504188"/>
+            <a:ext cx="192024" cy="192024"/>
           </a:xfrm>
           <a:prstGeom prst="mathMultiply">
             <a:avLst/>
@@ -5637,7 +4006,7 @@
           <a:lstStyle/>
           <a:p>
             <a:pPr algn="ctr"/>
-            <a:endParaRPr lang="en-US"/>
+            <a:endParaRPr lang="en-US" sz="2117"/>
           </a:p>
         </p:txBody>
       </p:sp>
@@ -5655,8 +4024,8 @@
         </p:nvSpPr>
         <p:spPr>
           <a:xfrm>
-            <a:off x="1183290" y="964184"/>
-            <a:ext cx="182880" cy="182880"/>
+            <a:off x="1242455" y="1412443"/>
+            <a:ext cx="192024" cy="192024"/>
           </a:xfrm>
           <a:prstGeom prst="mathMultiply">
             <a:avLst/>
@@ -5689,7 +4058,7 @@
           <a:lstStyle/>
           <a:p>
             <a:pPr algn="ctr"/>
-            <a:endParaRPr lang="en-US"/>
+            <a:endParaRPr lang="en-US" sz="2117"/>
           </a:p>
         </p:txBody>
       </p:sp>
@@ -5707,8 +4076,8 @@
         </p:nvSpPr>
         <p:spPr>
           <a:xfrm>
-            <a:off x="1230280" y="1109472"/>
-            <a:ext cx="182880" cy="182880"/>
+            <a:off x="1291794" y="1564996"/>
+            <a:ext cx="192024" cy="192024"/>
           </a:xfrm>
           <a:prstGeom prst="mathMultiply">
             <a:avLst/>
@@ -5741,7 +4110,7 @@
           <a:lstStyle/>
           <a:p>
             <a:pPr algn="ctr"/>
-            <a:endParaRPr lang="en-US"/>
+            <a:endParaRPr lang="en-US" sz="2117"/>
           </a:p>
         </p:txBody>
       </p:sp>
@@ -5759,8 +4128,8 @@
         </p:nvSpPr>
         <p:spPr>
           <a:xfrm>
-            <a:off x="3055651" y="1292352"/>
-            <a:ext cx="182880" cy="182880"/>
+            <a:off x="3208434" y="1757020"/>
+            <a:ext cx="192024" cy="192024"/>
           </a:xfrm>
           <a:prstGeom prst="mathMultiply">
             <a:avLst/>
@@ -5793,7 +4162,7 @@
           <a:lstStyle/>
           <a:p>
             <a:pPr algn="ctr"/>
-            <a:endParaRPr lang="en-US"/>
+            <a:endParaRPr lang="en-US" sz="2117"/>
           </a:p>
         </p:txBody>
       </p:sp>
@@ -5811,8 +4180,8 @@
         </p:nvSpPr>
         <p:spPr>
           <a:xfrm>
-            <a:off x="3178587" y="1204976"/>
-            <a:ext cx="182880" cy="182880"/>
+            <a:off x="3337516" y="1665275"/>
+            <a:ext cx="192024" cy="192024"/>
           </a:xfrm>
           <a:prstGeom prst="mathMultiply">
             <a:avLst/>
@@ -5845,7 +4214,7 @@
           <a:lstStyle/>
           <a:p>
             <a:pPr algn="ctr"/>
-            <a:endParaRPr lang="en-US"/>
+            <a:endParaRPr lang="en-US" sz="2117"/>
           </a:p>
         </p:txBody>
       </p:sp>
@@ -5863,8 +4232,8 @@
         </p:nvSpPr>
         <p:spPr>
           <a:xfrm>
-            <a:off x="3225577" y="1350264"/>
-            <a:ext cx="182880" cy="182880"/>
+            <a:off x="3386856" y="1817827"/>
+            <a:ext cx="192024" cy="192024"/>
           </a:xfrm>
           <a:prstGeom prst="mathMultiply">
             <a:avLst/>
@@ -5897,7 +4266,7 @@
           <a:lstStyle/>
           <a:p>
             <a:pPr algn="ctr"/>
-            <a:endParaRPr lang="en-US"/>
+            <a:endParaRPr lang="en-US" sz="2117"/>
           </a:p>
         </p:txBody>
       </p:sp>
@@ -5915,8 +4284,8 @@
         </p:nvSpPr>
         <p:spPr>
           <a:xfrm>
-            <a:off x="5470683" y="1045464"/>
-            <a:ext cx="182880" cy="182880"/>
+            <a:off x="5744217" y="1497787"/>
+            <a:ext cx="192024" cy="192024"/>
           </a:xfrm>
           <a:prstGeom prst="mathMultiply">
             <a:avLst/>
@@ -5949,7 +4318,7 @@
           <a:lstStyle/>
           <a:p>
             <a:pPr algn="ctr"/>
-            <a:endParaRPr lang="en-US"/>
+            <a:endParaRPr lang="en-US" sz="2117"/>
           </a:p>
         </p:txBody>
       </p:sp>
@@ -5967,8 +4336,8 @@
         </p:nvSpPr>
         <p:spPr>
           <a:xfrm>
-            <a:off x="5770403" y="811784"/>
-            <a:ext cx="182880" cy="182880"/>
+            <a:off x="6058923" y="1252423"/>
+            <a:ext cx="192024" cy="192024"/>
           </a:xfrm>
           <a:prstGeom prst="mathMultiply">
             <a:avLst/>
@@ -6001,7 +4370,7 @@
           <a:lstStyle/>
           <a:p>
             <a:pPr algn="ctr"/>
-            <a:endParaRPr lang="en-US"/>
+            <a:endParaRPr lang="en-US" sz="2117"/>
           </a:p>
         </p:txBody>
       </p:sp>
@@ -6019,8 +4388,8 @@
         </p:nvSpPr>
         <p:spPr>
           <a:xfrm>
-            <a:off x="5909595" y="1228344"/>
-            <a:ext cx="182880" cy="182880"/>
+            <a:off x="6205075" y="1689811"/>
+            <a:ext cx="192024" cy="192024"/>
           </a:xfrm>
           <a:prstGeom prst="mathMultiply">
             <a:avLst/>
@@ -6053,7 +4422,7 @@
           <a:lstStyle/>
           <a:p>
             <a:pPr algn="ctr"/>
-            <a:endParaRPr lang="en-US"/>
+            <a:endParaRPr lang="en-US" sz="2117"/>
           </a:p>
         </p:txBody>
       </p:sp>
@@ -6071,8 +4440,8 @@
         </p:nvSpPr>
         <p:spPr>
           <a:xfrm>
-            <a:off x="7600885" y="1258824"/>
-            <a:ext cx="182880" cy="182880"/>
+            <a:off x="7980929" y="1721815"/>
+            <a:ext cx="192024" cy="192024"/>
           </a:xfrm>
           <a:prstGeom prst="mathMultiply">
             <a:avLst/>
@@ -6105,7 +4474,7 @@
           <a:lstStyle/>
           <a:p>
             <a:pPr algn="ctr"/>
-            <a:endParaRPr lang="en-US"/>
+            <a:endParaRPr lang="en-US" sz="2117"/>
           </a:p>
         </p:txBody>
       </p:sp>
@@ -6123,8 +4492,8 @@
         </p:nvSpPr>
         <p:spPr>
           <a:xfrm>
-            <a:off x="7900605" y="1025144"/>
-            <a:ext cx="182880" cy="182880"/>
+            <a:off x="8295635" y="1476451"/>
+            <a:ext cx="192024" cy="192024"/>
           </a:xfrm>
           <a:prstGeom prst="mathMultiply">
             <a:avLst/>
@@ -6157,7 +4526,7 @@
           <a:lstStyle/>
           <a:p>
             <a:pPr algn="ctr"/>
-            <a:endParaRPr lang="en-US"/>
+            <a:endParaRPr lang="en-US" sz="2117"/>
           </a:p>
         </p:txBody>
       </p:sp>
@@ -6175,8 +4544,8 @@
         </p:nvSpPr>
         <p:spPr>
           <a:xfrm>
-            <a:off x="8039797" y="1441704"/>
-            <a:ext cx="182880" cy="182880"/>
+            <a:off x="8441787" y="1913839"/>
+            <a:ext cx="192024" cy="192024"/>
           </a:xfrm>
           <a:prstGeom prst="mathMultiply">
             <a:avLst/>
@@ -6209,7 +4578,7 @@
           <a:lstStyle/>
           <a:p>
             <a:pPr algn="ctr"/>
-            <a:endParaRPr lang="en-US"/>
+            <a:endParaRPr lang="en-US" sz="2117"/>
           </a:p>
         </p:txBody>
       </p:sp>
@@ -6226,7 +4595,7 @@
 </p:sld>
 </file>
 
-<file path=ppt/slides/slide3.xml><?xml version="1.0" encoding="utf-8"?>
+<file path=ppt/slides/slide2.xml><?xml version="1.0" encoding="utf-8"?>
 <p:sld xmlns:a="http://schemas.openxmlformats.org/drawingml/2006/main" xmlns:r="http://schemas.openxmlformats.org/officeDocument/2006/relationships" xmlns:p="http://schemas.openxmlformats.org/presentationml/2006/main">
   <p:cSld>
     <p:spTree>
@@ -6277,8 +4646,8 @@
         </p:blipFill>
         <p:spPr>
           <a:xfrm>
-            <a:off x="0" y="0"/>
-            <a:ext cx="2286000" cy="2286000"/>
+            <a:off x="0" y="400050"/>
+            <a:ext cx="2400300" cy="2400300"/>
           </a:xfrm>
           <a:prstGeom prst="rect">
             <a:avLst/>
@@ -6313,8 +4682,8 @@
         </p:blipFill>
         <p:spPr>
           <a:xfrm>
-            <a:off x="2286000" y="0"/>
-            <a:ext cx="2286000" cy="2286000"/>
+            <a:off x="2400300" y="400050"/>
+            <a:ext cx="2400300" cy="2400300"/>
           </a:xfrm>
           <a:prstGeom prst="rect">
             <a:avLst/>
@@ -6349,8 +4718,8 @@
         </p:blipFill>
         <p:spPr>
           <a:xfrm>
-            <a:off x="4572000" y="0"/>
-            <a:ext cx="2286000" cy="2286000"/>
+            <a:off x="4800600" y="400050"/>
+            <a:ext cx="2400300" cy="2400300"/>
           </a:xfrm>
           <a:prstGeom prst="rect">
             <a:avLst/>
@@ -6385,8 +4754,8 @@
         </p:blipFill>
         <p:spPr>
           <a:xfrm>
-            <a:off x="6858000" y="0"/>
-            <a:ext cx="2286000" cy="2286000"/>
+            <a:off x="7200900" y="400050"/>
+            <a:ext cx="2400300" cy="2400300"/>
           </a:xfrm>
           <a:prstGeom prst="rect">
             <a:avLst/>
@@ -6397,6 +4766,244 @@
     <p:extLst>
       <p:ext uri="{BB962C8B-B14F-4D97-AF65-F5344CB8AC3E}">
         <p14:creationId xmlns:p14="http://schemas.microsoft.com/office/powerpoint/2010/main" val="1604193028"/>
+      </p:ext>
+    </p:extLst>
+  </p:cSld>
+  <p:clrMapOvr>
+    <a:masterClrMapping/>
+  </p:clrMapOvr>
+</p:sld>
+</file>
+
+<file path=ppt/slides/slide3.xml><?xml version="1.0" encoding="utf-8"?>
+<p:sld xmlns:a="http://schemas.openxmlformats.org/drawingml/2006/main" xmlns:r="http://schemas.openxmlformats.org/officeDocument/2006/relationships" xmlns:p="http://schemas.openxmlformats.org/presentationml/2006/main">
+  <p:cSld>
+    <p:spTree>
+      <p:nvGrpSpPr>
+        <p:cNvPr id="1" name=""/>
+        <p:cNvGrpSpPr/>
+        <p:nvPr/>
+      </p:nvGrpSpPr>
+      <p:grpSpPr>
+        <a:xfrm>
+          <a:off x="0" y="0"/>
+          <a:ext cx="0" cy="0"/>
+          <a:chOff x="0" y="0"/>
+          <a:chExt cx="0" cy="0"/>
+        </a:xfrm>
+      </p:grpSpPr>
+      <p:sp>
+        <p:nvSpPr>
+          <p:cNvPr id="7" name="Flowchart: Connector 6">
+            <a:extLst>
+              <a:ext uri="{FF2B5EF4-FFF2-40B4-BE49-F238E27FC236}">
+                <a16:creationId xmlns:a16="http://schemas.microsoft.com/office/drawing/2014/main" id="{3D754C27-EE6E-B76D-58C5-1DF8E5CF2BCE}"/>
+              </a:ext>
+            </a:extLst>
+          </p:cNvPr>
+          <p:cNvSpPr/>
+          <p:nvPr/>
+        </p:nvSpPr>
+        <p:spPr>
+          <a:xfrm>
+            <a:off x="420361" y="1072134"/>
+            <a:ext cx="1056132" cy="1056132"/>
+          </a:xfrm>
+          <a:prstGeom prst="flowChartConnector">
+            <a:avLst/>
+          </a:prstGeom>
+          <a:noFill/>
+          <a:ln w="76200">
+            <a:solidFill>
+              <a:srgbClr val="C00000"/>
+            </a:solidFill>
+          </a:ln>
+        </p:spPr>
+        <p:style>
+          <a:lnRef idx="2">
+            <a:schemeClr val="accent1">
+              <a:shade val="15000"/>
+            </a:schemeClr>
+          </a:lnRef>
+          <a:fillRef idx="1">
+            <a:schemeClr val="accent1"/>
+          </a:fillRef>
+          <a:effectRef idx="0">
+            <a:schemeClr val="accent1"/>
+          </a:effectRef>
+          <a:fontRef idx="minor">
+            <a:schemeClr val="lt1"/>
+          </a:fontRef>
+        </p:style>
+        <p:txBody>
+          <a:bodyPr rtlCol="0" anchor="ctr"/>
+          <a:lstStyle/>
+          <a:p>
+            <a:pPr algn="ctr"/>
+            <a:endParaRPr lang="en-US" sz="2117"/>
+          </a:p>
+        </p:txBody>
+      </p:sp>
+      <p:sp>
+        <p:nvSpPr>
+          <p:cNvPr id="8" name="Flowchart: Connector 7">
+            <a:extLst>
+              <a:ext uri="{FF2B5EF4-FFF2-40B4-BE49-F238E27FC236}">
+                <a16:creationId xmlns:a16="http://schemas.microsoft.com/office/drawing/2014/main" id="{95E71FB6-86C3-5D8B-0832-26E3EA849125}"/>
+              </a:ext>
+            </a:extLst>
+          </p:cNvPr>
+          <p:cNvSpPr/>
+          <p:nvPr/>
+        </p:nvSpPr>
+        <p:spPr>
+          <a:xfrm>
+            <a:off x="564379" y="1216152"/>
+            <a:ext cx="768096" cy="768096"/>
+          </a:xfrm>
+          <a:prstGeom prst="flowChartConnector">
+            <a:avLst/>
+          </a:prstGeom>
+          <a:noFill/>
+          <a:ln w="76200">
+            <a:solidFill>
+              <a:srgbClr val="C00000"/>
+            </a:solidFill>
+          </a:ln>
+        </p:spPr>
+        <p:style>
+          <a:lnRef idx="2">
+            <a:schemeClr val="accent1">
+              <a:shade val="15000"/>
+            </a:schemeClr>
+          </a:lnRef>
+          <a:fillRef idx="1">
+            <a:schemeClr val="accent1"/>
+          </a:fillRef>
+          <a:effectRef idx="0">
+            <a:schemeClr val="accent1"/>
+          </a:effectRef>
+          <a:fontRef idx="minor">
+            <a:schemeClr val="lt1"/>
+          </a:fontRef>
+        </p:style>
+        <p:txBody>
+          <a:bodyPr rtlCol="0" anchor="ctr"/>
+          <a:lstStyle/>
+          <a:p>
+            <a:pPr algn="ctr"/>
+            <a:endParaRPr lang="en-US" sz="2117"/>
+          </a:p>
+        </p:txBody>
+      </p:sp>
+      <p:sp>
+        <p:nvSpPr>
+          <p:cNvPr id="9" name="Flowchart: Connector 8">
+            <a:extLst>
+              <a:ext uri="{FF2B5EF4-FFF2-40B4-BE49-F238E27FC236}">
+                <a16:creationId xmlns:a16="http://schemas.microsoft.com/office/drawing/2014/main" id="{4F0930C7-3C3E-D294-3222-61D1329496A5}"/>
+              </a:ext>
+            </a:extLst>
+          </p:cNvPr>
+          <p:cNvSpPr/>
+          <p:nvPr/>
+        </p:nvSpPr>
+        <p:spPr>
+          <a:xfrm>
+            <a:off x="708397" y="1360170"/>
+            <a:ext cx="480060" cy="480060"/>
+          </a:xfrm>
+          <a:prstGeom prst="flowChartConnector">
+            <a:avLst/>
+          </a:prstGeom>
+          <a:noFill/>
+          <a:ln w="76200">
+            <a:solidFill>
+              <a:srgbClr val="C00000"/>
+            </a:solidFill>
+          </a:ln>
+        </p:spPr>
+        <p:style>
+          <a:lnRef idx="2">
+            <a:schemeClr val="accent1">
+              <a:shade val="15000"/>
+            </a:schemeClr>
+          </a:lnRef>
+          <a:fillRef idx="1">
+            <a:schemeClr val="accent1"/>
+          </a:fillRef>
+          <a:effectRef idx="0">
+            <a:schemeClr val="accent1"/>
+          </a:effectRef>
+          <a:fontRef idx="minor">
+            <a:schemeClr val="lt1"/>
+          </a:fontRef>
+        </p:style>
+        <p:txBody>
+          <a:bodyPr rtlCol="0" anchor="ctr"/>
+          <a:lstStyle/>
+          <a:p>
+            <a:pPr algn="ctr"/>
+            <a:endParaRPr lang="en-US" sz="2117"/>
+          </a:p>
+        </p:txBody>
+      </p:sp>
+      <p:sp>
+        <p:nvSpPr>
+          <p:cNvPr id="10" name="Flowchart: Connector 9">
+            <a:extLst>
+              <a:ext uri="{FF2B5EF4-FFF2-40B4-BE49-F238E27FC236}">
+                <a16:creationId xmlns:a16="http://schemas.microsoft.com/office/drawing/2014/main" id="{CF458069-0224-95D9-00BE-B534EA3C1C9B}"/>
+              </a:ext>
+            </a:extLst>
+          </p:cNvPr>
+          <p:cNvSpPr/>
+          <p:nvPr/>
+        </p:nvSpPr>
+        <p:spPr>
+          <a:xfrm>
+            <a:off x="852415" y="1504188"/>
+            <a:ext cx="192024" cy="192024"/>
+          </a:xfrm>
+          <a:prstGeom prst="flowChartConnector">
+            <a:avLst/>
+          </a:prstGeom>
+          <a:noFill/>
+          <a:ln w="76200">
+            <a:solidFill>
+              <a:srgbClr val="C00000"/>
+            </a:solidFill>
+          </a:ln>
+        </p:spPr>
+        <p:style>
+          <a:lnRef idx="2">
+            <a:schemeClr val="accent1">
+              <a:shade val="15000"/>
+            </a:schemeClr>
+          </a:lnRef>
+          <a:fillRef idx="1">
+            <a:schemeClr val="accent1"/>
+          </a:fillRef>
+          <a:effectRef idx="0">
+            <a:schemeClr val="accent1"/>
+          </a:effectRef>
+          <a:fontRef idx="minor">
+            <a:schemeClr val="lt1"/>
+          </a:fontRef>
+        </p:style>
+        <p:txBody>
+          <a:bodyPr rtlCol="0" anchor="ctr"/>
+          <a:lstStyle/>
+          <a:p>
+            <a:pPr algn="ctr"/>
+            <a:endParaRPr lang="en-US" sz="2117"/>
+          </a:p>
+        </p:txBody>
+      </p:sp>
+    </p:spTree>
+    <p:extLst>
+      <p:ext uri="{BB962C8B-B14F-4D97-AF65-F5344CB8AC3E}">
+        <p14:creationId xmlns:p14="http://schemas.microsoft.com/office/powerpoint/2010/main" val="2580505433"/>
       </p:ext>
     </p:extLst>
   </p:cSld>
@@ -6425,244 +5032,6 @@
       </p:grpSpPr>
       <p:sp>
         <p:nvSpPr>
-          <p:cNvPr id="7" name="Flowchart: Connector 6">
-            <a:extLst>
-              <a:ext uri="{FF2B5EF4-FFF2-40B4-BE49-F238E27FC236}">
-                <a16:creationId xmlns:a16="http://schemas.microsoft.com/office/drawing/2014/main" id="{3D754C27-EE6E-B76D-58C5-1DF8E5CF2BCE}"/>
-              </a:ext>
-            </a:extLst>
-          </p:cNvPr>
-          <p:cNvSpPr/>
-          <p:nvPr/>
-        </p:nvSpPr>
-        <p:spPr>
-          <a:xfrm>
-            <a:off x="400344" y="640080"/>
-            <a:ext cx="1005840" cy="1005840"/>
-          </a:xfrm>
-          <a:prstGeom prst="flowChartConnector">
-            <a:avLst/>
-          </a:prstGeom>
-          <a:noFill/>
-          <a:ln w="76200">
-            <a:solidFill>
-              <a:srgbClr val="C00000"/>
-            </a:solidFill>
-          </a:ln>
-        </p:spPr>
-        <p:style>
-          <a:lnRef idx="2">
-            <a:schemeClr val="accent1">
-              <a:shade val="15000"/>
-            </a:schemeClr>
-          </a:lnRef>
-          <a:fillRef idx="1">
-            <a:schemeClr val="accent1"/>
-          </a:fillRef>
-          <a:effectRef idx="0">
-            <a:schemeClr val="accent1"/>
-          </a:effectRef>
-          <a:fontRef idx="minor">
-            <a:schemeClr val="lt1"/>
-          </a:fontRef>
-        </p:style>
-        <p:txBody>
-          <a:bodyPr rtlCol="0" anchor="ctr"/>
-          <a:lstStyle/>
-          <a:p>
-            <a:pPr algn="ctr"/>
-            <a:endParaRPr lang="en-US"/>
-          </a:p>
-        </p:txBody>
-      </p:sp>
-      <p:sp>
-        <p:nvSpPr>
-          <p:cNvPr id="8" name="Flowchart: Connector 7">
-            <a:extLst>
-              <a:ext uri="{FF2B5EF4-FFF2-40B4-BE49-F238E27FC236}">
-                <a16:creationId xmlns:a16="http://schemas.microsoft.com/office/drawing/2014/main" id="{95E71FB6-86C3-5D8B-0832-26E3EA849125}"/>
-              </a:ext>
-            </a:extLst>
-          </p:cNvPr>
-          <p:cNvSpPr/>
-          <p:nvPr/>
-        </p:nvSpPr>
-        <p:spPr>
-          <a:xfrm>
-            <a:off x="537504" y="777240"/>
-            <a:ext cx="731520" cy="731520"/>
-          </a:xfrm>
-          <a:prstGeom prst="flowChartConnector">
-            <a:avLst/>
-          </a:prstGeom>
-          <a:noFill/>
-          <a:ln w="76200">
-            <a:solidFill>
-              <a:srgbClr val="C00000"/>
-            </a:solidFill>
-          </a:ln>
-        </p:spPr>
-        <p:style>
-          <a:lnRef idx="2">
-            <a:schemeClr val="accent1">
-              <a:shade val="15000"/>
-            </a:schemeClr>
-          </a:lnRef>
-          <a:fillRef idx="1">
-            <a:schemeClr val="accent1"/>
-          </a:fillRef>
-          <a:effectRef idx="0">
-            <a:schemeClr val="accent1"/>
-          </a:effectRef>
-          <a:fontRef idx="minor">
-            <a:schemeClr val="lt1"/>
-          </a:fontRef>
-        </p:style>
-        <p:txBody>
-          <a:bodyPr rtlCol="0" anchor="ctr"/>
-          <a:lstStyle/>
-          <a:p>
-            <a:pPr algn="ctr"/>
-            <a:endParaRPr lang="en-US"/>
-          </a:p>
-        </p:txBody>
-      </p:sp>
-      <p:sp>
-        <p:nvSpPr>
-          <p:cNvPr id="9" name="Flowchart: Connector 8">
-            <a:extLst>
-              <a:ext uri="{FF2B5EF4-FFF2-40B4-BE49-F238E27FC236}">
-                <a16:creationId xmlns:a16="http://schemas.microsoft.com/office/drawing/2014/main" id="{4F0930C7-3C3E-D294-3222-61D1329496A5}"/>
-              </a:ext>
-            </a:extLst>
-          </p:cNvPr>
-          <p:cNvSpPr/>
-          <p:nvPr/>
-        </p:nvSpPr>
-        <p:spPr>
-          <a:xfrm>
-            <a:off x="674664" y="914400"/>
-            <a:ext cx="457200" cy="457200"/>
-          </a:xfrm>
-          <a:prstGeom prst="flowChartConnector">
-            <a:avLst/>
-          </a:prstGeom>
-          <a:noFill/>
-          <a:ln w="76200">
-            <a:solidFill>
-              <a:srgbClr val="C00000"/>
-            </a:solidFill>
-          </a:ln>
-        </p:spPr>
-        <p:style>
-          <a:lnRef idx="2">
-            <a:schemeClr val="accent1">
-              <a:shade val="15000"/>
-            </a:schemeClr>
-          </a:lnRef>
-          <a:fillRef idx="1">
-            <a:schemeClr val="accent1"/>
-          </a:fillRef>
-          <a:effectRef idx="0">
-            <a:schemeClr val="accent1"/>
-          </a:effectRef>
-          <a:fontRef idx="minor">
-            <a:schemeClr val="lt1"/>
-          </a:fontRef>
-        </p:style>
-        <p:txBody>
-          <a:bodyPr rtlCol="0" anchor="ctr"/>
-          <a:lstStyle/>
-          <a:p>
-            <a:pPr algn="ctr"/>
-            <a:endParaRPr lang="en-US"/>
-          </a:p>
-        </p:txBody>
-      </p:sp>
-      <p:sp>
-        <p:nvSpPr>
-          <p:cNvPr id="10" name="Flowchart: Connector 9">
-            <a:extLst>
-              <a:ext uri="{FF2B5EF4-FFF2-40B4-BE49-F238E27FC236}">
-                <a16:creationId xmlns:a16="http://schemas.microsoft.com/office/drawing/2014/main" id="{CF458069-0224-95D9-00BE-B534EA3C1C9B}"/>
-              </a:ext>
-            </a:extLst>
-          </p:cNvPr>
-          <p:cNvSpPr/>
-          <p:nvPr/>
-        </p:nvSpPr>
-        <p:spPr>
-          <a:xfrm>
-            <a:off x="811824" y="1051560"/>
-            <a:ext cx="182880" cy="182880"/>
-          </a:xfrm>
-          <a:prstGeom prst="flowChartConnector">
-            <a:avLst/>
-          </a:prstGeom>
-          <a:noFill/>
-          <a:ln w="76200">
-            <a:solidFill>
-              <a:srgbClr val="C00000"/>
-            </a:solidFill>
-          </a:ln>
-        </p:spPr>
-        <p:style>
-          <a:lnRef idx="2">
-            <a:schemeClr val="accent1">
-              <a:shade val="15000"/>
-            </a:schemeClr>
-          </a:lnRef>
-          <a:fillRef idx="1">
-            <a:schemeClr val="accent1"/>
-          </a:fillRef>
-          <a:effectRef idx="0">
-            <a:schemeClr val="accent1"/>
-          </a:effectRef>
-          <a:fontRef idx="minor">
-            <a:schemeClr val="lt1"/>
-          </a:fontRef>
-        </p:style>
-        <p:txBody>
-          <a:bodyPr rtlCol="0" anchor="ctr"/>
-          <a:lstStyle/>
-          <a:p>
-            <a:pPr algn="ctr"/>
-            <a:endParaRPr lang="en-US"/>
-          </a:p>
-        </p:txBody>
-      </p:sp>
-    </p:spTree>
-    <p:extLst>
-      <p:ext uri="{BB962C8B-B14F-4D97-AF65-F5344CB8AC3E}">
-        <p14:creationId xmlns:p14="http://schemas.microsoft.com/office/powerpoint/2010/main" val="2580505433"/>
-      </p:ext>
-    </p:extLst>
-  </p:cSld>
-  <p:clrMapOvr>
-    <a:masterClrMapping/>
-  </p:clrMapOvr>
-</p:sld>
-</file>
-
-<file path=ppt/slides/slide5.xml><?xml version="1.0" encoding="utf-8"?>
-<p:sld xmlns:a="http://schemas.openxmlformats.org/drawingml/2006/main" xmlns:r="http://schemas.openxmlformats.org/officeDocument/2006/relationships" xmlns:p="http://schemas.openxmlformats.org/presentationml/2006/main">
-  <p:cSld>
-    <p:spTree>
-      <p:nvGrpSpPr>
-        <p:cNvPr id="1" name=""/>
-        <p:cNvGrpSpPr/>
-        <p:nvPr/>
-      </p:nvGrpSpPr>
-      <p:grpSpPr>
-        <a:xfrm>
-          <a:off x="0" y="0"/>
-          <a:ext cx="0" cy="0"/>
-          <a:chOff x="0" y="0"/>
-          <a:chExt cx="0" cy="0"/>
-        </a:xfrm>
-      </p:grpSpPr>
-      <p:sp>
-        <p:nvSpPr>
           <p:cNvPr id="2" name="Multiplication Sign 1">
             <a:extLst>
               <a:ext uri="{FF2B5EF4-FFF2-40B4-BE49-F238E27FC236}">
@@ -6675,8 +5044,8 @@
         </p:nvSpPr>
         <p:spPr>
           <a:xfrm>
-            <a:off x="423672" y="1115568"/>
-            <a:ext cx="182880" cy="182880"/>
+            <a:off x="444856" y="1571396"/>
+            <a:ext cx="192024" cy="192024"/>
           </a:xfrm>
           <a:prstGeom prst="mathMultiply">
             <a:avLst/>
@@ -6709,7 +5078,7 @@
           <a:lstStyle/>
           <a:p>
             <a:pPr algn="ctr"/>
-            <a:endParaRPr lang="en-US"/>
+            <a:endParaRPr lang="en-US" sz="2117"/>
           </a:p>
         </p:txBody>
       </p:sp>
@@ -6727,8 +5096,8 @@
         </p:nvSpPr>
         <p:spPr>
           <a:xfrm>
-            <a:off x="546608" y="1028192"/>
-            <a:ext cx="182880" cy="182880"/>
+            <a:off x="573938" y="1479652"/>
+            <a:ext cx="192024" cy="192024"/>
           </a:xfrm>
           <a:prstGeom prst="mathMultiply">
             <a:avLst/>
@@ -6761,7 +5130,7 @@
           <a:lstStyle/>
           <a:p>
             <a:pPr algn="ctr"/>
-            <a:endParaRPr lang="en-US"/>
+            <a:endParaRPr lang="en-US" sz="2117"/>
           </a:p>
         </p:txBody>
       </p:sp>
@@ -6779,8 +5148,8 @@
         </p:nvSpPr>
         <p:spPr>
           <a:xfrm>
-            <a:off x="593598" y="1173480"/>
-            <a:ext cx="182880" cy="182880"/>
+            <a:off x="623278" y="1632204"/>
+            <a:ext cx="192024" cy="192024"/>
           </a:xfrm>
           <a:prstGeom prst="mathMultiply">
             <a:avLst/>
@@ -6813,7 +5182,7 @@
           <a:lstStyle/>
           <a:p>
             <a:pPr algn="ctr"/>
-            <a:endParaRPr lang="en-US"/>
+            <a:endParaRPr lang="en-US" sz="2117"/>
           </a:p>
         </p:txBody>
       </p:sp>
@@ -6831,8 +5200,8 @@
         </p:nvSpPr>
         <p:spPr>
           <a:xfrm>
-            <a:off x="2052320" y="1097280"/>
-            <a:ext cx="182880" cy="182880"/>
+            <a:off x="2154936" y="1552194"/>
+            <a:ext cx="192024" cy="192024"/>
           </a:xfrm>
           <a:prstGeom prst="mathMultiply">
             <a:avLst/>
@@ -6865,7 +5234,7 @@
           <a:lstStyle/>
           <a:p>
             <a:pPr algn="ctr"/>
-            <a:endParaRPr lang="en-US"/>
+            <a:endParaRPr lang="en-US" sz="2117"/>
           </a:p>
         </p:txBody>
       </p:sp>
@@ -6883,8 +5252,8 @@
         </p:nvSpPr>
         <p:spPr>
           <a:xfrm>
-            <a:off x="2352040" y="863600"/>
-            <a:ext cx="182880" cy="182880"/>
+            <a:off x="2469642" y="1306830"/>
+            <a:ext cx="192024" cy="192024"/>
           </a:xfrm>
           <a:prstGeom prst="mathMultiply">
             <a:avLst/>
@@ -6917,7 +5286,7 @@
           <a:lstStyle/>
           <a:p>
             <a:pPr algn="ctr"/>
-            <a:endParaRPr lang="en-US"/>
+            <a:endParaRPr lang="en-US" sz="2117"/>
           </a:p>
         </p:txBody>
       </p:sp>
@@ -6935,8 +5304,8 @@
         </p:nvSpPr>
         <p:spPr>
           <a:xfrm>
-            <a:off x="2491232" y="1280160"/>
-            <a:ext cx="182880" cy="182880"/>
+            <a:off x="2615794" y="1744218"/>
+            <a:ext cx="192024" cy="192024"/>
           </a:xfrm>
           <a:prstGeom prst="mathMultiply">
             <a:avLst/>
@@ -6969,7 +5338,7 @@
           <a:lstStyle/>
           <a:p>
             <a:pPr algn="ctr"/>
-            <a:endParaRPr lang="en-US"/>
+            <a:endParaRPr lang="en-US" sz="2117"/>
           </a:p>
         </p:txBody>
       </p:sp>

--- a/images/bias-brain.pptx
+++ b/images/bias-brain.pptx
@@ -4,6 +4,9 @@
   <p:sldMasterIdLst>
     <p:sldMasterId id="2147483684" r:id="rId1"/>
   </p:sldMasterIdLst>
+  <p:notesMasterIdLst>
+    <p:notesMasterId r:id="rId6"/>
+  </p:notesMasterIdLst>
   <p:sldIdLst>
     <p:sldId id="261" r:id="rId2"/>
     <p:sldId id="260" r:id="rId3"/>
@@ -115,6 +118,439 @@
 </p:presentation>
 </file>
 
+<file path=ppt/notesMasters/notesMaster1.xml><?xml version="1.0" encoding="utf-8"?>
+<p:notesMaster xmlns:a="http://schemas.openxmlformats.org/drawingml/2006/main" xmlns:r="http://schemas.openxmlformats.org/officeDocument/2006/relationships" xmlns:p="http://schemas.openxmlformats.org/presentationml/2006/main">
+  <p:cSld>
+    <p:bg>
+      <p:bgRef idx="1001">
+        <a:schemeClr val="bg1"/>
+      </p:bgRef>
+    </p:bg>
+    <p:spTree>
+      <p:nvGrpSpPr>
+        <p:cNvPr id="1" name=""/>
+        <p:cNvGrpSpPr/>
+        <p:nvPr/>
+      </p:nvGrpSpPr>
+      <p:grpSpPr>
+        <a:xfrm>
+          <a:off x="0" y="0"/>
+          <a:ext cx="0" cy="0"/>
+          <a:chOff x="0" y="0"/>
+          <a:chExt cx="0" cy="0"/>
+        </a:xfrm>
+      </p:grpSpPr>
+      <p:sp>
+        <p:nvSpPr>
+          <p:cNvPr id="2" name="Header Placeholder 1"/>
+          <p:cNvSpPr>
+            <a:spLocks noGrp="1"/>
+          </p:cNvSpPr>
+          <p:nvPr>
+            <p:ph type="hdr" sz="quarter"/>
+          </p:nvPr>
+        </p:nvSpPr>
+        <p:spPr>
+          <a:xfrm>
+            <a:off x="0" y="0"/>
+            <a:ext cx="2971800" cy="458788"/>
+          </a:xfrm>
+          <a:prstGeom prst="rect">
+            <a:avLst/>
+          </a:prstGeom>
+        </p:spPr>
+        <p:txBody>
+          <a:bodyPr vert="horz" lIns="91440" tIns="45720" rIns="91440" bIns="45720" rtlCol="0"/>
+          <a:lstStyle>
+            <a:lvl1pPr algn="l">
+              <a:defRPr sz="1200"/>
+            </a:lvl1pPr>
+          </a:lstStyle>
+          <a:p>
+            <a:endParaRPr lang="en-US"/>
+          </a:p>
+        </p:txBody>
+      </p:sp>
+      <p:sp>
+        <p:nvSpPr>
+          <p:cNvPr id="3" name="Date Placeholder 2"/>
+          <p:cNvSpPr>
+            <a:spLocks noGrp="1"/>
+          </p:cNvSpPr>
+          <p:nvPr>
+            <p:ph type="dt" idx="1"/>
+          </p:nvPr>
+        </p:nvSpPr>
+        <p:spPr>
+          <a:xfrm>
+            <a:off x="3884613" y="0"/>
+            <a:ext cx="2971800" cy="458788"/>
+          </a:xfrm>
+          <a:prstGeom prst="rect">
+            <a:avLst/>
+          </a:prstGeom>
+        </p:spPr>
+        <p:txBody>
+          <a:bodyPr vert="horz" lIns="91440" tIns="45720" rIns="91440" bIns="45720" rtlCol="0"/>
+          <a:lstStyle>
+            <a:lvl1pPr algn="r">
+              <a:defRPr sz="1200"/>
+            </a:lvl1pPr>
+          </a:lstStyle>
+          <a:p>
+            <a:fld id="{B1913588-C2C1-4AB8-9F0D-04EC72C1EC15}" type="datetimeFigureOut">
+              <a:rPr lang="en-US" smtClean="0"/>
+              <a:t>3/4/2026</a:t>
+            </a:fld>
+            <a:endParaRPr lang="en-US"/>
+          </a:p>
+        </p:txBody>
+      </p:sp>
+      <p:sp>
+        <p:nvSpPr>
+          <p:cNvPr id="4" name="Slide Image Placeholder 3"/>
+          <p:cNvSpPr>
+            <a:spLocks noGrp="1" noRot="1" noChangeAspect="1"/>
+          </p:cNvSpPr>
+          <p:nvPr>
+            <p:ph type="sldImg" idx="2"/>
+          </p:nvPr>
+        </p:nvSpPr>
+        <p:spPr>
+          <a:xfrm>
+            <a:off x="-1200150" y="1143000"/>
+            <a:ext cx="9258300" cy="3086100"/>
+          </a:xfrm>
+          <a:prstGeom prst="rect">
+            <a:avLst/>
+          </a:prstGeom>
+          <a:noFill/>
+          <a:ln w="12700">
+            <a:solidFill>
+              <a:prstClr val="black"/>
+            </a:solidFill>
+          </a:ln>
+        </p:spPr>
+        <p:txBody>
+          <a:bodyPr vert="horz" lIns="91440" tIns="45720" rIns="91440" bIns="45720" rtlCol="0" anchor="ctr"/>
+          <a:lstStyle/>
+          <a:p>
+            <a:endParaRPr lang="en-US"/>
+          </a:p>
+        </p:txBody>
+      </p:sp>
+      <p:sp>
+        <p:nvSpPr>
+          <p:cNvPr id="5" name="Notes Placeholder 4"/>
+          <p:cNvSpPr>
+            <a:spLocks noGrp="1"/>
+          </p:cNvSpPr>
+          <p:nvPr>
+            <p:ph type="body" sz="quarter" idx="3"/>
+          </p:nvPr>
+        </p:nvSpPr>
+        <p:spPr>
+          <a:xfrm>
+            <a:off x="685800" y="4400550"/>
+            <a:ext cx="5486400" cy="3600450"/>
+          </a:xfrm>
+          <a:prstGeom prst="rect">
+            <a:avLst/>
+          </a:prstGeom>
+        </p:spPr>
+        <p:txBody>
+          <a:bodyPr vert="horz" lIns="91440" tIns="45720" rIns="91440" bIns="45720" rtlCol="0"/>
+          <a:lstStyle/>
+          <a:p>
+            <a:pPr lvl="0"/>
+            <a:r>
+              <a:rPr lang="en-US"/>
+              <a:t>Click to edit Master text styles</a:t>
+            </a:r>
+          </a:p>
+          <a:p>
+            <a:pPr lvl="1"/>
+            <a:r>
+              <a:rPr lang="en-US"/>
+              <a:t>Second level</a:t>
+            </a:r>
+          </a:p>
+          <a:p>
+            <a:pPr lvl="2"/>
+            <a:r>
+              <a:rPr lang="en-US"/>
+              <a:t>Third level</a:t>
+            </a:r>
+          </a:p>
+          <a:p>
+            <a:pPr lvl="3"/>
+            <a:r>
+              <a:rPr lang="en-US"/>
+              <a:t>Fourth level</a:t>
+            </a:r>
+          </a:p>
+          <a:p>
+            <a:pPr lvl="4"/>
+            <a:r>
+              <a:rPr lang="en-US"/>
+              <a:t>Fifth level</a:t>
+            </a:r>
+          </a:p>
+        </p:txBody>
+      </p:sp>
+      <p:sp>
+        <p:nvSpPr>
+          <p:cNvPr id="6" name="Footer Placeholder 5"/>
+          <p:cNvSpPr>
+            <a:spLocks noGrp="1"/>
+          </p:cNvSpPr>
+          <p:nvPr>
+            <p:ph type="ftr" sz="quarter" idx="4"/>
+          </p:nvPr>
+        </p:nvSpPr>
+        <p:spPr>
+          <a:xfrm>
+            <a:off x="0" y="8685213"/>
+            <a:ext cx="2971800" cy="458787"/>
+          </a:xfrm>
+          <a:prstGeom prst="rect">
+            <a:avLst/>
+          </a:prstGeom>
+        </p:spPr>
+        <p:txBody>
+          <a:bodyPr vert="horz" lIns="91440" tIns="45720" rIns="91440" bIns="45720" rtlCol="0" anchor="b"/>
+          <a:lstStyle>
+            <a:lvl1pPr algn="l">
+              <a:defRPr sz="1200"/>
+            </a:lvl1pPr>
+          </a:lstStyle>
+          <a:p>
+            <a:endParaRPr lang="en-US"/>
+          </a:p>
+        </p:txBody>
+      </p:sp>
+      <p:sp>
+        <p:nvSpPr>
+          <p:cNvPr id="7" name="Slide Number Placeholder 6"/>
+          <p:cNvSpPr>
+            <a:spLocks noGrp="1"/>
+          </p:cNvSpPr>
+          <p:nvPr>
+            <p:ph type="sldNum" sz="quarter" idx="5"/>
+          </p:nvPr>
+        </p:nvSpPr>
+        <p:spPr>
+          <a:xfrm>
+            <a:off x="3884613" y="8685213"/>
+            <a:ext cx="2971800" cy="458787"/>
+          </a:xfrm>
+          <a:prstGeom prst="rect">
+            <a:avLst/>
+          </a:prstGeom>
+        </p:spPr>
+        <p:txBody>
+          <a:bodyPr vert="horz" lIns="91440" tIns="45720" rIns="91440" bIns="45720" rtlCol="0" anchor="b"/>
+          <a:lstStyle>
+            <a:lvl1pPr algn="r">
+              <a:defRPr sz="1200"/>
+            </a:lvl1pPr>
+          </a:lstStyle>
+          <a:p>
+            <a:fld id="{F2B37D13-0149-432C-8036-C4B5540D52E2}" type="slidenum">
+              <a:rPr lang="en-US" smtClean="0"/>
+              <a:t>‹#›</a:t>
+            </a:fld>
+            <a:endParaRPr lang="en-US"/>
+          </a:p>
+        </p:txBody>
+      </p:sp>
+    </p:spTree>
+    <p:extLst>
+      <p:ext uri="{BB962C8B-B14F-4D97-AF65-F5344CB8AC3E}">
+        <p14:creationId xmlns:p14="http://schemas.microsoft.com/office/powerpoint/2010/main" val="3062344222"/>
+      </p:ext>
+    </p:extLst>
+  </p:cSld>
+  <p:clrMap bg1="lt1" tx1="dk1" bg2="lt2" tx2="dk2" accent1="accent1" accent2="accent2" accent3="accent3" accent4="accent4" accent5="accent5" accent6="accent6" hlink="hlink" folHlink="folHlink"/>
+  <p:notesStyle>
+    <a:lvl1pPr marL="0" algn="l" defTabSz="914400" rtl="0" eaLnBrk="1" latinLnBrk="0" hangingPunct="1">
+      <a:defRPr sz="1200" kern="1200">
+        <a:solidFill>
+          <a:schemeClr val="tx1"/>
+        </a:solidFill>
+        <a:latin typeface="+mn-lt"/>
+        <a:ea typeface="+mn-ea"/>
+        <a:cs typeface="+mn-cs"/>
+      </a:defRPr>
+    </a:lvl1pPr>
+    <a:lvl2pPr marL="457200" algn="l" defTabSz="914400" rtl="0" eaLnBrk="1" latinLnBrk="0" hangingPunct="1">
+      <a:defRPr sz="1200" kern="1200">
+        <a:solidFill>
+          <a:schemeClr val="tx1"/>
+        </a:solidFill>
+        <a:latin typeface="+mn-lt"/>
+        <a:ea typeface="+mn-ea"/>
+        <a:cs typeface="+mn-cs"/>
+      </a:defRPr>
+    </a:lvl2pPr>
+    <a:lvl3pPr marL="914400" algn="l" defTabSz="914400" rtl="0" eaLnBrk="1" latinLnBrk="0" hangingPunct="1">
+      <a:defRPr sz="1200" kern="1200">
+        <a:solidFill>
+          <a:schemeClr val="tx1"/>
+        </a:solidFill>
+        <a:latin typeface="+mn-lt"/>
+        <a:ea typeface="+mn-ea"/>
+        <a:cs typeface="+mn-cs"/>
+      </a:defRPr>
+    </a:lvl3pPr>
+    <a:lvl4pPr marL="1371600" algn="l" defTabSz="914400" rtl="0" eaLnBrk="1" latinLnBrk="0" hangingPunct="1">
+      <a:defRPr sz="1200" kern="1200">
+        <a:solidFill>
+          <a:schemeClr val="tx1"/>
+        </a:solidFill>
+        <a:latin typeface="+mn-lt"/>
+        <a:ea typeface="+mn-ea"/>
+        <a:cs typeface="+mn-cs"/>
+      </a:defRPr>
+    </a:lvl4pPr>
+    <a:lvl5pPr marL="1828800" algn="l" defTabSz="914400" rtl="0" eaLnBrk="1" latinLnBrk="0" hangingPunct="1">
+      <a:defRPr sz="1200" kern="1200">
+        <a:solidFill>
+          <a:schemeClr val="tx1"/>
+        </a:solidFill>
+        <a:latin typeface="+mn-lt"/>
+        <a:ea typeface="+mn-ea"/>
+        <a:cs typeface="+mn-cs"/>
+      </a:defRPr>
+    </a:lvl5pPr>
+    <a:lvl6pPr marL="2286000" algn="l" defTabSz="914400" rtl="0" eaLnBrk="1" latinLnBrk="0" hangingPunct="1">
+      <a:defRPr sz="1200" kern="1200">
+        <a:solidFill>
+          <a:schemeClr val="tx1"/>
+        </a:solidFill>
+        <a:latin typeface="+mn-lt"/>
+        <a:ea typeface="+mn-ea"/>
+        <a:cs typeface="+mn-cs"/>
+      </a:defRPr>
+    </a:lvl6pPr>
+    <a:lvl7pPr marL="2743200" algn="l" defTabSz="914400" rtl="0" eaLnBrk="1" latinLnBrk="0" hangingPunct="1">
+      <a:defRPr sz="1200" kern="1200">
+        <a:solidFill>
+          <a:schemeClr val="tx1"/>
+        </a:solidFill>
+        <a:latin typeface="+mn-lt"/>
+        <a:ea typeface="+mn-ea"/>
+        <a:cs typeface="+mn-cs"/>
+      </a:defRPr>
+    </a:lvl7pPr>
+    <a:lvl8pPr marL="3200400" algn="l" defTabSz="914400" rtl="0" eaLnBrk="1" latinLnBrk="0" hangingPunct="1">
+      <a:defRPr sz="1200" kern="1200">
+        <a:solidFill>
+          <a:schemeClr val="tx1"/>
+        </a:solidFill>
+        <a:latin typeface="+mn-lt"/>
+        <a:ea typeface="+mn-ea"/>
+        <a:cs typeface="+mn-cs"/>
+      </a:defRPr>
+    </a:lvl8pPr>
+    <a:lvl9pPr marL="3657600" algn="l" defTabSz="914400" rtl="0" eaLnBrk="1" latinLnBrk="0" hangingPunct="1">
+      <a:defRPr sz="1200" kern="1200">
+        <a:solidFill>
+          <a:schemeClr val="tx1"/>
+        </a:solidFill>
+        <a:latin typeface="+mn-lt"/>
+        <a:ea typeface="+mn-ea"/>
+        <a:cs typeface="+mn-cs"/>
+      </a:defRPr>
+    </a:lvl9pPr>
+  </p:notesStyle>
+</p:notesMaster>
+</file>
+
+<file path=ppt/notesSlides/notesSlide1.xml><?xml version="1.0" encoding="utf-8"?>
+<p:notes xmlns:a="http://schemas.openxmlformats.org/drawingml/2006/main" xmlns:r="http://schemas.openxmlformats.org/officeDocument/2006/relationships" xmlns:p="http://schemas.openxmlformats.org/presentationml/2006/main">
+  <p:cSld>
+    <p:spTree>
+      <p:nvGrpSpPr>
+        <p:cNvPr id="1" name=""/>
+        <p:cNvGrpSpPr/>
+        <p:nvPr/>
+      </p:nvGrpSpPr>
+      <p:grpSpPr>
+        <a:xfrm>
+          <a:off x="0" y="0"/>
+          <a:ext cx="0" cy="0"/>
+          <a:chOff x="0" y="0"/>
+          <a:chExt cx="0" cy="0"/>
+        </a:xfrm>
+      </p:grpSpPr>
+      <p:sp>
+        <p:nvSpPr>
+          <p:cNvPr id="2" name="Slide Image Placeholder 1"/>
+          <p:cNvSpPr>
+            <a:spLocks noGrp="1" noRot="1" noChangeAspect="1"/>
+          </p:cNvSpPr>
+          <p:nvPr>
+            <p:ph type="sldImg"/>
+          </p:nvPr>
+        </p:nvSpPr>
+        <p:spPr/>
+      </p:sp>
+      <p:sp>
+        <p:nvSpPr>
+          <p:cNvPr id="3" name="Notes Placeholder 2"/>
+          <p:cNvSpPr>
+            <a:spLocks noGrp="1"/>
+          </p:cNvSpPr>
+          <p:nvPr>
+            <p:ph type="body" idx="1"/>
+          </p:nvPr>
+        </p:nvSpPr>
+        <p:spPr/>
+        <p:txBody>
+          <a:bodyPr/>
+          <a:lstStyle/>
+          <a:p>
+            <a:endParaRPr lang="en-US" dirty="0"/>
+          </a:p>
+        </p:txBody>
+      </p:sp>
+      <p:sp>
+        <p:nvSpPr>
+          <p:cNvPr id="4" name="Slide Number Placeholder 3"/>
+          <p:cNvSpPr>
+            <a:spLocks noGrp="1"/>
+          </p:cNvSpPr>
+          <p:nvPr>
+            <p:ph type="sldNum" sz="quarter" idx="5"/>
+          </p:nvPr>
+        </p:nvSpPr>
+        <p:spPr/>
+        <p:txBody>
+          <a:bodyPr/>
+          <a:lstStyle/>
+          <a:p>
+            <a:fld id="{F2B37D13-0149-432C-8036-C4B5540D52E2}" type="slidenum">
+              <a:rPr lang="en-US" smtClean="0"/>
+              <a:t>1</a:t>
+            </a:fld>
+            <a:endParaRPr lang="en-US"/>
+          </a:p>
+        </p:txBody>
+      </p:sp>
+    </p:spTree>
+    <p:extLst>
+      <p:ext uri="{BB962C8B-B14F-4D97-AF65-F5344CB8AC3E}">
+        <p14:creationId xmlns:p14="http://schemas.microsoft.com/office/powerpoint/2010/main" val="1192117230"/>
+      </p:ext>
+    </p:extLst>
+  </p:cSld>
+  <p:clrMapOvr>
+    <a:masterClrMapping/>
+  </p:clrMapOvr>
+</p:notes>
+</file>
+
 <file path=ppt/slideLayouts/slideLayout1.xml><?xml version="1.0" encoding="utf-8"?>
 <p:sldLayout xmlns:a="http://schemas.openxmlformats.org/drawingml/2006/main" xmlns:r="http://schemas.openxmlformats.org/officeDocument/2006/relationships" xmlns:p="http://schemas.openxmlformats.org/presentationml/2006/main" type="title" preserve="1">
   <p:cSld name="Title Slide">
@@ -246,7 +682,7 @@
           <a:p>
             <a:fld id="{B8700A39-06E1-486D-9C71-A159ABBEACA4}" type="datetimeFigureOut">
               <a:rPr lang="en-US" smtClean="0"/>
-              <a:t>3/3/2026</a:t>
+              <a:t>3/4/2026</a:t>
             </a:fld>
             <a:endParaRPr lang="en-US"/>
           </a:p>
@@ -416,7 +852,7 @@
           <a:p>
             <a:fld id="{B8700A39-06E1-486D-9C71-A159ABBEACA4}" type="datetimeFigureOut">
               <a:rPr lang="en-US" smtClean="0"/>
-              <a:t>3/3/2026</a:t>
+              <a:t>3/4/2026</a:t>
             </a:fld>
             <a:endParaRPr lang="en-US"/>
           </a:p>
@@ -596,7 +1032,7 @@
           <a:p>
             <a:fld id="{B8700A39-06E1-486D-9C71-A159ABBEACA4}" type="datetimeFigureOut">
               <a:rPr lang="en-US" smtClean="0"/>
-              <a:t>3/3/2026</a:t>
+              <a:t>3/4/2026</a:t>
             </a:fld>
             <a:endParaRPr lang="en-US"/>
           </a:p>
@@ -766,7 +1202,7 @@
           <a:p>
             <a:fld id="{B8700A39-06E1-486D-9C71-A159ABBEACA4}" type="datetimeFigureOut">
               <a:rPr lang="en-US" smtClean="0"/>
-              <a:t>3/3/2026</a:t>
+              <a:t>3/4/2026</a:t>
             </a:fld>
             <a:endParaRPr lang="en-US"/>
           </a:p>
@@ -1012,7 +1448,7 @@
           <a:p>
             <a:fld id="{B8700A39-06E1-486D-9C71-A159ABBEACA4}" type="datetimeFigureOut">
               <a:rPr lang="en-US" smtClean="0"/>
-              <a:t>3/3/2026</a:t>
+              <a:t>3/4/2026</a:t>
             </a:fld>
             <a:endParaRPr lang="en-US"/>
           </a:p>
@@ -1244,7 +1680,7 @@
           <a:p>
             <a:fld id="{B8700A39-06E1-486D-9C71-A159ABBEACA4}" type="datetimeFigureOut">
               <a:rPr lang="en-US" smtClean="0"/>
-              <a:t>3/3/2026</a:t>
+              <a:t>3/4/2026</a:t>
             </a:fld>
             <a:endParaRPr lang="en-US"/>
           </a:p>
@@ -1611,7 +2047,7 @@
           <a:p>
             <a:fld id="{B8700A39-06E1-486D-9C71-A159ABBEACA4}" type="datetimeFigureOut">
               <a:rPr lang="en-US" smtClean="0"/>
-              <a:t>3/3/2026</a:t>
+              <a:t>3/4/2026</a:t>
             </a:fld>
             <a:endParaRPr lang="en-US"/>
           </a:p>
@@ -1729,7 +2165,7 @@
           <a:p>
             <a:fld id="{B8700A39-06E1-486D-9C71-A159ABBEACA4}" type="datetimeFigureOut">
               <a:rPr lang="en-US" smtClean="0"/>
-              <a:t>3/3/2026</a:t>
+              <a:t>3/4/2026</a:t>
             </a:fld>
             <a:endParaRPr lang="en-US"/>
           </a:p>
@@ -1824,7 +2260,7 @@
           <a:p>
             <a:fld id="{B8700A39-06E1-486D-9C71-A159ABBEACA4}" type="datetimeFigureOut">
               <a:rPr lang="en-US" smtClean="0"/>
-              <a:t>3/3/2026</a:t>
+              <a:t>3/4/2026</a:t>
             </a:fld>
             <a:endParaRPr lang="en-US"/>
           </a:p>
@@ -2101,7 +2537,7 @@
           <a:p>
             <a:fld id="{B8700A39-06E1-486D-9C71-A159ABBEACA4}" type="datetimeFigureOut">
               <a:rPr lang="en-US" smtClean="0"/>
-              <a:t>3/3/2026</a:t>
+              <a:t>3/4/2026</a:t>
             </a:fld>
             <a:endParaRPr lang="en-US"/>
           </a:p>
@@ -2358,7 +2794,7 @@
           <a:p>
             <a:fld id="{B8700A39-06E1-486D-9C71-A159ABBEACA4}" type="datetimeFigureOut">
               <a:rPr lang="en-US" smtClean="0"/>
-              <a:t>3/3/2026</a:t>
+              <a:t>3/4/2026</a:t>
             </a:fld>
             <a:endParaRPr lang="en-US"/>
           </a:p>
@@ -2571,7 +3007,7 @@
           <a:p>
             <a:fld id="{B8700A39-06E1-486D-9C71-A159ABBEACA4}" type="datetimeFigureOut">
               <a:rPr lang="en-US" smtClean="0"/>
-              <a:t>3/3/2026</a:t>
+              <a:t>3/4/2026</a:t>
             </a:fld>
             <a:endParaRPr lang="en-US"/>
           </a:p>
@@ -2997,10 +3433,10 @@
           <p:nvPr/>
         </p:nvPicPr>
         <p:blipFill>
-          <a:blip r:embed="rId2">
+          <a:blip r:embed="rId3">
             <a:extLst>
               <a:ext uri="{96DAC541-7B7A-43D3-8B79-37D633B846F1}">
-                <asvg:svgBlip xmlns:asvg="http://schemas.microsoft.com/office/drawing/2016/SVG/main" r:embed="rId3"/>
+                <asvg:svgBlip xmlns:asvg="http://schemas.microsoft.com/office/drawing/2016/SVG/main" r:embed="rId4"/>
               </a:ext>
             </a:extLst>
           </a:blip>
@@ -3033,10 +3469,10 @@
           <p:nvPr/>
         </p:nvPicPr>
         <p:blipFill>
-          <a:blip r:embed="rId2">
+          <a:blip r:embed="rId3">
             <a:extLst>
               <a:ext uri="{96DAC541-7B7A-43D3-8B79-37D633B846F1}">
-                <asvg:svgBlip xmlns:asvg="http://schemas.microsoft.com/office/drawing/2016/SVG/main" r:embed="rId3"/>
+                <asvg:svgBlip xmlns:asvg="http://schemas.microsoft.com/office/drawing/2016/SVG/main" r:embed="rId4"/>
               </a:ext>
             </a:extLst>
           </a:blip>
@@ -3069,10 +3505,10 @@
           <p:nvPr/>
         </p:nvPicPr>
         <p:blipFill>
-          <a:blip r:embed="rId2">
+          <a:blip r:embed="rId3">
             <a:extLst>
               <a:ext uri="{96DAC541-7B7A-43D3-8B79-37D633B846F1}">
-                <asvg:svgBlip xmlns:asvg="http://schemas.microsoft.com/office/drawing/2016/SVG/main" r:embed="rId3"/>
+                <asvg:svgBlip xmlns:asvg="http://schemas.microsoft.com/office/drawing/2016/SVG/main" r:embed="rId4"/>
               </a:ext>
             </a:extLst>
           </a:blip>
@@ -3105,10 +3541,10 @@
           <p:nvPr/>
         </p:nvPicPr>
         <p:blipFill>
-          <a:blip r:embed="rId2">
+          <a:blip r:embed="rId3">
             <a:extLst>
               <a:ext uri="{96DAC541-7B7A-43D3-8B79-37D633B846F1}">
-                <asvg:svgBlip xmlns:asvg="http://schemas.microsoft.com/office/drawing/2016/SVG/main" r:embed="rId3"/>
+                <asvg:svgBlip xmlns:asvg="http://schemas.microsoft.com/office/drawing/2016/SVG/main" r:embed="rId4"/>
               </a:ext>
             </a:extLst>
           </a:blip>
@@ -3128,10 +3564,10 @@
       </p:pic>
       <p:sp>
         <p:nvSpPr>
-          <p:cNvPr id="2" name="Flowchart: Connector 1">
+          <p:cNvPr id="26" name="Flowchart: Connector 25">
             <a:extLst>
               <a:ext uri="{FF2B5EF4-FFF2-40B4-BE49-F238E27FC236}">
-                <a16:creationId xmlns:a16="http://schemas.microsoft.com/office/drawing/2014/main" id="{214E3771-E0EF-1702-78B1-45E355768185}"/>
+                <a16:creationId xmlns:a16="http://schemas.microsoft.com/office/drawing/2014/main" id="{DF8E9995-3A7E-770E-3477-5D27494D0850}"/>
               </a:ext>
             </a:extLst>
           </p:cNvPr>
@@ -3140,7 +3576,7 @@
         </p:nvSpPr>
         <p:spPr>
           <a:xfrm>
-            <a:off x="777330" y="1072134"/>
+            <a:off x="672084" y="1072134"/>
             <a:ext cx="1056132" cy="1056132"/>
           </a:xfrm>
           <a:prstGeom prst="flowChartConnector">
@@ -3180,10 +3616,10 @@
       </p:sp>
       <p:sp>
         <p:nvSpPr>
-          <p:cNvPr id="7" name="Flowchart: Connector 6">
+          <p:cNvPr id="28" name="Flowchart: Connector 27">
             <a:extLst>
               <a:ext uri="{FF2B5EF4-FFF2-40B4-BE49-F238E27FC236}">
-                <a16:creationId xmlns:a16="http://schemas.microsoft.com/office/drawing/2014/main" id="{F394243C-B49A-E0D6-0C6F-1A3D288A591F}"/>
+                <a16:creationId xmlns:a16="http://schemas.microsoft.com/office/drawing/2014/main" id="{B1642983-E52D-FF26-D1EA-1E5C8AB55927}"/>
               </a:ext>
             </a:extLst>
           </p:cNvPr>
@@ -3192,8 +3628,8 @@
         </p:nvSpPr>
         <p:spPr>
           <a:xfrm>
-            <a:off x="921348" y="1216152"/>
-            <a:ext cx="768096" cy="768096"/>
+            <a:off x="3072889" y="1072134"/>
+            <a:ext cx="1056132" cy="1056132"/>
           </a:xfrm>
           <a:prstGeom prst="flowChartConnector">
             <a:avLst/>
@@ -3232,10 +3668,10 @@
       </p:sp>
       <p:sp>
         <p:nvSpPr>
-          <p:cNvPr id="8" name="Flowchart: Connector 7">
+          <p:cNvPr id="29" name="Flowchart: Connector 28">
             <a:extLst>
               <a:ext uri="{FF2B5EF4-FFF2-40B4-BE49-F238E27FC236}">
-                <a16:creationId xmlns:a16="http://schemas.microsoft.com/office/drawing/2014/main" id="{81D9B8E4-B68B-B4D1-0CC8-44C06695F0A3}"/>
+                <a16:creationId xmlns:a16="http://schemas.microsoft.com/office/drawing/2014/main" id="{42C19175-AE27-CAD2-FD70-3A91E75314F3}"/>
               </a:ext>
             </a:extLst>
           </p:cNvPr>
@@ -3244,8 +3680,8 @@
         </p:nvSpPr>
         <p:spPr>
           <a:xfrm>
-            <a:off x="1065366" y="1360170"/>
-            <a:ext cx="480060" cy="480060"/>
+            <a:off x="5472179" y="1072134"/>
+            <a:ext cx="1056132" cy="1056132"/>
           </a:xfrm>
           <a:prstGeom prst="flowChartConnector">
             <a:avLst/>
@@ -3284,10 +3720,10 @@
       </p:sp>
       <p:sp>
         <p:nvSpPr>
-          <p:cNvPr id="9" name="Flowchart: Connector 8">
+          <p:cNvPr id="30" name="Flowchart: Connector 29">
             <a:extLst>
               <a:ext uri="{FF2B5EF4-FFF2-40B4-BE49-F238E27FC236}">
-                <a16:creationId xmlns:a16="http://schemas.microsoft.com/office/drawing/2014/main" id="{1E219C02-71CA-F9B0-D471-29372ABAFFBC}"/>
+                <a16:creationId xmlns:a16="http://schemas.microsoft.com/office/drawing/2014/main" id="{7C0F5898-B108-0ADD-39B9-A8E0D60B746D}"/>
               </a:ext>
             </a:extLst>
           </p:cNvPr>
@@ -3296,8 +3732,8 @@
         </p:nvSpPr>
         <p:spPr>
           <a:xfrm>
-            <a:off x="1209384" y="1504188"/>
-            <a:ext cx="192024" cy="192024"/>
+            <a:off x="7872479" y="1072134"/>
+            <a:ext cx="1056132" cy="1056132"/>
           </a:xfrm>
           <a:prstGeom prst="flowChartConnector">
             <a:avLst/>
@@ -3336,10 +3772,10 @@
       </p:sp>
       <p:sp>
         <p:nvSpPr>
-          <p:cNvPr id="14" name="Flowchart: Connector 13">
+          <p:cNvPr id="31" name="Flowchart: Connector 30">
             <a:extLst>
               <a:ext uri="{FF2B5EF4-FFF2-40B4-BE49-F238E27FC236}">
-                <a16:creationId xmlns:a16="http://schemas.microsoft.com/office/drawing/2014/main" id="{EB371EDF-5627-5109-29DF-2C9EE6786BBA}"/>
+                <a16:creationId xmlns:a16="http://schemas.microsoft.com/office/drawing/2014/main" id="{791030A6-8CA6-D194-BDB7-C597B71313DE}"/>
               </a:ext>
             </a:extLst>
           </p:cNvPr>
@@ -3348,8 +3784,8 @@
         </p:nvSpPr>
         <p:spPr>
           <a:xfrm>
-            <a:off x="3177630" y="1072134"/>
-            <a:ext cx="1056132" cy="1056132"/>
+            <a:off x="816102" y="1216152"/>
+            <a:ext cx="768096" cy="768096"/>
           </a:xfrm>
           <a:prstGeom prst="flowChartConnector">
             <a:avLst/>
@@ -3388,10 +3824,10 @@
       </p:sp>
       <p:sp>
         <p:nvSpPr>
-          <p:cNvPr id="15" name="Flowchart: Connector 14">
+          <p:cNvPr id="35" name="Flowchart: Connector 34">
             <a:extLst>
               <a:ext uri="{FF2B5EF4-FFF2-40B4-BE49-F238E27FC236}">
-                <a16:creationId xmlns:a16="http://schemas.microsoft.com/office/drawing/2014/main" id="{8138BA02-F3AE-5825-87AC-1B68DA86A031}"/>
+                <a16:creationId xmlns:a16="http://schemas.microsoft.com/office/drawing/2014/main" id="{78EFC507-5AB7-072E-B954-6D047C5FC805}"/>
               </a:ext>
             </a:extLst>
           </p:cNvPr>
@@ -3400,8 +3836,8 @@
         </p:nvSpPr>
         <p:spPr>
           <a:xfrm>
-            <a:off x="3321648" y="1216152"/>
-            <a:ext cx="768096" cy="768096"/>
+            <a:off x="960120" y="1360170"/>
+            <a:ext cx="480060" cy="480060"/>
           </a:xfrm>
           <a:prstGeom prst="flowChartConnector">
             <a:avLst/>
@@ -3440,10 +3876,10 @@
       </p:sp>
       <p:sp>
         <p:nvSpPr>
-          <p:cNvPr id="16" name="Flowchart: Connector 15">
+          <p:cNvPr id="36" name="Flowchart: Connector 35">
             <a:extLst>
               <a:ext uri="{FF2B5EF4-FFF2-40B4-BE49-F238E27FC236}">
-                <a16:creationId xmlns:a16="http://schemas.microsoft.com/office/drawing/2014/main" id="{9D827F47-32ED-97C8-31CD-89E958FCA5A4}"/>
+                <a16:creationId xmlns:a16="http://schemas.microsoft.com/office/drawing/2014/main" id="{62D040E6-1691-17AB-344B-B22AB2D919C4}"/>
               </a:ext>
             </a:extLst>
           </p:cNvPr>
@@ -3452,8 +3888,8 @@
         </p:nvSpPr>
         <p:spPr>
           <a:xfrm>
-            <a:off x="3465666" y="1360170"/>
-            <a:ext cx="480060" cy="480060"/>
+            <a:off x="1104138" y="1504188"/>
+            <a:ext cx="192024" cy="192024"/>
           </a:xfrm>
           <a:prstGeom prst="flowChartConnector">
             <a:avLst/>
@@ -3492,10 +3928,10 @@
       </p:sp>
       <p:sp>
         <p:nvSpPr>
-          <p:cNvPr id="17" name="Flowchart: Connector 16">
+          <p:cNvPr id="37" name="Flowchart: Connector 36">
             <a:extLst>
               <a:ext uri="{FF2B5EF4-FFF2-40B4-BE49-F238E27FC236}">
-                <a16:creationId xmlns:a16="http://schemas.microsoft.com/office/drawing/2014/main" id="{4107351C-04BD-477F-23BE-36C18CD8E116}"/>
+                <a16:creationId xmlns:a16="http://schemas.microsoft.com/office/drawing/2014/main" id="{99E2D17E-FD5C-3A43-F045-2E04671B6F34}"/>
               </a:ext>
             </a:extLst>
           </p:cNvPr>
@@ -3504,8 +3940,8 @@
         </p:nvSpPr>
         <p:spPr>
           <a:xfrm>
-            <a:off x="3609684" y="1504188"/>
-            <a:ext cx="192024" cy="192024"/>
+            <a:off x="3216402" y="1216152"/>
+            <a:ext cx="768096" cy="768096"/>
           </a:xfrm>
           <a:prstGeom prst="flowChartConnector">
             <a:avLst/>
@@ -3544,10 +3980,10 @@
       </p:sp>
       <p:sp>
         <p:nvSpPr>
-          <p:cNvPr id="18" name="Flowchart: Connector 17">
+          <p:cNvPr id="47" name="Flowchart: Connector 46">
             <a:extLst>
               <a:ext uri="{FF2B5EF4-FFF2-40B4-BE49-F238E27FC236}">
-                <a16:creationId xmlns:a16="http://schemas.microsoft.com/office/drawing/2014/main" id="{5D5D4632-F4F3-4CFA-BE2C-F30B1B74997D}"/>
+                <a16:creationId xmlns:a16="http://schemas.microsoft.com/office/drawing/2014/main" id="{11E59B7C-A104-7D1A-97E8-92D74915D0CD}"/>
               </a:ext>
             </a:extLst>
           </p:cNvPr>
@@ -3556,8 +3992,8 @@
         </p:nvSpPr>
         <p:spPr>
           <a:xfrm>
-            <a:off x="5577930" y="1072134"/>
-            <a:ext cx="1056132" cy="1056132"/>
+            <a:off x="3360420" y="1360170"/>
+            <a:ext cx="480060" cy="480060"/>
           </a:xfrm>
           <a:prstGeom prst="flowChartConnector">
             <a:avLst/>
@@ -3596,10 +4032,10 @@
       </p:sp>
       <p:sp>
         <p:nvSpPr>
-          <p:cNvPr id="19" name="Flowchart: Connector 18">
+          <p:cNvPr id="48" name="Flowchart: Connector 47">
             <a:extLst>
               <a:ext uri="{FF2B5EF4-FFF2-40B4-BE49-F238E27FC236}">
-                <a16:creationId xmlns:a16="http://schemas.microsoft.com/office/drawing/2014/main" id="{77B77236-CF61-DE03-7429-2E11C196A598}"/>
+                <a16:creationId xmlns:a16="http://schemas.microsoft.com/office/drawing/2014/main" id="{E03A7836-A827-D9A9-AA7B-7BD6294C2510}"/>
               </a:ext>
             </a:extLst>
           </p:cNvPr>
@@ -3608,8 +4044,8 @@
         </p:nvSpPr>
         <p:spPr>
           <a:xfrm>
-            <a:off x="5721948" y="1216152"/>
-            <a:ext cx="768096" cy="768096"/>
+            <a:off x="3504438" y="1504188"/>
+            <a:ext cx="192024" cy="192024"/>
           </a:xfrm>
           <a:prstGeom prst="flowChartConnector">
             <a:avLst/>
@@ -3648,10 +4084,10 @@
       </p:sp>
       <p:sp>
         <p:nvSpPr>
-          <p:cNvPr id="20" name="Flowchart: Connector 19">
+          <p:cNvPr id="49" name="Flowchart: Connector 48">
             <a:extLst>
               <a:ext uri="{FF2B5EF4-FFF2-40B4-BE49-F238E27FC236}">
-                <a16:creationId xmlns:a16="http://schemas.microsoft.com/office/drawing/2014/main" id="{8C2DB0A9-5571-4232-102F-D4E9F9E062CD}"/>
+                <a16:creationId xmlns:a16="http://schemas.microsoft.com/office/drawing/2014/main" id="{3BF79896-3C8D-C719-9A0D-06161BE7A379}"/>
               </a:ext>
             </a:extLst>
           </p:cNvPr>
@@ -3660,8 +4096,8 @@
         </p:nvSpPr>
         <p:spPr>
           <a:xfrm>
-            <a:off x="5865966" y="1360170"/>
-            <a:ext cx="480060" cy="480060"/>
+            <a:off x="5616702" y="1216152"/>
+            <a:ext cx="768096" cy="768096"/>
           </a:xfrm>
           <a:prstGeom prst="flowChartConnector">
             <a:avLst/>
@@ -3700,10 +4136,10 @@
       </p:sp>
       <p:sp>
         <p:nvSpPr>
-          <p:cNvPr id="21" name="Flowchart: Connector 20">
+          <p:cNvPr id="50" name="Flowchart: Connector 49">
             <a:extLst>
               <a:ext uri="{FF2B5EF4-FFF2-40B4-BE49-F238E27FC236}">
-                <a16:creationId xmlns:a16="http://schemas.microsoft.com/office/drawing/2014/main" id="{3E71695C-45C7-7F95-C88D-79C61EC8AC82}"/>
+                <a16:creationId xmlns:a16="http://schemas.microsoft.com/office/drawing/2014/main" id="{F14C6BFD-B210-1F80-94A4-C0E93B5A834C}"/>
               </a:ext>
             </a:extLst>
           </p:cNvPr>
@@ -3712,8 +4148,8 @@
         </p:nvSpPr>
         <p:spPr>
           <a:xfrm>
-            <a:off x="6009984" y="1504188"/>
-            <a:ext cx="192024" cy="192024"/>
+            <a:off x="5760720" y="1360170"/>
+            <a:ext cx="480060" cy="480060"/>
           </a:xfrm>
           <a:prstGeom prst="flowChartConnector">
             <a:avLst/>
@@ -3752,10 +4188,10 @@
       </p:sp>
       <p:sp>
         <p:nvSpPr>
-          <p:cNvPr id="22" name="Flowchart: Connector 21">
+          <p:cNvPr id="51" name="Flowchart: Connector 50">
             <a:extLst>
               <a:ext uri="{FF2B5EF4-FFF2-40B4-BE49-F238E27FC236}">
-                <a16:creationId xmlns:a16="http://schemas.microsoft.com/office/drawing/2014/main" id="{5A6FE1C9-A26A-4FC1-CB0E-A6A53D24FAC9}"/>
+                <a16:creationId xmlns:a16="http://schemas.microsoft.com/office/drawing/2014/main" id="{55873AB6-A91F-BEAA-7302-0A4491C2DA0E}"/>
               </a:ext>
             </a:extLst>
           </p:cNvPr>
@@ -3764,8 +4200,8 @@
         </p:nvSpPr>
         <p:spPr>
           <a:xfrm>
-            <a:off x="7978230" y="1072134"/>
-            <a:ext cx="1056132" cy="1056132"/>
+            <a:off x="5904738" y="1504188"/>
+            <a:ext cx="192024" cy="192024"/>
           </a:xfrm>
           <a:prstGeom prst="flowChartConnector">
             <a:avLst/>
@@ -3804,10 +4240,10 @@
       </p:sp>
       <p:sp>
         <p:nvSpPr>
-          <p:cNvPr id="23" name="Flowchart: Connector 22">
+          <p:cNvPr id="52" name="Flowchart: Connector 51">
             <a:extLst>
               <a:ext uri="{FF2B5EF4-FFF2-40B4-BE49-F238E27FC236}">
-                <a16:creationId xmlns:a16="http://schemas.microsoft.com/office/drawing/2014/main" id="{615AE5A8-C0D4-342D-BEA6-C9E477ABF937}"/>
+                <a16:creationId xmlns:a16="http://schemas.microsoft.com/office/drawing/2014/main" id="{1BB9F2AE-BDC5-37CE-0BD6-18C9E224AC69}"/>
               </a:ext>
             </a:extLst>
           </p:cNvPr>
@@ -3816,7 +4252,7 @@
         </p:nvSpPr>
         <p:spPr>
           <a:xfrm>
-            <a:off x="8122248" y="1216152"/>
+            <a:off x="8017002" y="1216152"/>
             <a:ext cx="768096" cy="768096"/>
           </a:xfrm>
           <a:prstGeom prst="flowChartConnector">
@@ -3856,10 +4292,10 @@
       </p:sp>
       <p:sp>
         <p:nvSpPr>
-          <p:cNvPr id="24" name="Flowchart: Connector 23">
+          <p:cNvPr id="53" name="Flowchart: Connector 52">
             <a:extLst>
               <a:ext uri="{FF2B5EF4-FFF2-40B4-BE49-F238E27FC236}">
-                <a16:creationId xmlns:a16="http://schemas.microsoft.com/office/drawing/2014/main" id="{8C001727-28B3-D0DE-EC86-1CE231FF8952}"/>
+                <a16:creationId xmlns:a16="http://schemas.microsoft.com/office/drawing/2014/main" id="{2DBDDA79-47AF-3957-9037-60F456E839E6}"/>
               </a:ext>
             </a:extLst>
           </p:cNvPr>
@@ -3868,7 +4304,7 @@
         </p:nvSpPr>
         <p:spPr>
           <a:xfrm>
-            <a:off x="8266266" y="1360170"/>
+            <a:off x="8161020" y="1360170"/>
             <a:ext cx="480060" cy="480060"/>
           </a:xfrm>
           <a:prstGeom prst="flowChartConnector">
@@ -3908,10 +4344,10 @@
       </p:sp>
       <p:sp>
         <p:nvSpPr>
-          <p:cNvPr id="25" name="Flowchart: Connector 24">
+          <p:cNvPr id="54" name="Flowchart: Connector 53">
             <a:extLst>
               <a:ext uri="{FF2B5EF4-FFF2-40B4-BE49-F238E27FC236}">
-                <a16:creationId xmlns:a16="http://schemas.microsoft.com/office/drawing/2014/main" id="{8DF22DA1-2919-C60C-C27F-001AABCBA457}"/>
+                <a16:creationId xmlns:a16="http://schemas.microsoft.com/office/drawing/2014/main" id="{4D903455-B962-9685-2535-6E8D2034A7B6}"/>
               </a:ext>
             </a:extLst>
           </p:cNvPr>
@@ -3920,7 +4356,7 @@
         </p:nvSpPr>
         <p:spPr>
           <a:xfrm>
-            <a:off x="8410284" y="1504188"/>
+            <a:off x="8305038" y="1504188"/>
             <a:ext cx="192024" cy="192024"/>
           </a:xfrm>
           <a:prstGeom prst="flowChartConnector">
@@ -3960,10 +4396,10 @@
       </p:sp>
       <p:sp>
         <p:nvSpPr>
-          <p:cNvPr id="32" name="Multiplication Sign 31">
+          <p:cNvPr id="55" name="Multiplication Sign 54">
             <a:extLst>
               <a:ext uri="{FF2B5EF4-FFF2-40B4-BE49-F238E27FC236}">
-                <a16:creationId xmlns:a16="http://schemas.microsoft.com/office/drawing/2014/main" id="{346CB416-D4E1-27AD-6C0F-D7A1A58C0F66}"/>
+                <a16:creationId xmlns:a16="http://schemas.microsoft.com/office/drawing/2014/main" id="{49904F61-A93B-6D48-6EDB-1B5750FB3196}"/>
               </a:ext>
             </a:extLst>
           </p:cNvPr>
@@ -3972,7 +4408,7 @@
         </p:nvSpPr>
         <p:spPr>
           <a:xfrm>
-            <a:off x="1113372" y="1504188"/>
+            <a:off x="1011772" y="1504188"/>
             <a:ext cx="192024" cy="192024"/>
           </a:xfrm>
           <a:prstGeom prst="mathMultiply">
@@ -4012,10 +4448,10 @@
       </p:sp>
       <p:sp>
         <p:nvSpPr>
-          <p:cNvPr id="33" name="Multiplication Sign 32">
+          <p:cNvPr id="56" name="Multiplication Sign 55">
             <a:extLst>
               <a:ext uri="{FF2B5EF4-FFF2-40B4-BE49-F238E27FC236}">
-                <a16:creationId xmlns:a16="http://schemas.microsoft.com/office/drawing/2014/main" id="{570ABCA8-E0C6-57BC-A595-414E5F921FB1}"/>
+                <a16:creationId xmlns:a16="http://schemas.microsoft.com/office/drawing/2014/main" id="{96C2FA5E-C8ED-3627-A257-264D5F9D881B}"/>
               </a:ext>
             </a:extLst>
           </p:cNvPr>
@@ -4024,7 +4460,7 @@
         </p:nvSpPr>
         <p:spPr>
           <a:xfrm>
-            <a:off x="1242455" y="1412443"/>
+            <a:off x="1140855" y="1412443"/>
             <a:ext cx="192024" cy="192024"/>
           </a:xfrm>
           <a:prstGeom prst="mathMultiply">
@@ -4064,10 +4500,10 @@
       </p:sp>
       <p:sp>
         <p:nvSpPr>
-          <p:cNvPr id="34" name="Multiplication Sign 33">
+          <p:cNvPr id="57" name="Multiplication Sign 56">
             <a:extLst>
               <a:ext uri="{FF2B5EF4-FFF2-40B4-BE49-F238E27FC236}">
-                <a16:creationId xmlns:a16="http://schemas.microsoft.com/office/drawing/2014/main" id="{146F3FC9-0A56-5849-3694-F2547C58B21E}"/>
+                <a16:creationId xmlns:a16="http://schemas.microsoft.com/office/drawing/2014/main" id="{21AC62B0-6536-D0CD-089F-407CF218917F}"/>
               </a:ext>
             </a:extLst>
           </p:cNvPr>
@@ -4076,7 +4512,7 @@
         </p:nvSpPr>
         <p:spPr>
           <a:xfrm>
-            <a:off x="1291794" y="1564996"/>
+            <a:off x="1190194" y="1564996"/>
             <a:ext cx="192024" cy="192024"/>
           </a:xfrm>
           <a:prstGeom prst="mathMultiply">
@@ -4116,10 +4552,10 @@
       </p:sp>
       <p:sp>
         <p:nvSpPr>
-          <p:cNvPr id="38" name="Multiplication Sign 37">
+          <p:cNvPr id="58" name="Multiplication Sign 57">
             <a:extLst>
               <a:ext uri="{FF2B5EF4-FFF2-40B4-BE49-F238E27FC236}">
-                <a16:creationId xmlns:a16="http://schemas.microsoft.com/office/drawing/2014/main" id="{098C83BF-1997-F9B1-8C30-40AE8A021BDB}"/>
+                <a16:creationId xmlns:a16="http://schemas.microsoft.com/office/drawing/2014/main" id="{328F25C5-79A6-4186-9AAD-FCFE812A0060}"/>
               </a:ext>
             </a:extLst>
           </p:cNvPr>
@@ -4128,7 +4564,7 @@
         </p:nvSpPr>
         <p:spPr>
           <a:xfrm>
-            <a:off x="3208434" y="1757020"/>
+            <a:off x="5501331" y="1741453"/>
             <a:ext cx="192024" cy="192024"/>
           </a:xfrm>
           <a:prstGeom prst="mathMultiply">
@@ -4168,10 +4604,10 @@
       </p:sp>
       <p:sp>
         <p:nvSpPr>
-          <p:cNvPr id="39" name="Multiplication Sign 38">
+          <p:cNvPr id="59" name="Multiplication Sign 58">
             <a:extLst>
               <a:ext uri="{FF2B5EF4-FFF2-40B4-BE49-F238E27FC236}">
-                <a16:creationId xmlns:a16="http://schemas.microsoft.com/office/drawing/2014/main" id="{4BB1FA84-60D9-4C83-070B-A379A6CD6DC9}"/>
+                <a16:creationId xmlns:a16="http://schemas.microsoft.com/office/drawing/2014/main" id="{16F27FFB-884F-2FE2-9658-9A65C39B8D4A}"/>
               </a:ext>
             </a:extLst>
           </p:cNvPr>
@@ -4180,7 +4616,7 @@
         </p:nvSpPr>
         <p:spPr>
           <a:xfrm>
-            <a:off x="3337516" y="1665275"/>
+            <a:off x="5598248" y="1617543"/>
             <a:ext cx="192024" cy="192024"/>
           </a:xfrm>
           <a:prstGeom prst="mathMultiply">
@@ -4220,10 +4656,10 @@
       </p:sp>
       <p:sp>
         <p:nvSpPr>
-          <p:cNvPr id="40" name="Multiplication Sign 39">
+          <p:cNvPr id="60" name="Multiplication Sign 59">
             <a:extLst>
               <a:ext uri="{FF2B5EF4-FFF2-40B4-BE49-F238E27FC236}">
-                <a16:creationId xmlns:a16="http://schemas.microsoft.com/office/drawing/2014/main" id="{B9989E8C-C6B0-5682-D753-47D722E3E18A}"/>
+                <a16:creationId xmlns:a16="http://schemas.microsoft.com/office/drawing/2014/main" id="{A1A3356D-A8AC-689E-853C-1643C6D7D2B1}"/>
               </a:ext>
             </a:extLst>
           </p:cNvPr>
@@ -4232,7 +4668,7 @@
         </p:nvSpPr>
         <p:spPr>
           <a:xfrm>
-            <a:off x="3386856" y="1817827"/>
+            <a:off x="5670563" y="1747120"/>
             <a:ext cx="192024" cy="192024"/>
           </a:xfrm>
           <a:prstGeom prst="mathMultiply">
@@ -4272,10 +4708,10 @@
       </p:sp>
       <p:sp>
         <p:nvSpPr>
-          <p:cNvPr id="41" name="Multiplication Sign 40">
+          <p:cNvPr id="61" name="Multiplication Sign 60">
             <a:extLst>
               <a:ext uri="{FF2B5EF4-FFF2-40B4-BE49-F238E27FC236}">
-                <a16:creationId xmlns:a16="http://schemas.microsoft.com/office/drawing/2014/main" id="{257305F8-EED5-D520-5A53-ACEF9837CB45}"/>
+                <a16:creationId xmlns:a16="http://schemas.microsoft.com/office/drawing/2014/main" id="{62CEA28C-12CC-1B20-5B54-088B01DDAF91}"/>
               </a:ext>
             </a:extLst>
           </p:cNvPr>
@@ -4284,7 +4720,7 @@
         </p:nvSpPr>
         <p:spPr>
           <a:xfrm>
-            <a:off x="5744217" y="1497787"/>
+            <a:off x="3259166" y="1488493"/>
             <a:ext cx="192024" cy="192024"/>
           </a:xfrm>
           <a:prstGeom prst="mathMultiply">
@@ -4324,10 +4760,10 @@
       </p:sp>
       <p:sp>
         <p:nvSpPr>
-          <p:cNvPr id="42" name="Multiplication Sign 41">
+          <p:cNvPr id="62" name="Multiplication Sign 61">
             <a:extLst>
               <a:ext uri="{FF2B5EF4-FFF2-40B4-BE49-F238E27FC236}">
-                <a16:creationId xmlns:a16="http://schemas.microsoft.com/office/drawing/2014/main" id="{D02C3953-6367-B0A7-5CEC-B8B0E9214DDD}"/>
+                <a16:creationId xmlns:a16="http://schemas.microsoft.com/office/drawing/2014/main" id="{2C48AF90-16B3-66BC-D91B-232E076717AE}"/>
               </a:ext>
             </a:extLst>
           </p:cNvPr>
@@ -4336,7 +4772,7 @@
         </p:nvSpPr>
         <p:spPr>
           <a:xfrm>
-            <a:off x="6058923" y="1252423"/>
+            <a:off x="3573872" y="1243129"/>
             <a:ext cx="192024" cy="192024"/>
           </a:xfrm>
           <a:prstGeom prst="mathMultiply">
@@ -4376,10 +4812,10 @@
       </p:sp>
       <p:sp>
         <p:nvSpPr>
-          <p:cNvPr id="43" name="Multiplication Sign 42">
+          <p:cNvPr id="63" name="Multiplication Sign 62">
             <a:extLst>
               <a:ext uri="{FF2B5EF4-FFF2-40B4-BE49-F238E27FC236}">
-                <a16:creationId xmlns:a16="http://schemas.microsoft.com/office/drawing/2014/main" id="{58104411-D5F2-C2F7-F92E-995124AFA34B}"/>
+                <a16:creationId xmlns:a16="http://schemas.microsoft.com/office/drawing/2014/main" id="{66C83456-43FC-0423-1379-395A8A6AACCC}"/>
               </a:ext>
             </a:extLst>
           </p:cNvPr>
@@ -4388,7 +4824,7 @@
         </p:nvSpPr>
         <p:spPr>
           <a:xfrm>
-            <a:off x="6205075" y="1689811"/>
+            <a:off x="3720024" y="1680517"/>
             <a:ext cx="192024" cy="192024"/>
           </a:xfrm>
           <a:prstGeom prst="mathMultiply">
@@ -4428,10 +4864,10 @@
       </p:sp>
       <p:sp>
         <p:nvSpPr>
-          <p:cNvPr id="44" name="Multiplication Sign 43">
+          <p:cNvPr id="64" name="Multiplication Sign 63">
             <a:extLst>
               <a:ext uri="{FF2B5EF4-FFF2-40B4-BE49-F238E27FC236}">
-                <a16:creationId xmlns:a16="http://schemas.microsoft.com/office/drawing/2014/main" id="{4F3996F3-238C-9E12-CA19-CAFF44FC44E8}"/>
+                <a16:creationId xmlns:a16="http://schemas.microsoft.com/office/drawing/2014/main" id="{02D9A9DF-0F80-86FA-D0CB-08679C6FB4C7}"/>
               </a:ext>
             </a:extLst>
           </p:cNvPr>
@@ -4440,7 +4876,7 @@
         </p:nvSpPr>
         <p:spPr>
           <a:xfrm>
-            <a:off x="7980929" y="1721815"/>
+            <a:off x="7902304" y="1744790"/>
             <a:ext cx="192024" cy="192024"/>
           </a:xfrm>
           <a:prstGeom prst="mathMultiply">
@@ -4480,10 +4916,10 @@
       </p:sp>
       <p:sp>
         <p:nvSpPr>
-          <p:cNvPr id="45" name="Multiplication Sign 44">
+          <p:cNvPr id="65" name="Multiplication Sign 64">
             <a:extLst>
               <a:ext uri="{FF2B5EF4-FFF2-40B4-BE49-F238E27FC236}">
-                <a16:creationId xmlns:a16="http://schemas.microsoft.com/office/drawing/2014/main" id="{5450922A-73D0-63AB-D57B-B4BB13B2DD7B}"/>
+                <a16:creationId xmlns:a16="http://schemas.microsoft.com/office/drawing/2014/main" id="{E6C3B115-38CE-BFC4-1CF7-04DD88CCE427}"/>
               </a:ext>
             </a:extLst>
           </p:cNvPr>
@@ -4492,7 +4928,7 @@
         </p:nvSpPr>
         <p:spPr>
           <a:xfrm>
-            <a:off x="8295635" y="1476451"/>
+            <a:off x="8148085" y="1476451"/>
             <a:ext cx="192024" cy="192024"/>
           </a:xfrm>
           <a:prstGeom prst="mathMultiply">
@@ -4532,10 +4968,10 @@
       </p:sp>
       <p:sp>
         <p:nvSpPr>
-          <p:cNvPr id="46" name="Multiplication Sign 45">
+          <p:cNvPr id="66" name="Multiplication Sign 65">
             <a:extLst>
               <a:ext uri="{FF2B5EF4-FFF2-40B4-BE49-F238E27FC236}">
-                <a16:creationId xmlns:a16="http://schemas.microsoft.com/office/drawing/2014/main" id="{F9BBDB0F-2349-C488-229C-C7EE5F89E5EA}"/>
+                <a16:creationId xmlns:a16="http://schemas.microsoft.com/office/drawing/2014/main" id="{AC69B43B-D98D-B585-659E-63594A807F37}"/>
               </a:ext>
             </a:extLst>
           </p:cNvPr>
@@ -4544,7 +4980,7 @@
         </p:nvSpPr>
         <p:spPr>
           <a:xfrm>
-            <a:off x="8441787" y="1913839"/>
+            <a:off x="8340187" y="1867889"/>
             <a:ext cx="192024" cy="192024"/>
           </a:xfrm>
           <a:prstGeom prst="mathMultiply">
@@ -4794,10 +5230,10 @@
       </p:grpSpPr>
       <p:sp>
         <p:nvSpPr>
-          <p:cNvPr id="7" name="Flowchart: Connector 6">
+          <p:cNvPr id="2" name="Flowchart: Connector 1">
             <a:extLst>
               <a:ext uri="{FF2B5EF4-FFF2-40B4-BE49-F238E27FC236}">
-                <a16:creationId xmlns:a16="http://schemas.microsoft.com/office/drawing/2014/main" id="{3D754C27-EE6E-B76D-58C5-1DF8E5CF2BCE}"/>
+                <a16:creationId xmlns:a16="http://schemas.microsoft.com/office/drawing/2014/main" id="{F9B7A076-F1E2-F00A-B3E9-5A0A4B9C6BE5}"/>
               </a:ext>
             </a:extLst>
           </p:cNvPr>
@@ -4806,7 +5242,7 @@
         </p:nvSpPr>
         <p:spPr>
           <a:xfrm>
-            <a:off x="420361" y="1072134"/>
+            <a:off x="672084" y="1072134"/>
             <a:ext cx="1056132" cy="1056132"/>
           </a:xfrm>
           <a:prstGeom prst="flowChartConnector">
@@ -4846,10 +5282,10 @@
       </p:sp>
       <p:sp>
         <p:nvSpPr>
-          <p:cNvPr id="8" name="Flowchart: Connector 7">
+          <p:cNvPr id="3" name="Flowchart: Connector 2">
             <a:extLst>
               <a:ext uri="{FF2B5EF4-FFF2-40B4-BE49-F238E27FC236}">
-                <a16:creationId xmlns:a16="http://schemas.microsoft.com/office/drawing/2014/main" id="{95E71FB6-86C3-5D8B-0832-26E3EA849125}"/>
+                <a16:creationId xmlns:a16="http://schemas.microsoft.com/office/drawing/2014/main" id="{0E400DDA-17AD-DFF2-83CF-EEB2A9341B06}"/>
               </a:ext>
             </a:extLst>
           </p:cNvPr>
@@ -4858,8 +5294,8 @@
         </p:nvSpPr>
         <p:spPr>
           <a:xfrm>
-            <a:off x="564379" y="1216152"/>
-            <a:ext cx="768096" cy="768096"/>
+            <a:off x="3072889" y="1072134"/>
+            <a:ext cx="1056132" cy="1056132"/>
           </a:xfrm>
           <a:prstGeom prst="flowChartConnector">
             <a:avLst/>
@@ -4898,10 +5334,10 @@
       </p:sp>
       <p:sp>
         <p:nvSpPr>
-          <p:cNvPr id="9" name="Flowchart: Connector 8">
+          <p:cNvPr id="4" name="Flowchart: Connector 3">
             <a:extLst>
               <a:ext uri="{FF2B5EF4-FFF2-40B4-BE49-F238E27FC236}">
-                <a16:creationId xmlns:a16="http://schemas.microsoft.com/office/drawing/2014/main" id="{4F0930C7-3C3E-D294-3222-61D1329496A5}"/>
+                <a16:creationId xmlns:a16="http://schemas.microsoft.com/office/drawing/2014/main" id="{FD39940F-22B6-2D48-904E-76B50F28A238}"/>
               </a:ext>
             </a:extLst>
           </p:cNvPr>
@@ -4910,8 +5346,8 @@
         </p:nvSpPr>
         <p:spPr>
           <a:xfrm>
-            <a:off x="708397" y="1360170"/>
-            <a:ext cx="480060" cy="480060"/>
+            <a:off x="5472179" y="1072134"/>
+            <a:ext cx="1056132" cy="1056132"/>
           </a:xfrm>
           <a:prstGeom prst="flowChartConnector">
             <a:avLst/>
@@ -4950,10 +5386,10 @@
       </p:sp>
       <p:sp>
         <p:nvSpPr>
-          <p:cNvPr id="10" name="Flowchart: Connector 9">
+          <p:cNvPr id="5" name="Flowchart: Connector 4">
             <a:extLst>
               <a:ext uri="{FF2B5EF4-FFF2-40B4-BE49-F238E27FC236}">
-                <a16:creationId xmlns:a16="http://schemas.microsoft.com/office/drawing/2014/main" id="{CF458069-0224-95D9-00BE-B534EA3C1C9B}"/>
+                <a16:creationId xmlns:a16="http://schemas.microsoft.com/office/drawing/2014/main" id="{DE82283B-4CCE-1F78-973D-2156CBCCA788}"/>
               </a:ext>
             </a:extLst>
           </p:cNvPr>
@@ -4962,7 +5398,631 @@
         </p:nvSpPr>
         <p:spPr>
           <a:xfrm>
-            <a:off x="852415" y="1504188"/>
+            <a:off x="7872479" y="1072134"/>
+            <a:ext cx="1056132" cy="1056132"/>
+          </a:xfrm>
+          <a:prstGeom prst="flowChartConnector">
+            <a:avLst/>
+          </a:prstGeom>
+          <a:noFill/>
+          <a:ln w="76200">
+            <a:solidFill>
+              <a:srgbClr val="C00000"/>
+            </a:solidFill>
+          </a:ln>
+        </p:spPr>
+        <p:style>
+          <a:lnRef idx="2">
+            <a:schemeClr val="accent1">
+              <a:shade val="15000"/>
+            </a:schemeClr>
+          </a:lnRef>
+          <a:fillRef idx="1">
+            <a:schemeClr val="accent1"/>
+          </a:fillRef>
+          <a:effectRef idx="0">
+            <a:schemeClr val="accent1"/>
+          </a:effectRef>
+          <a:fontRef idx="minor">
+            <a:schemeClr val="lt1"/>
+          </a:fontRef>
+        </p:style>
+        <p:txBody>
+          <a:bodyPr rtlCol="0" anchor="ctr"/>
+          <a:lstStyle/>
+          <a:p>
+            <a:pPr algn="ctr"/>
+            <a:endParaRPr lang="en-US" sz="2117"/>
+          </a:p>
+        </p:txBody>
+      </p:sp>
+      <p:sp>
+        <p:nvSpPr>
+          <p:cNvPr id="6" name="Flowchart: Connector 5">
+            <a:extLst>
+              <a:ext uri="{FF2B5EF4-FFF2-40B4-BE49-F238E27FC236}">
+                <a16:creationId xmlns:a16="http://schemas.microsoft.com/office/drawing/2014/main" id="{678D6451-7A1F-73E1-66D1-B971A592A846}"/>
+              </a:ext>
+            </a:extLst>
+          </p:cNvPr>
+          <p:cNvSpPr/>
+          <p:nvPr/>
+        </p:nvSpPr>
+        <p:spPr>
+          <a:xfrm>
+            <a:off x="816102" y="1216152"/>
+            <a:ext cx="768096" cy="768096"/>
+          </a:xfrm>
+          <a:prstGeom prst="flowChartConnector">
+            <a:avLst/>
+          </a:prstGeom>
+          <a:noFill/>
+          <a:ln w="76200">
+            <a:solidFill>
+              <a:srgbClr val="C00000"/>
+            </a:solidFill>
+          </a:ln>
+        </p:spPr>
+        <p:style>
+          <a:lnRef idx="2">
+            <a:schemeClr val="accent1">
+              <a:shade val="15000"/>
+            </a:schemeClr>
+          </a:lnRef>
+          <a:fillRef idx="1">
+            <a:schemeClr val="accent1"/>
+          </a:fillRef>
+          <a:effectRef idx="0">
+            <a:schemeClr val="accent1"/>
+          </a:effectRef>
+          <a:fontRef idx="minor">
+            <a:schemeClr val="lt1"/>
+          </a:fontRef>
+        </p:style>
+        <p:txBody>
+          <a:bodyPr rtlCol="0" anchor="ctr"/>
+          <a:lstStyle/>
+          <a:p>
+            <a:pPr algn="ctr"/>
+            <a:endParaRPr lang="en-US" sz="2117"/>
+          </a:p>
+        </p:txBody>
+      </p:sp>
+      <p:sp>
+        <p:nvSpPr>
+          <p:cNvPr id="11" name="Flowchart: Connector 10">
+            <a:extLst>
+              <a:ext uri="{FF2B5EF4-FFF2-40B4-BE49-F238E27FC236}">
+                <a16:creationId xmlns:a16="http://schemas.microsoft.com/office/drawing/2014/main" id="{62960A51-AC7C-1D15-D5FB-6272C21BF448}"/>
+              </a:ext>
+            </a:extLst>
+          </p:cNvPr>
+          <p:cNvSpPr/>
+          <p:nvPr/>
+        </p:nvSpPr>
+        <p:spPr>
+          <a:xfrm>
+            <a:off x="960120" y="1360170"/>
+            <a:ext cx="480060" cy="480060"/>
+          </a:xfrm>
+          <a:prstGeom prst="flowChartConnector">
+            <a:avLst/>
+          </a:prstGeom>
+          <a:noFill/>
+          <a:ln w="76200">
+            <a:solidFill>
+              <a:srgbClr val="C00000"/>
+            </a:solidFill>
+          </a:ln>
+        </p:spPr>
+        <p:style>
+          <a:lnRef idx="2">
+            <a:schemeClr val="accent1">
+              <a:shade val="15000"/>
+            </a:schemeClr>
+          </a:lnRef>
+          <a:fillRef idx="1">
+            <a:schemeClr val="accent1"/>
+          </a:fillRef>
+          <a:effectRef idx="0">
+            <a:schemeClr val="accent1"/>
+          </a:effectRef>
+          <a:fontRef idx="minor">
+            <a:schemeClr val="lt1"/>
+          </a:fontRef>
+        </p:style>
+        <p:txBody>
+          <a:bodyPr rtlCol="0" anchor="ctr"/>
+          <a:lstStyle/>
+          <a:p>
+            <a:pPr algn="ctr"/>
+            <a:endParaRPr lang="en-US" sz="2117"/>
+          </a:p>
+        </p:txBody>
+      </p:sp>
+      <p:sp>
+        <p:nvSpPr>
+          <p:cNvPr id="12" name="Flowchart: Connector 11">
+            <a:extLst>
+              <a:ext uri="{FF2B5EF4-FFF2-40B4-BE49-F238E27FC236}">
+                <a16:creationId xmlns:a16="http://schemas.microsoft.com/office/drawing/2014/main" id="{2DDC8B5C-8489-C32D-FA9C-477C60590CC1}"/>
+              </a:ext>
+            </a:extLst>
+          </p:cNvPr>
+          <p:cNvSpPr/>
+          <p:nvPr/>
+        </p:nvSpPr>
+        <p:spPr>
+          <a:xfrm>
+            <a:off x="1104138" y="1504188"/>
+            <a:ext cx="192024" cy="192024"/>
+          </a:xfrm>
+          <a:prstGeom prst="flowChartConnector">
+            <a:avLst/>
+          </a:prstGeom>
+          <a:noFill/>
+          <a:ln w="76200">
+            <a:solidFill>
+              <a:srgbClr val="C00000"/>
+            </a:solidFill>
+          </a:ln>
+        </p:spPr>
+        <p:style>
+          <a:lnRef idx="2">
+            <a:schemeClr val="accent1">
+              <a:shade val="15000"/>
+            </a:schemeClr>
+          </a:lnRef>
+          <a:fillRef idx="1">
+            <a:schemeClr val="accent1"/>
+          </a:fillRef>
+          <a:effectRef idx="0">
+            <a:schemeClr val="accent1"/>
+          </a:effectRef>
+          <a:fontRef idx="minor">
+            <a:schemeClr val="lt1"/>
+          </a:fontRef>
+        </p:style>
+        <p:txBody>
+          <a:bodyPr rtlCol="0" anchor="ctr"/>
+          <a:lstStyle/>
+          <a:p>
+            <a:pPr algn="ctr"/>
+            <a:endParaRPr lang="en-US" sz="2117"/>
+          </a:p>
+        </p:txBody>
+      </p:sp>
+      <p:sp>
+        <p:nvSpPr>
+          <p:cNvPr id="13" name="Flowchart: Connector 12">
+            <a:extLst>
+              <a:ext uri="{FF2B5EF4-FFF2-40B4-BE49-F238E27FC236}">
+                <a16:creationId xmlns:a16="http://schemas.microsoft.com/office/drawing/2014/main" id="{8AC23A4C-A52F-3C45-46EF-C3EDC15FE42E}"/>
+              </a:ext>
+            </a:extLst>
+          </p:cNvPr>
+          <p:cNvSpPr/>
+          <p:nvPr/>
+        </p:nvSpPr>
+        <p:spPr>
+          <a:xfrm>
+            <a:off x="3216402" y="1216152"/>
+            <a:ext cx="768096" cy="768096"/>
+          </a:xfrm>
+          <a:prstGeom prst="flowChartConnector">
+            <a:avLst/>
+          </a:prstGeom>
+          <a:noFill/>
+          <a:ln w="76200">
+            <a:solidFill>
+              <a:srgbClr val="C00000"/>
+            </a:solidFill>
+          </a:ln>
+        </p:spPr>
+        <p:style>
+          <a:lnRef idx="2">
+            <a:schemeClr val="accent1">
+              <a:shade val="15000"/>
+            </a:schemeClr>
+          </a:lnRef>
+          <a:fillRef idx="1">
+            <a:schemeClr val="accent1"/>
+          </a:fillRef>
+          <a:effectRef idx="0">
+            <a:schemeClr val="accent1"/>
+          </a:effectRef>
+          <a:fontRef idx="minor">
+            <a:schemeClr val="lt1"/>
+          </a:fontRef>
+        </p:style>
+        <p:txBody>
+          <a:bodyPr rtlCol="0" anchor="ctr"/>
+          <a:lstStyle/>
+          <a:p>
+            <a:pPr algn="ctr"/>
+            <a:endParaRPr lang="en-US" sz="2117"/>
+          </a:p>
+        </p:txBody>
+      </p:sp>
+      <p:sp>
+        <p:nvSpPr>
+          <p:cNvPr id="14" name="Flowchart: Connector 13">
+            <a:extLst>
+              <a:ext uri="{FF2B5EF4-FFF2-40B4-BE49-F238E27FC236}">
+                <a16:creationId xmlns:a16="http://schemas.microsoft.com/office/drawing/2014/main" id="{D3AF0768-77C3-09A5-B920-74EFE343E9CF}"/>
+              </a:ext>
+            </a:extLst>
+          </p:cNvPr>
+          <p:cNvSpPr/>
+          <p:nvPr/>
+        </p:nvSpPr>
+        <p:spPr>
+          <a:xfrm>
+            <a:off x="3360420" y="1360170"/>
+            <a:ext cx="480060" cy="480060"/>
+          </a:xfrm>
+          <a:prstGeom prst="flowChartConnector">
+            <a:avLst/>
+          </a:prstGeom>
+          <a:noFill/>
+          <a:ln w="76200">
+            <a:solidFill>
+              <a:srgbClr val="C00000"/>
+            </a:solidFill>
+          </a:ln>
+        </p:spPr>
+        <p:style>
+          <a:lnRef idx="2">
+            <a:schemeClr val="accent1">
+              <a:shade val="15000"/>
+            </a:schemeClr>
+          </a:lnRef>
+          <a:fillRef idx="1">
+            <a:schemeClr val="accent1"/>
+          </a:fillRef>
+          <a:effectRef idx="0">
+            <a:schemeClr val="accent1"/>
+          </a:effectRef>
+          <a:fontRef idx="minor">
+            <a:schemeClr val="lt1"/>
+          </a:fontRef>
+        </p:style>
+        <p:txBody>
+          <a:bodyPr rtlCol="0" anchor="ctr"/>
+          <a:lstStyle/>
+          <a:p>
+            <a:pPr algn="ctr"/>
+            <a:endParaRPr lang="en-US" sz="2117"/>
+          </a:p>
+        </p:txBody>
+      </p:sp>
+      <p:sp>
+        <p:nvSpPr>
+          <p:cNvPr id="15" name="Flowchart: Connector 14">
+            <a:extLst>
+              <a:ext uri="{FF2B5EF4-FFF2-40B4-BE49-F238E27FC236}">
+                <a16:creationId xmlns:a16="http://schemas.microsoft.com/office/drawing/2014/main" id="{AD1D16C8-FAC8-4481-F481-435457501108}"/>
+              </a:ext>
+            </a:extLst>
+          </p:cNvPr>
+          <p:cNvSpPr/>
+          <p:nvPr/>
+        </p:nvSpPr>
+        <p:spPr>
+          <a:xfrm>
+            <a:off x="3504438" y="1504188"/>
+            <a:ext cx="192024" cy="192024"/>
+          </a:xfrm>
+          <a:prstGeom prst="flowChartConnector">
+            <a:avLst/>
+          </a:prstGeom>
+          <a:noFill/>
+          <a:ln w="76200">
+            <a:solidFill>
+              <a:srgbClr val="C00000"/>
+            </a:solidFill>
+          </a:ln>
+        </p:spPr>
+        <p:style>
+          <a:lnRef idx="2">
+            <a:schemeClr val="accent1">
+              <a:shade val="15000"/>
+            </a:schemeClr>
+          </a:lnRef>
+          <a:fillRef idx="1">
+            <a:schemeClr val="accent1"/>
+          </a:fillRef>
+          <a:effectRef idx="0">
+            <a:schemeClr val="accent1"/>
+          </a:effectRef>
+          <a:fontRef idx="minor">
+            <a:schemeClr val="lt1"/>
+          </a:fontRef>
+        </p:style>
+        <p:txBody>
+          <a:bodyPr rtlCol="0" anchor="ctr"/>
+          <a:lstStyle/>
+          <a:p>
+            <a:pPr algn="ctr"/>
+            <a:endParaRPr lang="en-US" sz="2117"/>
+          </a:p>
+        </p:txBody>
+      </p:sp>
+      <p:sp>
+        <p:nvSpPr>
+          <p:cNvPr id="16" name="Flowchart: Connector 15">
+            <a:extLst>
+              <a:ext uri="{FF2B5EF4-FFF2-40B4-BE49-F238E27FC236}">
+                <a16:creationId xmlns:a16="http://schemas.microsoft.com/office/drawing/2014/main" id="{F5C97CAD-6FC9-D877-4275-8962AF439B0D}"/>
+              </a:ext>
+            </a:extLst>
+          </p:cNvPr>
+          <p:cNvSpPr/>
+          <p:nvPr/>
+        </p:nvSpPr>
+        <p:spPr>
+          <a:xfrm>
+            <a:off x="5616702" y="1216152"/>
+            <a:ext cx="768096" cy="768096"/>
+          </a:xfrm>
+          <a:prstGeom prst="flowChartConnector">
+            <a:avLst/>
+          </a:prstGeom>
+          <a:noFill/>
+          <a:ln w="76200">
+            <a:solidFill>
+              <a:srgbClr val="C00000"/>
+            </a:solidFill>
+          </a:ln>
+        </p:spPr>
+        <p:style>
+          <a:lnRef idx="2">
+            <a:schemeClr val="accent1">
+              <a:shade val="15000"/>
+            </a:schemeClr>
+          </a:lnRef>
+          <a:fillRef idx="1">
+            <a:schemeClr val="accent1"/>
+          </a:fillRef>
+          <a:effectRef idx="0">
+            <a:schemeClr val="accent1"/>
+          </a:effectRef>
+          <a:fontRef idx="minor">
+            <a:schemeClr val="lt1"/>
+          </a:fontRef>
+        </p:style>
+        <p:txBody>
+          <a:bodyPr rtlCol="0" anchor="ctr"/>
+          <a:lstStyle/>
+          <a:p>
+            <a:pPr algn="ctr"/>
+            <a:endParaRPr lang="en-US" sz="2117"/>
+          </a:p>
+        </p:txBody>
+      </p:sp>
+      <p:sp>
+        <p:nvSpPr>
+          <p:cNvPr id="17" name="Flowchart: Connector 16">
+            <a:extLst>
+              <a:ext uri="{FF2B5EF4-FFF2-40B4-BE49-F238E27FC236}">
+                <a16:creationId xmlns:a16="http://schemas.microsoft.com/office/drawing/2014/main" id="{0BCC8DFE-0762-C8EF-835E-0DAA9C570243}"/>
+              </a:ext>
+            </a:extLst>
+          </p:cNvPr>
+          <p:cNvSpPr/>
+          <p:nvPr/>
+        </p:nvSpPr>
+        <p:spPr>
+          <a:xfrm>
+            <a:off x="5760720" y="1360170"/>
+            <a:ext cx="480060" cy="480060"/>
+          </a:xfrm>
+          <a:prstGeom prst="flowChartConnector">
+            <a:avLst/>
+          </a:prstGeom>
+          <a:noFill/>
+          <a:ln w="76200">
+            <a:solidFill>
+              <a:srgbClr val="C00000"/>
+            </a:solidFill>
+          </a:ln>
+        </p:spPr>
+        <p:style>
+          <a:lnRef idx="2">
+            <a:schemeClr val="accent1">
+              <a:shade val="15000"/>
+            </a:schemeClr>
+          </a:lnRef>
+          <a:fillRef idx="1">
+            <a:schemeClr val="accent1"/>
+          </a:fillRef>
+          <a:effectRef idx="0">
+            <a:schemeClr val="accent1"/>
+          </a:effectRef>
+          <a:fontRef idx="minor">
+            <a:schemeClr val="lt1"/>
+          </a:fontRef>
+        </p:style>
+        <p:txBody>
+          <a:bodyPr rtlCol="0" anchor="ctr"/>
+          <a:lstStyle/>
+          <a:p>
+            <a:pPr algn="ctr"/>
+            <a:endParaRPr lang="en-US" sz="2117"/>
+          </a:p>
+        </p:txBody>
+      </p:sp>
+      <p:sp>
+        <p:nvSpPr>
+          <p:cNvPr id="18" name="Flowchart: Connector 17">
+            <a:extLst>
+              <a:ext uri="{FF2B5EF4-FFF2-40B4-BE49-F238E27FC236}">
+                <a16:creationId xmlns:a16="http://schemas.microsoft.com/office/drawing/2014/main" id="{BA38CDDF-FDA4-C35B-AF68-518BEA1CCC9A}"/>
+              </a:ext>
+            </a:extLst>
+          </p:cNvPr>
+          <p:cNvSpPr/>
+          <p:nvPr/>
+        </p:nvSpPr>
+        <p:spPr>
+          <a:xfrm>
+            <a:off x="5904738" y="1504188"/>
+            <a:ext cx="192024" cy="192024"/>
+          </a:xfrm>
+          <a:prstGeom prst="flowChartConnector">
+            <a:avLst/>
+          </a:prstGeom>
+          <a:noFill/>
+          <a:ln w="76200">
+            <a:solidFill>
+              <a:srgbClr val="C00000"/>
+            </a:solidFill>
+          </a:ln>
+        </p:spPr>
+        <p:style>
+          <a:lnRef idx="2">
+            <a:schemeClr val="accent1">
+              <a:shade val="15000"/>
+            </a:schemeClr>
+          </a:lnRef>
+          <a:fillRef idx="1">
+            <a:schemeClr val="accent1"/>
+          </a:fillRef>
+          <a:effectRef idx="0">
+            <a:schemeClr val="accent1"/>
+          </a:effectRef>
+          <a:fontRef idx="minor">
+            <a:schemeClr val="lt1"/>
+          </a:fontRef>
+        </p:style>
+        <p:txBody>
+          <a:bodyPr rtlCol="0" anchor="ctr"/>
+          <a:lstStyle/>
+          <a:p>
+            <a:pPr algn="ctr"/>
+            <a:endParaRPr lang="en-US" sz="2117"/>
+          </a:p>
+        </p:txBody>
+      </p:sp>
+      <p:sp>
+        <p:nvSpPr>
+          <p:cNvPr id="19" name="Flowchart: Connector 18">
+            <a:extLst>
+              <a:ext uri="{FF2B5EF4-FFF2-40B4-BE49-F238E27FC236}">
+                <a16:creationId xmlns:a16="http://schemas.microsoft.com/office/drawing/2014/main" id="{7EE906E3-A04D-AC33-A4F7-40B23233FCCE}"/>
+              </a:ext>
+            </a:extLst>
+          </p:cNvPr>
+          <p:cNvSpPr/>
+          <p:nvPr/>
+        </p:nvSpPr>
+        <p:spPr>
+          <a:xfrm>
+            <a:off x="8017002" y="1216152"/>
+            <a:ext cx="768096" cy="768096"/>
+          </a:xfrm>
+          <a:prstGeom prst="flowChartConnector">
+            <a:avLst/>
+          </a:prstGeom>
+          <a:noFill/>
+          <a:ln w="76200">
+            <a:solidFill>
+              <a:srgbClr val="C00000"/>
+            </a:solidFill>
+          </a:ln>
+        </p:spPr>
+        <p:style>
+          <a:lnRef idx="2">
+            <a:schemeClr val="accent1">
+              <a:shade val="15000"/>
+            </a:schemeClr>
+          </a:lnRef>
+          <a:fillRef idx="1">
+            <a:schemeClr val="accent1"/>
+          </a:fillRef>
+          <a:effectRef idx="0">
+            <a:schemeClr val="accent1"/>
+          </a:effectRef>
+          <a:fontRef idx="minor">
+            <a:schemeClr val="lt1"/>
+          </a:fontRef>
+        </p:style>
+        <p:txBody>
+          <a:bodyPr rtlCol="0" anchor="ctr"/>
+          <a:lstStyle/>
+          <a:p>
+            <a:pPr algn="ctr"/>
+            <a:endParaRPr lang="en-US" sz="2117"/>
+          </a:p>
+        </p:txBody>
+      </p:sp>
+      <p:sp>
+        <p:nvSpPr>
+          <p:cNvPr id="20" name="Flowchart: Connector 19">
+            <a:extLst>
+              <a:ext uri="{FF2B5EF4-FFF2-40B4-BE49-F238E27FC236}">
+                <a16:creationId xmlns:a16="http://schemas.microsoft.com/office/drawing/2014/main" id="{67E1558E-9872-A663-FC9B-0CC27EB226CE}"/>
+              </a:ext>
+            </a:extLst>
+          </p:cNvPr>
+          <p:cNvSpPr/>
+          <p:nvPr/>
+        </p:nvSpPr>
+        <p:spPr>
+          <a:xfrm>
+            <a:off x="8161020" y="1360170"/>
+            <a:ext cx="480060" cy="480060"/>
+          </a:xfrm>
+          <a:prstGeom prst="flowChartConnector">
+            <a:avLst/>
+          </a:prstGeom>
+          <a:noFill/>
+          <a:ln w="76200">
+            <a:solidFill>
+              <a:srgbClr val="C00000"/>
+            </a:solidFill>
+          </a:ln>
+        </p:spPr>
+        <p:style>
+          <a:lnRef idx="2">
+            <a:schemeClr val="accent1">
+              <a:shade val="15000"/>
+            </a:schemeClr>
+          </a:lnRef>
+          <a:fillRef idx="1">
+            <a:schemeClr val="accent1"/>
+          </a:fillRef>
+          <a:effectRef idx="0">
+            <a:schemeClr val="accent1"/>
+          </a:effectRef>
+          <a:fontRef idx="minor">
+            <a:schemeClr val="lt1"/>
+          </a:fontRef>
+        </p:style>
+        <p:txBody>
+          <a:bodyPr rtlCol="0" anchor="ctr"/>
+          <a:lstStyle/>
+          <a:p>
+            <a:pPr algn="ctr"/>
+            <a:endParaRPr lang="en-US" sz="2117"/>
+          </a:p>
+        </p:txBody>
+      </p:sp>
+      <p:sp>
+        <p:nvSpPr>
+          <p:cNvPr id="21" name="Flowchart: Connector 20">
+            <a:extLst>
+              <a:ext uri="{FF2B5EF4-FFF2-40B4-BE49-F238E27FC236}">
+                <a16:creationId xmlns:a16="http://schemas.microsoft.com/office/drawing/2014/main" id="{5C8123DF-664E-839F-55C5-2A20D05B621D}"/>
+              </a:ext>
+            </a:extLst>
+          </p:cNvPr>
+          <p:cNvSpPr/>
+          <p:nvPr/>
+        </p:nvSpPr>
+        <p:spPr>
+          <a:xfrm>
+            <a:off x="8305038" y="1504188"/>
             <a:ext cx="192024" cy="192024"/>
           </a:xfrm>
           <a:prstGeom prst="flowChartConnector">
@@ -5032,10 +6092,10 @@
       </p:grpSpPr>
       <p:sp>
         <p:nvSpPr>
-          <p:cNvPr id="2" name="Multiplication Sign 1">
+          <p:cNvPr id="32" name="Multiplication Sign 31">
             <a:extLst>
               <a:ext uri="{FF2B5EF4-FFF2-40B4-BE49-F238E27FC236}">
-                <a16:creationId xmlns:a16="http://schemas.microsoft.com/office/drawing/2014/main" id="{9D96AF8B-28DD-1F9A-26E1-C4E8E5C34AA3}"/>
+                <a16:creationId xmlns:a16="http://schemas.microsoft.com/office/drawing/2014/main" id="{346CB416-D4E1-27AD-6C0F-D7A1A58C0F66}"/>
               </a:ext>
             </a:extLst>
           </p:cNvPr>
@@ -5044,7 +6104,7 @@
         </p:nvSpPr>
         <p:spPr>
           <a:xfrm>
-            <a:off x="444856" y="1571396"/>
+            <a:off x="1011772" y="1504188"/>
             <a:ext cx="192024" cy="192024"/>
           </a:xfrm>
           <a:prstGeom prst="mathMultiply">
@@ -5084,10 +6144,10 @@
       </p:sp>
       <p:sp>
         <p:nvSpPr>
-          <p:cNvPr id="3" name="Multiplication Sign 2">
+          <p:cNvPr id="33" name="Multiplication Sign 32">
             <a:extLst>
               <a:ext uri="{FF2B5EF4-FFF2-40B4-BE49-F238E27FC236}">
-                <a16:creationId xmlns:a16="http://schemas.microsoft.com/office/drawing/2014/main" id="{9A359F7C-42C3-BE77-C423-61ABEE7B80F1}"/>
+                <a16:creationId xmlns:a16="http://schemas.microsoft.com/office/drawing/2014/main" id="{570ABCA8-E0C6-57BC-A595-414E5F921FB1}"/>
               </a:ext>
             </a:extLst>
           </p:cNvPr>
@@ -5096,7 +6156,7 @@
         </p:nvSpPr>
         <p:spPr>
           <a:xfrm>
-            <a:off x="573938" y="1479652"/>
+            <a:off x="1140855" y="1412443"/>
             <a:ext cx="192024" cy="192024"/>
           </a:xfrm>
           <a:prstGeom prst="mathMultiply">
@@ -5136,10 +6196,10 @@
       </p:sp>
       <p:sp>
         <p:nvSpPr>
-          <p:cNvPr id="4" name="Multiplication Sign 3">
+          <p:cNvPr id="34" name="Multiplication Sign 33">
             <a:extLst>
               <a:ext uri="{FF2B5EF4-FFF2-40B4-BE49-F238E27FC236}">
-                <a16:creationId xmlns:a16="http://schemas.microsoft.com/office/drawing/2014/main" id="{D29C0198-CB97-2625-8427-FB7190F6EBC9}"/>
+                <a16:creationId xmlns:a16="http://schemas.microsoft.com/office/drawing/2014/main" id="{146F3FC9-0A56-5849-3694-F2547C58B21E}"/>
               </a:ext>
             </a:extLst>
           </p:cNvPr>
@@ -5148,7 +6208,7 @@
         </p:nvSpPr>
         <p:spPr>
           <a:xfrm>
-            <a:off x="623278" y="1632204"/>
+            <a:off x="1190194" y="1564996"/>
             <a:ext cx="192024" cy="192024"/>
           </a:xfrm>
           <a:prstGeom prst="mathMultiply">
@@ -5188,10 +6248,10 @@
       </p:sp>
       <p:sp>
         <p:nvSpPr>
-          <p:cNvPr id="7" name="Multiplication Sign 6">
+          <p:cNvPr id="38" name="Multiplication Sign 37">
             <a:extLst>
               <a:ext uri="{FF2B5EF4-FFF2-40B4-BE49-F238E27FC236}">
-                <a16:creationId xmlns:a16="http://schemas.microsoft.com/office/drawing/2014/main" id="{1221E184-C1A2-55E4-79FF-C8E9FA1D4EC8}"/>
+                <a16:creationId xmlns:a16="http://schemas.microsoft.com/office/drawing/2014/main" id="{098C83BF-1997-F9B1-8C30-40AE8A021BDB}"/>
               </a:ext>
             </a:extLst>
           </p:cNvPr>
@@ -5200,7 +6260,7 @@
         </p:nvSpPr>
         <p:spPr>
           <a:xfrm>
-            <a:off x="2154936" y="1552194"/>
+            <a:off x="5501331" y="1741453"/>
             <a:ext cx="192024" cy="192024"/>
           </a:xfrm>
           <a:prstGeom prst="mathMultiply">
@@ -5240,10 +6300,10 @@
       </p:sp>
       <p:sp>
         <p:nvSpPr>
-          <p:cNvPr id="8" name="Multiplication Sign 7">
+          <p:cNvPr id="39" name="Multiplication Sign 38">
             <a:extLst>
               <a:ext uri="{FF2B5EF4-FFF2-40B4-BE49-F238E27FC236}">
-                <a16:creationId xmlns:a16="http://schemas.microsoft.com/office/drawing/2014/main" id="{9A91ED6E-C6FA-523A-9A0B-C8D5760A7853}"/>
+                <a16:creationId xmlns:a16="http://schemas.microsoft.com/office/drawing/2014/main" id="{4BB1FA84-60D9-4C83-070B-A379A6CD6DC9}"/>
               </a:ext>
             </a:extLst>
           </p:cNvPr>
@@ -5252,7 +6312,7 @@
         </p:nvSpPr>
         <p:spPr>
           <a:xfrm>
-            <a:off x="2469642" y="1306830"/>
+            <a:off x="5598248" y="1617543"/>
             <a:ext cx="192024" cy="192024"/>
           </a:xfrm>
           <a:prstGeom prst="mathMultiply">
@@ -5292,10 +6352,10 @@
       </p:sp>
       <p:sp>
         <p:nvSpPr>
-          <p:cNvPr id="9" name="Multiplication Sign 8">
+          <p:cNvPr id="40" name="Multiplication Sign 39">
             <a:extLst>
               <a:ext uri="{FF2B5EF4-FFF2-40B4-BE49-F238E27FC236}">
-                <a16:creationId xmlns:a16="http://schemas.microsoft.com/office/drawing/2014/main" id="{2EC84B82-01C1-4849-5818-1635E8E497CA}"/>
+                <a16:creationId xmlns:a16="http://schemas.microsoft.com/office/drawing/2014/main" id="{B9989E8C-C6B0-5682-D753-47D722E3E18A}"/>
               </a:ext>
             </a:extLst>
           </p:cNvPr>
@@ -5304,7 +6364,319 @@
         </p:nvSpPr>
         <p:spPr>
           <a:xfrm>
-            <a:off x="2615794" y="1744218"/>
+            <a:off x="5670563" y="1747120"/>
+            <a:ext cx="192024" cy="192024"/>
+          </a:xfrm>
+          <a:prstGeom prst="mathMultiply">
+            <a:avLst/>
+          </a:prstGeom>
+          <a:solidFill>
+            <a:schemeClr val="tx1"/>
+          </a:solidFill>
+          <a:ln>
+            <a:noFill/>
+          </a:ln>
+        </p:spPr>
+        <p:style>
+          <a:lnRef idx="2">
+            <a:schemeClr val="accent1">
+              <a:shade val="15000"/>
+            </a:schemeClr>
+          </a:lnRef>
+          <a:fillRef idx="1">
+            <a:schemeClr val="accent1"/>
+          </a:fillRef>
+          <a:effectRef idx="0">
+            <a:schemeClr val="accent1"/>
+          </a:effectRef>
+          <a:fontRef idx="minor">
+            <a:schemeClr val="lt1"/>
+          </a:fontRef>
+        </p:style>
+        <p:txBody>
+          <a:bodyPr rtlCol="0" anchor="ctr"/>
+          <a:lstStyle/>
+          <a:p>
+            <a:pPr algn="ctr"/>
+            <a:endParaRPr lang="en-US" sz="2117"/>
+          </a:p>
+        </p:txBody>
+      </p:sp>
+      <p:sp>
+        <p:nvSpPr>
+          <p:cNvPr id="41" name="Multiplication Sign 40">
+            <a:extLst>
+              <a:ext uri="{FF2B5EF4-FFF2-40B4-BE49-F238E27FC236}">
+                <a16:creationId xmlns:a16="http://schemas.microsoft.com/office/drawing/2014/main" id="{257305F8-EED5-D520-5A53-ACEF9837CB45}"/>
+              </a:ext>
+            </a:extLst>
+          </p:cNvPr>
+          <p:cNvSpPr/>
+          <p:nvPr/>
+        </p:nvSpPr>
+        <p:spPr>
+          <a:xfrm>
+            <a:off x="3259166" y="1488493"/>
+            <a:ext cx="192024" cy="192024"/>
+          </a:xfrm>
+          <a:prstGeom prst="mathMultiply">
+            <a:avLst/>
+          </a:prstGeom>
+          <a:solidFill>
+            <a:schemeClr val="tx1"/>
+          </a:solidFill>
+          <a:ln>
+            <a:noFill/>
+          </a:ln>
+        </p:spPr>
+        <p:style>
+          <a:lnRef idx="2">
+            <a:schemeClr val="accent1">
+              <a:shade val="15000"/>
+            </a:schemeClr>
+          </a:lnRef>
+          <a:fillRef idx="1">
+            <a:schemeClr val="accent1"/>
+          </a:fillRef>
+          <a:effectRef idx="0">
+            <a:schemeClr val="accent1"/>
+          </a:effectRef>
+          <a:fontRef idx="minor">
+            <a:schemeClr val="lt1"/>
+          </a:fontRef>
+        </p:style>
+        <p:txBody>
+          <a:bodyPr rtlCol="0" anchor="ctr"/>
+          <a:lstStyle/>
+          <a:p>
+            <a:pPr algn="ctr"/>
+            <a:endParaRPr lang="en-US" sz="2117"/>
+          </a:p>
+        </p:txBody>
+      </p:sp>
+      <p:sp>
+        <p:nvSpPr>
+          <p:cNvPr id="42" name="Multiplication Sign 41">
+            <a:extLst>
+              <a:ext uri="{FF2B5EF4-FFF2-40B4-BE49-F238E27FC236}">
+                <a16:creationId xmlns:a16="http://schemas.microsoft.com/office/drawing/2014/main" id="{D02C3953-6367-B0A7-5CEC-B8B0E9214DDD}"/>
+              </a:ext>
+            </a:extLst>
+          </p:cNvPr>
+          <p:cNvSpPr/>
+          <p:nvPr/>
+        </p:nvSpPr>
+        <p:spPr>
+          <a:xfrm>
+            <a:off x="3573872" y="1243129"/>
+            <a:ext cx="192024" cy="192024"/>
+          </a:xfrm>
+          <a:prstGeom prst="mathMultiply">
+            <a:avLst/>
+          </a:prstGeom>
+          <a:solidFill>
+            <a:schemeClr val="tx1"/>
+          </a:solidFill>
+          <a:ln>
+            <a:noFill/>
+          </a:ln>
+        </p:spPr>
+        <p:style>
+          <a:lnRef idx="2">
+            <a:schemeClr val="accent1">
+              <a:shade val="15000"/>
+            </a:schemeClr>
+          </a:lnRef>
+          <a:fillRef idx="1">
+            <a:schemeClr val="accent1"/>
+          </a:fillRef>
+          <a:effectRef idx="0">
+            <a:schemeClr val="accent1"/>
+          </a:effectRef>
+          <a:fontRef idx="minor">
+            <a:schemeClr val="lt1"/>
+          </a:fontRef>
+        </p:style>
+        <p:txBody>
+          <a:bodyPr rtlCol="0" anchor="ctr"/>
+          <a:lstStyle/>
+          <a:p>
+            <a:pPr algn="ctr"/>
+            <a:endParaRPr lang="en-US" sz="2117"/>
+          </a:p>
+        </p:txBody>
+      </p:sp>
+      <p:sp>
+        <p:nvSpPr>
+          <p:cNvPr id="43" name="Multiplication Sign 42">
+            <a:extLst>
+              <a:ext uri="{FF2B5EF4-FFF2-40B4-BE49-F238E27FC236}">
+                <a16:creationId xmlns:a16="http://schemas.microsoft.com/office/drawing/2014/main" id="{58104411-D5F2-C2F7-F92E-995124AFA34B}"/>
+              </a:ext>
+            </a:extLst>
+          </p:cNvPr>
+          <p:cNvSpPr/>
+          <p:nvPr/>
+        </p:nvSpPr>
+        <p:spPr>
+          <a:xfrm>
+            <a:off x="3720024" y="1680517"/>
+            <a:ext cx="192024" cy="192024"/>
+          </a:xfrm>
+          <a:prstGeom prst="mathMultiply">
+            <a:avLst/>
+          </a:prstGeom>
+          <a:solidFill>
+            <a:schemeClr val="tx1"/>
+          </a:solidFill>
+          <a:ln>
+            <a:noFill/>
+          </a:ln>
+        </p:spPr>
+        <p:style>
+          <a:lnRef idx="2">
+            <a:schemeClr val="accent1">
+              <a:shade val="15000"/>
+            </a:schemeClr>
+          </a:lnRef>
+          <a:fillRef idx="1">
+            <a:schemeClr val="accent1"/>
+          </a:fillRef>
+          <a:effectRef idx="0">
+            <a:schemeClr val="accent1"/>
+          </a:effectRef>
+          <a:fontRef idx="minor">
+            <a:schemeClr val="lt1"/>
+          </a:fontRef>
+        </p:style>
+        <p:txBody>
+          <a:bodyPr rtlCol="0" anchor="ctr"/>
+          <a:lstStyle/>
+          <a:p>
+            <a:pPr algn="ctr"/>
+            <a:endParaRPr lang="en-US" sz="2117"/>
+          </a:p>
+        </p:txBody>
+      </p:sp>
+      <p:sp>
+        <p:nvSpPr>
+          <p:cNvPr id="44" name="Multiplication Sign 43">
+            <a:extLst>
+              <a:ext uri="{FF2B5EF4-FFF2-40B4-BE49-F238E27FC236}">
+                <a16:creationId xmlns:a16="http://schemas.microsoft.com/office/drawing/2014/main" id="{4F3996F3-238C-9E12-CA19-CAFF44FC44E8}"/>
+              </a:ext>
+            </a:extLst>
+          </p:cNvPr>
+          <p:cNvSpPr/>
+          <p:nvPr/>
+        </p:nvSpPr>
+        <p:spPr>
+          <a:xfrm>
+            <a:off x="7902304" y="1744790"/>
+            <a:ext cx="192024" cy="192024"/>
+          </a:xfrm>
+          <a:prstGeom prst="mathMultiply">
+            <a:avLst/>
+          </a:prstGeom>
+          <a:solidFill>
+            <a:schemeClr val="tx1"/>
+          </a:solidFill>
+          <a:ln>
+            <a:noFill/>
+          </a:ln>
+        </p:spPr>
+        <p:style>
+          <a:lnRef idx="2">
+            <a:schemeClr val="accent1">
+              <a:shade val="15000"/>
+            </a:schemeClr>
+          </a:lnRef>
+          <a:fillRef idx="1">
+            <a:schemeClr val="accent1"/>
+          </a:fillRef>
+          <a:effectRef idx="0">
+            <a:schemeClr val="accent1"/>
+          </a:effectRef>
+          <a:fontRef idx="minor">
+            <a:schemeClr val="lt1"/>
+          </a:fontRef>
+        </p:style>
+        <p:txBody>
+          <a:bodyPr rtlCol="0" anchor="ctr"/>
+          <a:lstStyle/>
+          <a:p>
+            <a:pPr algn="ctr"/>
+            <a:endParaRPr lang="en-US" sz="2117"/>
+          </a:p>
+        </p:txBody>
+      </p:sp>
+      <p:sp>
+        <p:nvSpPr>
+          <p:cNvPr id="45" name="Multiplication Sign 44">
+            <a:extLst>
+              <a:ext uri="{FF2B5EF4-FFF2-40B4-BE49-F238E27FC236}">
+                <a16:creationId xmlns:a16="http://schemas.microsoft.com/office/drawing/2014/main" id="{5450922A-73D0-63AB-D57B-B4BB13B2DD7B}"/>
+              </a:ext>
+            </a:extLst>
+          </p:cNvPr>
+          <p:cNvSpPr/>
+          <p:nvPr/>
+        </p:nvSpPr>
+        <p:spPr>
+          <a:xfrm>
+            <a:off x="8148085" y="1476451"/>
+            <a:ext cx="192024" cy="192024"/>
+          </a:xfrm>
+          <a:prstGeom prst="mathMultiply">
+            <a:avLst/>
+          </a:prstGeom>
+          <a:solidFill>
+            <a:schemeClr val="tx1"/>
+          </a:solidFill>
+          <a:ln>
+            <a:noFill/>
+          </a:ln>
+        </p:spPr>
+        <p:style>
+          <a:lnRef idx="2">
+            <a:schemeClr val="accent1">
+              <a:shade val="15000"/>
+            </a:schemeClr>
+          </a:lnRef>
+          <a:fillRef idx="1">
+            <a:schemeClr val="accent1"/>
+          </a:fillRef>
+          <a:effectRef idx="0">
+            <a:schemeClr val="accent1"/>
+          </a:effectRef>
+          <a:fontRef idx="minor">
+            <a:schemeClr val="lt1"/>
+          </a:fontRef>
+        </p:style>
+        <p:txBody>
+          <a:bodyPr rtlCol="0" anchor="ctr"/>
+          <a:lstStyle/>
+          <a:p>
+            <a:pPr algn="ctr"/>
+            <a:endParaRPr lang="en-US" sz="2117"/>
+          </a:p>
+        </p:txBody>
+      </p:sp>
+      <p:sp>
+        <p:nvSpPr>
+          <p:cNvPr id="46" name="Multiplication Sign 45">
+            <a:extLst>
+              <a:ext uri="{FF2B5EF4-FFF2-40B4-BE49-F238E27FC236}">
+                <a16:creationId xmlns:a16="http://schemas.microsoft.com/office/drawing/2014/main" id="{F9BBDB0F-2349-C488-229C-C7EE5F89E5EA}"/>
+              </a:ext>
+            </a:extLst>
+          </p:cNvPr>
+          <p:cNvSpPr/>
+          <p:nvPr/>
+        </p:nvSpPr>
+        <p:spPr>
+          <a:xfrm>
+            <a:off x="8340187" y="1867889"/>
             <a:ext cx="192024" cy="192024"/>
           </a:xfrm>
           <a:prstGeom prst="mathMultiply">
@@ -5668,4 +7040,319 @@
     </a:ext>
   </a:extLst>
 </a:theme>
+</file>
+
+<file path=ppt/theme/theme2.xml><?xml version="1.0" encoding="utf-8"?>
+<a:theme xmlns:a="http://schemas.openxmlformats.org/drawingml/2006/main" name="Office Theme">
+  <a:themeElements>
+    <a:clrScheme name="Office">
+      <a:dk1>
+        <a:sysClr val="windowText" lastClr="000000"/>
+      </a:dk1>
+      <a:lt1>
+        <a:sysClr val="window" lastClr="FFFFFF"/>
+      </a:lt1>
+      <a:dk2>
+        <a:srgbClr val="0E2841"/>
+      </a:dk2>
+      <a:lt2>
+        <a:srgbClr val="E8E8E8"/>
+      </a:lt2>
+      <a:accent1>
+        <a:srgbClr val="156082"/>
+      </a:accent1>
+      <a:accent2>
+        <a:srgbClr val="E97132"/>
+      </a:accent2>
+      <a:accent3>
+        <a:srgbClr val="196B24"/>
+      </a:accent3>
+      <a:accent4>
+        <a:srgbClr val="0F9ED5"/>
+      </a:accent4>
+      <a:accent5>
+        <a:srgbClr val="A02B93"/>
+      </a:accent5>
+      <a:accent6>
+        <a:srgbClr val="4EA72E"/>
+      </a:accent6>
+      <a:hlink>
+        <a:srgbClr val="467886"/>
+      </a:hlink>
+      <a:folHlink>
+        <a:srgbClr val="96607D"/>
+      </a:folHlink>
+    </a:clrScheme>
+    <a:fontScheme name="Office">
+      <a:majorFont>
+        <a:latin typeface="Aptos Display" panose="02110004020202020204"/>
+        <a:ea typeface=""/>
+        <a:cs typeface=""/>
+        <a:font script="Jpan" typeface="游ゴシック Light"/>
+        <a:font script="Hang" typeface="맑은 고딕"/>
+        <a:font script="Hans" typeface="等线 Light"/>
+        <a:font script="Hant" typeface="新細明體"/>
+        <a:font script="Arab" typeface="Times New Roman"/>
+        <a:font script="Hebr" typeface="Times New Roman"/>
+        <a:font script="Thai" typeface="Angsana New"/>
+        <a:font script="Ethi" typeface="Nyala"/>
+        <a:font script="Beng" typeface="Vrinda"/>
+        <a:font script="Gujr" typeface="Shruti"/>
+        <a:font script="Khmr" typeface="MoolBoran"/>
+        <a:font script="Knda" typeface="Tunga"/>
+        <a:font script="Guru" typeface="Raavi"/>
+        <a:font script="Cans" typeface="Euphemia"/>
+        <a:font script="Cher" typeface="Plantagenet Cherokee"/>
+        <a:font script="Yiii" typeface="Microsoft Yi Baiti"/>
+        <a:font script="Tibt" typeface="Microsoft Himalaya"/>
+        <a:font script="Thaa" typeface="MV Boli"/>
+        <a:font script="Deva" typeface="Mangal"/>
+        <a:font script="Telu" typeface="Gautami"/>
+        <a:font script="Taml" typeface="Latha"/>
+        <a:font script="Syrc" typeface="Estrangelo Edessa"/>
+        <a:font script="Orya" typeface="Kalinga"/>
+        <a:font script="Mlym" typeface="Kartika"/>
+        <a:font script="Laoo" typeface="DokChampa"/>
+        <a:font script="Sinh" typeface="Iskoola Pota"/>
+        <a:font script="Mong" typeface="Mongolian Baiti"/>
+        <a:font script="Viet" typeface="Times New Roman"/>
+        <a:font script="Uigh" typeface="Microsoft Uighur"/>
+        <a:font script="Geor" typeface="Sylfaen"/>
+        <a:font script="Armn" typeface="Arial"/>
+        <a:font script="Bugi" typeface="Leelawadee UI"/>
+        <a:font script="Bopo" typeface="Microsoft JhengHei"/>
+        <a:font script="Java" typeface="Javanese Text"/>
+        <a:font script="Lisu" typeface="Segoe UI"/>
+        <a:font script="Mymr" typeface="Myanmar Text"/>
+        <a:font script="Nkoo" typeface="Ebrima"/>
+        <a:font script="Olck" typeface="Nirmala UI"/>
+        <a:font script="Osma" typeface="Ebrima"/>
+        <a:font script="Phag" typeface="Phagspa"/>
+        <a:font script="Syrn" typeface="Estrangelo Edessa"/>
+        <a:font script="Syrj" typeface="Estrangelo Edessa"/>
+        <a:font script="Syre" typeface="Estrangelo Edessa"/>
+        <a:font script="Sora" typeface="Nirmala UI"/>
+        <a:font script="Tale" typeface="Microsoft Tai Le"/>
+        <a:font script="Talu" typeface="Microsoft New Tai Lue"/>
+        <a:font script="Tfng" typeface="Ebrima"/>
+      </a:majorFont>
+      <a:minorFont>
+        <a:latin typeface="Aptos" panose="02110004020202020204"/>
+        <a:ea typeface=""/>
+        <a:cs typeface=""/>
+        <a:font script="Jpan" typeface="游ゴシック"/>
+        <a:font script="Hang" typeface="맑은 고딕"/>
+        <a:font script="Hans" typeface="等线"/>
+        <a:font script="Hant" typeface="新細明體"/>
+        <a:font script="Arab" typeface="Arial"/>
+        <a:font script="Hebr" typeface="Arial"/>
+        <a:font script="Thai" typeface="Cordia New"/>
+        <a:font script="Ethi" typeface="Nyala"/>
+        <a:font script="Beng" typeface="Vrinda"/>
+        <a:font script="Gujr" typeface="Shruti"/>
+        <a:font script="Khmr" typeface="DaunPenh"/>
+        <a:font script="Knda" typeface="Tunga"/>
+        <a:font script="Guru" typeface="Raavi"/>
+        <a:font script="Cans" typeface="Euphemia"/>
+        <a:font script="Cher" typeface="Plantagenet Cherokee"/>
+        <a:font script="Yiii" typeface="Microsoft Yi Baiti"/>
+        <a:font script="Tibt" typeface="Microsoft Himalaya"/>
+        <a:font script="Thaa" typeface="MV Boli"/>
+        <a:font script="Deva" typeface="Mangal"/>
+        <a:font script="Telu" typeface="Gautami"/>
+        <a:font script="Taml" typeface="Latha"/>
+        <a:font script="Syrc" typeface="Estrangelo Edessa"/>
+        <a:font script="Orya" typeface="Kalinga"/>
+        <a:font script="Mlym" typeface="Kartika"/>
+        <a:font script="Laoo" typeface="DokChampa"/>
+        <a:font script="Sinh" typeface="Iskoola Pota"/>
+        <a:font script="Mong" typeface="Mongolian Baiti"/>
+        <a:font script="Viet" typeface="Arial"/>
+        <a:font script="Uigh" typeface="Microsoft Uighur"/>
+        <a:font script="Geor" typeface="Sylfaen"/>
+        <a:font script="Armn" typeface="Arial"/>
+        <a:font script="Bugi" typeface="Leelawadee UI"/>
+        <a:font script="Bopo" typeface="Microsoft JhengHei"/>
+        <a:font script="Java" typeface="Javanese Text"/>
+        <a:font script="Lisu" typeface="Segoe UI"/>
+        <a:font script="Mymr" typeface="Myanmar Text"/>
+        <a:font script="Nkoo" typeface="Ebrima"/>
+        <a:font script="Olck" typeface="Nirmala UI"/>
+        <a:font script="Osma" typeface="Ebrima"/>
+        <a:font script="Phag" typeface="Phagspa"/>
+        <a:font script="Syrn" typeface="Estrangelo Edessa"/>
+        <a:font script="Syrj" typeface="Estrangelo Edessa"/>
+        <a:font script="Syre" typeface="Estrangelo Edessa"/>
+        <a:font script="Sora" typeface="Nirmala UI"/>
+        <a:font script="Tale" typeface="Microsoft Tai Le"/>
+        <a:font script="Talu" typeface="Microsoft New Tai Lue"/>
+        <a:font script="Tfng" typeface="Ebrima"/>
+      </a:minorFont>
+    </a:fontScheme>
+    <a:fmtScheme name="Office">
+      <a:fillStyleLst>
+        <a:solidFill>
+          <a:schemeClr val="phClr"/>
+        </a:solidFill>
+        <a:gradFill rotWithShape="1">
+          <a:gsLst>
+            <a:gs pos="0">
+              <a:schemeClr val="phClr">
+                <a:lumMod val="110000"/>
+                <a:satMod val="105000"/>
+                <a:tint val="67000"/>
+              </a:schemeClr>
+            </a:gs>
+            <a:gs pos="50000">
+              <a:schemeClr val="phClr">
+                <a:lumMod val="105000"/>
+                <a:satMod val="103000"/>
+                <a:tint val="73000"/>
+              </a:schemeClr>
+            </a:gs>
+            <a:gs pos="100000">
+              <a:schemeClr val="phClr">
+                <a:lumMod val="105000"/>
+                <a:satMod val="109000"/>
+                <a:tint val="81000"/>
+              </a:schemeClr>
+            </a:gs>
+          </a:gsLst>
+          <a:lin ang="5400000" scaled="0"/>
+        </a:gradFill>
+        <a:gradFill rotWithShape="1">
+          <a:gsLst>
+            <a:gs pos="0">
+              <a:schemeClr val="phClr">
+                <a:satMod val="103000"/>
+                <a:lumMod val="102000"/>
+                <a:tint val="94000"/>
+              </a:schemeClr>
+            </a:gs>
+            <a:gs pos="50000">
+              <a:schemeClr val="phClr">
+                <a:satMod val="110000"/>
+                <a:lumMod val="100000"/>
+                <a:shade val="100000"/>
+              </a:schemeClr>
+            </a:gs>
+            <a:gs pos="100000">
+              <a:schemeClr val="phClr">
+                <a:lumMod val="99000"/>
+                <a:satMod val="120000"/>
+                <a:shade val="78000"/>
+              </a:schemeClr>
+            </a:gs>
+          </a:gsLst>
+          <a:lin ang="5400000" scaled="0"/>
+        </a:gradFill>
+      </a:fillStyleLst>
+      <a:lnStyleLst>
+        <a:ln w="12700" cap="flat" cmpd="sng" algn="ctr">
+          <a:solidFill>
+            <a:schemeClr val="phClr"/>
+          </a:solidFill>
+          <a:prstDash val="solid"/>
+          <a:miter lim="800000"/>
+        </a:ln>
+        <a:ln w="19050" cap="flat" cmpd="sng" algn="ctr">
+          <a:solidFill>
+            <a:schemeClr val="phClr"/>
+          </a:solidFill>
+          <a:prstDash val="solid"/>
+          <a:miter lim="800000"/>
+        </a:ln>
+        <a:ln w="25400" cap="flat" cmpd="sng" algn="ctr">
+          <a:solidFill>
+            <a:schemeClr val="phClr"/>
+          </a:solidFill>
+          <a:prstDash val="solid"/>
+          <a:miter lim="800000"/>
+        </a:ln>
+      </a:lnStyleLst>
+      <a:effectStyleLst>
+        <a:effectStyle>
+          <a:effectLst/>
+        </a:effectStyle>
+        <a:effectStyle>
+          <a:effectLst/>
+        </a:effectStyle>
+        <a:effectStyle>
+          <a:effectLst>
+            <a:outerShdw blurRad="57150" dist="19050" dir="5400000" algn="ctr" rotWithShape="0">
+              <a:srgbClr val="000000">
+                <a:alpha val="63000"/>
+              </a:srgbClr>
+            </a:outerShdw>
+          </a:effectLst>
+        </a:effectStyle>
+      </a:effectStyleLst>
+      <a:bgFillStyleLst>
+        <a:solidFill>
+          <a:schemeClr val="phClr"/>
+        </a:solidFill>
+        <a:solidFill>
+          <a:schemeClr val="phClr">
+            <a:tint val="95000"/>
+            <a:satMod val="170000"/>
+          </a:schemeClr>
+        </a:solidFill>
+        <a:gradFill rotWithShape="1">
+          <a:gsLst>
+            <a:gs pos="0">
+              <a:schemeClr val="phClr">
+                <a:tint val="93000"/>
+                <a:satMod val="150000"/>
+                <a:shade val="98000"/>
+                <a:lumMod val="102000"/>
+              </a:schemeClr>
+            </a:gs>
+            <a:gs pos="50000">
+              <a:schemeClr val="phClr">
+                <a:tint val="98000"/>
+                <a:satMod val="130000"/>
+                <a:shade val="90000"/>
+                <a:lumMod val="103000"/>
+              </a:schemeClr>
+            </a:gs>
+            <a:gs pos="100000">
+              <a:schemeClr val="phClr">
+                <a:shade val="63000"/>
+                <a:satMod val="120000"/>
+              </a:schemeClr>
+            </a:gs>
+          </a:gsLst>
+          <a:lin ang="5400000" scaled="0"/>
+        </a:gradFill>
+      </a:bgFillStyleLst>
+    </a:fmtScheme>
+  </a:themeElements>
+  <a:objectDefaults>
+    <a:lnDef>
+      <a:spPr/>
+      <a:bodyPr/>
+      <a:lstStyle/>
+      <a:style>
+        <a:lnRef idx="2">
+          <a:schemeClr val="accent1"/>
+        </a:lnRef>
+        <a:fillRef idx="0">
+          <a:schemeClr val="accent1"/>
+        </a:fillRef>
+        <a:effectRef idx="1">
+          <a:schemeClr val="accent1"/>
+        </a:effectRef>
+        <a:fontRef idx="minor">
+          <a:schemeClr val="tx1"/>
+        </a:fontRef>
+      </a:style>
+    </a:lnDef>
+  </a:objectDefaults>
+  <a:extraClrSchemeLst/>
+  <a:extLst>
+    <a:ext uri="{05A4C25C-085E-4340-85A3-A5531E510DB2}">
+      <thm15:themeFamily xmlns:thm15="http://schemas.microsoft.com/office/thememl/2012/main" name="Office Theme" id="{2E142A2C-CD16-42D6-873A-C26D2A0506FA}" vid="{1BDDFF52-6CD6-40A5-AB3C-68EB2F1E4D0A}"/>
+    </a:ext>
+  </a:extLst>
+</a:theme>
 </file>
--- a/images/bias-brain.pptx
+++ b/images/bias-brain.pptx
@@ -3576,7 +3576,7 @@
         </p:nvSpPr>
         <p:spPr>
           <a:xfrm>
-            <a:off x="672084" y="1072134"/>
+            <a:off x="729889" y="993309"/>
             <a:ext cx="1056132" cy="1056132"/>
           </a:xfrm>
           <a:prstGeom prst="flowChartConnector">
@@ -3628,7 +3628,7 @@
         </p:nvSpPr>
         <p:spPr>
           <a:xfrm>
-            <a:off x="3072889" y="1072134"/>
+            <a:off x="3130694" y="993309"/>
             <a:ext cx="1056132" cy="1056132"/>
           </a:xfrm>
           <a:prstGeom prst="flowChartConnector">
@@ -3680,7 +3680,7 @@
         </p:nvSpPr>
         <p:spPr>
           <a:xfrm>
-            <a:off x="5472179" y="1072134"/>
+            <a:off x="5529984" y="993309"/>
             <a:ext cx="1056132" cy="1056132"/>
           </a:xfrm>
           <a:prstGeom prst="flowChartConnector">
@@ -3732,7 +3732,7 @@
         </p:nvSpPr>
         <p:spPr>
           <a:xfrm>
-            <a:off x="7872479" y="1072134"/>
+            <a:off x="7930284" y="993309"/>
             <a:ext cx="1056132" cy="1056132"/>
           </a:xfrm>
           <a:prstGeom prst="flowChartConnector">
@@ -3784,7 +3784,7 @@
         </p:nvSpPr>
         <p:spPr>
           <a:xfrm>
-            <a:off x="816102" y="1216152"/>
+            <a:off x="873907" y="1137327"/>
             <a:ext cx="768096" cy="768096"/>
           </a:xfrm>
           <a:prstGeom prst="flowChartConnector">
@@ -3836,7 +3836,7 @@
         </p:nvSpPr>
         <p:spPr>
           <a:xfrm>
-            <a:off x="960120" y="1360170"/>
+            <a:off x="1017925" y="1281345"/>
             <a:ext cx="480060" cy="480060"/>
           </a:xfrm>
           <a:prstGeom prst="flowChartConnector">
@@ -3888,7 +3888,7 @@
         </p:nvSpPr>
         <p:spPr>
           <a:xfrm>
-            <a:off x="1104138" y="1504188"/>
+            <a:off x="1161943" y="1425363"/>
             <a:ext cx="192024" cy="192024"/>
           </a:xfrm>
           <a:prstGeom prst="flowChartConnector">
@@ -3940,7 +3940,7 @@
         </p:nvSpPr>
         <p:spPr>
           <a:xfrm>
-            <a:off x="3216402" y="1216152"/>
+            <a:off x="3274207" y="1137327"/>
             <a:ext cx="768096" cy="768096"/>
           </a:xfrm>
           <a:prstGeom prst="flowChartConnector">
@@ -3992,7 +3992,7 @@
         </p:nvSpPr>
         <p:spPr>
           <a:xfrm>
-            <a:off x="3360420" y="1360170"/>
+            <a:off x="3418225" y="1281345"/>
             <a:ext cx="480060" cy="480060"/>
           </a:xfrm>
           <a:prstGeom prst="flowChartConnector">
@@ -4044,7 +4044,7 @@
         </p:nvSpPr>
         <p:spPr>
           <a:xfrm>
-            <a:off x="3504438" y="1504188"/>
+            <a:off x="3562243" y="1425363"/>
             <a:ext cx="192024" cy="192024"/>
           </a:xfrm>
           <a:prstGeom prst="flowChartConnector">
@@ -4096,7 +4096,7 @@
         </p:nvSpPr>
         <p:spPr>
           <a:xfrm>
-            <a:off x="5616702" y="1216152"/>
+            <a:off x="5674507" y="1137327"/>
             <a:ext cx="768096" cy="768096"/>
           </a:xfrm>
           <a:prstGeom prst="flowChartConnector">
@@ -4148,7 +4148,7 @@
         </p:nvSpPr>
         <p:spPr>
           <a:xfrm>
-            <a:off x="5760720" y="1360170"/>
+            <a:off x="5818525" y="1281345"/>
             <a:ext cx="480060" cy="480060"/>
           </a:xfrm>
           <a:prstGeom prst="flowChartConnector">
@@ -4200,7 +4200,7 @@
         </p:nvSpPr>
         <p:spPr>
           <a:xfrm>
-            <a:off x="5904738" y="1504188"/>
+            <a:off x="5962543" y="1425363"/>
             <a:ext cx="192024" cy="192024"/>
           </a:xfrm>
           <a:prstGeom prst="flowChartConnector">
@@ -4252,7 +4252,7 @@
         </p:nvSpPr>
         <p:spPr>
           <a:xfrm>
-            <a:off x="8017002" y="1216152"/>
+            <a:off x="8074807" y="1137327"/>
             <a:ext cx="768096" cy="768096"/>
           </a:xfrm>
           <a:prstGeom prst="flowChartConnector">
@@ -4304,7 +4304,7 @@
         </p:nvSpPr>
         <p:spPr>
           <a:xfrm>
-            <a:off x="8161020" y="1360170"/>
+            <a:off x="8218825" y="1281345"/>
             <a:ext cx="480060" cy="480060"/>
           </a:xfrm>
           <a:prstGeom prst="flowChartConnector">
@@ -4356,7 +4356,7 @@
         </p:nvSpPr>
         <p:spPr>
           <a:xfrm>
-            <a:off x="8305038" y="1504188"/>
+            <a:off x="8362843" y="1425363"/>
             <a:ext cx="192024" cy="192024"/>
           </a:xfrm>
           <a:prstGeom prst="flowChartConnector">
@@ -4408,7 +4408,7 @@
         </p:nvSpPr>
         <p:spPr>
           <a:xfrm>
-            <a:off x="1011772" y="1504188"/>
+            <a:off x="1069577" y="1425363"/>
             <a:ext cx="192024" cy="192024"/>
           </a:xfrm>
           <a:prstGeom prst="mathMultiply">
@@ -4460,7 +4460,7 @@
         </p:nvSpPr>
         <p:spPr>
           <a:xfrm>
-            <a:off x="1140855" y="1412443"/>
+            <a:off x="1198660" y="1333618"/>
             <a:ext cx="192024" cy="192024"/>
           </a:xfrm>
           <a:prstGeom prst="mathMultiply">
@@ -4512,7 +4512,7 @@
         </p:nvSpPr>
         <p:spPr>
           <a:xfrm>
-            <a:off x="1190194" y="1564996"/>
+            <a:off x="1247999" y="1486171"/>
             <a:ext cx="192024" cy="192024"/>
           </a:xfrm>
           <a:prstGeom prst="mathMultiply">
@@ -4564,7 +4564,7 @@
         </p:nvSpPr>
         <p:spPr>
           <a:xfrm>
-            <a:off x="5501331" y="1741453"/>
+            <a:off x="5559136" y="1662628"/>
             <a:ext cx="192024" cy="192024"/>
           </a:xfrm>
           <a:prstGeom prst="mathMultiply">
@@ -4616,7 +4616,7 @@
         </p:nvSpPr>
         <p:spPr>
           <a:xfrm>
-            <a:off x="5598248" y="1617543"/>
+            <a:off x="5656053" y="1538718"/>
             <a:ext cx="192024" cy="192024"/>
           </a:xfrm>
           <a:prstGeom prst="mathMultiply">
@@ -4668,7 +4668,7 @@
         </p:nvSpPr>
         <p:spPr>
           <a:xfrm>
-            <a:off x="5670563" y="1747120"/>
+            <a:off x="5728368" y="1668295"/>
             <a:ext cx="192024" cy="192024"/>
           </a:xfrm>
           <a:prstGeom prst="mathMultiply">
@@ -4720,7 +4720,7 @@
         </p:nvSpPr>
         <p:spPr>
           <a:xfrm>
-            <a:off x="3259166" y="1488493"/>
+            <a:off x="3316971" y="1409668"/>
             <a:ext cx="192024" cy="192024"/>
           </a:xfrm>
           <a:prstGeom prst="mathMultiply">
@@ -4772,7 +4772,7 @@
         </p:nvSpPr>
         <p:spPr>
           <a:xfrm>
-            <a:off x="3573872" y="1243129"/>
+            <a:off x="3631677" y="1164304"/>
             <a:ext cx="192024" cy="192024"/>
           </a:xfrm>
           <a:prstGeom prst="mathMultiply">
@@ -4824,7 +4824,7 @@
         </p:nvSpPr>
         <p:spPr>
           <a:xfrm>
-            <a:off x="3720024" y="1680517"/>
+            <a:off x="3777829" y="1601692"/>
             <a:ext cx="192024" cy="192024"/>
           </a:xfrm>
           <a:prstGeom prst="mathMultiply">
@@ -4876,7 +4876,7 @@
         </p:nvSpPr>
         <p:spPr>
           <a:xfrm>
-            <a:off x="7902304" y="1744790"/>
+            <a:off x="7960109" y="1665965"/>
             <a:ext cx="192024" cy="192024"/>
           </a:xfrm>
           <a:prstGeom prst="mathMultiply">
@@ -4928,7 +4928,7 @@
         </p:nvSpPr>
         <p:spPr>
           <a:xfrm>
-            <a:off x="8148085" y="1476451"/>
+            <a:off x="8205890" y="1397626"/>
             <a:ext cx="192024" cy="192024"/>
           </a:xfrm>
           <a:prstGeom prst="mathMultiply">
@@ -4980,7 +4980,7 @@
         </p:nvSpPr>
         <p:spPr>
           <a:xfrm>
-            <a:off x="8340187" y="1867889"/>
+            <a:off x="8397992" y="1789064"/>
             <a:ext cx="192024" cy="192024"/>
           </a:xfrm>
           <a:prstGeom prst="mathMultiply">
@@ -5242,7 +5242,7 @@
         </p:nvSpPr>
         <p:spPr>
           <a:xfrm>
-            <a:off x="672084" y="1072134"/>
+            <a:off x="729889" y="993309"/>
             <a:ext cx="1056132" cy="1056132"/>
           </a:xfrm>
           <a:prstGeom prst="flowChartConnector">
@@ -5294,7 +5294,7 @@
         </p:nvSpPr>
         <p:spPr>
           <a:xfrm>
-            <a:off x="3072889" y="1072134"/>
+            <a:off x="3130694" y="993309"/>
             <a:ext cx="1056132" cy="1056132"/>
           </a:xfrm>
           <a:prstGeom prst="flowChartConnector">
@@ -5346,7 +5346,7 @@
         </p:nvSpPr>
         <p:spPr>
           <a:xfrm>
-            <a:off x="5472179" y="1072134"/>
+            <a:off x="5529984" y="993309"/>
             <a:ext cx="1056132" cy="1056132"/>
           </a:xfrm>
           <a:prstGeom prst="flowChartConnector">
@@ -5398,7 +5398,7 @@
         </p:nvSpPr>
         <p:spPr>
           <a:xfrm>
-            <a:off x="7872479" y="1072134"/>
+            <a:off x="7930284" y="993309"/>
             <a:ext cx="1056132" cy="1056132"/>
           </a:xfrm>
           <a:prstGeom prst="flowChartConnector">
@@ -5450,7 +5450,7 @@
         </p:nvSpPr>
         <p:spPr>
           <a:xfrm>
-            <a:off x="816102" y="1216152"/>
+            <a:off x="873907" y="1137327"/>
             <a:ext cx="768096" cy="768096"/>
           </a:xfrm>
           <a:prstGeom prst="flowChartConnector">
@@ -5502,7 +5502,7 @@
         </p:nvSpPr>
         <p:spPr>
           <a:xfrm>
-            <a:off x="960120" y="1360170"/>
+            <a:off x="1017925" y="1281345"/>
             <a:ext cx="480060" cy="480060"/>
           </a:xfrm>
           <a:prstGeom prst="flowChartConnector">
@@ -5554,7 +5554,7 @@
         </p:nvSpPr>
         <p:spPr>
           <a:xfrm>
-            <a:off x="1104138" y="1504188"/>
+            <a:off x="1161943" y="1425363"/>
             <a:ext cx="192024" cy="192024"/>
           </a:xfrm>
           <a:prstGeom prst="flowChartConnector">
@@ -5606,7 +5606,7 @@
         </p:nvSpPr>
         <p:spPr>
           <a:xfrm>
-            <a:off x="3216402" y="1216152"/>
+            <a:off x="3274207" y="1137327"/>
             <a:ext cx="768096" cy="768096"/>
           </a:xfrm>
           <a:prstGeom prst="flowChartConnector">
@@ -5658,7 +5658,7 @@
         </p:nvSpPr>
         <p:spPr>
           <a:xfrm>
-            <a:off x="3360420" y="1360170"/>
+            <a:off x="3418225" y="1281345"/>
             <a:ext cx="480060" cy="480060"/>
           </a:xfrm>
           <a:prstGeom prst="flowChartConnector">
@@ -5710,7 +5710,7 @@
         </p:nvSpPr>
         <p:spPr>
           <a:xfrm>
-            <a:off x="3504438" y="1504188"/>
+            <a:off x="3562243" y="1425363"/>
             <a:ext cx="192024" cy="192024"/>
           </a:xfrm>
           <a:prstGeom prst="flowChartConnector">
@@ -5762,7 +5762,7 @@
         </p:nvSpPr>
         <p:spPr>
           <a:xfrm>
-            <a:off x="5616702" y="1216152"/>
+            <a:off x="5674507" y="1137327"/>
             <a:ext cx="768096" cy="768096"/>
           </a:xfrm>
           <a:prstGeom prst="flowChartConnector">
@@ -5814,7 +5814,7 @@
         </p:nvSpPr>
         <p:spPr>
           <a:xfrm>
-            <a:off x="5760720" y="1360170"/>
+            <a:off x="5818525" y="1281345"/>
             <a:ext cx="480060" cy="480060"/>
           </a:xfrm>
           <a:prstGeom prst="flowChartConnector">
@@ -5866,7 +5866,7 @@
         </p:nvSpPr>
         <p:spPr>
           <a:xfrm>
-            <a:off x="5904738" y="1504188"/>
+            <a:off x="5962543" y="1425363"/>
             <a:ext cx="192024" cy="192024"/>
           </a:xfrm>
           <a:prstGeom prst="flowChartConnector">
@@ -5918,7 +5918,7 @@
         </p:nvSpPr>
         <p:spPr>
           <a:xfrm>
-            <a:off x="8017002" y="1216152"/>
+            <a:off x="8074807" y="1137327"/>
             <a:ext cx="768096" cy="768096"/>
           </a:xfrm>
           <a:prstGeom prst="flowChartConnector">
@@ -5970,7 +5970,7 @@
         </p:nvSpPr>
         <p:spPr>
           <a:xfrm>
-            <a:off x="8161020" y="1360170"/>
+            <a:off x="8218825" y="1281345"/>
             <a:ext cx="480060" cy="480060"/>
           </a:xfrm>
           <a:prstGeom prst="flowChartConnector">
@@ -6022,7 +6022,7 @@
         </p:nvSpPr>
         <p:spPr>
           <a:xfrm>
-            <a:off x="8305038" y="1504188"/>
+            <a:off x="8362843" y="1425363"/>
             <a:ext cx="192024" cy="192024"/>
           </a:xfrm>
           <a:prstGeom prst="flowChartConnector">
@@ -6104,7 +6104,7 @@
         </p:nvSpPr>
         <p:spPr>
           <a:xfrm>
-            <a:off x="1011772" y="1504188"/>
+            <a:off x="1069577" y="1425363"/>
             <a:ext cx="192024" cy="192024"/>
           </a:xfrm>
           <a:prstGeom prst="mathMultiply">
@@ -6156,7 +6156,7 @@
         </p:nvSpPr>
         <p:spPr>
           <a:xfrm>
-            <a:off x="1140855" y="1412443"/>
+            <a:off x="1198660" y="1333618"/>
             <a:ext cx="192024" cy="192024"/>
           </a:xfrm>
           <a:prstGeom prst="mathMultiply">
@@ -6208,7 +6208,7 @@
         </p:nvSpPr>
         <p:spPr>
           <a:xfrm>
-            <a:off x="1190194" y="1564996"/>
+            <a:off x="1247999" y="1486171"/>
             <a:ext cx="192024" cy="192024"/>
           </a:xfrm>
           <a:prstGeom prst="mathMultiply">
@@ -6260,7 +6260,7 @@
         </p:nvSpPr>
         <p:spPr>
           <a:xfrm>
-            <a:off x="5501331" y="1741453"/>
+            <a:off x="5559136" y="1662628"/>
             <a:ext cx="192024" cy="192024"/>
           </a:xfrm>
           <a:prstGeom prst="mathMultiply">
@@ -6312,7 +6312,7 @@
         </p:nvSpPr>
         <p:spPr>
           <a:xfrm>
-            <a:off x="5598248" y="1617543"/>
+            <a:off x="5656053" y="1538718"/>
             <a:ext cx="192024" cy="192024"/>
           </a:xfrm>
           <a:prstGeom prst="mathMultiply">
@@ -6364,7 +6364,7 @@
         </p:nvSpPr>
         <p:spPr>
           <a:xfrm>
-            <a:off x="5670563" y="1747120"/>
+            <a:off x="5728368" y="1668295"/>
             <a:ext cx="192024" cy="192024"/>
           </a:xfrm>
           <a:prstGeom prst="mathMultiply">
@@ -6416,7 +6416,7 @@
         </p:nvSpPr>
         <p:spPr>
           <a:xfrm>
-            <a:off x="3259166" y="1488493"/>
+            <a:off x="3316971" y="1409668"/>
             <a:ext cx="192024" cy="192024"/>
           </a:xfrm>
           <a:prstGeom prst="mathMultiply">
@@ -6468,7 +6468,7 @@
         </p:nvSpPr>
         <p:spPr>
           <a:xfrm>
-            <a:off x="3573872" y="1243129"/>
+            <a:off x="3631677" y="1164304"/>
             <a:ext cx="192024" cy="192024"/>
           </a:xfrm>
           <a:prstGeom prst="mathMultiply">
@@ -6520,7 +6520,7 @@
         </p:nvSpPr>
         <p:spPr>
           <a:xfrm>
-            <a:off x="3720024" y="1680517"/>
+            <a:off x="3777829" y="1601692"/>
             <a:ext cx="192024" cy="192024"/>
           </a:xfrm>
           <a:prstGeom prst="mathMultiply">
@@ -6572,7 +6572,7 @@
         </p:nvSpPr>
         <p:spPr>
           <a:xfrm>
-            <a:off x="7902304" y="1744790"/>
+            <a:off x="7960109" y="1665965"/>
             <a:ext cx="192024" cy="192024"/>
           </a:xfrm>
           <a:prstGeom prst="mathMultiply">
@@ -6624,7 +6624,7 @@
         </p:nvSpPr>
         <p:spPr>
           <a:xfrm>
-            <a:off x="8148085" y="1476451"/>
+            <a:off x="8205890" y="1397626"/>
             <a:ext cx="192024" cy="192024"/>
           </a:xfrm>
           <a:prstGeom prst="mathMultiply">
@@ -6676,7 +6676,7 @@
         </p:nvSpPr>
         <p:spPr>
           <a:xfrm>
-            <a:off x="8340187" y="1867889"/>
+            <a:off x="8397992" y="1789064"/>
             <a:ext cx="192024" cy="192024"/>
           </a:xfrm>
           <a:prstGeom prst="mathMultiply">
